--- a/python_course_4p/1_venv_package/1_venv_package.pptx
+++ b/python_course_4p/1_venv_package/1_venv_package.pptx
@@ -5,7 +5,7 @@
     <p:sldMasterId id="2147483648" r:id="rId1"/>
   </p:sldMasterIdLst>
   <p:notesMasterIdLst>
-    <p:notesMasterId r:id="rId42"/>
+    <p:notesMasterId r:id="rId43"/>
   </p:notesMasterIdLst>
   <p:sldIdLst>
     <p:sldId id="256" r:id="rId2"/>
@@ -40,14 +40,15 @@
     <p:sldId id="374" r:id="rId31"/>
     <p:sldId id="362" r:id="rId32"/>
     <p:sldId id="375" r:id="rId33"/>
-    <p:sldId id="359" r:id="rId34"/>
-    <p:sldId id="266" r:id="rId35"/>
-    <p:sldId id="299" r:id="rId36"/>
-    <p:sldId id="278" r:id="rId37"/>
-    <p:sldId id="279" r:id="rId38"/>
-    <p:sldId id="281" r:id="rId39"/>
-    <p:sldId id="282" r:id="rId40"/>
-    <p:sldId id="351" r:id="rId41"/>
+    <p:sldId id="376" r:id="rId34"/>
+    <p:sldId id="359" r:id="rId35"/>
+    <p:sldId id="266" r:id="rId36"/>
+    <p:sldId id="299" r:id="rId37"/>
+    <p:sldId id="278" r:id="rId38"/>
+    <p:sldId id="279" r:id="rId39"/>
+    <p:sldId id="281" r:id="rId40"/>
+    <p:sldId id="282" r:id="rId41"/>
+    <p:sldId id="351" r:id="rId42"/>
   </p:sldIdLst>
   <p:sldSz cx="12192000" cy="6858000"/>
   <p:notesSz cx="6858000" cy="9144000"/>
@@ -236,7 +237,7 @@
           <a:p>
             <a:fld id="{3BADDCAA-88FC-44D4-A91A-DD0530AB88E0}" type="datetimeFigureOut">
               <a:rPr lang="en-NL" smtClean="0"/>
-              <a:t>16/09/2026</a:t>
+              <a:t>17/09/2026</a:t>
             </a:fld>
             <a:endParaRPr lang="en-NL"/>
           </a:p>
@@ -667,7 +668,31 @@
           <a:bodyPr/>
           <a:lstStyle/>
           <a:p>
-            <a:endParaRPr lang="en-NL" dirty="0"/>
+            <a:r>
+              <a:rPr lang="en-US" dirty="0"/>
+              <a:t>Demo: package </a:t>
+            </a:r>
+            <a:r>
+              <a:rPr lang="en-US" dirty="0" err="1"/>
+              <a:t>opzetten</a:t>
+            </a:r>
+            <a:r>
+              <a:rPr lang="en-US" dirty="0"/>
+              <a:t> </a:t>
+            </a:r>
+            <a:r>
+              <a:rPr lang="en-US" dirty="0" err="1"/>
+              <a:t>en</a:t>
+            </a:r>
+            <a:r>
+              <a:rPr lang="en-US" dirty="0"/>
+              <a:t> </a:t>
+            </a:r>
+            <a:r>
+              <a:rPr lang="en-US"/>
+              <a:t>gebruiken</a:t>
+            </a:r>
+            <a:endParaRPr lang="en-NL"/>
           </a:p>
         </p:txBody>
       </p:sp>
@@ -688,7 +713,91 @@
           <a:p>
             <a:fld id="{4BAF0DEA-1372-46C0-8FC9-2869E9CCF7DA}" type="slidenum">
               <a:rPr lang="en-NL" smtClean="0"/>
-              <a:t>37</a:t>
+              <a:t>33</a:t>
+            </a:fld>
+            <a:endParaRPr lang="en-NL"/>
+          </a:p>
+        </p:txBody>
+      </p:sp>
+    </p:spTree>
+    <p:extLst>
+      <p:ext uri="{BB962C8B-B14F-4D97-AF65-F5344CB8AC3E}">
+        <p14:creationId xmlns:p14="http://schemas.microsoft.com/office/powerpoint/2010/main" val="3502637254"/>
+      </p:ext>
+    </p:extLst>
+  </p:cSld>
+  <p:clrMapOvr>
+    <a:masterClrMapping/>
+  </p:clrMapOvr>
+</p:notes>
+</file>
+
+<file path=ppt/notesSlides/notesSlide3.xml><?xml version="1.0" encoding="utf-8"?>
+<p:notes xmlns:a="http://schemas.openxmlformats.org/drawingml/2006/main" xmlns:r="http://schemas.openxmlformats.org/officeDocument/2006/relationships" xmlns:p="http://schemas.openxmlformats.org/presentationml/2006/main">
+  <p:cSld>
+    <p:spTree>
+      <p:nvGrpSpPr>
+        <p:cNvPr id="1" name=""/>
+        <p:cNvGrpSpPr/>
+        <p:nvPr/>
+      </p:nvGrpSpPr>
+      <p:grpSpPr>
+        <a:xfrm>
+          <a:off x="0" y="0"/>
+          <a:ext cx="0" cy="0"/>
+          <a:chOff x="0" y="0"/>
+          <a:chExt cx="0" cy="0"/>
+        </a:xfrm>
+      </p:grpSpPr>
+      <p:sp>
+        <p:nvSpPr>
+          <p:cNvPr id="2" name="Slide Image Placeholder 1"/>
+          <p:cNvSpPr>
+            <a:spLocks noGrp="1" noRot="1" noChangeAspect="1"/>
+          </p:cNvSpPr>
+          <p:nvPr>
+            <p:ph type="sldImg"/>
+          </p:nvPr>
+        </p:nvSpPr>
+        <p:spPr/>
+      </p:sp>
+      <p:sp>
+        <p:nvSpPr>
+          <p:cNvPr id="3" name="Notes Placeholder 2"/>
+          <p:cNvSpPr>
+            <a:spLocks noGrp="1"/>
+          </p:cNvSpPr>
+          <p:nvPr>
+            <p:ph type="body" idx="1"/>
+          </p:nvPr>
+        </p:nvSpPr>
+        <p:spPr/>
+        <p:txBody>
+          <a:bodyPr/>
+          <a:lstStyle/>
+          <a:p>
+            <a:endParaRPr lang="en-NL" dirty="0"/>
+          </a:p>
+        </p:txBody>
+      </p:sp>
+      <p:sp>
+        <p:nvSpPr>
+          <p:cNvPr id="4" name="Slide Number Placeholder 3"/>
+          <p:cNvSpPr>
+            <a:spLocks noGrp="1"/>
+          </p:cNvSpPr>
+          <p:nvPr>
+            <p:ph type="sldNum" sz="quarter" idx="5"/>
+          </p:nvPr>
+        </p:nvSpPr>
+        <p:spPr/>
+        <p:txBody>
+          <a:bodyPr/>
+          <a:lstStyle/>
+          <a:p>
+            <a:fld id="{4BAF0DEA-1372-46C0-8FC9-2869E9CCF7DA}" type="slidenum">
+              <a:rPr lang="en-NL" smtClean="0"/>
+              <a:t>38</a:t>
             </a:fld>
             <a:endParaRPr lang="en-NL"/>
           </a:p>
@@ -856,7 +965,7 @@
           <a:p>
             <a:fld id="{0EBB069A-003F-4FC0-8534-236B0C5C7B5F}" type="datetimeFigureOut">
               <a:rPr lang="en-NL" smtClean="0"/>
-              <a:t>16/09/2026</a:t>
+              <a:t>17/09/2026</a:t>
             </a:fld>
             <a:endParaRPr lang="en-NL"/>
           </a:p>
@@ -1056,7 +1165,7 @@
           <a:p>
             <a:fld id="{0EBB069A-003F-4FC0-8534-236B0C5C7B5F}" type="datetimeFigureOut">
               <a:rPr lang="en-NL" smtClean="0"/>
-              <a:t>16/09/2026</a:t>
+              <a:t>17/09/2026</a:t>
             </a:fld>
             <a:endParaRPr lang="en-NL"/>
           </a:p>
@@ -1266,7 +1375,7 @@
           <a:p>
             <a:fld id="{0EBB069A-003F-4FC0-8534-236B0C5C7B5F}" type="datetimeFigureOut">
               <a:rPr lang="en-NL" smtClean="0"/>
-              <a:t>16/09/2026</a:t>
+              <a:t>17/09/2026</a:t>
             </a:fld>
             <a:endParaRPr lang="en-NL"/>
           </a:p>
@@ -1466,7 +1575,7 @@
           <a:p>
             <a:fld id="{0EBB069A-003F-4FC0-8534-236B0C5C7B5F}" type="datetimeFigureOut">
               <a:rPr lang="en-NL" smtClean="0"/>
-              <a:t>16/09/2026</a:t>
+              <a:t>17/09/2026</a:t>
             </a:fld>
             <a:endParaRPr lang="en-NL"/>
           </a:p>
@@ -1742,7 +1851,7 @@
           <a:p>
             <a:fld id="{0EBB069A-003F-4FC0-8534-236B0C5C7B5F}" type="datetimeFigureOut">
               <a:rPr lang="en-NL" smtClean="0"/>
-              <a:t>16/09/2026</a:t>
+              <a:t>17/09/2026</a:t>
             </a:fld>
             <a:endParaRPr lang="en-NL"/>
           </a:p>
@@ -2010,7 +2119,7 @@
           <a:p>
             <a:fld id="{0EBB069A-003F-4FC0-8534-236B0C5C7B5F}" type="datetimeFigureOut">
               <a:rPr lang="en-NL" smtClean="0"/>
-              <a:t>16/09/2026</a:t>
+              <a:t>17/09/2026</a:t>
             </a:fld>
             <a:endParaRPr lang="en-NL"/>
           </a:p>
@@ -2425,7 +2534,7 @@
           <a:p>
             <a:fld id="{0EBB069A-003F-4FC0-8534-236B0C5C7B5F}" type="datetimeFigureOut">
               <a:rPr lang="en-NL" smtClean="0"/>
-              <a:t>16/09/2026</a:t>
+              <a:t>17/09/2026</a:t>
             </a:fld>
             <a:endParaRPr lang="en-NL"/>
           </a:p>
@@ -2567,7 +2676,7 @@
           <a:p>
             <a:fld id="{0EBB069A-003F-4FC0-8534-236B0C5C7B5F}" type="datetimeFigureOut">
               <a:rPr lang="en-NL" smtClean="0"/>
-              <a:t>16/09/2026</a:t>
+              <a:t>17/09/2026</a:t>
             </a:fld>
             <a:endParaRPr lang="en-NL"/>
           </a:p>
@@ -2680,7 +2789,7 @@
           <a:p>
             <a:fld id="{0EBB069A-003F-4FC0-8534-236B0C5C7B5F}" type="datetimeFigureOut">
               <a:rPr lang="en-NL" smtClean="0"/>
-              <a:t>16/09/2026</a:t>
+              <a:t>17/09/2026</a:t>
             </a:fld>
             <a:endParaRPr lang="en-NL"/>
           </a:p>
@@ -2993,7 +3102,7 @@
           <a:p>
             <a:fld id="{0EBB069A-003F-4FC0-8534-236B0C5C7B5F}" type="datetimeFigureOut">
               <a:rPr lang="en-NL" smtClean="0"/>
-              <a:t>16/09/2026</a:t>
+              <a:t>17/09/2026</a:t>
             </a:fld>
             <a:endParaRPr lang="en-NL"/>
           </a:p>
@@ -3282,7 +3391,7 @@
           <a:p>
             <a:fld id="{0EBB069A-003F-4FC0-8534-236B0C5C7B5F}" type="datetimeFigureOut">
               <a:rPr lang="en-NL" smtClean="0"/>
-              <a:t>16/09/2026</a:t>
+              <a:t>17/09/2026</a:t>
             </a:fld>
             <a:endParaRPr lang="en-NL"/>
           </a:p>
@@ -3525,7 +3634,7 @@
           <a:p>
             <a:fld id="{0EBB069A-003F-4FC0-8534-236B0C5C7B5F}" type="datetimeFigureOut">
               <a:rPr lang="en-NL" smtClean="0"/>
-              <a:t>16/09/2026</a:t>
+              <a:t>17/09/2026</a:t>
             </a:fld>
             <a:endParaRPr lang="en-NL"/>
           </a:p>
@@ -15901,6 +16010,770 @@
         <p:cNvPr id="1" name="">
           <a:extLst>
             <a:ext uri="{FF2B5EF4-FFF2-40B4-BE49-F238E27FC236}">
+              <a16:creationId xmlns:a16="http://schemas.microsoft.com/office/drawing/2014/main" id="{C1A333C6-DCA1-8A0C-E60A-B8BD19419799}"/>
+            </a:ext>
+          </a:extLst>
+        </p:cNvPr>
+        <p:cNvGrpSpPr/>
+        <p:nvPr/>
+      </p:nvGrpSpPr>
+      <p:grpSpPr>
+        <a:xfrm>
+          <a:off x="0" y="0"/>
+          <a:ext cx="0" cy="0"/>
+          <a:chOff x="0" y="0"/>
+          <a:chExt cx="0" cy="0"/>
+        </a:xfrm>
+      </p:grpSpPr>
+      <p:sp>
+        <p:nvSpPr>
+          <p:cNvPr id="2" name="Title 1">
+            <a:extLst>
+              <a:ext uri="{FF2B5EF4-FFF2-40B4-BE49-F238E27FC236}">
+                <a16:creationId xmlns:a16="http://schemas.microsoft.com/office/drawing/2014/main" id="{7388D127-3F81-7035-1B77-43AEF9616C91}"/>
+              </a:ext>
+            </a:extLst>
+          </p:cNvPr>
+          <p:cNvSpPr>
+            <a:spLocks noGrp="1"/>
+          </p:cNvSpPr>
+          <p:nvPr>
+            <p:ph type="title"/>
+          </p:nvPr>
+        </p:nvSpPr>
+        <p:spPr>
+          <a:xfrm>
+            <a:off x="838200" y="365126"/>
+            <a:ext cx="10515600" cy="718608"/>
+          </a:xfrm>
+        </p:spPr>
+        <p:txBody>
+          <a:bodyPr>
+            <a:normAutofit/>
+          </a:bodyPr>
+          <a:lstStyle/>
+          <a:p>
+            <a:r>
+              <a:rPr lang="nl-NL" sz="3600" noProof="0" dirty="0"/>
+              <a:t>Package ontwikkelen</a:t>
+            </a:r>
+          </a:p>
+        </p:txBody>
+      </p:sp>
+      <p:sp>
+        <p:nvSpPr>
+          <p:cNvPr id="3" name="Content Placeholder 2">
+            <a:extLst>
+              <a:ext uri="{FF2B5EF4-FFF2-40B4-BE49-F238E27FC236}">
+                <a16:creationId xmlns:a16="http://schemas.microsoft.com/office/drawing/2014/main" id="{98034A06-9540-1B7F-EEF5-789870E4E9C7}"/>
+              </a:ext>
+            </a:extLst>
+          </p:cNvPr>
+          <p:cNvSpPr>
+            <a:spLocks noGrp="1"/>
+          </p:cNvSpPr>
+          <p:nvPr>
+            <p:ph idx="1"/>
+          </p:nvPr>
+        </p:nvSpPr>
+        <p:spPr>
+          <a:xfrm>
+            <a:off x="838198" y="1456267"/>
+            <a:ext cx="4715935" cy="4720696"/>
+          </a:xfrm>
+        </p:spPr>
+        <p:txBody>
+          <a:bodyPr>
+            <a:normAutofit/>
+          </a:bodyPr>
+          <a:lstStyle/>
+          <a:p>
+            <a:pPr marL="0" indent="0">
+              <a:buNone/>
+            </a:pPr>
+            <a:r>
+              <a:rPr lang="nl-NL" sz="2000" dirty="0"/>
+              <a:t>Bedoeling van een package is gebruik in een *ander* project.</a:t>
+            </a:r>
+          </a:p>
+          <a:p>
+            <a:pPr marL="0" indent="0">
+              <a:buNone/>
+            </a:pPr>
+            <a:endParaRPr lang="nl-NL" sz="2000" dirty="0"/>
+          </a:p>
+          <a:p>
+            <a:pPr marL="0" indent="0">
+              <a:buNone/>
+            </a:pPr>
+            <a:r>
+              <a:rPr lang="nl-NL" sz="2000" dirty="0"/>
+              <a:t>Draai de code niet in de werk directory van het package.</a:t>
+            </a:r>
+          </a:p>
+          <a:p>
+            <a:pPr marL="0" indent="0">
+              <a:buNone/>
+            </a:pPr>
+            <a:endParaRPr lang="nl-NL" sz="2000" dirty="0"/>
+          </a:p>
+          <a:p>
+            <a:pPr marL="0" indent="0">
+              <a:buNone/>
+            </a:pPr>
+            <a:r>
+              <a:rPr lang="nl-NL" sz="2000" dirty="0"/>
+              <a:t>Maak een andere virtuele omgeving aan en installeer het package daarin.</a:t>
+            </a:r>
+          </a:p>
+          <a:p>
+            <a:pPr marL="0" indent="0">
+              <a:buNone/>
+            </a:pPr>
+            <a:endParaRPr lang="nl-NL" sz="2000" dirty="0"/>
+          </a:p>
+          <a:p>
+            <a:pPr marL="0" indent="0">
+              <a:buNone/>
+            </a:pPr>
+            <a:r>
+              <a:rPr lang="nl-NL" sz="2000" dirty="0"/>
+              <a:t>Tip: gebruik een </a:t>
+            </a:r>
+            <a:r>
+              <a:rPr lang="nl-NL" sz="2000" dirty="0" err="1"/>
+              <a:t>editable</a:t>
+            </a:r>
+            <a:r>
+              <a:rPr lang="nl-NL" sz="2000" dirty="0"/>
+              <a:t> installatie.</a:t>
+            </a:r>
+          </a:p>
+          <a:p>
+            <a:pPr marL="0" indent="0">
+              <a:buNone/>
+            </a:pPr>
+            <a:endParaRPr lang="nl-NL" sz="2000" dirty="0"/>
+          </a:p>
+        </p:txBody>
+      </p:sp>
+      <p:sp>
+        <p:nvSpPr>
+          <p:cNvPr id="5" name="Content Placeholder 2">
+            <a:extLst>
+              <a:ext uri="{FF2B5EF4-FFF2-40B4-BE49-F238E27FC236}">
+                <a16:creationId xmlns:a16="http://schemas.microsoft.com/office/drawing/2014/main" id="{09A15334-44ED-7A65-1691-16DC79785FE4}"/>
+              </a:ext>
+            </a:extLst>
+          </p:cNvPr>
+          <p:cNvSpPr txBox="1">
+            <a:spLocks/>
+          </p:cNvSpPr>
+          <p:nvPr/>
+        </p:nvSpPr>
+        <p:spPr>
+          <a:xfrm>
+            <a:off x="6637869" y="1456267"/>
+            <a:ext cx="4715935" cy="4720696"/>
+          </a:xfrm>
+          <a:prstGeom prst="rect">
+            <a:avLst/>
+          </a:prstGeom>
+        </p:spPr>
+        <p:txBody>
+          <a:bodyPr vert="horz" lIns="91440" tIns="45720" rIns="91440" bIns="45720" rtlCol="0">
+            <a:normAutofit/>
+          </a:bodyPr>
+          <a:lstStyle>
+            <a:lvl1pPr marL="228600" indent="-228600" algn="l" defTabSz="914400" rtl="0" eaLnBrk="1" latinLnBrk="0" hangingPunct="1">
+              <a:lnSpc>
+                <a:spcPct val="90000"/>
+              </a:lnSpc>
+              <a:spcBef>
+                <a:spcPts val="1000"/>
+              </a:spcBef>
+              <a:buFont typeface="Arial" panose="020B0604020202020204" pitchFamily="34" charset="0"/>
+              <a:buChar char="•"/>
+              <a:defRPr sz="2800" kern="1200">
+                <a:solidFill>
+                  <a:schemeClr val="tx1"/>
+                </a:solidFill>
+                <a:latin typeface="+mn-lt"/>
+                <a:ea typeface="+mn-ea"/>
+                <a:cs typeface="+mn-cs"/>
+              </a:defRPr>
+            </a:lvl1pPr>
+            <a:lvl2pPr marL="685800" indent="-228600" algn="l" defTabSz="914400" rtl="0" eaLnBrk="1" latinLnBrk="0" hangingPunct="1">
+              <a:lnSpc>
+                <a:spcPct val="90000"/>
+              </a:lnSpc>
+              <a:spcBef>
+                <a:spcPts val="500"/>
+              </a:spcBef>
+              <a:buFont typeface="Arial" panose="020B0604020202020204" pitchFamily="34" charset="0"/>
+              <a:buChar char="•"/>
+              <a:defRPr sz="2400" kern="1200">
+                <a:solidFill>
+                  <a:schemeClr val="tx1"/>
+                </a:solidFill>
+                <a:latin typeface="+mn-lt"/>
+                <a:ea typeface="+mn-ea"/>
+                <a:cs typeface="+mn-cs"/>
+              </a:defRPr>
+            </a:lvl2pPr>
+            <a:lvl3pPr marL="1143000" indent="-228600" algn="l" defTabSz="914400" rtl="0" eaLnBrk="1" latinLnBrk="0" hangingPunct="1">
+              <a:lnSpc>
+                <a:spcPct val="90000"/>
+              </a:lnSpc>
+              <a:spcBef>
+                <a:spcPts val="500"/>
+              </a:spcBef>
+              <a:buFont typeface="Arial" panose="020B0604020202020204" pitchFamily="34" charset="0"/>
+              <a:buChar char="•"/>
+              <a:defRPr sz="2000" kern="1200">
+                <a:solidFill>
+                  <a:schemeClr val="tx1"/>
+                </a:solidFill>
+                <a:latin typeface="+mn-lt"/>
+                <a:ea typeface="+mn-ea"/>
+                <a:cs typeface="+mn-cs"/>
+              </a:defRPr>
+            </a:lvl3pPr>
+            <a:lvl4pPr marL="1600200" indent="-228600" algn="l" defTabSz="914400" rtl="0" eaLnBrk="1" latinLnBrk="0" hangingPunct="1">
+              <a:lnSpc>
+                <a:spcPct val="90000"/>
+              </a:lnSpc>
+              <a:spcBef>
+                <a:spcPts val="500"/>
+              </a:spcBef>
+              <a:buFont typeface="Arial" panose="020B0604020202020204" pitchFamily="34" charset="0"/>
+              <a:buChar char="•"/>
+              <a:defRPr sz="1800" kern="1200">
+                <a:solidFill>
+                  <a:schemeClr val="tx1"/>
+                </a:solidFill>
+                <a:latin typeface="+mn-lt"/>
+                <a:ea typeface="+mn-ea"/>
+                <a:cs typeface="+mn-cs"/>
+              </a:defRPr>
+            </a:lvl4pPr>
+            <a:lvl5pPr marL="2057400" indent="-228600" algn="l" defTabSz="914400" rtl="0" eaLnBrk="1" latinLnBrk="0" hangingPunct="1">
+              <a:lnSpc>
+                <a:spcPct val="90000"/>
+              </a:lnSpc>
+              <a:spcBef>
+                <a:spcPts val="500"/>
+              </a:spcBef>
+              <a:buFont typeface="Arial" panose="020B0604020202020204" pitchFamily="34" charset="0"/>
+              <a:buChar char="•"/>
+              <a:defRPr sz="1800" kern="1200">
+                <a:solidFill>
+                  <a:schemeClr val="tx1"/>
+                </a:solidFill>
+                <a:latin typeface="+mn-lt"/>
+                <a:ea typeface="+mn-ea"/>
+                <a:cs typeface="+mn-cs"/>
+              </a:defRPr>
+            </a:lvl5pPr>
+            <a:lvl6pPr marL="2514600" indent="-228600" algn="l" defTabSz="914400" rtl="0" eaLnBrk="1" latinLnBrk="0" hangingPunct="1">
+              <a:lnSpc>
+                <a:spcPct val="90000"/>
+              </a:lnSpc>
+              <a:spcBef>
+                <a:spcPts val="500"/>
+              </a:spcBef>
+              <a:buFont typeface="Arial" panose="020B0604020202020204" pitchFamily="34" charset="0"/>
+              <a:buChar char="•"/>
+              <a:defRPr sz="1800" kern="1200">
+                <a:solidFill>
+                  <a:schemeClr val="tx1"/>
+                </a:solidFill>
+                <a:latin typeface="+mn-lt"/>
+                <a:ea typeface="+mn-ea"/>
+                <a:cs typeface="+mn-cs"/>
+              </a:defRPr>
+            </a:lvl6pPr>
+            <a:lvl7pPr marL="2971800" indent="-228600" algn="l" defTabSz="914400" rtl="0" eaLnBrk="1" latinLnBrk="0" hangingPunct="1">
+              <a:lnSpc>
+                <a:spcPct val="90000"/>
+              </a:lnSpc>
+              <a:spcBef>
+                <a:spcPts val="500"/>
+              </a:spcBef>
+              <a:buFont typeface="Arial" panose="020B0604020202020204" pitchFamily="34" charset="0"/>
+              <a:buChar char="•"/>
+              <a:defRPr sz="1800" kern="1200">
+                <a:solidFill>
+                  <a:schemeClr val="tx1"/>
+                </a:solidFill>
+                <a:latin typeface="+mn-lt"/>
+                <a:ea typeface="+mn-ea"/>
+                <a:cs typeface="+mn-cs"/>
+              </a:defRPr>
+            </a:lvl7pPr>
+            <a:lvl8pPr marL="3429000" indent="-228600" algn="l" defTabSz="914400" rtl="0" eaLnBrk="1" latinLnBrk="0" hangingPunct="1">
+              <a:lnSpc>
+                <a:spcPct val="90000"/>
+              </a:lnSpc>
+              <a:spcBef>
+                <a:spcPts val="500"/>
+              </a:spcBef>
+              <a:buFont typeface="Arial" panose="020B0604020202020204" pitchFamily="34" charset="0"/>
+              <a:buChar char="•"/>
+              <a:defRPr sz="1800" kern="1200">
+                <a:solidFill>
+                  <a:schemeClr val="tx1"/>
+                </a:solidFill>
+                <a:latin typeface="+mn-lt"/>
+                <a:ea typeface="+mn-ea"/>
+                <a:cs typeface="+mn-cs"/>
+              </a:defRPr>
+            </a:lvl8pPr>
+            <a:lvl9pPr marL="3886200" indent="-228600" algn="l" defTabSz="914400" rtl="0" eaLnBrk="1" latinLnBrk="0" hangingPunct="1">
+              <a:lnSpc>
+                <a:spcPct val="90000"/>
+              </a:lnSpc>
+              <a:spcBef>
+                <a:spcPts val="500"/>
+              </a:spcBef>
+              <a:buFont typeface="Arial" panose="020B0604020202020204" pitchFamily="34" charset="0"/>
+              <a:buChar char="•"/>
+              <a:defRPr sz="1800" kern="1200">
+                <a:solidFill>
+                  <a:schemeClr val="tx1"/>
+                </a:solidFill>
+                <a:latin typeface="+mn-lt"/>
+                <a:ea typeface="+mn-ea"/>
+                <a:cs typeface="+mn-cs"/>
+              </a:defRPr>
+            </a:lvl9pPr>
+          </a:lstStyle>
+          <a:p>
+            <a:pPr marL="0" indent="0">
+              <a:spcBef>
+                <a:spcPts val="0"/>
+              </a:spcBef>
+              <a:buNone/>
+            </a:pPr>
+            <a:r>
+              <a:rPr lang="nl-NL" sz="1800" dirty="0">
+                <a:latin typeface="Courier New" panose="02070309020205020404" pitchFamily="49" charset="0"/>
+                <a:cs typeface="Courier New" panose="02070309020205020404" pitchFamily="49" charset="0"/>
+              </a:rPr>
+              <a:t>[project]</a:t>
+            </a:r>
+          </a:p>
+          <a:p>
+            <a:pPr marL="0" indent="0">
+              <a:spcBef>
+                <a:spcPts val="0"/>
+              </a:spcBef>
+              <a:buNone/>
+            </a:pPr>
+            <a:r>
+              <a:rPr lang="nl-NL" sz="1800" dirty="0">
+                <a:latin typeface="Courier New" panose="02070309020205020404" pitchFamily="49" charset="0"/>
+                <a:cs typeface="Courier New" panose="02070309020205020404" pitchFamily="49" charset="0"/>
+              </a:rPr>
+              <a:t>name = "</a:t>
+            </a:r>
+            <a:r>
+              <a:rPr lang="nl-NL" sz="1800" dirty="0" err="1">
+                <a:latin typeface="Courier New" panose="02070309020205020404" pitchFamily="49" charset="0"/>
+                <a:cs typeface="Courier New" panose="02070309020205020404" pitchFamily="49" charset="0"/>
+              </a:rPr>
+              <a:t>my</a:t>
+            </a:r>
+            <a:r>
+              <a:rPr lang="nl-NL" sz="1800" dirty="0">
+                <a:latin typeface="Courier New" panose="02070309020205020404" pitchFamily="49" charset="0"/>
+                <a:cs typeface="Courier New" panose="02070309020205020404" pitchFamily="49" charset="0"/>
+              </a:rPr>
+              <a:t>-package"</a:t>
+            </a:r>
+          </a:p>
+          <a:p>
+            <a:pPr marL="0" indent="0">
+              <a:spcBef>
+                <a:spcPts val="0"/>
+              </a:spcBef>
+              <a:buNone/>
+            </a:pPr>
+            <a:r>
+              <a:rPr lang="nl-NL" sz="1800" dirty="0" err="1">
+                <a:latin typeface="Courier New" panose="02070309020205020404" pitchFamily="49" charset="0"/>
+                <a:cs typeface="Courier New" panose="02070309020205020404" pitchFamily="49" charset="0"/>
+              </a:rPr>
+              <a:t>version</a:t>
+            </a:r>
+            <a:r>
+              <a:rPr lang="nl-NL" sz="1800" dirty="0">
+                <a:latin typeface="Courier New" panose="02070309020205020404" pitchFamily="49" charset="0"/>
+                <a:cs typeface="Courier New" panose="02070309020205020404" pitchFamily="49" charset="0"/>
+              </a:rPr>
+              <a:t> = "0.1.0"</a:t>
+            </a:r>
+          </a:p>
+          <a:p>
+            <a:pPr marL="0" indent="0">
+              <a:spcBef>
+                <a:spcPts val="0"/>
+              </a:spcBef>
+              <a:buNone/>
+            </a:pPr>
+            <a:r>
+              <a:rPr lang="nl-NL" sz="1800" dirty="0" err="1">
+                <a:latin typeface="Courier New" panose="02070309020205020404" pitchFamily="49" charset="0"/>
+                <a:cs typeface="Courier New" panose="02070309020205020404" pitchFamily="49" charset="0"/>
+              </a:rPr>
+              <a:t>description</a:t>
+            </a:r>
+            <a:r>
+              <a:rPr lang="nl-NL" sz="1800" dirty="0">
+                <a:latin typeface="Courier New" panose="02070309020205020404" pitchFamily="49" charset="0"/>
+                <a:cs typeface="Courier New" panose="02070309020205020404" pitchFamily="49" charset="0"/>
+              </a:rPr>
+              <a:t> = "</a:t>
+            </a:r>
+            <a:r>
+              <a:rPr lang="nl-NL" sz="1800" dirty="0" err="1">
+                <a:latin typeface="Courier New" panose="02070309020205020404" pitchFamily="49" charset="0"/>
+                <a:cs typeface="Courier New" panose="02070309020205020404" pitchFamily="49" charset="0"/>
+              </a:rPr>
+              <a:t>Description</a:t>
+            </a:r>
+            <a:r>
+              <a:rPr lang="nl-NL" sz="1800" dirty="0">
+                <a:latin typeface="Courier New" panose="02070309020205020404" pitchFamily="49" charset="0"/>
+                <a:cs typeface="Courier New" panose="02070309020205020404" pitchFamily="49" charset="0"/>
+              </a:rPr>
+              <a:t> here"</a:t>
+            </a:r>
+          </a:p>
+          <a:p>
+            <a:pPr marL="0" indent="0">
+              <a:spcBef>
+                <a:spcPts val="0"/>
+              </a:spcBef>
+              <a:buNone/>
+            </a:pPr>
+            <a:r>
+              <a:rPr lang="nl-NL" sz="1800" dirty="0" err="1">
+                <a:latin typeface="Courier New" panose="02070309020205020404" pitchFamily="49" charset="0"/>
+                <a:cs typeface="Courier New" panose="02070309020205020404" pitchFamily="49" charset="0"/>
+              </a:rPr>
+              <a:t>readme</a:t>
+            </a:r>
+            <a:r>
+              <a:rPr lang="nl-NL" sz="1800" dirty="0">
+                <a:latin typeface="Courier New" panose="02070309020205020404" pitchFamily="49" charset="0"/>
+                <a:cs typeface="Courier New" panose="02070309020205020404" pitchFamily="49" charset="0"/>
+              </a:rPr>
+              <a:t> = "README.md"</a:t>
+            </a:r>
+          </a:p>
+          <a:p>
+            <a:pPr marL="0" indent="0">
+              <a:spcBef>
+                <a:spcPts val="0"/>
+              </a:spcBef>
+              <a:buNone/>
+            </a:pPr>
+            <a:r>
+              <a:rPr lang="nl-NL" sz="1800" dirty="0" err="1">
+                <a:latin typeface="Courier New" panose="02070309020205020404" pitchFamily="49" charset="0"/>
+                <a:cs typeface="Courier New" panose="02070309020205020404" pitchFamily="49" charset="0"/>
+              </a:rPr>
+              <a:t>authors</a:t>
+            </a:r>
+            <a:r>
+              <a:rPr lang="nl-NL" sz="1800" dirty="0">
+                <a:latin typeface="Courier New" panose="02070309020205020404" pitchFamily="49" charset="0"/>
+                <a:cs typeface="Courier New" panose="02070309020205020404" pitchFamily="49" charset="0"/>
+              </a:rPr>
+              <a:t> = [</a:t>
+            </a:r>
+          </a:p>
+          <a:p>
+            <a:pPr marL="0" indent="0">
+              <a:spcBef>
+                <a:spcPts val="0"/>
+              </a:spcBef>
+              <a:buNone/>
+            </a:pPr>
+            <a:r>
+              <a:rPr lang="nl-NL" sz="1800" dirty="0">
+                <a:latin typeface="Courier New" panose="02070309020205020404" pitchFamily="49" charset="0"/>
+                <a:cs typeface="Courier New" panose="02070309020205020404" pitchFamily="49" charset="0"/>
+              </a:rPr>
+              <a:t>    { name = "Lukas Koning" }</a:t>
+            </a:r>
+          </a:p>
+          <a:p>
+            <a:pPr marL="0" indent="0">
+              <a:spcBef>
+                <a:spcPts val="0"/>
+              </a:spcBef>
+              <a:buNone/>
+            </a:pPr>
+            <a:r>
+              <a:rPr lang="nl-NL" sz="1800" dirty="0">
+                <a:latin typeface="Courier New" panose="02070309020205020404" pitchFamily="49" charset="0"/>
+                <a:cs typeface="Courier New" panose="02070309020205020404" pitchFamily="49" charset="0"/>
+              </a:rPr>
+              <a:t>]</a:t>
+            </a:r>
+          </a:p>
+          <a:p>
+            <a:pPr marL="0" indent="0">
+              <a:spcBef>
+                <a:spcPts val="0"/>
+              </a:spcBef>
+              <a:buNone/>
+            </a:pPr>
+            <a:r>
+              <a:rPr lang="nl-NL" sz="1800" dirty="0" err="1">
+                <a:latin typeface="Courier New" panose="02070309020205020404" pitchFamily="49" charset="0"/>
+                <a:cs typeface="Courier New" panose="02070309020205020404" pitchFamily="49" charset="0"/>
+              </a:rPr>
+              <a:t>requires</a:t>
+            </a:r>
+            <a:r>
+              <a:rPr lang="nl-NL" sz="1800" dirty="0">
+                <a:latin typeface="Courier New" panose="02070309020205020404" pitchFamily="49" charset="0"/>
+                <a:cs typeface="Courier New" panose="02070309020205020404" pitchFamily="49" charset="0"/>
+              </a:rPr>
+              <a:t>-python = "&gt;=3.13"</a:t>
+            </a:r>
+          </a:p>
+          <a:p>
+            <a:pPr marL="0" indent="0">
+              <a:spcBef>
+                <a:spcPts val="0"/>
+              </a:spcBef>
+              <a:buNone/>
+            </a:pPr>
+            <a:r>
+              <a:rPr lang="nl-NL" sz="1800" dirty="0">
+                <a:latin typeface="Courier New" panose="02070309020205020404" pitchFamily="49" charset="0"/>
+                <a:cs typeface="Courier New" panose="02070309020205020404" pitchFamily="49" charset="0"/>
+              </a:rPr>
+              <a:t>dependencies = []</a:t>
+            </a:r>
+          </a:p>
+          <a:p>
+            <a:pPr marL="0" indent="0">
+              <a:spcBef>
+                <a:spcPts val="0"/>
+              </a:spcBef>
+              <a:buNone/>
+            </a:pPr>
+            <a:endParaRPr lang="nl-NL" sz="1800" dirty="0">
+              <a:latin typeface="Courier New" panose="02070309020205020404" pitchFamily="49" charset="0"/>
+              <a:cs typeface="Courier New" panose="02070309020205020404" pitchFamily="49" charset="0"/>
+            </a:endParaRPr>
+          </a:p>
+          <a:p>
+            <a:pPr marL="0" indent="0">
+              <a:spcBef>
+                <a:spcPts val="0"/>
+              </a:spcBef>
+              <a:buNone/>
+            </a:pPr>
+            <a:r>
+              <a:rPr lang="nl-NL" sz="1800" dirty="0">
+                <a:latin typeface="Courier New" panose="02070309020205020404" pitchFamily="49" charset="0"/>
+                <a:cs typeface="Courier New" panose="02070309020205020404" pitchFamily="49" charset="0"/>
+              </a:rPr>
+              <a:t>[</a:t>
+            </a:r>
+            <a:r>
+              <a:rPr lang="nl-NL" sz="1800" dirty="0" err="1">
+                <a:latin typeface="Courier New" panose="02070309020205020404" pitchFamily="49" charset="0"/>
+                <a:cs typeface="Courier New" panose="02070309020205020404" pitchFamily="49" charset="0"/>
+              </a:rPr>
+              <a:t>project.scripts</a:t>
+            </a:r>
+            <a:r>
+              <a:rPr lang="nl-NL" sz="1800" dirty="0">
+                <a:latin typeface="Courier New" panose="02070309020205020404" pitchFamily="49" charset="0"/>
+                <a:cs typeface="Courier New" panose="02070309020205020404" pitchFamily="49" charset="0"/>
+              </a:rPr>
+              <a:t>]</a:t>
+            </a:r>
+          </a:p>
+          <a:p>
+            <a:pPr marL="0" indent="0">
+              <a:spcBef>
+                <a:spcPts val="0"/>
+              </a:spcBef>
+              <a:buNone/>
+            </a:pPr>
+            <a:r>
+              <a:rPr lang="nl-NL" sz="1800" dirty="0" err="1">
+                <a:latin typeface="Courier New" panose="02070309020205020404" pitchFamily="49" charset="0"/>
+                <a:cs typeface="Courier New" panose="02070309020205020404" pitchFamily="49" charset="0"/>
+              </a:rPr>
+              <a:t>my</a:t>
+            </a:r>
+            <a:r>
+              <a:rPr lang="nl-NL" sz="1800" dirty="0">
+                <a:latin typeface="Courier New" panose="02070309020205020404" pitchFamily="49" charset="0"/>
+                <a:cs typeface="Courier New" panose="02070309020205020404" pitchFamily="49" charset="0"/>
+              </a:rPr>
+              <a:t>-package = "</a:t>
+            </a:r>
+            <a:r>
+              <a:rPr lang="nl-NL" sz="1800" dirty="0" err="1">
+                <a:latin typeface="Courier New" panose="02070309020205020404" pitchFamily="49" charset="0"/>
+                <a:cs typeface="Courier New" panose="02070309020205020404" pitchFamily="49" charset="0"/>
+              </a:rPr>
+              <a:t>my_package:main</a:t>
+            </a:r>
+            <a:r>
+              <a:rPr lang="nl-NL" sz="1800" dirty="0">
+                <a:latin typeface="Courier New" panose="02070309020205020404" pitchFamily="49" charset="0"/>
+                <a:cs typeface="Courier New" panose="02070309020205020404" pitchFamily="49" charset="0"/>
+              </a:rPr>
+              <a:t>"</a:t>
+            </a:r>
+          </a:p>
+          <a:p>
+            <a:pPr marL="0" indent="0">
+              <a:spcBef>
+                <a:spcPts val="0"/>
+              </a:spcBef>
+              <a:buNone/>
+            </a:pPr>
+            <a:endParaRPr lang="nl-NL" sz="1800" dirty="0">
+              <a:latin typeface="Courier New" panose="02070309020205020404" pitchFamily="49" charset="0"/>
+              <a:cs typeface="Courier New" panose="02070309020205020404" pitchFamily="49" charset="0"/>
+            </a:endParaRPr>
+          </a:p>
+          <a:p>
+            <a:pPr marL="0" indent="0">
+              <a:spcBef>
+                <a:spcPts val="0"/>
+              </a:spcBef>
+              <a:buNone/>
+            </a:pPr>
+            <a:r>
+              <a:rPr lang="nl-NL" sz="1800" dirty="0">
+                <a:latin typeface="Courier New" panose="02070309020205020404" pitchFamily="49" charset="0"/>
+                <a:cs typeface="Courier New" panose="02070309020205020404" pitchFamily="49" charset="0"/>
+              </a:rPr>
+              <a:t>[</a:t>
+            </a:r>
+            <a:r>
+              <a:rPr lang="nl-NL" sz="1800" dirty="0" err="1">
+                <a:latin typeface="Courier New" panose="02070309020205020404" pitchFamily="49" charset="0"/>
+                <a:cs typeface="Courier New" panose="02070309020205020404" pitchFamily="49" charset="0"/>
+              </a:rPr>
+              <a:t>build</a:t>
+            </a:r>
+            <a:r>
+              <a:rPr lang="nl-NL" sz="1800" dirty="0">
+                <a:latin typeface="Courier New" panose="02070309020205020404" pitchFamily="49" charset="0"/>
+                <a:cs typeface="Courier New" panose="02070309020205020404" pitchFamily="49" charset="0"/>
+              </a:rPr>
+              <a:t>-system]</a:t>
+            </a:r>
+          </a:p>
+          <a:p>
+            <a:pPr marL="0" indent="0">
+              <a:spcBef>
+                <a:spcPts val="0"/>
+              </a:spcBef>
+              <a:buNone/>
+            </a:pPr>
+            <a:r>
+              <a:rPr lang="nl-NL" sz="1800" dirty="0" err="1">
+                <a:latin typeface="Courier New" panose="02070309020205020404" pitchFamily="49" charset="0"/>
+                <a:cs typeface="Courier New" panose="02070309020205020404" pitchFamily="49" charset="0"/>
+              </a:rPr>
+              <a:t>requires</a:t>
+            </a:r>
+            <a:r>
+              <a:rPr lang="nl-NL" sz="1800" dirty="0">
+                <a:latin typeface="Courier New" panose="02070309020205020404" pitchFamily="49" charset="0"/>
+                <a:cs typeface="Courier New" panose="02070309020205020404" pitchFamily="49" charset="0"/>
+              </a:rPr>
+              <a:t> = ["</a:t>
+            </a:r>
+            <a:r>
+              <a:rPr lang="nl-NL" sz="1800" dirty="0" err="1">
+                <a:latin typeface="Courier New" panose="02070309020205020404" pitchFamily="49" charset="0"/>
+                <a:cs typeface="Courier New" panose="02070309020205020404" pitchFamily="49" charset="0"/>
+              </a:rPr>
+              <a:t>uv_build</a:t>
+            </a:r>
+            <a:r>
+              <a:rPr lang="nl-NL" sz="1800" dirty="0">
+                <a:latin typeface="Courier New" panose="02070309020205020404" pitchFamily="49" charset="0"/>
+                <a:cs typeface="Courier New" panose="02070309020205020404" pitchFamily="49" charset="0"/>
+              </a:rPr>
+              <a:t>&gt;=0.11"]</a:t>
+            </a:r>
+          </a:p>
+          <a:p>
+            <a:pPr marL="0" indent="0">
+              <a:spcBef>
+                <a:spcPts val="0"/>
+              </a:spcBef>
+              <a:buNone/>
+            </a:pPr>
+            <a:r>
+              <a:rPr lang="nl-NL" sz="1800" dirty="0" err="1">
+                <a:latin typeface="Courier New" panose="02070309020205020404" pitchFamily="49" charset="0"/>
+                <a:cs typeface="Courier New" panose="02070309020205020404" pitchFamily="49" charset="0"/>
+              </a:rPr>
+              <a:t>build</a:t>
+            </a:r>
+            <a:r>
+              <a:rPr lang="nl-NL" sz="1800" dirty="0">
+                <a:latin typeface="Courier New" panose="02070309020205020404" pitchFamily="49" charset="0"/>
+                <a:cs typeface="Courier New" panose="02070309020205020404" pitchFamily="49" charset="0"/>
+              </a:rPr>
+              <a:t>-backend = "</a:t>
+            </a:r>
+            <a:r>
+              <a:rPr lang="nl-NL" sz="1800" dirty="0" err="1">
+                <a:latin typeface="Courier New" panose="02070309020205020404" pitchFamily="49" charset="0"/>
+                <a:cs typeface="Courier New" panose="02070309020205020404" pitchFamily="49" charset="0"/>
+              </a:rPr>
+              <a:t>uv_build</a:t>
+            </a:r>
+            <a:r>
+              <a:rPr lang="nl-NL" sz="1800" dirty="0">
+                <a:latin typeface="Courier New" panose="02070309020205020404" pitchFamily="49" charset="0"/>
+                <a:cs typeface="Courier New" panose="02070309020205020404" pitchFamily="49" charset="0"/>
+              </a:rPr>
+              <a:t>"</a:t>
+            </a:r>
+          </a:p>
+        </p:txBody>
+      </p:sp>
+    </p:spTree>
+    <p:extLst>
+      <p:ext uri="{BB962C8B-B14F-4D97-AF65-F5344CB8AC3E}">
+        <p14:creationId xmlns:p14="http://schemas.microsoft.com/office/powerpoint/2010/main" val="1148242955"/>
+      </p:ext>
+    </p:extLst>
+  </p:cSld>
+  <p:clrMapOvr>
+    <a:masterClrMapping/>
+  </p:clrMapOvr>
+</p:sld>
+</file>
+
+<file path=ppt/slides/slide34.xml><?xml version="1.0" encoding="utf-8"?>
+<p:sld xmlns:a="http://schemas.openxmlformats.org/drawingml/2006/main" xmlns:r="http://schemas.openxmlformats.org/officeDocument/2006/relationships" xmlns:p="http://schemas.openxmlformats.org/presentationml/2006/main">
+  <p:cSld>
+    <p:spTree>
+      <p:nvGrpSpPr>
+        <p:cNvPr id="1" name="">
+          <a:extLst>
+            <a:ext uri="{FF2B5EF4-FFF2-40B4-BE49-F238E27FC236}">
               <a16:creationId xmlns:a16="http://schemas.microsoft.com/office/drawing/2014/main" id="{BE0339F0-2D02-907F-DBB6-BF47FCD59719}"/>
             </a:ext>
           </a:extLst>
@@ -15982,7 +16855,7 @@
 </p:sld>
 </file>
 
-<file path=ppt/slides/slide34.xml><?xml version="1.0" encoding="utf-8"?>
+<file path=ppt/slides/slide35.xml><?xml version="1.0" encoding="utf-8"?>
 <p:sld xmlns:a="http://schemas.openxmlformats.org/drawingml/2006/main" xmlns:r="http://schemas.openxmlformats.org/officeDocument/2006/relationships" xmlns:p="http://schemas.openxmlformats.org/presentationml/2006/main">
   <p:cSld>
     <p:spTree>
@@ -16470,7 +17343,7 @@
 </p:sld>
 </file>
 
-<file path=ppt/slides/slide35.xml><?xml version="1.0" encoding="utf-8"?>
+<file path=ppt/slides/slide36.xml><?xml version="1.0" encoding="utf-8"?>
 <p:sld xmlns:a="http://schemas.openxmlformats.org/drawingml/2006/main" xmlns:r="http://schemas.openxmlformats.org/officeDocument/2006/relationships" xmlns:p="http://schemas.openxmlformats.org/presentationml/2006/main">
   <p:cSld>
     <p:spTree>
@@ -17070,7 +17943,7 @@
 </p:sld>
 </file>
 
-<file path=ppt/slides/slide36.xml><?xml version="1.0" encoding="utf-8"?>
+<file path=ppt/slides/slide37.xml><?xml version="1.0" encoding="utf-8"?>
 <p:sld xmlns:a="http://schemas.openxmlformats.org/drawingml/2006/main" xmlns:r="http://schemas.openxmlformats.org/officeDocument/2006/relationships" xmlns:p="http://schemas.openxmlformats.org/presentationml/2006/main">
   <p:cSld>
     <p:spTree>
@@ -17165,7 +18038,7 @@
 </p:sld>
 </file>
 
-<file path=ppt/slides/slide37.xml><?xml version="1.0" encoding="utf-8"?>
+<file path=ppt/slides/slide38.xml><?xml version="1.0" encoding="utf-8"?>
 <p:sld xmlns:a="http://schemas.openxmlformats.org/drawingml/2006/main" xmlns:r="http://schemas.openxmlformats.org/officeDocument/2006/relationships" xmlns:p="http://schemas.openxmlformats.org/presentationml/2006/main">
   <p:cSld>
     <p:spTree>
@@ -17524,7 +18397,7 @@
 </p:sld>
 </file>
 
-<file path=ppt/slides/slide38.xml><?xml version="1.0" encoding="utf-8"?>
+<file path=ppt/slides/slide39.xml><?xml version="1.0" encoding="utf-8"?>
 <p:sld xmlns:a="http://schemas.openxmlformats.org/drawingml/2006/main" xmlns:r="http://schemas.openxmlformats.org/officeDocument/2006/relationships" xmlns:p="http://schemas.openxmlformats.org/presentationml/2006/main">
   <p:cSld>
     <p:spTree>
@@ -17877,7 +18750,241 @@
 </p:sld>
 </file>
 
-<file path=ppt/slides/slide39.xml><?xml version="1.0" encoding="utf-8"?>
+<file path=ppt/slides/slide4.xml><?xml version="1.0" encoding="utf-8"?>
+<p:sld xmlns:a="http://schemas.openxmlformats.org/drawingml/2006/main" xmlns:r="http://schemas.openxmlformats.org/officeDocument/2006/relationships" xmlns:p="http://schemas.openxmlformats.org/presentationml/2006/main">
+  <p:cSld>
+    <p:spTree>
+      <p:nvGrpSpPr>
+        <p:cNvPr id="1" name=""/>
+        <p:cNvGrpSpPr/>
+        <p:nvPr/>
+      </p:nvGrpSpPr>
+      <p:grpSpPr>
+        <a:xfrm>
+          <a:off x="0" y="0"/>
+          <a:ext cx="0" cy="0"/>
+          <a:chOff x="0" y="0"/>
+          <a:chExt cx="0" cy="0"/>
+        </a:xfrm>
+      </p:grpSpPr>
+      <p:pic>
+        <p:nvPicPr>
+          <p:cNvPr id="1026" name="Picture 2" descr="Python">
+            <a:extLst>
+              <a:ext uri="{FF2B5EF4-FFF2-40B4-BE49-F238E27FC236}">
+                <a16:creationId xmlns:a16="http://schemas.microsoft.com/office/drawing/2014/main" id="{2604CCD1-B710-B7B3-3C01-61B36162D61A}"/>
+              </a:ext>
+            </a:extLst>
+          </p:cNvPr>
+          <p:cNvPicPr>
+            <a:picLocks noChangeAspect="1" noChangeArrowheads="1"/>
+          </p:cNvPicPr>
+          <p:nvPr/>
+        </p:nvPicPr>
+        <p:blipFill>
+          <a:blip r:embed="rId2">
+            <a:extLst>
+              <a:ext uri="{28A0092B-C50C-407E-A947-70E740481C1C}">
+                <a14:useLocalDpi xmlns:a14="http://schemas.microsoft.com/office/drawing/2010/main" val="0"/>
+              </a:ext>
+            </a:extLst>
+          </a:blip>
+          <a:srcRect/>
+          <a:stretch>
+            <a:fillRect/>
+          </a:stretch>
+        </p:blipFill>
+        <p:spPr bwMode="auto">
+          <a:xfrm>
+            <a:off x="6880227" y="1098853"/>
+            <a:ext cx="4473573" cy="5078110"/>
+          </a:xfrm>
+          <a:prstGeom prst="rect">
+            <a:avLst/>
+          </a:prstGeom>
+          <a:noFill/>
+          <a:extLst>
+            <a:ext uri="{909E8E84-426E-40DD-AFC4-6F175D3DCCD1}">
+              <a14:hiddenFill xmlns:a14="http://schemas.microsoft.com/office/drawing/2010/main">
+                <a:solidFill>
+                  <a:srgbClr val="FFFFFF"/>
+                </a:solidFill>
+              </a14:hiddenFill>
+            </a:ext>
+          </a:extLst>
+        </p:spPr>
+      </p:pic>
+      <p:sp>
+        <p:nvSpPr>
+          <p:cNvPr id="2" name="Title 1">
+            <a:extLst>
+              <a:ext uri="{FF2B5EF4-FFF2-40B4-BE49-F238E27FC236}">
+                <a16:creationId xmlns:a16="http://schemas.microsoft.com/office/drawing/2014/main" id="{39A1D606-8DD1-369C-5C09-471CDD551AD5}"/>
+              </a:ext>
+            </a:extLst>
+          </p:cNvPr>
+          <p:cNvSpPr>
+            <a:spLocks noGrp="1"/>
+          </p:cNvSpPr>
+          <p:nvPr>
+            <p:ph type="title"/>
+          </p:nvPr>
+        </p:nvSpPr>
+        <p:spPr>
+          <a:xfrm>
+            <a:off x="838200" y="365126"/>
+            <a:ext cx="10515600" cy="718608"/>
+          </a:xfrm>
+        </p:spPr>
+        <p:txBody>
+          <a:bodyPr>
+            <a:normAutofit/>
+          </a:bodyPr>
+          <a:lstStyle/>
+          <a:p>
+            <a:r>
+              <a:rPr lang="nl-NL" sz="3600" noProof="0" dirty="0"/>
+              <a:t>Sterke en zwakke punten</a:t>
+            </a:r>
+          </a:p>
+        </p:txBody>
+      </p:sp>
+      <p:sp>
+        <p:nvSpPr>
+          <p:cNvPr id="3" name="Content Placeholder 2">
+            <a:extLst>
+              <a:ext uri="{FF2B5EF4-FFF2-40B4-BE49-F238E27FC236}">
+                <a16:creationId xmlns:a16="http://schemas.microsoft.com/office/drawing/2014/main" id="{F4C2D286-E049-0AAB-1360-B7157E11AD7E}"/>
+              </a:ext>
+            </a:extLst>
+          </p:cNvPr>
+          <p:cNvSpPr>
+            <a:spLocks noGrp="1"/>
+          </p:cNvSpPr>
+          <p:nvPr>
+            <p:ph idx="1"/>
+          </p:nvPr>
+        </p:nvSpPr>
+        <p:spPr>
+          <a:xfrm>
+            <a:off x="838200" y="1456267"/>
+            <a:ext cx="4749800" cy="4720696"/>
+          </a:xfrm>
+        </p:spPr>
+        <p:txBody>
+          <a:bodyPr>
+            <a:normAutofit/>
+          </a:bodyPr>
+          <a:lstStyle/>
+          <a:p>
+            <a:pPr marL="0" indent="0">
+              <a:buNone/>
+            </a:pPr>
+            <a:r>
+              <a:rPr lang="nl-NL" sz="2000" b="1" noProof="0" dirty="0"/>
+              <a:t>Sterke punten:</a:t>
+            </a:r>
+          </a:p>
+          <a:p>
+            <a:pPr marL="0" indent="0">
+              <a:buNone/>
+            </a:pPr>
+            <a:endParaRPr lang="nl-NL" sz="2000" noProof="0" dirty="0"/>
+          </a:p>
+          <a:p>
+            <a:pPr>
+              <a:buFontTx/>
+              <a:buChar char="-"/>
+            </a:pPr>
+            <a:r>
+              <a:rPr lang="nl-NL" sz="2000" noProof="0" dirty="0"/>
+              <a:t>Makkelijk te leren, flexibele syntax.</a:t>
+            </a:r>
+          </a:p>
+          <a:p>
+            <a:pPr>
+              <a:buFontTx/>
+              <a:buChar char="-"/>
+            </a:pPr>
+            <a:endParaRPr lang="nl-NL" sz="2000" noProof="0" dirty="0"/>
+          </a:p>
+          <a:p>
+            <a:pPr>
+              <a:buFontTx/>
+              <a:buChar char="-"/>
+            </a:pPr>
+            <a:r>
+              <a:rPr lang="nl-NL" sz="2000" noProof="0" dirty="0"/>
+              <a:t>Veel ontwikkelaars en gebruikers.</a:t>
+            </a:r>
+          </a:p>
+          <a:p>
+            <a:pPr>
+              <a:buFontTx/>
+              <a:buChar char="-"/>
+            </a:pPr>
+            <a:endParaRPr lang="nl-NL" sz="2000" noProof="0" dirty="0"/>
+          </a:p>
+          <a:p>
+            <a:pPr>
+              <a:buFontTx/>
+              <a:buChar char="-"/>
+            </a:pPr>
+            <a:r>
+              <a:rPr lang="nl-NL" sz="2000" noProof="0" dirty="0"/>
+              <a:t>Veel online informatie.</a:t>
+            </a:r>
+          </a:p>
+          <a:p>
+            <a:pPr>
+              <a:buFontTx/>
+              <a:buChar char="-"/>
+            </a:pPr>
+            <a:endParaRPr lang="nl-NL" sz="2000" noProof="0" dirty="0"/>
+          </a:p>
+          <a:p>
+            <a:pPr>
+              <a:buFontTx/>
+              <a:buChar char="-"/>
+            </a:pPr>
+            <a:r>
+              <a:rPr lang="nl-NL" sz="2000" noProof="0" dirty="0"/>
+              <a:t>Uitgebreid ecosysteem van uitbreidingen.</a:t>
+            </a:r>
+          </a:p>
+          <a:p>
+            <a:pPr>
+              <a:buFontTx/>
+              <a:buChar char="-"/>
+            </a:pPr>
+            <a:endParaRPr lang="nl-NL" sz="2000" noProof="0" dirty="0"/>
+          </a:p>
+          <a:p>
+            <a:pPr>
+              <a:buFontTx/>
+              <a:buChar char="-"/>
+            </a:pPr>
+            <a:r>
+              <a:rPr lang="nl-NL" sz="2000" noProof="0" dirty="0"/>
+              <a:t>Breed inzetbaar.</a:t>
+            </a:r>
+          </a:p>
+        </p:txBody>
+      </p:sp>
+    </p:spTree>
+    <p:extLst>
+      <p:ext uri="{BB962C8B-B14F-4D97-AF65-F5344CB8AC3E}">
+        <p14:creationId xmlns:p14="http://schemas.microsoft.com/office/powerpoint/2010/main" val="344422135"/>
+      </p:ext>
+    </p:extLst>
+  </p:cSld>
+  <p:clrMapOvr>
+    <a:masterClrMapping/>
+  </p:clrMapOvr>
+</p:sld>
+</file>
+
+<file path=ppt/slides/slide40.xml><?xml version="1.0" encoding="utf-8"?>
 <p:sld xmlns:a="http://schemas.openxmlformats.org/drawingml/2006/main" xmlns:r="http://schemas.openxmlformats.org/officeDocument/2006/relationships" xmlns:p="http://schemas.openxmlformats.org/presentationml/2006/main">
   <p:cSld>
     <p:spTree>
@@ -18181,241 +19288,7 @@
 </p:sld>
 </file>
 
-<file path=ppt/slides/slide4.xml><?xml version="1.0" encoding="utf-8"?>
-<p:sld xmlns:a="http://schemas.openxmlformats.org/drawingml/2006/main" xmlns:r="http://schemas.openxmlformats.org/officeDocument/2006/relationships" xmlns:p="http://schemas.openxmlformats.org/presentationml/2006/main">
-  <p:cSld>
-    <p:spTree>
-      <p:nvGrpSpPr>
-        <p:cNvPr id="1" name=""/>
-        <p:cNvGrpSpPr/>
-        <p:nvPr/>
-      </p:nvGrpSpPr>
-      <p:grpSpPr>
-        <a:xfrm>
-          <a:off x="0" y="0"/>
-          <a:ext cx="0" cy="0"/>
-          <a:chOff x="0" y="0"/>
-          <a:chExt cx="0" cy="0"/>
-        </a:xfrm>
-      </p:grpSpPr>
-      <p:pic>
-        <p:nvPicPr>
-          <p:cNvPr id="1026" name="Picture 2" descr="Python">
-            <a:extLst>
-              <a:ext uri="{FF2B5EF4-FFF2-40B4-BE49-F238E27FC236}">
-                <a16:creationId xmlns:a16="http://schemas.microsoft.com/office/drawing/2014/main" id="{2604CCD1-B710-B7B3-3C01-61B36162D61A}"/>
-              </a:ext>
-            </a:extLst>
-          </p:cNvPr>
-          <p:cNvPicPr>
-            <a:picLocks noChangeAspect="1" noChangeArrowheads="1"/>
-          </p:cNvPicPr>
-          <p:nvPr/>
-        </p:nvPicPr>
-        <p:blipFill>
-          <a:blip r:embed="rId2">
-            <a:extLst>
-              <a:ext uri="{28A0092B-C50C-407E-A947-70E740481C1C}">
-                <a14:useLocalDpi xmlns:a14="http://schemas.microsoft.com/office/drawing/2010/main" val="0"/>
-              </a:ext>
-            </a:extLst>
-          </a:blip>
-          <a:srcRect/>
-          <a:stretch>
-            <a:fillRect/>
-          </a:stretch>
-        </p:blipFill>
-        <p:spPr bwMode="auto">
-          <a:xfrm>
-            <a:off x="6880227" y="1098853"/>
-            <a:ext cx="4473573" cy="5078110"/>
-          </a:xfrm>
-          <a:prstGeom prst="rect">
-            <a:avLst/>
-          </a:prstGeom>
-          <a:noFill/>
-          <a:extLst>
-            <a:ext uri="{909E8E84-426E-40DD-AFC4-6F175D3DCCD1}">
-              <a14:hiddenFill xmlns:a14="http://schemas.microsoft.com/office/drawing/2010/main">
-                <a:solidFill>
-                  <a:srgbClr val="FFFFFF"/>
-                </a:solidFill>
-              </a14:hiddenFill>
-            </a:ext>
-          </a:extLst>
-        </p:spPr>
-      </p:pic>
-      <p:sp>
-        <p:nvSpPr>
-          <p:cNvPr id="2" name="Title 1">
-            <a:extLst>
-              <a:ext uri="{FF2B5EF4-FFF2-40B4-BE49-F238E27FC236}">
-                <a16:creationId xmlns:a16="http://schemas.microsoft.com/office/drawing/2014/main" id="{39A1D606-8DD1-369C-5C09-471CDD551AD5}"/>
-              </a:ext>
-            </a:extLst>
-          </p:cNvPr>
-          <p:cNvSpPr>
-            <a:spLocks noGrp="1"/>
-          </p:cNvSpPr>
-          <p:nvPr>
-            <p:ph type="title"/>
-          </p:nvPr>
-        </p:nvSpPr>
-        <p:spPr>
-          <a:xfrm>
-            <a:off x="838200" y="365126"/>
-            <a:ext cx="10515600" cy="718608"/>
-          </a:xfrm>
-        </p:spPr>
-        <p:txBody>
-          <a:bodyPr>
-            <a:normAutofit/>
-          </a:bodyPr>
-          <a:lstStyle/>
-          <a:p>
-            <a:r>
-              <a:rPr lang="nl-NL" sz="3600" noProof="0" dirty="0"/>
-              <a:t>Sterke en zwakke punten</a:t>
-            </a:r>
-          </a:p>
-        </p:txBody>
-      </p:sp>
-      <p:sp>
-        <p:nvSpPr>
-          <p:cNvPr id="3" name="Content Placeholder 2">
-            <a:extLst>
-              <a:ext uri="{FF2B5EF4-FFF2-40B4-BE49-F238E27FC236}">
-                <a16:creationId xmlns:a16="http://schemas.microsoft.com/office/drawing/2014/main" id="{F4C2D286-E049-0AAB-1360-B7157E11AD7E}"/>
-              </a:ext>
-            </a:extLst>
-          </p:cNvPr>
-          <p:cNvSpPr>
-            <a:spLocks noGrp="1"/>
-          </p:cNvSpPr>
-          <p:nvPr>
-            <p:ph idx="1"/>
-          </p:nvPr>
-        </p:nvSpPr>
-        <p:spPr>
-          <a:xfrm>
-            <a:off x="838200" y="1456267"/>
-            <a:ext cx="4749800" cy="4720696"/>
-          </a:xfrm>
-        </p:spPr>
-        <p:txBody>
-          <a:bodyPr>
-            <a:normAutofit/>
-          </a:bodyPr>
-          <a:lstStyle/>
-          <a:p>
-            <a:pPr marL="0" indent="0">
-              <a:buNone/>
-            </a:pPr>
-            <a:r>
-              <a:rPr lang="nl-NL" sz="2000" b="1" noProof="0" dirty="0"/>
-              <a:t>Sterke punten:</a:t>
-            </a:r>
-          </a:p>
-          <a:p>
-            <a:pPr marL="0" indent="0">
-              <a:buNone/>
-            </a:pPr>
-            <a:endParaRPr lang="nl-NL" sz="2000" noProof="0" dirty="0"/>
-          </a:p>
-          <a:p>
-            <a:pPr>
-              <a:buFontTx/>
-              <a:buChar char="-"/>
-            </a:pPr>
-            <a:r>
-              <a:rPr lang="nl-NL" sz="2000" noProof="0" dirty="0"/>
-              <a:t>Makkelijk te leren, flexibele syntax.</a:t>
-            </a:r>
-          </a:p>
-          <a:p>
-            <a:pPr>
-              <a:buFontTx/>
-              <a:buChar char="-"/>
-            </a:pPr>
-            <a:endParaRPr lang="nl-NL" sz="2000" noProof="0" dirty="0"/>
-          </a:p>
-          <a:p>
-            <a:pPr>
-              <a:buFontTx/>
-              <a:buChar char="-"/>
-            </a:pPr>
-            <a:r>
-              <a:rPr lang="nl-NL" sz="2000" noProof="0" dirty="0"/>
-              <a:t>Veel ontwikkelaars en gebruikers.</a:t>
-            </a:r>
-          </a:p>
-          <a:p>
-            <a:pPr>
-              <a:buFontTx/>
-              <a:buChar char="-"/>
-            </a:pPr>
-            <a:endParaRPr lang="nl-NL" sz="2000" noProof="0" dirty="0"/>
-          </a:p>
-          <a:p>
-            <a:pPr>
-              <a:buFontTx/>
-              <a:buChar char="-"/>
-            </a:pPr>
-            <a:r>
-              <a:rPr lang="nl-NL" sz="2000" noProof="0" dirty="0"/>
-              <a:t>Veel online informatie.</a:t>
-            </a:r>
-          </a:p>
-          <a:p>
-            <a:pPr>
-              <a:buFontTx/>
-              <a:buChar char="-"/>
-            </a:pPr>
-            <a:endParaRPr lang="nl-NL" sz="2000" noProof="0" dirty="0"/>
-          </a:p>
-          <a:p>
-            <a:pPr>
-              <a:buFontTx/>
-              <a:buChar char="-"/>
-            </a:pPr>
-            <a:r>
-              <a:rPr lang="nl-NL" sz="2000" noProof="0" dirty="0"/>
-              <a:t>Uitgebreid ecosysteem van uitbreidingen.</a:t>
-            </a:r>
-          </a:p>
-          <a:p>
-            <a:pPr>
-              <a:buFontTx/>
-              <a:buChar char="-"/>
-            </a:pPr>
-            <a:endParaRPr lang="nl-NL" sz="2000" noProof="0" dirty="0"/>
-          </a:p>
-          <a:p>
-            <a:pPr>
-              <a:buFontTx/>
-              <a:buChar char="-"/>
-            </a:pPr>
-            <a:r>
-              <a:rPr lang="nl-NL" sz="2000" noProof="0" dirty="0"/>
-              <a:t>Breed inzetbaar.</a:t>
-            </a:r>
-          </a:p>
-        </p:txBody>
-      </p:sp>
-    </p:spTree>
-    <p:extLst>
-      <p:ext uri="{BB962C8B-B14F-4D97-AF65-F5344CB8AC3E}">
-        <p14:creationId xmlns:p14="http://schemas.microsoft.com/office/powerpoint/2010/main" val="344422135"/>
-      </p:ext>
-    </p:extLst>
-  </p:cSld>
-  <p:clrMapOvr>
-    <a:masterClrMapping/>
-  </p:clrMapOvr>
-</p:sld>
-</file>
-
-<file path=ppt/slides/slide40.xml><?xml version="1.0" encoding="utf-8"?>
+<file path=ppt/slides/slide41.xml><?xml version="1.0" encoding="utf-8"?>
 <p:sld xmlns:a="http://schemas.openxmlformats.org/drawingml/2006/main" xmlns:r="http://schemas.openxmlformats.org/officeDocument/2006/relationships" xmlns:p="http://schemas.openxmlformats.org/presentationml/2006/main" show="0">
   <p:cSld>
     <p:spTree>

--- a/python_course_4p/1_venv_package/1_venv_package.pptx
+++ b/python_course_4p/1_venv_package/1_venv_package.pptx
@@ -247,7 +247,7 @@
           <a:p>
             <a:fld id="{3BADDCAA-88FC-44D4-A91A-DD0530AB88E0}" type="datetimeFigureOut">
               <a:rPr lang="en-NL" smtClean="0"/>
-              <a:t>22/09/2026</a:t>
+              <a:t>24/09/2026</a:t>
             </a:fld>
             <a:endParaRPr lang="en-NL"/>
           </a:p>
@@ -1429,7 +1429,7 @@
           <a:p>
             <a:fld id="{0EBB069A-003F-4FC0-8534-236B0C5C7B5F}" type="datetimeFigureOut">
               <a:rPr lang="en-NL" smtClean="0"/>
-              <a:t>22/09/2026</a:t>
+              <a:t>24/09/2026</a:t>
             </a:fld>
             <a:endParaRPr lang="en-NL"/>
           </a:p>
@@ -1629,7 +1629,7 @@
           <a:p>
             <a:fld id="{0EBB069A-003F-4FC0-8534-236B0C5C7B5F}" type="datetimeFigureOut">
               <a:rPr lang="en-NL" smtClean="0"/>
-              <a:t>22/09/2026</a:t>
+              <a:t>24/09/2026</a:t>
             </a:fld>
             <a:endParaRPr lang="en-NL"/>
           </a:p>
@@ -1839,7 +1839,7 @@
           <a:p>
             <a:fld id="{0EBB069A-003F-4FC0-8534-236B0C5C7B5F}" type="datetimeFigureOut">
               <a:rPr lang="en-NL" smtClean="0"/>
-              <a:t>22/09/2026</a:t>
+              <a:t>24/09/2026</a:t>
             </a:fld>
             <a:endParaRPr lang="en-NL"/>
           </a:p>
@@ -2039,7 +2039,7 @@
           <a:p>
             <a:fld id="{0EBB069A-003F-4FC0-8534-236B0C5C7B5F}" type="datetimeFigureOut">
               <a:rPr lang="en-NL" smtClean="0"/>
-              <a:t>22/09/2026</a:t>
+              <a:t>24/09/2026</a:t>
             </a:fld>
             <a:endParaRPr lang="en-NL"/>
           </a:p>
@@ -2315,7 +2315,7 @@
           <a:p>
             <a:fld id="{0EBB069A-003F-4FC0-8534-236B0C5C7B5F}" type="datetimeFigureOut">
               <a:rPr lang="en-NL" smtClean="0"/>
-              <a:t>22/09/2026</a:t>
+              <a:t>24/09/2026</a:t>
             </a:fld>
             <a:endParaRPr lang="en-NL"/>
           </a:p>
@@ -2583,7 +2583,7 @@
           <a:p>
             <a:fld id="{0EBB069A-003F-4FC0-8534-236B0C5C7B5F}" type="datetimeFigureOut">
               <a:rPr lang="en-NL" smtClean="0"/>
-              <a:t>22/09/2026</a:t>
+              <a:t>24/09/2026</a:t>
             </a:fld>
             <a:endParaRPr lang="en-NL"/>
           </a:p>
@@ -2998,7 +2998,7 @@
           <a:p>
             <a:fld id="{0EBB069A-003F-4FC0-8534-236B0C5C7B5F}" type="datetimeFigureOut">
               <a:rPr lang="en-NL" smtClean="0"/>
-              <a:t>22/09/2026</a:t>
+              <a:t>24/09/2026</a:t>
             </a:fld>
             <a:endParaRPr lang="en-NL"/>
           </a:p>
@@ -3140,7 +3140,7 @@
           <a:p>
             <a:fld id="{0EBB069A-003F-4FC0-8534-236B0C5C7B5F}" type="datetimeFigureOut">
               <a:rPr lang="en-NL" smtClean="0"/>
-              <a:t>22/09/2026</a:t>
+              <a:t>24/09/2026</a:t>
             </a:fld>
             <a:endParaRPr lang="en-NL"/>
           </a:p>
@@ -3253,7 +3253,7 @@
           <a:p>
             <a:fld id="{0EBB069A-003F-4FC0-8534-236B0C5C7B5F}" type="datetimeFigureOut">
               <a:rPr lang="en-NL" smtClean="0"/>
-              <a:t>22/09/2026</a:t>
+              <a:t>24/09/2026</a:t>
             </a:fld>
             <a:endParaRPr lang="en-NL"/>
           </a:p>
@@ -3566,7 +3566,7 @@
           <a:p>
             <a:fld id="{0EBB069A-003F-4FC0-8534-236B0C5C7B5F}" type="datetimeFigureOut">
               <a:rPr lang="en-NL" smtClean="0"/>
-              <a:t>22/09/2026</a:t>
+              <a:t>24/09/2026</a:t>
             </a:fld>
             <a:endParaRPr lang="en-NL"/>
           </a:p>
@@ -3855,7 +3855,7 @@
           <a:p>
             <a:fld id="{0EBB069A-003F-4FC0-8534-236B0C5C7B5F}" type="datetimeFigureOut">
               <a:rPr lang="en-NL" smtClean="0"/>
-              <a:t>22/09/2026</a:t>
+              <a:t>24/09/2026</a:t>
             </a:fld>
             <a:endParaRPr lang="en-NL"/>
           </a:p>
@@ -4098,7 +4098,7 @@
           <a:p>
             <a:fld id="{0EBB069A-003F-4FC0-8534-236B0C5C7B5F}" type="datetimeFigureOut">
               <a:rPr lang="en-NL" smtClean="0"/>
-              <a:t>22/09/2026</a:t>
+              <a:t>24/09/2026</a:t>
             </a:fld>
             <a:endParaRPr lang="en-NL"/>
           </a:p>
@@ -9863,7 +9863,7 @@
                 <a:latin typeface="Courier New" panose="02070309020205020404" pitchFamily="49" charset="0"/>
                 <a:cs typeface="Courier New" panose="02070309020205020404" pitchFamily="49" charset="0"/>
               </a:rPr>
-              <a:t>name = "my-package"</a:t>
+              <a:t>name = "my-project"</a:t>
             </a:r>
           </a:p>
           <a:p>
@@ -10434,7 +10434,7 @@
                 <a:latin typeface="Courier New" panose="02070309020205020404" pitchFamily="49" charset="0"/>
                 <a:cs typeface="Courier New" panose="02070309020205020404" pitchFamily="49" charset="0"/>
               </a:rPr>
-              <a:t>name = "my-package"</a:t>
+              <a:t>name = "my-project"</a:t>
             </a:r>
           </a:p>
           <a:p>
@@ -11132,7 +11132,7 @@
                 <a:latin typeface="Courier New" panose="02070309020205020404" pitchFamily="49" charset="0"/>
                 <a:cs typeface="Courier New" panose="02070309020205020404" pitchFamily="49" charset="0"/>
               </a:rPr>
-              <a:t>name = "my-package"</a:t>
+              <a:t>name = "my-project"</a:t>
             </a:r>
           </a:p>
           <a:p>

--- a/python_course_4p/1_venv_package/1_venv_package.pptx
+++ b/python_course_4p/1_venv_package/1_venv_package.pptx
@@ -5,7 +5,7 @@
     <p:sldMasterId id="2147483648" r:id="rId1"/>
   </p:sldMasterIdLst>
   <p:notesMasterIdLst>
-    <p:notesMasterId r:id="rId53"/>
+    <p:notesMasterId r:id="rId54"/>
   </p:notesMasterIdLst>
   <p:sldIdLst>
     <p:sldId id="256" r:id="rId2"/>
@@ -29,36 +29,37 @@
     <p:sldId id="361" r:id="rId20"/>
     <p:sldId id="353" r:id="rId21"/>
     <p:sldId id="360" r:id="rId22"/>
-    <p:sldId id="363" r:id="rId23"/>
+    <p:sldId id="390" r:id="rId23"/>
     <p:sldId id="364" r:id="rId24"/>
     <p:sldId id="366" r:id="rId25"/>
     <p:sldId id="369" r:id="rId26"/>
     <p:sldId id="368" r:id="rId27"/>
     <p:sldId id="371" r:id="rId28"/>
-    <p:sldId id="372" r:id="rId29"/>
-    <p:sldId id="370" r:id="rId30"/>
-    <p:sldId id="374" r:id="rId31"/>
-    <p:sldId id="362" r:id="rId32"/>
-    <p:sldId id="375" r:id="rId33"/>
-    <p:sldId id="381" r:id="rId34"/>
-    <p:sldId id="378" r:id="rId35"/>
-    <p:sldId id="379" r:id="rId36"/>
-    <p:sldId id="380" r:id="rId37"/>
-    <p:sldId id="359" r:id="rId38"/>
-    <p:sldId id="383" r:id="rId39"/>
-    <p:sldId id="384" r:id="rId40"/>
-    <p:sldId id="385" r:id="rId41"/>
-    <p:sldId id="387" r:id="rId42"/>
-    <p:sldId id="382" r:id="rId43"/>
-    <p:sldId id="388" r:id="rId44"/>
-    <p:sldId id="389" r:id="rId45"/>
-    <p:sldId id="386" r:id="rId46"/>
-    <p:sldId id="266" r:id="rId47"/>
-    <p:sldId id="278" r:id="rId48"/>
-    <p:sldId id="279" r:id="rId49"/>
-    <p:sldId id="281" r:id="rId50"/>
-    <p:sldId id="282" r:id="rId51"/>
-    <p:sldId id="351" r:id="rId52"/>
+    <p:sldId id="391" r:id="rId29"/>
+    <p:sldId id="372" r:id="rId30"/>
+    <p:sldId id="370" r:id="rId31"/>
+    <p:sldId id="374" r:id="rId32"/>
+    <p:sldId id="362" r:id="rId33"/>
+    <p:sldId id="375" r:id="rId34"/>
+    <p:sldId id="381" r:id="rId35"/>
+    <p:sldId id="378" r:id="rId36"/>
+    <p:sldId id="379" r:id="rId37"/>
+    <p:sldId id="380" r:id="rId38"/>
+    <p:sldId id="359" r:id="rId39"/>
+    <p:sldId id="383" r:id="rId40"/>
+    <p:sldId id="384" r:id="rId41"/>
+    <p:sldId id="385" r:id="rId42"/>
+    <p:sldId id="387" r:id="rId43"/>
+    <p:sldId id="382" r:id="rId44"/>
+    <p:sldId id="388" r:id="rId45"/>
+    <p:sldId id="389" r:id="rId46"/>
+    <p:sldId id="386" r:id="rId47"/>
+    <p:sldId id="266" r:id="rId48"/>
+    <p:sldId id="278" r:id="rId49"/>
+    <p:sldId id="279" r:id="rId50"/>
+    <p:sldId id="281" r:id="rId51"/>
+    <p:sldId id="282" r:id="rId52"/>
+    <p:sldId id="351" r:id="rId53"/>
   </p:sldIdLst>
   <p:sldSz cx="12192000" cy="6858000"/>
   <p:notesSz cx="6858000" cy="9144000"/>
@@ -247,7 +248,7 @@
           <a:p>
             <a:fld id="{3BADDCAA-88FC-44D4-A91A-DD0530AB88E0}" type="datetimeFigureOut">
               <a:rPr lang="en-NL" smtClean="0"/>
-              <a:t>24/09/2026</a:t>
+              <a:t>20/10/2026</a:t>
             </a:fld>
             <a:endParaRPr lang="en-NL"/>
           </a:p>
@@ -559,42 +560,7 @@
           <a:bodyPr/>
           <a:lstStyle/>
           <a:p>
-            <a:r>
-              <a:rPr lang="en-US" dirty="0"/>
-              <a:t>Merk op: </a:t>
-            </a:r>
-            <a:r>
-              <a:rPr lang="en-US" dirty="0" err="1"/>
-              <a:t>nog</a:t>
-            </a:r>
-            <a:r>
-              <a:rPr lang="en-US" dirty="0"/>
-              <a:t> </a:t>
-            </a:r>
-            <a:r>
-              <a:rPr lang="en-US" dirty="0" err="1"/>
-              <a:t>geen</a:t>
-            </a:r>
-            <a:r>
-              <a:rPr lang="en-US" dirty="0"/>
-              <a:t> </a:t>
-            </a:r>
-            <a:r>
-              <a:rPr lang="en-US" dirty="0" err="1"/>
-              <a:t>venv</a:t>
-            </a:r>
-            <a:r>
-              <a:rPr lang="en-US" dirty="0"/>
-              <a:t> </a:t>
-            </a:r>
-            <a:r>
-              <a:rPr lang="en-US" dirty="0" err="1"/>
-              <a:t>opgezet</a:t>
-            </a:r>
-            <a:r>
-              <a:rPr lang="en-US" dirty="0"/>
-              <a:t>!</a:t>
-            </a:r>
+            <a:endParaRPr lang="en-US" dirty="0"/>
           </a:p>
         </p:txBody>
       </p:sp>
@@ -615,6 +581,125 @@
           <a:p>
             <a:fld id="{4BAF0DEA-1372-46C0-8FC9-2869E9CCF7DA}" type="slidenum">
               <a:rPr lang="en-NL" smtClean="0"/>
+              <a:t>6</a:t>
+            </a:fld>
+            <a:endParaRPr lang="en-NL"/>
+          </a:p>
+        </p:txBody>
+      </p:sp>
+    </p:spTree>
+    <p:extLst>
+      <p:ext uri="{BB962C8B-B14F-4D97-AF65-F5344CB8AC3E}">
+        <p14:creationId xmlns:p14="http://schemas.microsoft.com/office/powerpoint/2010/main" val="3707172576"/>
+      </p:ext>
+    </p:extLst>
+  </p:cSld>
+  <p:clrMapOvr>
+    <a:masterClrMapping/>
+  </p:clrMapOvr>
+</p:notes>
+</file>
+
+<file path=ppt/notesSlides/notesSlide2.xml><?xml version="1.0" encoding="utf-8"?>
+<p:notes xmlns:a="http://schemas.openxmlformats.org/drawingml/2006/main" xmlns:r="http://schemas.openxmlformats.org/officeDocument/2006/relationships" xmlns:p="http://schemas.openxmlformats.org/presentationml/2006/main">
+  <p:cSld>
+    <p:spTree>
+      <p:nvGrpSpPr>
+        <p:cNvPr id="1" name=""/>
+        <p:cNvGrpSpPr/>
+        <p:nvPr/>
+      </p:nvGrpSpPr>
+      <p:grpSpPr>
+        <a:xfrm>
+          <a:off x="0" y="0"/>
+          <a:ext cx="0" cy="0"/>
+          <a:chOff x="0" y="0"/>
+          <a:chExt cx="0" cy="0"/>
+        </a:xfrm>
+      </p:grpSpPr>
+      <p:sp>
+        <p:nvSpPr>
+          <p:cNvPr id="2" name="Slide Image Placeholder 1"/>
+          <p:cNvSpPr>
+            <a:spLocks noGrp="1" noRot="1" noChangeAspect="1"/>
+          </p:cNvSpPr>
+          <p:nvPr>
+            <p:ph type="sldImg"/>
+          </p:nvPr>
+        </p:nvSpPr>
+        <p:spPr/>
+      </p:sp>
+      <p:sp>
+        <p:nvSpPr>
+          <p:cNvPr id="3" name="Notes Placeholder 2"/>
+          <p:cNvSpPr>
+            <a:spLocks noGrp="1"/>
+          </p:cNvSpPr>
+          <p:nvPr>
+            <p:ph type="body" idx="1"/>
+          </p:nvPr>
+        </p:nvSpPr>
+        <p:spPr/>
+        <p:txBody>
+          <a:bodyPr/>
+          <a:lstStyle/>
+          <a:p>
+            <a:r>
+              <a:rPr lang="en-US" dirty="0"/>
+              <a:t>Merk op: </a:t>
+            </a:r>
+            <a:r>
+              <a:rPr lang="en-US" dirty="0" err="1"/>
+              <a:t>nog</a:t>
+            </a:r>
+            <a:r>
+              <a:rPr lang="en-US" dirty="0"/>
+              <a:t> </a:t>
+            </a:r>
+            <a:r>
+              <a:rPr lang="en-US" dirty="0" err="1"/>
+              <a:t>geen</a:t>
+            </a:r>
+            <a:r>
+              <a:rPr lang="en-US" dirty="0"/>
+              <a:t> </a:t>
+            </a:r>
+            <a:r>
+              <a:rPr lang="en-US" dirty="0" err="1"/>
+              <a:t>venv</a:t>
+            </a:r>
+            <a:r>
+              <a:rPr lang="en-US" dirty="0"/>
+              <a:t> </a:t>
+            </a:r>
+            <a:r>
+              <a:rPr lang="en-US" dirty="0" err="1"/>
+              <a:t>opgezet</a:t>
+            </a:r>
+            <a:r>
+              <a:rPr lang="en-US" dirty="0"/>
+              <a:t>!</a:t>
+            </a:r>
+          </a:p>
+        </p:txBody>
+      </p:sp>
+      <p:sp>
+        <p:nvSpPr>
+          <p:cNvPr id="4" name="Slide Number Placeholder 3"/>
+          <p:cNvSpPr>
+            <a:spLocks noGrp="1"/>
+          </p:cNvSpPr>
+          <p:nvPr>
+            <p:ph type="sldNum" sz="quarter" idx="5"/>
+          </p:nvPr>
+        </p:nvSpPr>
+        <p:spPr/>
+        <p:txBody>
+          <a:bodyPr/>
+          <a:lstStyle/>
+          <a:p>
+            <a:fld id="{4BAF0DEA-1372-46C0-8FC9-2869E9CCF7DA}" type="slidenum">
+              <a:rPr lang="en-NL" smtClean="0"/>
               <a:t>21</a:t>
             </a:fld>
             <a:endParaRPr lang="en-NL"/>
@@ -634,7 +719,115 @@
 </p:notes>
 </file>
 
-<file path=ppt/notesSlides/notesSlide2.xml><?xml version="1.0" encoding="utf-8"?>
+<file path=ppt/notesSlides/notesSlide3.xml><?xml version="1.0" encoding="utf-8"?>
+<p:notes xmlns:a="http://schemas.openxmlformats.org/drawingml/2006/main" xmlns:r="http://schemas.openxmlformats.org/officeDocument/2006/relationships" xmlns:p="http://schemas.openxmlformats.org/presentationml/2006/main">
+  <p:cSld>
+    <p:spTree>
+      <p:nvGrpSpPr>
+        <p:cNvPr id="1" name="">
+          <a:extLst>
+            <a:ext uri="{FF2B5EF4-FFF2-40B4-BE49-F238E27FC236}">
+              <a16:creationId xmlns:a16="http://schemas.microsoft.com/office/drawing/2014/main" id="{4F4F530C-C2F6-B25E-4513-23855E90845D}"/>
+            </a:ext>
+          </a:extLst>
+        </p:cNvPr>
+        <p:cNvGrpSpPr/>
+        <p:nvPr/>
+      </p:nvGrpSpPr>
+      <p:grpSpPr>
+        <a:xfrm>
+          <a:off x="0" y="0"/>
+          <a:ext cx="0" cy="0"/>
+          <a:chOff x="0" y="0"/>
+          <a:chExt cx="0" cy="0"/>
+        </a:xfrm>
+      </p:grpSpPr>
+      <p:sp>
+        <p:nvSpPr>
+          <p:cNvPr id="2" name="Slide Image Placeholder 1">
+            <a:extLst>
+              <a:ext uri="{FF2B5EF4-FFF2-40B4-BE49-F238E27FC236}">
+                <a16:creationId xmlns:a16="http://schemas.microsoft.com/office/drawing/2014/main" id="{A6E7F222-0A46-56B7-39CD-EF5D578A3C6A}"/>
+              </a:ext>
+            </a:extLst>
+          </p:cNvPr>
+          <p:cNvSpPr>
+            <a:spLocks noGrp="1" noRot="1" noChangeAspect="1"/>
+          </p:cNvSpPr>
+          <p:nvPr>
+            <p:ph type="sldImg"/>
+          </p:nvPr>
+        </p:nvSpPr>
+        <p:spPr/>
+      </p:sp>
+      <p:sp>
+        <p:nvSpPr>
+          <p:cNvPr id="3" name="Notes Placeholder 2">
+            <a:extLst>
+              <a:ext uri="{FF2B5EF4-FFF2-40B4-BE49-F238E27FC236}">
+                <a16:creationId xmlns:a16="http://schemas.microsoft.com/office/drawing/2014/main" id="{5503FDD4-1B7D-FCBB-6A37-915E1A25CBE5}"/>
+              </a:ext>
+            </a:extLst>
+          </p:cNvPr>
+          <p:cNvSpPr>
+            <a:spLocks noGrp="1"/>
+          </p:cNvSpPr>
+          <p:nvPr>
+            <p:ph type="body" idx="1"/>
+          </p:nvPr>
+        </p:nvSpPr>
+        <p:spPr/>
+        <p:txBody>
+          <a:bodyPr/>
+          <a:lstStyle/>
+          <a:p>
+            <a:endParaRPr lang="en-US" dirty="0"/>
+          </a:p>
+        </p:txBody>
+      </p:sp>
+      <p:sp>
+        <p:nvSpPr>
+          <p:cNvPr id="4" name="Slide Number Placeholder 3">
+            <a:extLst>
+              <a:ext uri="{FF2B5EF4-FFF2-40B4-BE49-F238E27FC236}">
+                <a16:creationId xmlns:a16="http://schemas.microsoft.com/office/drawing/2014/main" id="{5412505E-3F8B-EC2F-92D4-B962278F24DE}"/>
+              </a:ext>
+            </a:extLst>
+          </p:cNvPr>
+          <p:cNvSpPr>
+            <a:spLocks noGrp="1"/>
+          </p:cNvSpPr>
+          <p:nvPr>
+            <p:ph type="sldNum" sz="quarter" idx="5"/>
+          </p:nvPr>
+        </p:nvSpPr>
+        <p:spPr/>
+        <p:txBody>
+          <a:bodyPr/>
+          <a:lstStyle/>
+          <a:p>
+            <a:fld id="{4BAF0DEA-1372-46C0-8FC9-2869E9CCF7DA}" type="slidenum">
+              <a:rPr lang="en-NL" smtClean="0"/>
+              <a:t>22</a:t>
+            </a:fld>
+            <a:endParaRPr lang="en-NL"/>
+          </a:p>
+        </p:txBody>
+      </p:sp>
+    </p:spTree>
+    <p:extLst>
+      <p:ext uri="{BB962C8B-B14F-4D97-AF65-F5344CB8AC3E}">
+        <p14:creationId xmlns:p14="http://schemas.microsoft.com/office/powerpoint/2010/main" val="3068807663"/>
+      </p:ext>
+    </p:extLst>
+  </p:cSld>
+  <p:clrMapOvr>
+    <a:masterClrMapping/>
+  </p:clrMapOvr>
+</p:notes>
+</file>
+
+<file path=ppt/notesSlides/notesSlide4.xml><?xml version="1.0" encoding="utf-8"?>
 <p:notes xmlns:a="http://schemas.openxmlformats.org/drawingml/2006/main" xmlns:r="http://schemas.openxmlformats.org/officeDocument/2006/relationships" xmlns:p="http://schemas.openxmlformats.org/presentationml/2006/main">
   <p:cSld>
     <p:spTree>
@@ -723,7 +916,7 @@
           <a:p>
             <a:fld id="{4BAF0DEA-1372-46C0-8FC9-2869E9CCF7DA}" type="slidenum">
               <a:rPr lang="en-NL" smtClean="0"/>
-              <a:t>33</a:t>
+              <a:t>34</a:t>
             </a:fld>
             <a:endParaRPr lang="en-NL"/>
           </a:p>
@@ -742,7 +935,7 @@
 </p:notes>
 </file>
 
-<file path=ppt/notesSlides/notesSlide3.xml><?xml version="1.0" encoding="utf-8"?>
+<file path=ppt/notesSlides/notesSlide5.xml><?xml version="1.0" encoding="utf-8"?>
 <p:notes xmlns:a="http://schemas.openxmlformats.org/drawingml/2006/main" xmlns:r="http://schemas.openxmlformats.org/officeDocument/2006/relationships" xmlns:p="http://schemas.openxmlformats.org/presentationml/2006/main">
   <p:cSld>
     <p:spTree>
@@ -823,7 +1016,7 @@
           <a:p>
             <a:fld id="{4BAF0DEA-1372-46C0-8FC9-2869E9CCF7DA}" type="slidenum">
               <a:rPr lang="en-NL" smtClean="0"/>
-              <a:t>35</a:t>
+              <a:t>36</a:t>
             </a:fld>
             <a:endParaRPr lang="en-NL"/>
           </a:p>
@@ -842,7 +1035,7 @@
 </p:notes>
 </file>
 
-<file path=ppt/notesSlides/notesSlide4.xml><?xml version="1.0" encoding="utf-8"?>
+<file path=ppt/notesSlides/notesSlide6.xml><?xml version="1.0" encoding="utf-8"?>
 <p:notes xmlns:a="http://schemas.openxmlformats.org/drawingml/2006/main" xmlns:r="http://schemas.openxmlformats.org/officeDocument/2006/relationships" xmlns:p="http://schemas.openxmlformats.org/presentationml/2006/main">
   <p:cSld>
     <p:spTree>
@@ -931,7 +1124,7 @@
           <a:p>
             <a:fld id="{4BAF0DEA-1372-46C0-8FC9-2869E9CCF7DA}" type="slidenum">
               <a:rPr lang="en-NL" smtClean="0"/>
-              <a:t>38</a:t>
+              <a:t>39</a:t>
             </a:fld>
             <a:endParaRPr lang="en-NL"/>
           </a:p>
@@ -950,7 +1143,7 @@
 </p:notes>
 </file>
 
-<file path=ppt/notesSlides/notesSlide5.xml><?xml version="1.0" encoding="utf-8"?>
+<file path=ppt/notesSlides/notesSlide7.xml><?xml version="1.0" encoding="utf-8"?>
 <p:notes xmlns:a="http://schemas.openxmlformats.org/drawingml/2006/main" xmlns:r="http://schemas.openxmlformats.org/officeDocument/2006/relationships" xmlns:p="http://schemas.openxmlformats.org/presentationml/2006/main">
   <p:cSld>
     <p:spTree>
@@ -1061,7 +1254,7 @@
           <a:p>
             <a:fld id="{4BAF0DEA-1372-46C0-8FC9-2869E9CCF7DA}" type="slidenum">
               <a:rPr lang="en-NL" smtClean="0"/>
-              <a:t>39</a:t>
+              <a:t>40</a:t>
             </a:fld>
             <a:endParaRPr lang="en-NL"/>
           </a:p>
@@ -1080,7 +1273,7 @@
 </p:notes>
 </file>
 
-<file path=ppt/notesSlides/notesSlide6.xml><?xml version="1.0" encoding="utf-8"?>
+<file path=ppt/notesSlides/notesSlide8.xml><?xml version="1.0" encoding="utf-8"?>
 <p:notes xmlns:a="http://schemas.openxmlformats.org/drawingml/2006/main" xmlns:r="http://schemas.openxmlformats.org/officeDocument/2006/relationships" xmlns:p="http://schemas.openxmlformats.org/presentationml/2006/main">
   <p:cSld>
     <p:spTree>
@@ -1177,7 +1370,7 @@
           <a:p>
             <a:fld id="{4BAF0DEA-1372-46C0-8FC9-2869E9CCF7DA}" type="slidenum">
               <a:rPr lang="en-NL" smtClean="0"/>
-              <a:t>40</a:t>
+              <a:t>41</a:t>
             </a:fld>
             <a:endParaRPr lang="en-NL"/>
           </a:p>
@@ -1196,7 +1389,7 @@
 </p:notes>
 </file>
 
-<file path=ppt/notesSlides/notesSlide7.xml><?xml version="1.0" encoding="utf-8"?>
+<file path=ppt/notesSlides/notesSlide9.xml><?xml version="1.0" encoding="utf-8"?>
 <p:notes xmlns:a="http://schemas.openxmlformats.org/drawingml/2006/main" xmlns:r="http://schemas.openxmlformats.org/officeDocument/2006/relationships" xmlns:p="http://schemas.openxmlformats.org/presentationml/2006/main">
   <p:cSld>
     <p:spTree>
@@ -1261,7 +1454,7 @@
           <a:p>
             <a:fld id="{4BAF0DEA-1372-46C0-8FC9-2869E9CCF7DA}" type="slidenum">
               <a:rPr lang="en-NL" smtClean="0"/>
-              <a:t>48</a:t>
+              <a:t>49</a:t>
             </a:fld>
             <a:endParaRPr lang="en-NL"/>
           </a:p>
@@ -1429,7 +1622,7 @@
           <a:p>
             <a:fld id="{0EBB069A-003F-4FC0-8534-236B0C5C7B5F}" type="datetimeFigureOut">
               <a:rPr lang="en-NL" smtClean="0"/>
-              <a:t>24/09/2026</a:t>
+              <a:t>20/10/2026</a:t>
             </a:fld>
             <a:endParaRPr lang="en-NL"/>
           </a:p>
@@ -1629,7 +1822,7 @@
           <a:p>
             <a:fld id="{0EBB069A-003F-4FC0-8534-236B0C5C7B5F}" type="datetimeFigureOut">
               <a:rPr lang="en-NL" smtClean="0"/>
-              <a:t>24/09/2026</a:t>
+              <a:t>20/10/2026</a:t>
             </a:fld>
             <a:endParaRPr lang="en-NL"/>
           </a:p>
@@ -1839,7 +2032,7 @@
           <a:p>
             <a:fld id="{0EBB069A-003F-4FC0-8534-236B0C5C7B5F}" type="datetimeFigureOut">
               <a:rPr lang="en-NL" smtClean="0"/>
-              <a:t>24/09/2026</a:t>
+              <a:t>20/10/2026</a:t>
             </a:fld>
             <a:endParaRPr lang="en-NL"/>
           </a:p>
@@ -2039,7 +2232,7 @@
           <a:p>
             <a:fld id="{0EBB069A-003F-4FC0-8534-236B0C5C7B5F}" type="datetimeFigureOut">
               <a:rPr lang="en-NL" smtClean="0"/>
-              <a:t>24/09/2026</a:t>
+              <a:t>20/10/2026</a:t>
             </a:fld>
             <a:endParaRPr lang="en-NL"/>
           </a:p>
@@ -2315,7 +2508,7 @@
           <a:p>
             <a:fld id="{0EBB069A-003F-4FC0-8534-236B0C5C7B5F}" type="datetimeFigureOut">
               <a:rPr lang="en-NL" smtClean="0"/>
-              <a:t>24/09/2026</a:t>
+              <a:t>20/10/2026</a:t>
             </a:fld>
             <a:endParaRPr lang="en-NL"/>
           </a:p>
@@ -2583,7 +2776,7 @@
           <a:p>
             <a:fld id="{0EBB069A-003F-4FC0-8534-236B0C5C7B5F}" type="datetimeFigureOut">
               <a:rPr lang="en-NL" smtClean="0"/>
-              <a:t>24/09/2026</a:t>
+              <a:t>20/10/2026</a:t>
             </a:fld>
             <a:endParaRPr lang="en-NL"/>
           </a:p>
@@ -2998,7 +3191,7 @@
           <a:p>
             <a:fld id="{0EBB069A-003F-4FC0-8534-236B0C5C7B5F}" type="datetimeFigureOut">
               <a:rPr lang="en-NL" smtClean="0"/>
-              <a:t>24/09/2026</a:t>
+              <a:t>20/10/2026</a:t>
             </a:fld>
             <a:endParaRPr lang="en-NL"/>
           </a:p>
@@ -3140,7 +3333,7 @@
           <a:p>
             <a:fld id="{0EBB069A-003F-4FC0-8534-236B0C5C7B5F}" type="datetimeFigureOut">
               <a:rPr lang="en-NL" smtClean="0"/>
-              <a:t>24/09/2026</a:t>
+              <a:t>20/10/2026</a:t>
             </a:fld>
             <a:endParaRPr lang="en-NL"/>
           </a:p>
@@ -3253,7 +3446,7 @@
           <a:p>
             <a:fld id="{0EBB069A-003F-4FC0-8534-236B0C5C7B5F}" type="datetimeFigureOut">
               <a:rPr lang="en-NL" smtClean="0"/>
-              <a:t>24/09/2026</a:t>
+              <a:t>20/10/2026</a:t>
             </a:fld>
             <a:endParaRPr lang="en-NL"/>
           </a:p>
@@ -3566,7 +3759,7 @@
           <a:p>
             <a:fld id="{0EBB069A-003F-4FC0-8534-236B0C5C7B5F}" type="datetimeFigureOut">
               <a:rPr lang="en-NL" smtClean="0"/>
-              <a:t>24/09/2026</a:t>
+              <a:t>20/10/2026</a:t>
             </a:fld>
             <a:endParaRPr lang="en-NL"/>
           </a:p>
@@ -3855,7 +4048,7 @@
           <a:p>
             <a:fld id="{0EBB069A-003F-4FC0-8534-236B0C5C7B5F}" type="datetimeFigureOut">
               <a:rPr lang="en-NL" smtClean="0"/>
-              <a:t>24/09/2026</a:t>
+              <a:t>20/10/2026</a:t>
             </a:fld>
             <a:endParaRPr lang="en-NL"/>
           </a:p>
@@ -4098,7 +4291,7 @@
           <a:p>
             <a:fld id="{0EBB069A-003F-4FC0-8534-236B0C5C7B5F}" type="datetimeFigureOut">
               <a:rPr lang="en-NL" smtClean="0"/>
-              <a:t>24/09/2026</a:t>
+              <a:t>20/10/2026</a:t>
             </a:fld>
             <a:endParaRPr lang="en-NL"/>
           </a:p>
@@ -4683,7 +4876,7 @@
             </a:r>
             <a:r>
               <a:rPr lang="nl-NL" sz="1800" b="1" noProof="0" dirty="0"/>
-              <a:t>: download package</a:t>
+              <a:t>: zoek en download package</a:t>
             </a:r>
           </a:p>
           <a:p>
@@ -4694,7 +4887,7 @@
               <a:rPr lang="nl-NL" sz="1800" noProof="0" dirty="0">
                 <a:cs typeface="Courier New" panose="02070309020205020404" pitchFamily="49" charset="0"/>
               </a:rPr>
-              <a:t>Download code van de Python Package Index (</a:t>
+              <a:t>Zoek en download code van een index server, zoals de Python Package Index (</a:t>
             </a:r>
             <a:r>
               <a:rPr lang="nl-NL" sz="1800" noProof="0" dirty="0" err="1">
@@ -5738,7 +5931,7 @@
             </a:pPr>
             <a:r>
               <a:rPr lang="nl-NL" sz="2000" dirty="0"/>
-              <a:t>Packages zijn bouwstenen die je kunt gebruiken in je eigen code door ze te importeren.</a:t>
+              <a:t>Packages importeer je in je eigen code, zodat hun functionaliteit beschikbaar komt.</a:t>
             </a:r>
           </a:p>
           <a:p>
@@ -5851,20 +6044,8 @@
             </a:pPr>
             <a:r>
               <a:rPr lang="nl-NL" sz="2000" dirty="0"/>
-              <a:t>Daarna doorzoekt Python de standaard bibliotheek:</a:t>
-            </a:r>
-          </a:p>
-          <a:p>
-            <a:pPr marL="0" indent="0">
-              <a:buNone/>
-            </a:pPr>
-            <a:r>
-              <a:rPr lang="nl-NL" sz="2000" dirty="0">
-                <a:hlinkClick r:id="rId2"/>
-              </a:rPr>
-              <a:t>https://docs.python.org/3.9/library/</a:t>
-            </a:r>
-            <a:endParaRPr lang="nl-NL" sz="2000" dirty="0"/>
+              <a:t>Daarna doorzoekt Python de standaard bibliotheek.</a:t>
+            </a:r>
           </a:p>
         </p:txBody>
       </p:sp>
@@ -5901,7 +6082,7 @@
             </a:pPr>
             <a:r>
               <a:rPr lang="nl-NL" sz="2000" dirty="0"/>
-              <a:t>Eerst doorzoekt Python huidige directory (werk directory).</a:t>
+              <a:t>Eerst doorzoekt Python de werkdirectory.</a:t>
             </a:r>
           </a:p>
         </p:txBody>
@@ -5966,7 +6147,7 @@
           <a:p>
             <a:r>
               <a:rPr lang="nl-NL" sz="3600" noProof="0" dirty="0"/>
-              <a:t>Conflicterende packages</a:t>
+              <a:t>Conflicterende versies</a:t>
             </a:r>
           </a:p>
         </p:txBody>
@@ -6701,7 +6882,15 @@
             </a:pPr>
             <a:r>
               <a:rPr lang="nl-NL" sz="2000" dirty="0"/>
-              <a:t>Helpt bij opzetten van projecten inclusief afhankelijkheden.</a:t>
+              <a:t>Helpt bij opzetten van projecten en </a:t>
+            </a:r>
+            <a:r>
+              <a:rPr lang="nl-NL" sz="2000" dirty="0" err="1"/>
+              <a:t>beher</a:t>
+            </a:r>
+            <a:r>
+              <a:rPr lang="nl-NL" sz="2000" dirty="0"/>
+              <a:t> van afhankelijkheden.</a:t>
             </a:r>
             <a:endParaRPr lang="nl-NL" sz="2000" noProof="0" dirty="0"/>
           </a:p>
@@ -7354,7 +7543,7 @@
             </a:pPr>
             <a:r>
               <a:rPr lang="nl-NL" sz="2000" dirty="0"/>
-              <a:t>Installeren packages:</a:t>
+              <a:t>Packages installeren in de omgeving:</a:t>
             </a:r>
           </a:p>
           <a:p>
@@ -8091,7 +8280,7 @@
             </a:pPr>
             <a:r>
               <a:rPr lang="nl-NL" sz="2000" dirty="0"/>
-              <a:t>Maak hierin een nieuwe virtuele omgeving met Python 3.13.</a:t>
+              <a:t>Maak hierin een virtuele omgeving aan met Python versie 3.13.</a:t>
             </a:r>
           </a:p>
           <a:p>
@@ -8106,7 +8295,33 @@
             </a:pPr>
             <a:r>
               <a:rPr lang="nl-NL" sz="2000" dirty="0"/>
-              <a:t>Installeer het package </a:t>
+              <a:t>Installeer het </a:t>
+            </a:r>
+            <a:r>
+              <a:rPr lang="nl-NL" sz="2000" dirty="0" err="1">
+                <a:latin typeface="Courier New" panose="02070309020205020404" pitchFamily="49" charset="0"/>
+                <a:cs typeface="Courier New" panose="02070309020205020404" pitchFamily="49" charset="0"/>
+              </a:rPr>
+              <a:t>marimo</a:t>
+            </a:r>
+            <a:r>
+              <a:rPr lang="nl-NL" sz="2000" dirty="0"/>
+              <a:t> package in de virtuele omgeving.</a:t>
+            </a:r>
+          </a:p>
+          <a:p>
+            <a:pPr marL="457200" indent="-457200">
+              <a:buAutoNum type="arabicPeriod"/>
+            </a:pPr>
+            <a:endParaRPr lang="nl-NL" sz="2000" dirty="0"/>
+          </a:p>
+          <a:p>
+            <a:pPr marL="457200" indent="-457200">
+              <a:buAutoNum type="arabicPeriod"/>
+            </a:pPr>
+            <a:r>
+              <a:rPr lang="nl-NL" sz="2000" dirty="0"/>
+              <a:t>Start </a:t>
             </a:r>
             <a:r>
               <a:rPr lang="nl-NL" sz="2000" dirty="0" err="1"/>
@@ -8114,30 +8329,65 @@
             </a:r>
             <a:r>
               <a:rPr lang="nl-NL" sz="2000" dirty="0"/>
-              <a:t> in de virtuele omgeving.</a:t>
-            </a:r>
-          </a:p>
-          <a:p>
-            <a:pPr marL="457200" indent="-457200">
-              <a:buAutoNum type="arabicPeriod"/>
-            </a:pPr>
-            <a:endParaRPr lang="nl-NL" sz="2000" dirty="0"/>
-          </a:p>
-          <a:p>
-            <a:pPr marL="457200" indent="-457200">
-              <a:buAutoNum type="arabicPeriod"/>
-            </a:pPr>
+              <a:t> op in de virtuele omgeving:</a:t>
+            </a:r>
+          </a:p>
+          <a:p>
+            <a:pPr marL="0" indent="0">
+              <a:buNone/>
+            </a:pPr>
+            <a:r>
+              <a:rPr lang="nl-NL" sz="2000" dirty="0">
+                <a:latin typeface="Courier New" panose="02070309020205020404" pitchFamily="49" charset="0"/>
+                <a:cs typeface="Courier New" panose="02070309020205020404" pitchFamily="49" charset="0"/>
+              </a:rPr>
+              <a:t>   </a:t>
+            </a:r>
+            <a:r>
+              <a:rPr lang="nl-NL" sz="2000" dirty="0" err="1">
+                <a:latin typeface="Courier New" panose="02070309020205020404" pitchFamily="49" charset="0"/>
+                <a:cs typeface="Courier New" panose="02070309020205020404" pitchFamily="49" charset="0"/>
+              </a:rPr>
+              <a:t>uv</a:t>
+            </a:r>
+            <a:r>
+              <a:rPr lang="nl-NL" sz="2000" dirty="0">
+                <a:latin typeface="Courier New" panose="02070309020205020404" pitchFamily="49" charset="0"/>
+                <a:cs typeface="Courier New" panose="02070309020205020404" pitchFamily="49" charset="0"/>
+              </a:rPr>
+              <a:t> run </a:t>
+            </a:r>
+            <a:r>
+              <a:rPr lang="nl-NL" sz="2000" dirty="0" err="1">
+                <a:latin typeface="Courier New" panose="02070309020205020404" pitchFamily="49" charset="0"/>
+                <a:cs typeface="Courier New" panose="02070309020205020404" pitchFamily="49" charset="0"/>
+              </a:rPr>
+              <a:t>marimo</a:t>
+            </a:r>
+            <a:r>
+              <a:rPr lang="nl-NL" sz="2000" dirty="0">
+                <a:latin typeface="Courier New" panose="02070309020205020404" pitchFamily="49" charset="0"/>
+                <a:cs typeface="Courier New" panose="02070309020205020404" pitchFamily="49" charset="0"/>
+              </a:rPr>
+              <a:t> </a:t>
+            </a:r>
+            <a:r>
+              <a:rPr lang="nl-NL" sz="2000" dirty="0" err="1">
+                <a:latin typeface="Courier New" panose="02070309020205020404" pitchFamily="49" charset="0"/>
+                <a:cs typeface="Courier New" panose="02070309020205020404" pitchFamily="49" charset="0"/>
+              </a:rPr>
+              <a:t>edit</a:t>
+            </a:r>
+            <a:r>
+              <a:rPr lang="nl-NL" sz="2000" dirty="0">
+                <a:latin typeface="Courier New" panose="02070309020205020404" pitchFamily="49" charset="0"/>
+                <a:cs typeface="Courier New" panose="02070309020205020404" pitchFamily="49" charset="0"/>
+              </a:rPr>
+              <a:t> notebook.py</a:t>
+            </a:r>
             <a:r>
               <a:rPr lang="nl-NL" sz="2000" dirty="0"/>
-              <a:t>Start </a:t>
-            </a:r>
-            <a:r>
-              <a:rPr lang="nl-NL" sz="2000" dirty="0" err="1"/>
-              <a:t>marimo</a:t>
-            </a:r>
-            <a:r>
-              <a:rPr lang="nl-NL" sz="2000" dirty="0"/>
-              <a:t> op binnen de virtuele omgeving.</a:t>
+              <a:t>.</a:t>
             </a:r>
           </a:p>
           <a:p>
@@ -8276,7 +8526,15 @@
             </a:pPr>
             <a:r>
               <a:rPr lang="nl-NL" sz="2000" dirty="0"/>
-              <a:t>Het beheer van virtuele omgevingen op deze manier werkt voor persoonlijke experimenten.</a:t>
+              <a:t>Het beheer van virtuele omgevingen op deze manier is </a:t>
+            </a:r>
+            <a:r>
+              <a:rPr lang="nl-NL" sz="2000" dirty="0" err="1"/>
+              <a:t>geschickt</a:t>
+            </a:r>
+            <a:r>
+              <a:rPr lang="nl-NL" sz="2000" dirty="0"/>
+              <a:t> voor experimenten…</a:t>
             </a:r>
           </a:p>
           <a:p>
@@ -8443,6 +8701,19 @@
           </a:bodyPr>
           <a:lstStyle/>
           <a:p>
+            <a:pPr marL="0" indent="0">
+              <a:spcAft>
+                <a:spcPts val="600"/>
+              </a:spcAft>
+              <a:buNone/>
+            </a:pPr>
+            <a:r>
+              <a:rPr lang="nl-NL" sz="2000" noProof="0" dirty="0"/>
+              <a:t>Python</a:t>
+            </a:r>
+            <a:endParaRPr lang="nl-NL" sz="2000" dirty="0"/>
+          </a:p>
+          <a:p>
             <a:pPr>
               <a:spcAft>
                 <a:spcPts val="600"/>
@@ -8450,43 +8721,8 @@
             </a:pPr>
             <a:r>
               <a:rPr lang="nl-NL" sz="2000" noProof="0" dirty="0"/>
-              <a:t>Python</a:t>
-            </a:r>
-            <a:endParaRPr lang="nl-NL" sz="2000" dirty="0"/>
-          </a:p>
-          <a:p>
-            <a:pPr lvl="1">
-              <a:spcAft>
-                <a:spcPts val="600"/>
-              </a:spcAft>
-            </a:pPr>
-            <a:r>
-              <a:rPr lang="nl-NL" sz="1600" noProof="0" dirty="0"/>
               <a:t>Hoe werkt Python?</a:t>
             </a:r>
-          </a:p>
-          <a:p>
-            <a:pPr lvl="1">
-              <a:spcAft>
-                <a:spcPts val="600"/>
-              </a:spcAft>
-            </a:pPr>
-            <a:r>
-              <a:rPr lang="nl-NL" sz="1600" noProof="0" dirty="0"/>
-              <a:t>Virtuele omgevingen</a:t>
-            </a:r>
-          </a:p>
-          <a:p>
-            <a:pPr lvl="1">
-              <a:spcAft>
-                <a:spcPts val="600"/>
-              </a:spcAft>
-            </a:pPr>
-            <a:r>
-              <a:rPr lang="nl-NL" sz="1600" dirty="0"/>
-              <a:t>Projecten en packages</a:t>
-            </a:r>
-            <a:endParaRPr lang="nl-NL" sz="1600" noProof="0" dirty="0"/>
           </a:p>
           <a:p>
             <a:pPr>
@@ -8495,37 +8731,70 @@
               </a:spcAft>
             </a:pPr>
             <a:r>
-              <a:rPr lang="nl-NL" sz="2000" noProof="0" dirty="0" err="1"/>
-              <a:t>IDE's</a:t>
-            </a:r>
-            <a:endParaRPr lang="nl-NL" sz="1600" dirty="0"/>
-          </a:p>
-          <a:p>
-            <a:pPr lvl="1">
+              <a:rPr lang="nl-NL" sz="2000" noProof="0" dirty="0"/>
+              <a:t>Virtuele omgevingen</a:t>
+            </a:r>
+          </a:p>
+          <a:p>
+            <a:pPr>
               <a:spcAft>
                 <a:spcPts val="600"/>
               </a:spcAft>
             </a:pPr>
             <a:r>
-              <a:rPr lang="nl-NL" sz="1600" noProof="0" dirty="0" err="1"/>
-              <a:t>Marimo</a:t>
-            </a:r>
-            <a:r>
-              <a:rPr lang="nl-NL" sz="1600" noProof="0" dirty="0"/>
-              <a:t> Notebook</a:t>
-            </a:r>
-          </a:p>
-          <a:p>
-            <a:pPr lvl="1">
+              <a:rPr lang="nl-NL" sz="2000" dirty="0"/>
+              <a:t>Projecten en packages</a:t>
+            </a:r>
+            <a:endParaRPr lang="nl-NL" sz="2000" noProof="0" dirty="0"/>
+          </a:p>
+          <a:p>
+            <a:pPr marL="0" indent="0">
               <a:spcAft>
                 <a:spcPts val="600"/>
               </a:spcAft>
-            </a:pPr>
-            <a:r>
-              <a:rPr lang="nl-NL" sz="1600" dirty="0"/>
+              <a:buNone/>
+            </a:pPr>
+            <a:endParaRPr lang="nl-NL" sz="2000" noProof="0" dirty="0"/>
+          </a:p>
+          <a:p>
+            <a:pPr marL="0" indent="0">
+              <a:spcAft>
+                <a:spcPts val="600"/>
+              </a:spcAft>
+              <a:buNone/>
+            </a:pPr>
+            <a:r>
+              <a:rPr lang="nl-NL" sz="2000" noProof="0" dirty="0" err="1"/>
+              <a:t>IDE's</a:t>
+            </a:r>
+            <a:endParaRPr lang="nl-NL" sz="1600" dirty="0"/>
+          </a:p>
+          <a:p>
+            <a:pPr>
+              <a:spcAft>
+                <a:spcPts val="600"/>
+              </a:spcAft>
+            </a:pPr>
+            <a:r>
+              <a:rPr lang="nl-NL" sz="2000" noProof="0" dirty="0" err="1"/>
+              <a:t>Marimo</a:t>
+            </a:r>
+            <a:r>
+              <a:rPr lang="nl-NL" sz="2000" noProof="0" dirty="0"/>
+              <a:t> Notebook</a:t>
+            </a:r>
+          </a:p>
+          <a:p>
+            <a:pPr>
+              <a:spcAft>
+                <a:spcPts val="600"/>
+              </a:spcAft>
+            </a:pPr>
+            <a:r>
+              <a:rPr lang="nl-NL" sz="2000" dirty="0"/>
               <a:t>Visual Studio Code</a:t>
             </a:r>
-            <a:endParaRPr lang="nl-NL" sz="1600" noProof="0" dirty="0"/>
+            <a:endParaRPr lang="nl-NL" sz="2000" noProof="0" dirty="0"/>
           </a:p>
         </p:txBody>
       </p:sp>
@@ -8743,7 +9012,7 @@
         </p:spPr>
         <p:txBody>
           <a:bodyPr>
-            <a:normAutofit lnSpcReduction="10000"/>
+            <a:normAutofit fontScale="92500" lnSpcReduction="10000"/>
           </a:bodyPr>
           <a:lstStyle/>
           <a:p>
@@ -8793,6 +9062,96 @@
                 <a:cs typeface="Courier New" panose="02070309020205020404" pitchFamily="49" charset="0"/>
               </a:rPr>
               <a:t>init</a:t>
+            </a:r>
+            <a:r>
+              <a:rPr lang="nl-NL" sz="2000" dirty="0">
+                <a:latin typeface="Courier New" panose="02070309020205020404" pitchFamily="49" charset="0"/>
+                <a:cs typeface="Courier New" panose="02070309020205020404" pitchFamily="49" charset="0"/>
+              </a:rPr>
+              <a:t> --no-package</a:t>
+            </a:r>
+          </a:p>
+          <a:p>
+            <a:pPr marL="0" indent="0">
+              <a:buNone/>
+            </a:pPr>
+            <a:r>
+              <a:rPr lang="nl-NL" sz="2000" dirty="0">
+                <a:latin typeface="Courier New" panose="02070309020205020404" pitchFamily="49" charset="0"/>
+                <a:cs typeface="Courier New" panose="02070309020205020404" pitchFamily="49" charset="0"/>
+              </a:rPr>
+              <a:t>  &lt;f</a:t>
+            </a:r>
+            <a:r>
+              <a:rPr lang="nl-NL" sz="2000" noProof="0" dirty="0" err="1">
+                <a:latin typeface="Courier New" panose="02070309020205020404" pitchFamily="49" charset="0"/>
+                <a:cs typeface="Courier New" panose="02070309020205020404" pitchFamily="49" charset="0"/>
+              </a:rPr>
+              <a:t>older</a:t>
+            </a:r>
+            <a:r>
+              <a:rPr lang="nl-NL" sz="2000" noProof="0" dirty="0">
+                <a:latin typeface="Courier New" panose="02070309020205020404" pitchFamily="49" charset="0"/>
+                <a:cs typeface="Courier New" panose="02070309020205020404" pitchFamily="49" charset="0"/>
+              </a:rPr>
+              <a:t>&gt;</a:t>
+            </a:r>
+          </a:p>
+          <a:p>
+            <a:pPr marL="0" indent="0">
+              <a:buNone/>
+            </a:pPr>
+            <a:r>
+              <a:rPr lang="nl-NL" sz="2000" dirty="0">
+                <a:latin typeface="Courier New" panose="02070309020205020404" pitchFamily="49" charset="0"/>
+                <a:cs typeface="Courier New" panose="02070309020205020404" pitchFamily="49" charset="0"/>
+              </a:rPr>
+              <a:t>  &lt;--python=3.13&gt;</a:t>
+            </a:r>
+          </a:p>
+          <a:p>
+            <a:pPr marL="0" indent="0">
+              <a:buNone/>
+            </a:pPr>
+            <a:endParaRPr lang="nl-NL" sz="2000" dirty="0"/>
+          </a:p>
+          <a:p>
+            <a:pPr marL="0" indent="0">
+              <a:buNone/>
+            </a:pPr>
+            <a:r>
+              <a:rPr lang="nl-NL" sz="2000" dirty="0"/>
+              <a:t>Maakt het volgende aan:</a:t>
+            </a:r>
+          </a:p>
+          <a:p>
+            <a:pPr marL="0" indent="0">
+              <a:buNone/>
+            </a:pPr>
+            <a:endParaRPr lang="nl-NL" sz="2000" dirty="0"/>
+          </a:p>
+          <a:p>
+            <a:pPr>
+              <a:buFontTx/>
+              <a:buChar char="-"/>
+            </a:pPr>
+            <a:r>
+              <a:rPr lang="nl-NL" sz="2000" dirty="0"/>
+              <a:t>Git repository en </a:t>
+            </a:r>
+            <a:r>
+              <a:rPr lang="nl-NL" sz="2000" dirty="0">
+                <a:latin typeface="Courier New" panose="02070309020205020404" pitchFamily="49" charset="0"/>
+                <a:cs typeface="Courier New" panose="02070309020205020404" pitchFamily="49" charset="0"/>
+              </a:rPr>
+              <a:t>.</a:t>
+            </a:r>
+            <a:r>
+              <a:rPr lang="nl-NL" sz="2000" dirty="0" err="1">
+                <a:latin typeface="Courier New" panose="02070309020205020404" pitchFamily="49" charset="0"/>
+                <a:cs typeface="Courier New" panose="02070309020205020404" pitchFamily="49" charset="0"/>
+              </a:rPr>
+              <a:t>gitignore</a:t>
             </a:r>
             <a:endParaRPr lang="nl-NL" sz="2000" dirty="0">
               <a:latin typeface="Courier New" panose="02070309020205020404" pitchFamily="49" charset="0"/>
@@ -8800,67 +9159,13 @@
             </a:endParaRPr>
           </a:p>
           <a:p>
-            <a:pPr marL="0" indent="0">
-              <a:buNone/>
-            </a:pPr>
-            <a:r>
-              <a:rPr lang="nl-NL" sz="2000" dirty="0">
-                <a:latin typeface="Courier New" panose="02070309020205020404" pitchFamily="49" charset="0"/>
-                <a:cs typeface="Courier New" panose="02070309020205020404" pitchFamily="49" charset="0"/>
-              </a:rPr>
-              <a:t>u</a:t>
-            </a:r>
-            <a:r>
-              <a:rPr lang="nl-NL" sz="2000" noProof="0" dirty="0">
-                <a:latin typeface="Courier New" panose="02070309020205020404" pitchFamily="49" charset="0"/>
-                <a:cs typeface="Courier New" panose="02070309020205020404" pitchFamily="49" charset="0"/>
-              </a:rPr>
-              <a:t>v </a:t>
-            </a:r>
-            <a:r>
-              <a:rPr lang="nl-NL" sz="2000" noProof="0" dirty="0" err="1">
-                <a:latin typeface="Courier New" panose="02070309020205020404" pitchFamily="49" charset="0"/>
-                <a:cs typeface="Courier New" panose="02070309020205020404" pitchFamily="49" charset="0"/>
-              </a:rPr>
-              <a:t>init</a:t>
-            </a:r>
-            <a:r>
-              <a:rPr lang="nl-NL" sz="2000" noProof="0" dirty="0">
-                <a:latin typeface="Courier New" panose="02070309020205020404" pitchFamily="49" charset="0"/>
-                <a:cs typeface="Courier New" panose="02070309020205020404" pitchFamily="49" charset="0"/>
-              </a:rPr>
-              <a:t> &lt;project folder&gt;</a:t>
-            </a:r>
-          </a:p>
-          <a:p>
-            <a:pPr marL="0" indent="0">
-              <a:buNone/>
-            </a:pPr>
-            <a:endParaRPr lang="nl-NL" sz="2000" dirty="0"/>
-          </a:p>
-          <a:p>
-            <a:pPr marL="0" indent="0">
-              <a:buNone/>
-            </a:pPr>
-            <a:r>
-              <a:rPr lang="nl-NL" sz="2000" dirty="0"/>
-              <a:t>Maakt het volgende aan:</a:t>
-            </a:r>
-          </a:p>
-          <a:p>
-            <a:pPr marL="0" indent="0">
-              <a:buNone/>
-            </a:pPr>
-            <a:endParaRPr lang="nl-NL" sz="2000" dirty="0"/>
-          </a:p>
-          <a:p>
             <a:pPr>
               <a:buFontTx/>
               <a:buChar char="-"/>
             </a:pPr>
             <a:r>
               <a:rPr lang="nl-NL" sz="2000" dirty="0"/>
-              <a:t>git repository</a:t>
+              <a:t>Python versie bestand</a:t>
             </a:r>
           </a:p>
           <a:p>
@@ -8870,8 +9175,16 @@
             </a:pPr>
             <a:r>
               <a:rPr lang="nl-NL" sz="2000" dirty="0"/>
-              <a:t>python versie bestand</a:t>
-            </a:r>
+              <a:t>Voorbeeld </a:t>
+            </a:r>
+            <a:r>
+              <a:rPr lang="nl-NL" sz="2000" dirty="0">
+                <a:latin typeface="Courier New" panose="02070309020205020404" pitchFamily="49" charset="0"/>
+                <a:cs typeface="Courier New" panose="02070309020205020404" pitchFamily="49" charset="0"/>
+              </a:rPr>
+              <a:t>main.py</a:t>
+            </a:r>
+            <a:endParaRPr lang="nl-NL" sz="2000" dirty="0"/>
           </a:p>
           <a:p>
             <a:pPr>
@@ -8880,8 +9193,19 @@
             </a:pPr>
             <a:r>
               <a:rPr lang="nl-NL" sz="2000" dirty="0"/>
-              <a:t>lege main.py </a:t>
-            </a:r>
+              <a:t>Setup bestand: </a:t>
+            </a:r>
+            <a:r>
+              <a:rPr lang="nl-NL" sz="2000" dirty="0" err="1">
+                <a:latin typeface="Courier New" panose="02070309020205020404" pitchFamily="49" charset="0"/>
+                <a:cs typeface="Courier New" panose="02070309020205020404" pitchFamily="49" charset="0"/>
+              </a:rPr>
+              <a:t>pyproject.toml</a:t>
+            </a:r>
+            <a:endParaRPr lang="nl-NL" sz="2000" dirty="0">
+              <a:latin typeface="Courier New" panose="02070309020205020404" pitchFamily="49" charset="0"/>
+              <a:cs typeface="Courier New" panose="02070309020205020404" pitchFamily="49" charset="0"/>
+            </a:endParaRPr>
           </a:p>
           <a:p>
             <a:pPr>
@@ -8889,18 +9213,14 @@
               <a:buChar char="-"/>
             </a:pPr>
             <a:r>
-              <a:rPr lang="nl-NL" sz="2000" dirty="0" err="1"/>
-              <a:t>pyproject.toml</a:t>
-            </a:r>
-            <a:endParaRPr lang="nl-NL" sz="2000" dirty="0"/>
-          </a:p>
-          <a:p>
-            <a:pPr>
-              <a:buFontTx/>
-              <a:buChar char="-"/>
-            </a:pPr>
-            <a:r>
               <a:rPr lang="nl-NL" sz="2000" dirty="0"/>
+              <a:t>Documentatie: </a:t>
+            </a:r>
+            <a:r>
+              <a:rPr lang="nl-NL" sz="2000" dirty="0">
+                <a:latin typeface="Courier New" panose="02070309020205020404" pitchFamily="49" charset="0"/>
+                <a:cs typeface="Courier New" panose="02070309020205020404" pitchFamily="49" charset="0"/>
+              </a:rPr>
               <a:t>README.md</a:t>
             </a:r>
           </a:p>
@@ -9258,14 +9578,7 @@
                 <a:latin typeface="Courier New" panose="02070309020205020404" pitchFamily="49" charset="0"/>
                 <a:cs typeface="Courier New" panose="02070309020205020404" pitchFamily="49" charset="0"/>
               </a:rPr>
-              <a:t>├─ </a:t>
-            </a:r>
-            <a:r>
-              <a:rPr lang="nl-NL" sz="2000" b="1" dirty="0">
-                <a:latin typeface="Courier New" panose="02070309020205020404" pitchFamily="49" charset="0"/>
-                <a:cs typeface="Courier New" panose="02070309020205020404" pitchFamily="49" charset="0"/>
-              </a:rPr>
-              <a:t>main.py</a:t>
+              <a:t>├─ main.py</a:t>
             </a:r>
           </a:p>
           <a:p>
@@ -9363,7 +9676,7 @@
         <p:cNvPr id="1" name="">
           <a:extLst>
             <a:ext uri="{FF2B5EF4-FFF2-40B4-BE49-F238E27FC236}">
-              <a16:creationId xmlns:a16="http://schemas.microsoft.com/office/drawing/2014/main" id="{FB8C61F3-236A-370D-17B6-9388E56B0CFA}"/>
+              <a16:creationId xmlns:a16="http://schemas.microsoft.com/office/drawing/2014/main" id="{21E071EF-C544-E572-57F7-3D0622F8BFAB}"/>
             </a:ext>
           </a:extLst>
         </p:cNvPr>
@@ -9383,7 +9696,7 @@
           <p:cNvPr id="2" name="Title 1">
             <a:extLst>
               <a:ext uri="{FF2B5EF4-FFF2-40B4-BE49-F238E27FC236}">
-                <a16:creationId xmlns:a16="http://schemas.microsoft.com/office/drawing/2014/main" id="{048A7D01-B72D-4884-4E41-5EECA5F16DCA}"/>
+                <a16:creationId xmlns:a16="http://schemas.microsoft.com/office/drawing/2014/main" id="{D1B9E56E-10CB-09BD-E405-0971E808698A}"/>
               </a:ext>
             </a:extLst>
           </p:cNvPr>
@@ -9418,7 +9731,7 @@
           <p:cNvPr id="3" name="Content Placeholder 2">
             <a:extLst>
               <a:ext uri="{FF2B5EF4-FFF2-40B4-BE49-F238E27FC236}">
-                <a16:creationId xmlns:a16="http://schemas.microsoft.com/office/drawing/2014/main" id="{28B9E4E0-BE6B-C82A-1C3F-3479FA7F2274}"/>
+                <a16:creationId xmlns:a16="http://schemas.microsoft.com/office/drawing/2014/main" id="{08213EB8-92CF-373A-C187-DB8E9C7A1BBD}"/>
               </a:ext>
             </a:extLst>
           </p:cNvPr>
@@ -9437,7 +9750,7 @@
         </p:spPr>
         <p:txBody>
           <a:bodyPr>
-            <a:normAutofit fontScale="92500" lnSpcReduction="10000"/>
+            <a:normAutofit/>
           </a:bodyPr>
           <a:lstStyle/>
           <a:p>
@@ -9488,90 +9801,62 @@
               </a:rPr>
               <a:t>init</a:t>
             </a:r>
-            <a:endParaRPr lang="nl-NL" sz="2000" dirty="0">
-              <a:latin typeface="Courier New" panose="02070309020205020404" pitchFamily="49" charset="0"/>
-              <a:cs typeface="Courier New" panose="02070309020205020404" pitchFamily="49" charset="0"/>
-            </a:endParaRPr>
-          </a:p>
-          <a:p>
-            <a:pPr marL="0" indent="0">
-              <a:buNone/>
-            </a:pPr>
             <a:r>
               <a:rPr lang="nl-NL" sz="2000" dirty="0">
                 <a:latin typeface="Courier New" panose="02070309020205020404" pitchFamily="49" charset="0"/>
                 <a:cs typeface="Courier New" panose="02070309020205020404" pitchFamily="49" charset="0"/>
               </a:rPr>
-              <a:t>u</a:t>
-            </a:r>
-            <a:r>
-              <a:rPr lang="nl-NL" sz="2000" noProof="0" dirty="0">
-                <a:latin typeface="Courier New" panose="02070309020205020404" pitchFamily="49" charset="0"/>
-                <a:cs typeface="Courier New" panose="02070309020205020404" pitchFamily="49" charset="0"/>
-              </a:rPr>
-              <a:t>v </a:t>
-            </a:r>
-            <a:r>
-              <a:rPr lang="nl-NL" sz="2000" noProof="0" dirty="0" err="1">
-                <a:latin typeface="Courier New" panose="02070309020205020404" pitchFamily="49" charset="0"/>
-                <a:cs typeface="Courier New" panose="02070309020205020404" pitchFamily="49" charset="0"/>
-              </a:rPr>
-              <a:t>init</a:t>
-            </a:r>
-            <a:r>
-              <a:rPr lang="nl-NL" sz="2000" noProof="0" dirty="0">
-                <a:latin typeface="Courier New" panose="02070309020205020404" pitchFamily="49" charset="0"/>
-                <a:cs typeface="Courier New" panose="02070309020205020404" pitchFamily="49" charset="0"/>
-              </a:rPr>
-              <a:t> &lt;project folder&gt;</a:t>
-            </a:r>
-          </a:p>
-          <a:p>
-            <a:pPr marL="0" indent="0">
-              <a:buNone/>
-            </a:pPr>
+              <a:t> --no-package</a:t>
+            </a:r>
+          </a:p>
+          <a:p>
+            <a:pPr marL="0" indent="0">
+              <a:buNone/>
+            </a:pPr>
+            <a:r>
+              <a:rPr lang="nl-NL" sz="2000" dirty="0">
+                <a:latin typeface="Courier New" panose="02070309020205020404" pitchFamily="49" charset="0"/>
+                <a:cs typeface="Courier New" panose="02070309020205020404" pitchFamily="49" charset="0"/>
+              </a:rPr>
+              <a:t>  &lt;folder&gt;</a:t>
+            </a:r>
+          </a:p>
+          <a:p>
+            <a:pPr marL="0" indent="0">
+              <a:buNone/>
+            </a:pPr>
+            <a:r>
+              <a:rPr lang="nl-NL" sz="2000" dirty="0">
+                <a:latin typeface="Courier New" panose="02070309020205020404" pitchFamily="49" charset="0"/>
+                <a:cs typeface="Courier New" panose="02070309020205020404" pitchFamily="49" charset="0"/>
+              </a:rPr>
+              <a:t>  &lt;--python=3.13&gt;</a:t>
+            </a:r>
+          </a:p>
+          <a:p>
+            <a:pPr marL="0" indent="0">
+              <a:buNone/>
+            </a:pPr>
+            <a:endParaRPr lang="nl-NL" sz="2000" dirty="0"/>
+          </a:p>
+          <a:p>
+            <a:pPr marL="0" indent="0">
+              <a:buNone/>
+            </a:pPr>
+            <a:r>
+              <a:rPr lang="nl-NL" sz="2000" dirty="0"/>
+              <a:t>Inhoud </a:t>
+            </a:r>
             <a:r>
               <a:rPr lang="nl-NL" sz="2000" dirty="0" err="1">
                 <a:latin typeface="Courier New" panose="02070309020205020404" pitchFamily="49" charset="0"/>
                 <a:cs typeface="Courier New" panose="02070309020205020404" pitchFamily="49" charset="0"/>
               </a:rPr>
-              <a:t>uv</a:t>
-            </a:r>
-            <a:r>
-              <a:rPr lang="nl-NL" sz="2000" dirty="0">
-                <a:latin typeface="Courier New" panose="02070309020205020404" pitchFamily="49" charset="0"/>
-                <a:cs typeface="Courier New" panose="02070309020205020404" pitchFamily="49" charset="0"/>
-              </a:rPr>
-              <a:t> </a:t>
-            </a:r>
-            <a:r>
-              <a:rPr lang="nl-NL" sz="2000" dirty="0" err="1">
-                <a:latin typeface="Courier New" panose="02070309020205020404" pitchFamily="49" charset="0"/>
-                <a:cs typeface="Courier New" panose="02070309020205020404" pitchFamily="49" charset="0"/>
-              </a:rPr>
-              <a:t>init</a:t>
-            </a:r>
-            <a:r>
-              <a:rPr lang="nl-NL" sz="2000" dirty="0">
-                <a:latin typeface="Courier New" panose="02070309020205020404" pitchFamily="49" charset="0"/>
-                <a:cs typeface="Courier New" panose="02070309020205020404" pitchFamily="49" charset="0"/>
-              </a:rPr>
-              <a:t> --python=3.13</a:t>
-            </a:r>
-          </a:p>
-          <a:p>
-            <a:pPr marL="0" indent="0">
-              <a:buNone/>
-            </a:pPr>
-            <a:endParaRPr lang="nl-NL" sz="2000" dirty="0"/>
-          </a:p>
-          <a:p>
-            <a:pPr marL="0" indent="0">
-              <a:buNone/>
-            </a:pPr>
+              <a:t>pyproject.toml</a:t>
+            </a:r>
             <a:r>
               <a:rPr lang="nl-NL" sz="2000" dirty="0"/>
-              <a:t>Maakt het volgende aan:</a:t>
+              <a:t>:</a:t>
             </a:r>
           </a:p>
           <a:p>
@@ -9587,7 +9872,7 @@
             </a:pPr>
             <a:r>
               <a:rPr lang="nl-NL" sz="2000" dirty="0"/>
-              <a:t>Git repository</a:t>
+              <a:t>Omschrijving van het project</a:t>
             </a:r>
           </a:p>
           <a:p>
@@ -9597,7 +9882,7 @@
             </a:pPr>
             <a:r>
               <a:rPr lang="nl-NL" sz="2000" dirty="0"/>
-              <a:t>Python versie bestand</a:t>
+              <a:t>Minimale versie van Python</a:t>
             </a:r>
           </a:p>
           <a:p>
@@ -9607,28 +9892,7 @@
             </a:pPr>
             <a:r>
               <a:rPr lang="nl-NL" sz="2000" dirty="0"/>
-              <a:t>Lege main.py </a:t>
-            </a:r>
-          </a:p>
-          <a:p>
-            <a:pPr>
-              <a:buFontTx/>
-              <a:buChar char="-"/>
-            </a:pPr>
-            <a:r>
-              <a:rPr lang="nl-NL" sz="2000" dirty="0" err="1"/>
-              <a:t>pyproject.toml</a:t>
-            </a:r>
-            <a:endParaRPr lang="nl-NL" sz="2000" dirty="0"/>
-          </a:p>
-          <a:p>
-            <a:pPr>
-              <a:buFontTx/>
-              <a:buChar char="-"/>
-            </a:pPr>
-            <a:r>
-              <a:rPr lang="nl-NL" sz="2000" dirty="0"/>
-              <a:t>README.md</a:t>
+              <a:t>Afhankelijkheden en versies</a:t>
             </a:r>
           </a:p>
         </p:txBody>
@@ -9638,7 +9902,7 @@
           <p:cNvPr id="5" name="Content Placeholder 2">
             <a:extLst>
               <a:ext uri="{FF2B5EF4-FFF2-40B4-BE49-F238E27FC236}">
-                <a16:creationId xmlns:a16="http://schemas.microsoft.com/office/drawing/2014/main" id="{2A920376-6F53-DA36-4255-6FFC1837178D}"/>
+                <a16:creationId xmlns:a16="http://schemas.microsoft.com/office/drawing/2014/main" id="{BAFFA02B-CEF0-3191-F970-9557AF7E9E3E}"/>
               </a:ext>
             </a:extLst>
           </p:cNvPr>
@@ -9838,7 +10102,7 @@
               <a:buNone/>
             </a:pPr>
             <a:r>
-              <a:rPr lang="en-US" sz="1800" dirty="0">
+              <a:rPr lang="en-US" sz="2000" dirty="0">
                 <a:latin typeface="Courier New" panose="02070309020205020404" pitchFamily="49" charset="0"/>
                 <a:cs typeface="Courier New" panose="02070309020205020404" pitchFamily="49" charset="0"/>
               </a:rPr>
@@ -9859,7 +10123,7 @@
               <a:buNone/>
             </a:pPr>
             <a:r>
-              <a:rPr lang="en-US" sz="1800" dirty="0">
+              <a:rPr lang="en-US" sz="2000" dirty="0">
                 <a:latin typeface="Courier New" panose="02070309020205020404" pitchFamily="49" charset="0"/>
                 <a:cs typeface="Courier New" panose="02070309020205020404" pitchFamily="49" charset="0"/>
               </a:rPr>
@@ -9880,7 +10144,7 @@
               <a:buNone/>
             </a:pPr>
             <a:r>
-              <a:rPr lang="en-US" sz="1800" dirty="0">
+              <a:rPr lang="en-US" sz="2000" dirty="0">
                 <a:latin typeface="Courier New" panose="02070309020205020404" pitchFamily="49" charset="0"/>
                 <a:cs typeface="Courier New" panose="02070309020205020404" pitchFamily="49" charset="0"/>
               </a:rPr>
@@ -9901,11 +10165,11 @@
               <a:buNone/>
             </a:pPr>
             <a:r>
-              <a:rPr lang="en-US" sz="1800" dirty="0">
-                <a:latin typeface="Courier New" panose="02070309020205020404" pitchFamily="49" charset="0"/>
-                <a:cs typeface="Courier New" panose="02070309020205020404" pitchFamily="49" charset="0"/>
-              </a:rPr>
-              <a:t>description = "Description here"</a:t>
+              <a:rPr lang="en-US" sz="2000" dirty="0">
+                <a:latin typeface="Courier New" panose="02070309020205020404" pitchFamily="49" charset="0"/>
+                <a:cs typeface="Courier New" panose="02070309020205020404" pitchFamily="49" charset="0"/>
+              </a:rPr>
+              <a:t>description = "..."</a:t>
             </a:r>
           </a:p>
           <a:p>
@@ -9922,7 +10186,7 @@
               <a:buNone/>
             </a:pPr>
             <a:r>
-              <a:rPr lang="en-US" sz="1800" dirty="0">
+              <a:rPr lang="en-US" sz="2000" dirty="0">
                 <a:latin typeface="Courier New" panose="02070309020205020404" pitchFamily="49" charset="0"/>
                 <a:cs typeface="Courier New" panose="02070309020205020404" pitchFamily="49" charset="0"/>
               </a:rPr>
@@ -9943,7 +10207,7 @@
               <a:buNone/>
             </a:pPr>
             <a:r>
-              <a:rPr lang="en-US" sz="1800" dirty="0">
+              <a:rPr lang="en-US" sz="2000" dirty="0">
                 <a:latin typeface="Courier New" panose="02070309020205020404" pitchFamily="49" charset="0"/>
                 <a:cs typeface="Courier New" panose="02070309020205020404" pitchFamily="49" charset="0"/>
               </a:rPr>
@@ -9964,20 +10228,58 @@
               <a:buNone/>
             </a:pPr>
             <a:r>
-              <a:rPr lang="en-US" sz="1800" dirty="0">
+              <a:rPr lang="en-US" sz="2000" dirty="0">
                 <a:latin typeface="Courier New" panose="02070309020205020404" pitchFamily="49" charset="0"/>
                 <a:cs typeface="Courier New" panose="02070309020205020404" pitchFamily="49" charset="0"/>
               </a:rPr>
               <a:t>dependencies = []</a:t>
             </a:r>
-            <a:endParaRPr lang="nl-NL" sz="1800" dirty="0"/>
+            <a:endParaRPr lang="nl-NL" sz="2000" dirty="0"/>
           </a:p>
         </p:txBody>
       </p:sp>
+      <p:cxnSp>
+        <p:nvCxnSpPr>
+          <p:cNvPr id="4" name="Straight Connector 3">
+            <a:extLst>
+              <a:ext uri="{FF2B5EF4-FFF2-40B4-BE49-F238E27FC236}">
+                <a16:creationId xmlns:a16="http://schemas.microsoft.com/office/drawing/2014/main" id="{55B17C9D-59B3-BF15-EA4A-4D9C5F96EE4C}"/>
+              </a:ext>
+            </a:extLst>
+          </p:cNvPr>
+          <p:cNvCxnSpPr>
+            <a:cxnSpLocks/>
+          </p:cNvCxnSpPr>
+          <p:nvPr/>
+        </p:nvCxnSpPr>
+        <p:spPr>
+          <a:xfrm>
+            <a:off x="5960533" y="1388533"/>
+            <a:ext cx="0" cy="4788430"/>
+          </a:xfrm>
+          <a:prstGeom prst="line">
+            <a:avLst/>
+          </a:prstGeom>
+        </p:spPr>
+        <p:style>
+          <a:lnRef idx="3">
+            <a:schemeClr val="dk1"/>
+          </a:lnRef>
+          <a:fillRef idx="0">
+            <a:schemeClr val="dk1"/>
+          </a:fillRef>
+          <a:effectRef idx="2">
+            <a:schemeClr val="dk1"/>
+          </a:effectRef>
+          <a:fontRef idx="minor">
+            <a:schemeClr val="tx1"/>
+          </a:fontRef>
+        </p:style>
+      </p:cxnSp>
     </p:spTree>
     <p:extLst>
       <p:ext uri="{BB962C8B-B14F-4D97-AF65-F5344CB8AC3E}">
-        <p14:creationId xmlns:p14="http://schemas.microsoft.com/office/powerpoint/2010/main" val="3318899864"/>
+        <p14:creationId xmlns:p14="http://schemas.microsoft.com/office/powerpoint/2010/main" val="644012997"/>
       </p:ext>
     </p:extLst>
   </p:cSld>
@@ -10082,12 +10384,15 @@
               <a:t>Je kunt met </a:t>
             </a:r>
             <a:r>
-              <a:rPr lang="nl-NL" sz="2000" noProof="0" dirty="0" err="1"/>
+              <a:rPr lang="nl-NL" sz="2000" noProof="0" dirty="0" err="1">
+                <a:latin typeface="Courier New" panose="02070309020205020404" pitchFamily="49" charset="0"/>
+                <a:cs typeface="Courier New" panose="02070309020205020404" pitchFamily="49" charset="0"/>
+              </a:rPr>
               <a:t>uv</a:t>
             </a:r>
             <a:r>
               <a:rPr lang="nl-NL" sz="2000" noProof="0" dirty="0"/>
-              <a:t> eenvoudig packages toevoegen aan je project:</a:t>
+              <a:t> eenvoudig afhankelijkheden toevoegen aan je project:</a:t>
             </a:r>
           </a:p>
           <a:p>
@@ -10601,6 +10906,44 @@
           </a:p>
         </p:txBody>
       </p:sp>
+      <p:cxnSp>
+        <p:nvCxnSpPr>
+          <p:cNvPr id="4" name="Straight Connector 3">
+            <a:extLst>
+              <a:ext uri="{FF2B5EF4-FFF2-40B4-BE49-F238E27FC236}">
+                <a16:creationId xmlns:a16="http://schemas.microsoft.com/office/drawing/2014/main" id="{F6954C70-2BC5-DCBB-7242-059EB3E75951}"/>
+              </a:ext>
+            </a:extLst>
+          </p:cNvPr>
+          <p:cNvCxnSpPr>
+            <a:cxnSpLocks/>
+          </p:cNvCxnSpPr>
+          <p:nvPr/>
+        </p:nvCxnSpPr>
+        <p:spPr>
+          <a:xfrm>
+            <a:off x="5960533" y="1388533"/>
+            <a:ext cx="0" cy="4788430"/>
+          </a:xfrm>
+          <a:prstGeom prst="line">
+            <a:avLst/>
+          </a:prstGeom>
+        </p:spPr>
+        <p:style>
+          <a:lnRef idx="3">
+            <a:schemeClr val="dk1"/>
+          </a:lnRef>
+          <a:fillRef idx="0">
+            <a:schemeClr val="dk1"/>
+          </a:fillRef>
+          <a:effectRef idx="2">
+            <a:schemeClr val="dk1"/>
+          </a:effectRef>
+          <a:fontRef idx="minor">
+            <a:schemeClr val="tx1"/>
+          </a:fontRef>
+        </p:style>
+      </p:cxnSp>
     </p:spTree>
     <p:extLst>
       <p:ext uri="{BB962C8B-B14F-4D97-AF65-F5344CB8AC3E}">
@@ -10709,20 +11052,29 @@
               <a:t>Met </a:t>
             </a:r>
             <a:r>
-              <a:rPr lang="nl-NL" sz="2000" noProof="0" dirty="0" err="1"/>
+              <a:rPr lang="nl-NL" sz="2000" noProof="0" dirty="0" err="1">
+                <a:latin typeface="Courier New" panose="02070309020205020404" pitchFamily="49" charset="0"/>
+                <a:cs typeface="Courier New" panose="02070309020205020404" pitchFamily="49" charset="0"/>
+              </a:rPr>
               <a:t>uv</a:t>
             </a:r>
             <a:r>
+              <a:rPr lang="nl-NL" sz="2000" noProof="0" dirty="0">
+                <a:latin typeface="Courier New" panose="02070309020205020404" pitchFamily="49" charset="0"/>
+                <a:cs typeface="Courier New" panose="02070309020205020404" pitchFamily="49" charset="0"/>
+              </a:rPr>
+              <a:t> </a:t>
+            </a:r>
+            <a:r>
+              <a:rPr lang="nl-NL" sz="2000" noProof="0" dirty="0" err="1">
+                <a:latin typeface="Courier New" panose="02070309020205020404" pitchFamily="49" charset="0"/>
+                <a:cs typeface="Courier New" panose="02070309020205020404" pitchFamily="49" charset="0"/>
+              </a:rPr>
+              <a:t>add</a:t>
+            </a:r>
+            <a:r>
               <a:rPr lang="nl-NL" sz="2000" noProof="0" dirty="0"/>
-              <a:t> </a:t>
-            </a:r>
-            <a:r>
-              <a:rPr lang="nl-NL" sz="2000" noProof="0" dirty="0" err="1"/>
-              <a:t>add</a:t>
-            </a:r>
-            <a:r>
-              <a:rPr lang="nl-NL" sz="2000" noProof="0" dirty="0"/>
-              <a:t> kun je versies ook updaten:</a:t>
+              <a:t> kun je ook versies updaten:</a:t>
             </a:r>
           </a:p>
           <a:p>
@@ -10852,7 +11204,7 @@
             </a:pPr>
             <a:r>
               <a:rPr lang="nl-NL" sz="2000" dirty="0"/>
-              <a:t>Een packages verwijderen kan met:</a:t>
+              <a:t>Packages verwijderen kan met:</a:t>
             </a:r>
           </a:p>
           <a:p>
@@ -11299,6 +11651,44 @@
           </a:p>
         </p:txBody>
       </p:sp>
+      <p:cxnSp>
+        <p:nvCxnSpPr>
+          <p:cNvPr id="4" name="Straight Connector 3">
+            <a:extLst>
+              <a:ext uri="{FF2B5EF4-FFF2-40B4-BE49-F238E27FC236}">
+                <a16:creationId xmlns:a16="http://schemas.microsoft.com/office/drawing/2014/main" id="{223D091E-CB64-DE64-1A69-D7E0394877E6}"/>
+              </a:ext>
+            </a:extLst>
+          </p:cNvPr>
+          <p:cNvCxnSpPr>
+            <a:cxnSpLocks/>
+          </p:cNvCxnSpPr>
+          <p:nvPr/>
+        </p:nvCxnSpPr>
+        <p:spPr>
+          <a:xfrm>
+            <a:off x="5960533" y="1388533"/>
+            <a:ext cx="0" cy="4788430"/>
+          </a:xfrm>
+          <a:prstGeom prst="line">
+            <a:avLst/>
+          </a:prstGeom>
+        </p:spPr>
+        <p:style>
+          <a:lnRef idx="3">
+            <a:schemeClr val="dk1"/>
+          </a:lnRef>
+          <a:fillRef idx="0">
+            <a:schemeClr val="dk1"/>
+          </a:fillRef>
+          <a:effectRef idx="2">
+            <a:schemeClr val="dk1"/>
+          </a:effectRef>
+          <a:fontRef idx="minor">
+            <a:schemeClr val="tx1"/>
+          </a:fontRef>
+        </p:style>
+      </p:cxnSp>
     </p:spTree>
     <p:extLst>
       <p:ext uri="{BB962C8B-B14F-4D97-AF65-F5344CB8AC3E}">
@@ -11414,15 +11804,7 @@
             </a:pPr>
             <a:r>
               <a:rPr lang="nl-NL" sz="2000" dirty="0"/>
-              <a:t>major:      niet </a:t>
-            </a:r>
-            <a:r>
-              <a:rPr lang="nl-NL" sz="2000" dirty="0" err="1"/>
-              <a:t>backwards</a:t>
-            </a:r>
-            <a:r>
-              <a:rPr lang="nl-NL" sz="2000" dirty="0"/>
-              <a:t> compatible.</a:t>
+              <a:t>major:      niet backward compatible.</a:t>
             </a:r>
           </a:p>
           <a:p>
@@ -11481,7 +11863,7 @@
             </a:pPr>
             <a:r>
               <a:rPr lang="nl-NL" sz="2000" dirty="0"/>
-              <a:t>exacte versie:		</a:t>
+              <a:t>exacte versie		</a:t>
             </a:r>
             <a:r>
               <a:rPr lang="nl-NL" sz="2000" dirty="0">
@@ -11515,14 +11897,14 @@
             </a:pPr>
             <a:r>
               <a:rPr lang="nl-NL" sz="2000" dirty="0"/>
-              <a:t>versiebereik		</a:t>
+              <a:t>minimale versie	</a:t>
             </a:r>
             <a:r>
               <a:rPr lang="nl-NL" sz="2000" dirty="0">
                 <a:latin typeface="Courier New" panose="02070309020205020404" pitchFamily="49" charset="0"/>
                 <a:cs typeface="Courier New" panose="02070309020205020404" pitchFamily="49" charset="0"/>
               </a:rPr>
-              <a:t>&gt;=2.3,&lt;3</a:t>
+              <a:t>&gt;=</a:t>
             </a:r>
           </a:p>
           <a:p>
@@ -11532,14 +11914,14 @@
             </a:pPr>
             <a:r>
               <a:rPr lang="nl-NL" sz="2000" dirty="0"/>
-              <a:t>minimale versie:	</a:t>
+              <a:t>versiebereik		</a:t>
             </a:r>
             <a:r>
               <a:rPr lang="nl-NL" sz="2000" dirty="0">
                 <a:latin typeface="Courier New" panose="02070309020205020404" pitchFamily="49" charset="0"/>
                 <a:cs typeface="Courier New" panose="02070309020205020404" pitchFamily="49" charset="0"/>
               </a:rPr>
-              <a:t>&gt;=</a:t>
+              <a:t>&gt;=X, &lt;Y</a:t>
             </a:r>
           </a:p>
           <a:p>
@@ -11766,7 +12148,7 @@
                 <a:latin typeface="Courier New" panose="02070309020205020404" pitchFamily="49" charset="0"/>
                 <a:cs typeface="Courier New" panose="02070309020205020404" pitchFamily="49" charset="0"/>
               </a:rPr>
-              <a:t> 2.3.1</a:t>
+              <a:t>:  2.3.1</a:t>
             </a:r>
           </a:p>
           <a:p>
@@ -11787,11 +12169,11 @@
                 <a:latin typeface="Courier New" panose="02070309020205020404" pitchFamily="49" charset="0"/>
                 <a:cs typeface="Courier New" panose="02070309020205020404" pitchFamily="49" charset="0"/>
               </a:rPr>
-              <a:t>- 2</a:t>
-            </a:r>
-          </a:p>
-          <a:p>
-            <a:pPr>
+              <a:t>major:   2</a:t>
+            </a:r>
+          </a:p>
+          <a:p>
+            <a:pPr marL="0" indent="0">
               <a:lnSpc>
                 <a:spcPct val="100000"/>
               </a:lnSpc>
@@ -11801,19 +12183,18 @@
               <a:spcAft>
                 <a:spcPts val="1200"/>
               </a:spcAft>
-              <a:buFontTx/>
-              <a:buChar char="-"/>
+              <a:buNone/>
             </a:pPr>
             <a:r>
               <a:rPr lang="en-US" sz="1800" dirty="0">
                 <a:latin typeface="Courier New" panose="02070309020205020404" pitchFamily="49" charset="0"/>
                 <a:cs typeface="Courier New" panose="02070309020205020404" pitchFamily="49" charset="0"/>
               </a:rPr>
-              <a:t>3</a:t>
-            </a:r>
-          </a:p>
-          <a:p>
-            <a:pPr>
+              <a:t>minor:   3</a:t>
+            </a:r>
+          </a:p>
+          <a:p>
+            <a:pPr marL="0" indent="0">
               <a:lnSpc>
                 <a:spcPct val="100000"/>
               </a:lnSpc>
@@ -11823,15 +12204,14 @@
               <a:spcAft>
                 <a:spcPts val="1200"/>
               </a:spcAft>
-              <a:buFontTx/>
-              <a:buChar char="-"/>
+              <a:buNone/>
             </a:pPr>
             <a:r>
               <a:rPr lang="en-US" sz="1800" dirty="0">
                 <a:latin typeface="Courier New" panose="02070309020205020404" pitchFamily="49" charset="0"/>
                 <a:cs typeface="Courier New" panose="02070309020205020404" pitchFamily="49" charset="0"/>
               </a:rPr>
-              <a:t>1</a:t>
+              <a:t>patch:   1</a:t>
             </a:r>
           </a:p>
           <a:p>
@@ -11895,7 +12275,7 @@
                 <a:latin typeface="Courier New" panose="02070309020205020404" pitchFamily="49" charset="0"/>
                 <a:cs typeface="Courier New" panose="02070309020205020404" pitchFamily="49" charset="0"/>
               </a:rPr>
-              <a:t> == 2.3.1    # 2.3.1</a:t>
+              <a:t> == 2.3.0    # 2.3.0</a:t>
             </a:r>
           </a:p>
           <a:p>
@@ -11916,7 +12296,7 @@
                 <a:latin typeface="Courier New" panose="02070309020205020404" pitchFamily="49" charset="0"/>
                 <a:cs typeface="Courier New" panose="02070309020205020404" pitchFamily="49" charset="0"/>
               </a:rPr>
-              <a:t>pandas ~= 2.31     # 2.3.x</a:t>
+              <a:t>pandas ~= 2.3.0    # 2.3.x</a:t>
             </a:r>
           </a:p>
           <a:p>
@@ -11933,27 +12313,6 @@
               <a:buNone/>
             </a:pPr>
             <a:r>
-              <a:rPr lang="en-US" sz="1800" dirty="0">
-                <a:latin typeface="Courier New" panose="02070309020205020404" pitchFamily="49" charset="0"/>
-                <a:cs typeface="Courier New" panose="02070309020205020404" pitchFamily="49" charset="0"/>
-              </a:rPr>
-              <a:t>pandas &gt;= 2.3,&lt;3   # 2.x</a:t>
-            </a:r>
-          </a:p>
-          <a:p>
-            <a:pPr marL="0" indent="0">
-              <a:lnSpc>
-                <a:spcPct val="100000"/>
-              </a:lnSpc>
-              <a:spcBef>
-                <a:spcPts val="0"/>
-              </a:spcBef>
-              <a:spcAft>
-                <a:spcPts val="1200"/>
-              </a:spcAft>
-              <a:buNone/>
-            </a:pPr>
-            <a:r>
               <a:rPr lang="nl-NL" sz="1800" dirty="0" err="1">
                 <a:latin typeface="Courier New" panose="02070309020205020404" pitchFamily="49" charset="0"/>
                 <a:cs typeface="Courier New" panose="02070309020205020404" pitchFamily="49" charset="0"/>
@@ -11965,15 +12324,74 @@
                 <a:latin typeface="Courier New" panose="02070309020205020404" pitchFamily="49" charset="0"/>
                 <a:cs typeface="Courier New" panose="02070309020205020404" pitchFamily="49" charset="0"/>
               </a:rPr>
-              <a:t> &gt;= 2.3      # 2.x + 3.x</a:t>
+              <a:t> &gt;= 2.0      # 3.x</a:t>
             </a:r>
             <a:endParaRPr lang="en-US" sz="1800" dirty="0">
               <a:latin typeface="Courier New" panose="02070309020205020404" pitchFamily="49" charset="0"/>
               <a:cs typeface="Courier New" panose="02070309020205020404" pitchFamily="49" charset="0"/>
             </a:endParaRPr>
           </a:p>
+          <a:p>
+            <a:pPr marL="0" indent="0">
+              <a:lnSpc>
+                <a:spcPct val="100000"/>
+              </a:lnSpc>
+              <a:spcBef>
+                <a:spcPts val="0"/>
+              </a:spcBef>
+              <a:spcAft>
+                <a:spcPts val="1200"/>
+              </a:spcAft>
+              <a:buNone/>
+            </a:pPr>
+            <a:r>
+              <a:rPr lang="en-US" sz="1800" dirty="0">
+                <a:latin typeface="Courier New" panose="02070309020205020404" pitchFamily="49" charset="0"/>
+                <a:cs typeface="Courier New" panose="02070309020205020404" pitchFamily="49" charset="0"/>
+              </a:rPr>
+              <a:t>pandas &gt;= 2.0, &lt;3  # 2.x</a:t>
+            </a:r>
+          </a:p>
         </p:txBody>
       </p:sp>
+      <p:cxnSp>
+        <p:nvCxnSpPr>
+          <p:cNvPr id="4" name="Straight Connector 3">
+            <a:extLst>
+              <a:ext uri="{FF2B5EF4-FFF2-40B4-BE49-F238E27FC236}">
+                <a16:creationId xmlns:a16="http://schemas.microsoft.com/office/drawing/2014/main" id="{AEB986ED-0006-1D9D-BF2A-87F0F1CDDF4C}"/>
+              </a:ext>
+            </a:extLst>
+          </p:cNvPr>
+          <p:cNvCxnSpPr>
+            <a:cxnSpLocks/>
+          </p:cNvCxnSpPr>
+          <p:nvPr/>
+        </p:nvCxnSpPr>
+        <p:spPr>
+          <a:xfrm>
+            <a:off x="5960533" y="1388533"/>
+            <a:ext cx="0" cy="4788430"/>
+          </a:xfrm>
+          <a:prstGeom prst="line">
+            <a:avLst/>
+          </a:prstGeom>
+        </p:spPr>
+        <p:style>
+          <a:lnRef idx="3">
+            <a:schemeClr val="dk1"/>
+          </a:lnRef>
+          <a:fillRef idx="0">
+            <a:schemeClr val="dk1"/>
+          </a:fillRef>
+          <a:effectRef idx="2">
+            <a:schemeClr val="dk1"/>
+          </a:effectRef>
+          <a:fontRef idx="minor">
+            <a:schemeClr val="tx1"/>
+          </a:fontRef>
+        </p:style>
+      </p:cxnSp>
     </p:spTree>
     <p:extLst>
       <p:ext uri="{BB962C8B-B14F-4D97-AF65-F5344CB8AC3E}">
@@ -12069,7 +12487,7 @@
         </p:spPr>
         <p:txBody>
           <a:bodyPr>
-            <a:normAutofit lnSpcReduction="10000"/>
+            <a:normAutofit fontScale="92500" lnSpcReduction="10000"/>
           </a:bodyPr>
           <a:lstStyle/>
           <a:p>
@@ -12081,7 +12499,10 @@
               <a:t>Start een nieuw project met </a:t>
             </a:r>
             <a:r>
-              <a:rPr lang="nl-NL" sz="2000" dirty="0" err="1"/>
+              <a:rPr lang="nl-NL" sz="2000" dirty="0" err="1">
+                <a:latin typeface="Courier New" panose="02070309020205020404" pitchFamily="49" charset="0"/>
+                <a:cs typeface="Courier New" panose="02070309020205020404" pitchFamily="49" charset="0"/>
+              </a:rPr>
               <a:t>uv</a:t>
             </a:r>
             <a:r>
@@ -12101,15 +12522,53 @@
             </a:pPr>
             <a:r>
               <a:rPr lang="nl-NL" sz="2000" dirty="0"/>
-              <a:t>Voeg het package </a:t>
-            </a:r>
-            <a:r>
-              <a:rPr lang="nl-NL" sz="2000" dirty="0" err="1"/>
-              <a:t>marimo</a:t>
+              <a:t>Voeg </a:t>
+            </a:r>
+            <a:r>
+              <a:rPr lang="nl-NL" sz="2000" dirty="0" err="1">
+                <a:latin typeface="Courier New" panose="02070309020205020404" pitchFamily="49" charset="0"/>
+                <a:cs typeface="Courier New" panose="02070309020205020404" pitchFamily="49" charset="0"/>
+              </a:rPr>
+              <a:t>pandas</a:t>
             </a:r>
             <a:r>
               <a:rPr lang="nl-NL" sz="2000" dirty="0"/>
-              <a:t> toe aan het project.</a:t>
+              <a:t> toe aan het project, geef geen versie op:</a:t>
+            </a:r>
+          </a:p>
+          <a:p>
+            <a:pPr marL="914400" lvl="1" indent="-457200">
+              <a:buAutoNum type="arabicPeriod"/>
+            </a:pPr>
+            <a:endParaRPr lang="nl-NL" sz="2000" dirty="0"/>
+          </a:p>
+          <a:p>
+            <a:pPr lvl="1"/>
+            <a:r>
+              <a:rPr lang="nl-NL" sz="2000" dirty="0"/>
+              <a:t>Welke versie werd geïnstalleerd?</a:t>
+            </a:r>
+          </a:p>
+          <a:p>
+            <a:pPr lvl="1"/>
+            <a:endParaRPr lang="nl-NL" sz="2000" dirty="0"/>
+          </a:p>
+          <a:p>
+            <a:pPr lvl="1"/>
+            <a:r>
+              <a:rPr lang="nl-NL" sz="2000" dirty="0"/>
+              <a:t>Wat staat er in </a:t>
+            </a:r>
+            <a:r>
+              <a:rPr lang="nl-NL" sz="2000" dirty="0" err="1">
+                <a:latin typeface="Courier New" panose="02070309020205020404" pitchFamily="49" charset="0"/>
+                <a:cs typeface="Courier New" panose="02070309020205020404" pitchFamily="49" charset="0"/>
+              </a:rPr>
+              <a:t>pyproject.toml</a:t>
+            </a:r>
+            <a:r>
+              <a:rPr lang="nl-NL" sz="2000" dirty="0"/>
+              <a:t>?</a:t>
             </a:r>
           </a:p>
           <a:p>
@@ -12124,41 +12583,7 @@
             </a:pPr>
             <a:r>
               <a:rPr lang="nl-NL" sz="2000" dirty="0"/>
-              <a:t>Voeg </a:t>
-            </a:r>
-            <a:r>
-              <a:rPr lang="nl-NL" sz="2000" dirty="0" err="1"/>
-              <a:t>pandas</a:t>
-            </a:r>
-            <a:r>
-              <a:rPr lang="nl-NL" sz="2000" dirty="0"/>
-              <a:t> toe aan het project, geef geen versie op:</a:t>
-            </a:r>
-          </a:p>
-          <a:p>
-            <a:pPr marL="914400" lvl="1" indent="-457200">
-              <a:buAutoNum type="arabicPeriod"/>
-            </a:pPr>
-            <a:r>
-              <a:rPr lang="nl-NL" sz="1600" dirty="0"/>
-              <a:t>Wat staat er in </a:t>
-            </a:r>
-            <a:r>
-              <a:rPr lang="nl-NL" sz="1600" dirty="0" err="1"/>
-              <a:t>pyproject.toml</a:t>
-            </a:r>
-            <a:r>
-              <a:rPr lang="nl-NL" sz="1600" dirty="0"/>
-              <a:t>?</a:t>
-            </a:r>
-          </a:p>
-          <a:p>
-            <a:pPr marL="914400" lvl="1" indent="-457200">
-              <a:buAutoNum type="arabicPeriod"/>
-            </a:pPr>
-            <a:r>
-              <a:rPr lang="nl-NL" sz="1600" dirty="0"/>
-              <a:t>Welk package werd geïnstalleerd?</a:t>
+              <a:t>Verander nu de versie naar 2.3.1, wat gebeurt er?</a:t>
             </a:r>
           </a:p>
           <a:p>
@@ -12173,15 +12598,18 @@
             </a:pPr>
             <a:r>
               <a:rPr lang="nl-NL" sz="2000" dirty="0"/>
-              <a:t>Verander nu de versie van </a:t>
-            </a:r>
-            <a:r>
-              <a:rPr lang="nl-NL" sz="2000" dirty="0" err="1"/>
-              <a:t>pandas</a:t>
+              <a:t>Voeg </a:t>
+            </a:r>
+            <a:r>
+              <a:rPr lang="nl-NL" sz="2000" dirty="0" err="1">
+                <a:latin typeface="Courier New" panose="02070309020205020404" pitchFamily="49" charset="0"/>
+                <a:cs typeface="Courier New" panose="02070309020205020404" pitchFamily="49" charset="0"/>
+              </a:rPr>
+              <a:t>marimo</a:t>
             </a:r>
             <a:r>
               <a:rPr lang="nl-NL" sz="2000" dirty="0"/>
-              <a:t> naar 2.3.1, wat gebeurt er?</a:t>
+              <a:t> toe en open een nieuw Notebook.</a:t>
             </a:r>
           </a:p>
           <a:p>
@@ -12196,38 +12624,18 @@
             </a:pPr>
             <a:r>
               <a:rPr lang="nl-NL" sz="2000" dirty="0"/>
-              <a:t>Start </a:t>
-            </a:r>
-            <a:r>
-              <a:rPr lang="nl-NL" sz="2000" dirty="0" err="1"/>
-              <a:t>marimo</a:t>
+              <a:t>Importeer </a:t>
+            </a:r>
+            <a:r>
+              <a:rPr lang="nl-NL" sz="2000" dirty="0" err="1">
+                <a:latin typeface="Courier New" panose="02070309020205020404" pitchFamily="49" charset="0"/>
+                <a:cs typeface="Courier New" panose="02070309020205020404" pitchFamily="49" charset="0"/>
+              </a:rPr>
+              <a:t>sklearn</a:t>
             </a:r>
             <a:r>
               <a:rPr lang="nl-NL" sz="2000" dirty="0"/>
-              <a:t> op binnen de virtuele omgeving.</a:t>
-            </a:r>
-          </a:p>
-          <a:p>
-            <a:pPr marL="457200" indent="-457200">
-              <a:buAutoNum type="arabicPeriod"/>
-            </a:pPr>
-            <a:endParaRPr lang="nl-NL" sz="2000" dirty="0"/>
-          </a:p>
-          <a:p>
-            <a:pPr marL="457200" indent="-457200">
-              <a:buAutoNum type="arabicPeriod"/>
-            </a:pPr>
-            <a:r>
-              <a:rPr lang="nl-NL" sz="2000" dirty="0"/>
-              <a:t>Importeer </a:t>
-            </a:r>
-            <a:r>
-              <a:rPr lang="nl-NL" sz="2000" dirty="0" err="1"/>
-              <a:t>sklearn</a:t>
-            </a:r>
-            <a:r>
-              <a:rPr lang="nl-NL" sz="2000" dirty="0"/>
-              <a:t> in het Notebook.</a:t>
+              <a:t> in het Notebook; wat gebeurt er?</a:t>
             </a:r>
           </a:p>
           <a:p>
@@ -12375,7 +12783,7 @@
             </a:pPr>
             <a:r>
               <a:rPr lang="nl-NL" sz="2000" dirty="0"/>
-              <a:t>Versie specificaties laten meestal ruimte voor verschillende versies.</a:t>
+              <a:t>Versie specificaties laten vaak ruimte voor meerdere versies.</a:t>
             </a:r>
           </a:p>
           <a:p>
@@ -12388,20 +12796,26 @@
             <a:pPr marL="0" indent="0">
               <a:buNone/>
             </a:pPr>
+            <a:endParaRPr lang="nl-NL" sz="2000" dirty="0"/>
+          </a:p>
+          <a:p>
+            <a:pPr marL="0" indent="0">
+              <a:buNone/>
+            </a:pPr>
             <a:r>
               <a:rPr lang="nl-NL" sz="2000" dirty="0"/>
-              <a:t>Het </a:t>
-            </a:r>
-            <a:r>
-              <a:rPr lang="nl-NL" sz="2000" dirty="0" err="1">
-                <a:latin typeface="Courier New" panose="02070309020205020404" pitchFamily="49" charset="0"/>
-                <a:cs typeface="Courier New" panose="02070309020205020404" pitchFamily="49" charset="0"/>
-              </a:rPr>
-              <a:t>uv.lock</a:t>
+              <a:t>Zelfs als je zelf versies pint (</a:t>
+            </a:r>
+            <a:r>
+              <a:rPr lang="nl-NL" sz="2000" dirty="0">
+                <a:latin typeface="Courier New" panose="02070309020205020404" pitchFamily="49" charset="0"/>
+                <a:cs typeface="Courier New" panose="02070309020205020404" pitchFamily="49" charset="0"/>
+              </a:rPr>
+              <a:t>==</a:t>
             </a:r>
             <a:r>
               <a:rPr lang="nl-NL" sz="2000" dirty="0"/>
-              <a:t> bestand bevat de precieze versies in de virtuele omgeving.</a:t>
+              <a:t>) kunnen afhankelijkheden ruimte geven.</a:t>
             </a:r>
           </a:p>
           <a:p>
@@ -12414,35 +12828,15 @@
             <a:pPr marL="0" indent="0">
               <a:buNone/>
             </a:pPr>
+            <a:endParaRPr lang="nl-NL" sz="2000" dirty="0"/>
+          </a:p>
+          <a:p>
+            <a:pPr marL="0" indent="0">
+              <a:buNone/>
+            </a:pPr>
             <a:r>
               <a:rPr lang="nl-NL" sz="2000" dirty="0"/>
-              <a:t>Met dit bestand probeert </a:t>
-            </a:r>
-            <a:r>
-              <a:rPr lang="nl-NL" sz="2000" dirty="0" err="1">
-                <a:latin typeface="Courier New" panose="02070309020205020404" pitchFamily="49" charset="0"/>
-                <a:cs typeface="Courier New" panose="02070309020205020404" pitchFamily="49" charset="0"/>
-              </a:rPr>
-              <a:t>uv</a:t>
-            </a:r>
-            <a:r>
-              <a:rPr lang="nl-NL" sz="2000" dirty="0"/>
-              <a:t> de omgeving te recreëren.</a:t>
-            </a:r>
-          </a:p>
-          <a:p>
-            <a:pPr marL="0" indent="0">
-              <a:buNone/>
-            </a:pPr>
-            <a:endParaRPr lang="nl-NL" sz="2000" dirty="0"/>
-          </a:p>
-          <a:p>
-            <a:pPr marL="0" indent="0">
-              <a:buNone/>
-            </a:pPr>
-            <a:r>
-              <a:rPr lang="nl-NL" sz="2000" dirty="0"/>
-              <a:t>Als dit niet lukt, worden alternatieven gezocht.</a:t>
+              <a:t>De opbouw van je omgeving kan daarom morgen anders uitpakken dan vandaag…</a:t>
             </a:r>
           </a:p>
         </p:txBody>
@@ -12453,6 +12847,833 @@
             <a:extLst>
               <a:ext uri="{FF2B5EF4-FFF2-40B4-BE49-F238E27FC236}">
                 <a16:creationId xmlns:a16="http://schemas.microsoft.com/office/drawing/2014/main" id="{D137EF78-F0D6-D5A9-3E59-86D562B13FE7}"/>
+              </a:ext>
+            </a:extLst>
+          </p:cNvPr>
+          <p:cNvSpPr txBox="1">
+            <a:spLocks/>
+          </p:cNvSpPr>
+          <p:nvPr/>
+        </p:nvSpPr>
+        <p:spPr>
+          <a:xfrm>
+            <a:off x="6637869" y="1456267"/>
+            <a:ext cx="4715935" cy="4728252"/>
+          </a:xfrm>
+          <a:prstGeom prst="rect">
+            <a:avLst/>
+          </a:prstGeom>
+        </p:spPr>
+        <p:txBody>
+          <a:bodyPr vert="horz" lIns="91440" tIns="45720" rIns="91440" bIns="45720" rtlCol="0">
+            <a:noAutofit/>
+          </a:bodyPr>
+          <a:lstStyle>
+            <a:lvl1pPr marL="228600" indent="-228600" algn="l" defTabSz="914400" rtl="0" eaLnBrk="1" latinLnBrk="0" hangingPunct="1">
+              <a:lnSpc>
+                <a:spcPct val="90000"/>
+              </a:lnSpc>
+              <a:spcBef>
+                <a:spcPts val="1000"/>
+              </a:spcBef>
+              <a:buFont typeface="Arial" panose="020B0604020202020204" pitchFamily="34" charset="0"/>
+              <a:buChar char="•"/>
+              <a:defRPr sz="2800" kern="1200">
+                <a:solidFill>
+                  <a:schemeClr val="tx1"/>
+                </a:solidFill>
+                <a:latin typeface="+mn-lt"/>
+                <a:ea typeface="+mn-ea"/>
+                <a:cs typeface="+mn-cs"/>
+              </a:defRPr>
+            </a:lvl1pPr>
+            <a:lvl2pPr marL="685800" indent="-228600" algn="l" defTabSz="914400" rtl="0" eaLnBrk="1" latinLnBrk="0" hangingPunct="1">
+              <a:lnSpc>
+                <a:spcPct val="90000"/>
+              </a:lnSpc>
+              <a:spcBef>
+                <a:spcPts val="500"/>
+              </a:spcBef>
+              <a:buFont typeface="Arial" panose="020B0604020202020204" pitchFamily="34" charset="0"/>
+              <a:buChar char="•"/>
+              <a:defRPr sz="2400" kern="1200">
+                <a:solidFill>
+                  <a:schemeClr val="tx1"/>
+                </a:solidFill>
+                <a:latin typeface="+mn-lt"/>
+                <a:ea typeface="+mn-ea"/>
+                <a:cs typeface="+mn-cs"/>
+              </a:defRPr>
+            </a:lvl2pPr>
+            <a:lvl3pPr marL="1143000" indent="-228600" algn="l" defTabSz="914400" rtl="0" eaLnBrk="1" latinLnBrk="0" hangingPunct="1">
+              <a:lnSpc>
+                <a:spcPct val="90000"/>
+              </a:lnSpc>
+              <a:spcBef>
+                <a:spcPts val="500"/>
+              </a:spcBef>
+              <a:buFont typeface="Arial" panose="020B0604020202020204" pitchFamily="34" charset="0"/>
+              <a:buChar char="•"/>
+              <a:defRPr sz="2000" kern="1200">
+                <a:solidFill>
+                  <a:schemeClr val="tx1"/>
+                </a:solidFill>
+                <a:latin typeface="+mn-lt"/>
+                <a:ea typeface="+mn-ea"/>
+                <a:cs typeface="+mn-cs"/>
+              </a:defRPr>
+            </a:lvl3pPr>
+            <a:lvl4pPr marL="1600200" indent="-228600" algn="l" defTabSz="914400" rtl="0" eaLnBrk="1" latinLnBrk="0" hangingPunct="1">
+              <a:lnSpc>
+                <a:spcPct val="90000"/>
+              </a:lnSpc>
+              <a:spcBef>
+                <a:spcPts val="500"/>
+              </a:spcBef>
+              <a:buFont typeface="Arial" panose="020B0604020202020204" pitchFamily="34" charset="0"/>
+              <a:buChar char="•"/>
+              <a:defRPr sz="1800" kern="1200">
+                <a:solidFill>
+                  <a:schemeClr val="tx1"/>
+                </a:solidFill>
+                <a:latin typeface="+mn-lt"/>
+                <a:ea typeface="+mn-ea"/>
+                <a:cs typeface="+mn-cs"/>
+              </a:defRPr>
+            </a:lvl4pPr>
+            <a:lvl5pPr marL="2057400" indent="-228600" algn="l" defTabSz="914400" rtl="0" eaLnBrk="1" latinLnBrk="0" hangingPunct="1">
+              <a:lnSpc>
+                <a:spcPct val="90000"/>
+              </a:lnSpc>
+              <a:spcBef>
+                <a:spcPts val="500"/>
+              </a:spcBef>
+              <a:buFont typeface="Arial" panose="020B0604020202020204" pitchFamily="34" charset="0"/>
+              <a:buChar char="•"/>
+              <a:defRPr sz="1800" kern="1200">
+                <a:solidFill>
+                  <a:schemeClr val="tx1"/>
+                </a:solidFill>
+                <a:latin typeface="+mn-lt"/>
+                <a:ea typeface="+mn-ea"/>
+                <a:cs typeface="+mn-cs"/>
+              </a:defRPr>
+            </a:lvl5pPr>
+            <a:lvl6pPr marL="2514600" indent="-228600" algn="l" defTabSz="914400" rtl="0" eaLnBrk="1" latinLnBrk="0" hangingPunct="1">
+              <a:lnSpc>
+                <a:spcPct val="90000"/>
+              </a:lnSpc>
+              <a:spcBef>
+                <a:spcPts val="500"/>
+              </a:spcBef>
+              <a:buFont typeface="Arial" panose="020B0604020202020204" pitchFamily="34" charset="0"/>
+              <a:buChar char="•"/>
+              <a:defRPr sz="1800" kern="1200">
+                <a:solidFill>
+                  <a:schemeClr val="tx1"/>
+                </a:solidFill>
+                <a:latin typeface="+mn-lt"/>
+                <a:ea typeface="+mn-ea"/>
+                <a:cs typeface="+mn-cs"/>
+              </a:defRPr>
+            </a:lvl6pPr>
+            <a:lvl7pPr marL="2971800" indent="-228600" algn="l" defTabSz="914400" rtl="0" eaLnBrk="1" latinLnBrk="0" hangingPunct="1">
+              <a:lnSpc>
+                <a:spcPct val="90000"/>
+              </a:lnSpc>
+              <a:spcBef>
+                <a:spcPts val="500"/>
+              </a:spcBef>
+              <a:buFont typeface="Arial" panose="020B0604020202020204" pitchFamily="34" charset="0"/>
+              <a:buChar char="•"/>
+              <a:defRPr sz="1800" kern="1200">
+                <a:solidFill>
+                  <a:schemeClr val="tx1"/>
+                </a:solidFill>
+                <a:latin typeface="+mn-lt"/>
+                <a:ea typeface="+mn-ea"/>
+                <a:cs typeface="+mn-cs"/>
+              </a:defRPr>
+            </a:lvl7pPr>
+            <a:lvl8pPr marL="3429000" indent="-228600" algn="l" defTabSz="914400" rtl="0" eaLnBrk="1" latinLnBrk="0" hangingPunct="1">
+              <a:lnSpc>
+                <a:spcPct val="90000"/>
+              </a:lnSpc>
+              <a:spcBef>
+                <a:spcPts val="500"/>
+              </a:spcBef>
+              <a:buFont typeface="Arial" panose="020B0604020202020204" pitchFamily="34" charset="0"/>
+              <a:buChar char="•"/>
+              <a:defRPr sz="1800" kern="1200">
+                <a:solidFill>
+                  <a:schemeClr val="tx1"/>
+                </a:solidFill>
+                <a:latin typeface="+mn-lt"/>
+                <a:ea typeface="+mn-ea"/>
+                <a:cs typeface="+mn-cs"/>
+              </a:defRPr>
+            </a:lvl8pPr>
+            <a:lvl9pPr marL="3886200" indent="-228600" algn="l" defTabSz="914400" rtl="0" eaLnBrk="1" latinLnBrk="0" hangingPunct="1">
+              <a:lnSpc>
+                <a:spcPct val="90000"/>
+              </a:lnSpc>
+              <a:spcBef>
+                <a:spcPts val="500"/>
+              </a:spcBef>
+              <a:buFont typeface="Arial" panose="020B0604020202020204" pitchFamily="34" charset="0"/>
+              <a:buChar char="•"/>
+              <a:defRPr sz="1800" kern="1200">
+                <a:solidFill>
+                  <a:schemeClr val="tx1"/>
+                </a:solidFill>
+                <a:latin typeface="+mn-lt"/>
+                <a:ea typeface="+mn-ea"/>
+                <a:cs typeface="+mn-cs"/>
+              </a:defRPr>
+            </a:lvl9pPr>
+          </a:lstStyle>
+          <a:p>
+            <a:pPr marL="0" indent="0">
+              <a:lnSpc>
+                <a:spcPct val="100000"/>
+              </a:lnSpc>
+              <a:spcBef>
+                <a:spcPts val="0"/>
+              </a:spcBef>
+              <a:spcAft>
+                <a:spcPts val="600"/>
+              </a:spcAft>
+              <a:buNone/>
+            </a:pPr>
+            <a:r>
+              <a:rPr lang="en-US" sz="1800" dirty="0">
+                <a:latin typeface="Courier New" panose="02070309020205020404" pitchFamily="49" charset="0"/>
+                <a:cs typeface="Courier New" panose="02070309020205020404" pitchFamily="49" charset="0"/>
+              </a:rPr>
+              <a:t>pandas == 2.3.1</a:t>
+            </a:r>
+          </a:p>
+          <a:p>
+            <a:pPr marL="0" indent="0">
+              <a:lnSpc>
+                <a:spcPct val="100000"/>
+              </a:lnSpc>
+              <a:spcBef>
+                <a:spcPts val="0"/>
+              </a:spcBef>
+              <a:spcAft>
+                <a:spcPts val="600"/>
+              </a:spcAft>
+              <a:buNone/>
+            </a:pPr>
+            <a:endParaRPr lang="en-US" sz="1800" dirty="0">
+              <a:latin typeface="Courier New" panose="02070309020205020404" pitchFamily="49" charset="0"/>
+              <a:cs typeface="Courier New" panose="02070309020205020404" pitchFamily="49" charset="0"/>
+            </a:endParaRPr>
+          </a:p>
+          <a:p>
+            <a:pPr marL="0" indent="0">
+              <a:lnSpc>
+                <a:spcPct val="100000"/>
+              </a:lnSpc>
+              <a:spcBef>
+                <a:spcPts val="0"/>
+              </a:spcBef>
+              <a:spcAft>
+                <a:spcPts val="600"/>
+              </a:spcAft>
+              <a:buNone/>
+            </a:pPr>
+            <a:r>
+              <a:rPr lang="en-US" sz="1800" dirty="0">
+                <a:latin typeface="Courier New" panose="02070309020205020404" pitchFamily="49" charset="0"/>
+                <a:cs typeface="Courier New" panose="02070309020205020404" pitchFamily="49" charset="0"/>
+              </a:rPr>
+              <a:t>dependencies = [</a:t>
+            </a:r>
+          </a:p>
+          <a:p>
+            <a:pPr marL="0" indent="0">
+              <a:lnSpc>
+                <a:spcPct val="100000"/>
+              </a:lnSpc>
+              <a:spcBef>
+                <a:spcPts val="0"/>
+              </a:spcBef>
+              <a:spcAft>
+                <a:spcPts val="600"/>
+              </a:spcAft>
+              <a:buNone/>
+            </a:pPr>
+            <a:r>
+              <a:rPr lang="en-US" sz="1800" dirty="0">
+                <a:latin typeface="Courier New" panose="02070309020205020404" pitchFamily="49" charset="0"/>
+                <a:cs typeface="Courier New" panose="02070309020205020404" pitchFamily="49" charset="0"/>
+              </a:rPr>
+              <a:t>  "</a:t>
+            </a:r>
+            <a:r>
+              <a:rPr lang="en-US" sz="1800" dirty="0" err="1">
+                <a:latin typeface="Courier New" panose="02070309020205020404" pitchFamily="49" charset="0"/>
+                <a:cs typeface="Courier New" panose="02070309020205020404" pitchFamily="49" charset="0"/>
+              </a:rPr>
+              <a:t>numpy</a:t>
+            </a:r>
+            <a:r>
+              <a:rPr lang="en-US" sz="1800" dirty="0">
+                <a:latin typeface="Courier New" panose="02070309020205020404" pitchFamily="49" charset="0"/>
+                <a:cs typeface="Courier New" panose="02070309020205020404" pitchFamily="49" charset="0"/>
+              </a:rPr>
+              <a:t> &gt;= 1.22.4;</a:t>
+            </a:r>
+          </a:p>
+          <a:p>
+            <a:pPr marL="0" indent="0">
+              <a:lnSpc>
+                <a:spcPct val="100000"/>
+              </a:lnSpc>
+              <a:spcBef>
+                <a:spcPts val="0"/>
+              </a:spcBef>
+              <a:spcAft>
+                <a:spcPts val="600"/>
+              </a:spcAft>
+              <a:buNone/>
+            </a:pPr>
+            <a:r>
+              <a:rPr lang="en-US" sz="1800" dirty="0">
+                <a:latin typeface="Courier New" panose="02070309020205020404" pitchFamily="49" charset="0"/>
+                <a:cs typeface="Courier New" panose="02070309020205020404" pitchFamily="49" charset="0"/>
+              </a:rPr>
+              <a:t>    </a:t>
+            </a:r>
+            <a:r>
+              <a:rPr lang="en-US" sz="1800" dirty="0" err="1">
+                <a:latin typeface="Courier New" panose="02070309020205020404" pitchFamily="49" charset="0"/>
+                <a:cs typeface="Courier New" panose="02070309020205020404" pitchFamily="49" charset="0"/>
+              </a:rPr>
+              <a:t>python_version</a:t>
+            </a:r>
+            <a:r>
+              <a:rPr lang="en-US" sz="1800" dirty="0">
+                <a:latin typeface="Courier New" panose="02070309020205020404" pitchFamily="49" charset="0"/>
+                <a:cs typeface="Courier New" panose="02070309020205020404" pitchFamily="49" charset="0"/>
+              </a:rPr>
+              <a:t> &lt; '3.11'",</a:t>
+            </a:r>
+          </a:p>
+          <a:p>
+            <a:pPr marL="0" indent="0">
+              <a:lnSpc>
+                <a:spcPct val="100000"/>
+              </a:lnSpc>
+              <a:spcBef>
+                <a:spcPts val="0"/>
+              </a:spcBef>
+              <a:spcAft>
+                <a:spcPts val="600"/>
+              </a:spcAft>
+              <a:buNone/>
+            </a:pPr>
+            <a:r>
+              <a:rPr lang="en-US" sz="1800" dirty="0">
+                <a:latin typeface="Courier New" panose="02070309020205020404" pitchFamily="49" charset="0"/>
+                <a:cs typeface="Courier New" panose="02070309020205020404" pitchFamily="49" charset="0"/>
+              </a:rPr>
+              <a:t>  "</a:t>
+            </a:r>
+            <a:r>
+              <a:rPr lang="en-US" sz="1800" dirty="0" err="1">
+                <a:latin typeface="Courier New" panose="02070309020205020404" pitchFamily="49" charset="0"/>
+                <a:cs typeface="Courier New" panose="02070309020205020404" pitchFamily="49" charset="0"/>
+              </a:rPr>
+              <a:t>numpy</a:t>
+            </a:r>
+            <a:r>
+              <a:rPr lang="en-US" sz="1800" dirty="0">
+                <a:latin typeface="Courier New" panose="02070309020205020404" pitchFamily="49" charset="0"/>
+                <a:cs typeface="Courier New" panose="02070309020205020404" pitchFamily="49" charset="0"/>
+              </a:rPr>
+              <a:t> &gt;= 1.23.2;</a:t>
+            </a:r>
+          </a:p>
+          <a:p>
+            <a:pPr marL="0" indent="0">
+              <a:lnSpc>
+                <a:spcPct val="100000"/>
+              </a:lnSpc>
+              <a:spcBef>
+                <a:spcPts val="0"/>
+              </a:spcBef>
+              <a:spcAft>
+                <a:spcPts val="600"/>
+              </a:spcAft>
+              <a:buNone/>
+            </a:pPr>
+            <a:r>
+              <a:rPr lang="en-US" sz="1800" dirty="0">
+                <a:latin typeface="Courier New" panose="02070309020205020404" pitchFamily="49" charset="0"/>
+                <a:cs typeface="Courier New" panose="02070309020205020404" pitchFamily="49" charset="0"/>
+              </a:rPr>
+              <a:t>    </a:t>
+            </a:r>
+            <a:r>
+              <a:rPr lang="en-US" sz="1800" dirty="0" err="1">
+                <a:latin typeface="Courier New" panose="02070309020205020404" pitchFamily="49" charset="0"/>
+                <a:cs typeface="Courier New" panose="02070309020205020404" pitchFamily="49" charset="0"/>
+              </a:rPr>
+              <a:t>python_version</a:t>
+            </a:r>
+            <a:r>
+              <a:rPr lang="en-US" sz="1800" dirty="0">
+                <a:latin typeface="Courier New" panose="02070309020205020404" pitchFamily="49" charset="0"/>
+                <a:cs typeface="Courier New" panose="02070309020205020404" pitchFamily="49" charset="0"/>
+              </a:rPr>
+              <a:t> == '3.11'",</a:t>
+            </a:r>
+          </a:p>
+          <a:p>
+            <a:pPr marL="0" indent="0">
+              <a:lnSpc>
+                <a:spcPct val="100000"/>
+              </a:lnSpc>
+              <a:spcBef>
+                <a:spcPts val="0"/>
+              </a:spcBef>
+              <a:spcAft>
+                <a:spcPts val="600"/>
+              </a:spcAft>
+              <a:buNone/>
+            </a:pPr>
+            <a:r>
+              <a:rPr lang="en-US" sz="1800" dirty="0">
+                <a:latin typeface="Courier New" panose="02070309020205020404" pitchFamily="49" charset="0"/>
+                <a:cs typeface="Courier New" panose="02070309020205020404" pitchFamily="49" charset="0"/>
+              </a:rPr>
+              <a:t>  "</a:t>
+            </a:r>
+            <a:r>
+              <a:rPr lang="en-US" sz="1800" dirty="0" err="1">
+                <a:latin typeface="Courier New" panose="02070309020205020404" pitchFamily="49" charset="0"/>
+                <a:cs typeface="Courier New" panose="02070309020205020404" pitchFamily="49" charset="0"/>
+              </a:rPr>
+              <a:t>numpy</a:t>
+            </a:r>
+            <a:r>
+              <a:rPr lang="en-US" sz="1800" dirty="0">
+                <a:latin typeface="Courier New" panose="02070309020205020404" pitchFamily="49" charset="0"/>
+                <a:cs typeface="Courier New" panose="02070309020205020404" pitchFamily="49" charset="0"/>
+              </a:rPr>
+              <a:t> &gt;= 1.26.0;</a:t>
+            </a:r>
+          </a:p>
+          <a:p>
+            <a:pPr marL="0" indent="0">
+              <a:lnSpc>
+                <a:spcPct val="100000"/>
+              </a:lnSpc>
+              <a:spcBef>
+                <a:spcPts val="0"/>
+              </a:spcBef>
+              <a:spcAft>
+                <a:spcPts val="600"/>
+              </a:spcAft>
+              <a:buNone/>
+            </a:pPr>
+            <a:r>
+              <a:rPr lang="en-US" sz="1800" dirty="0">
+                <a:latin typeface="Courier New" panose="02070309020205020404" pitchFamily="49" charset="0"/>
+                <a:cs typeface="Courier New" panose="02070309020205020404" pitchFamily="49" charset="0"/>
+              </a:rPr>
+              <a:t>    </a:t>
+            </a:r>
+            <a:r>
+              <a:rPr lang="en-US" sz="1800" dirty="0" err="1">
+                <a:latin typeface="Courier New" panose="02070309020205020404" pitchFamily="49" charset="0"/>
+                <a:cs typeface="Courier New" panose="02070309020205020404" pitchFamily="49" charset="0"/>
+              </a:rPr>
+              <a:t>python_version</a:t>
+            </a:r>
+            <a:r>
+              <a:rPr lang="en-US" sz="1800" dirty="0">
+                <a:latin typeface="Courier New" panose="02070309020205020404" pitchFamily="49" charset="0"/>
+                <a:cs typeface="Courier New" panose="02070309020205020404" pitchFamily="49" charset="0"/>
+              </a:rPr>
+              <a:t> &gt;= '3.12'",</a:t>
+            </a:r>
+          </a:p>
+          <a:p>
+            <a:pPr marL="0" indent="0">
+              <a:lnSpc>
+                <a:spcPct val="100000"/>
+              </a:lnSpc>
+              <a:spcBef>
+                <a:spcPts val="0"/>
+              </a:spcBef>
+              <a:spcAft>
+                <a:spcPts val="600"/>
+              </a:spcAft>
+              <a:buNone/>
+            </a:pPr>
+            <a:r>
+              <a:rPr lang="en-US" sz="1800" dirty="0">
+                <a:latin typeface="Courier New" panose="02070309020205020404" pitchFamily="49" charset="0"/>
+                <a:cs typeface="Courier New" panose="02070309020205020404" pitchFamily="49" charset="0"/>
+              </a:rPr>
+              <a:t>  "python-</a:t>
+            </a:r>
+            <a:r>
+              <a:rPr lang="en-US" sz="1800" dirty="0" err="1">
+                <a:latin typeface="Courier New" panose="02070309020205020404" pitchFamily="49" charset="0"/>
+                <a:cs typeface="Courier New" panose="02070309020205020404" pitchFamily="49" charset="0"/>
+              </a:rPr>
+              <a:t>dateutil</a:t>
+            </a:r>
+            <a:r>
+              <a:rPr lang="en-US" sz="1800" dirty="0">
+                <a:latin typeface="Courier New" panose="02070309020205020404" pitchFamily="49" charset="0"/>
+                <a:cs typeface="Courier New" panose="02070309020205020404" pitchFamily="49" charset="0"/>
+              </a:rPr>
+              <a:t> &gt;= 2.8.2",</a:t>
+            </a:r>
+          </a:p>
+          <a:p>
+            <a:pPr marL="0" indent="0">
+              <a:lnSpc>
+                <a:spcPct val="100000"/>
+              </a:lnSpc>
+              <a:spcBef>
+                <a:spcPts val="0"/>
+              </a:spcBef>
+              <a:spcAft>
+                <a:spcPts val="600"/>
+              </a:spcAft>
+              <a:buNone/>
+            </a:pPr>
+            <a:r>
+              <a:rPr lang="en-US" sz="1800" dirty="0">
+                <a:latin typeface="Courier New" panose="02070309020205020404" pitchFamily="49" charset="0"/>
+                <a:cs typeface="Courier New" panose="02070309020205020404" pitchFamily="49" charset="0"/>
+              </a:rPr>
+              <a:t>  "</a:t>
+            </a:r>
+            <a:r>
+              <a:rPr lang="en-US" sz="1800" dirty="0" err="1">
+                <a:latin typeface="Courier New" panose="02070309020205020404" pitchFamily="49" charset="0"/>
+                <a:cs typeface="Courier New" panose="02070309020205020404" pitchFamily="49" charset="0"/>
+              </a:rPr>
+              <a:t>pytz</a:t>
+            </a:r>
+            <a:r>
+              <a:rPr lang="en-US" sz="1800" dirty="0">
+                <a:latin typeface="Courier New" panose="02070309020205020404" pitchFamily="49" charset="0"/>
+                <a:cs typeface="Courier New" panose="02070309020205020404" pitchFamily="49" charset="0"/>
+              </a:rPr>
+              <a:t> &gt;= 2020.1",</a:t>
+            </a:r>
+          </a:p>
+          <a:p>
+            <a:pPr marL="0" indent="0">
+              <a:lnSpc>
+                <a:spcPct val="100000"/>
+              </a:lnSpc>
+              <a:spcBef>
+                <a:spcPts val="0"/>
+              </a:spcBef>
+              <a:spcAft>
+                <a:spcPts val="600"/>
+              </a:spcAft>
+              <a:buNone/>
+            </a:pPr>
+            <a:r>
+              <a:rPr lang="en-US" sz="1800" dirty="0">
+                <a:latin typeface="Courier New" panose="02070309020205020404" pitchFamily="49" charset="0"/>
+                <a:cs typeface="Courier New" panose="02070309020205020404" pitchFamily="49" charset="0"/>
+              </a:rPr>
+              <a:t>  "</a:t>
+            </a:r>
+            <a:r>
+              <a:rPr lang="en-US" sz="1800" dirty="0" err="1">
+                <a:latin typeface="Courier New" panose="02070309020205020404" pitchFamily="49" charset="0"/>
+                <a:cs typeface="Courier New" panose="02070309020205020404" pitchFamily="49" charset="0"/>
+              </a:rPr>
+              <a:t>tzdata</a:t>
+            </a:r>
+            <a:r>
+              <a:rPr lang="en-US" sz="1800" dirty="0">
+                <a:latin typeface="Courier New" panose="02070309020205020404" pitchFamily="49" charset="0"/>
+                <a:cs typeface="Courier New" panose="02070309020205020404" pitchFamily="49" charset="0"/>
+              </a:rPr>
+              <a:t> &gt;= 2022.7"</a:t>
+            </a:r>
+          </a:p>
+          <a:p>
+            <a:pPr marL="0" indent="0">
+              <a:lnSpc>
+                <a:spcPct val="100000"/>
+              </a:lnSpc>
+              <a:spcBef>
+                <a:spcPts val="0"/>
+              </a:spcBef>
+              <a:spcAft>
+                <a:spcPts val="600"/>
+              </a:spcAft>
+              <a:buNone/>
+            </a:pPr>
+            <a:r>
+              <a:rPr lang="en-US" sz="1800" dirty="0">
+                <a:latin typeface="Courier New" panose="02070309020205020404" pitchFamily="49" charset="0"/>
+                <a:cs typeface="Courier New" panose="02070309020205020404" pitchFamily="49" charset="0"/>
+              </a:rPr>
+              <a:t>]</a:t>
+            </a:r>
+          </a:p>
+        </p:txBody>
+      </p:sp>
+      <p:cxnSp>
+        <p:nvCxnSpPr>
+          <p:cNvPr id="4" name="Straight Connector 3">
+            <a:extLst>
+              <a:ext uri="{FF2B5EF4-FFF2-40B4-BE49-F238E27FC236}">
+                <a16:creationId xmlns:a16="http://schemas.microsoft.com/office/drawing/2014/main" id="{D6A2E80B-8462-4FE6-2CAC-1871043A36A6}"/>
+              </a:ext>
+            </a:extLst>
+          </p:cNvPr>
+          <p:cNvCxnSpPr>
+            <a:cxnSpLocks/>
+          </p:cNvCxnSpPr>
+          <p:nvPr/>
+        </p:nvCxnSpPr>
+        <p:spPr>
+          <a:xfrm>
+            <a:off x="5960533" y="1388533"/>
+            <a:ext cx="0" cy="4788430"/>
+          </a:xfrm>
+          <a:prstGeom prst="line">
+            <a:avLst/>
+          </a:prstGeom>
+        </p:spPr>
+        <p:style>
+          <a:lnRef idx="3">
+            <a:schemeClr val="dk1"/>
+          </a:lnRef>
+          <a:fillRef idx="0">
+            <a:schemeClr val="dk1"/>
+          </a:fillRef>
+          <a:effectRef idx="2">
+            <a:schemeClr val="dk1"/>
+          </a:effectRef>
+          <a:fontRef idx="minor">
+            <a:schemeClr val="tx1"/>
+          </a:fontRef>
+        </p:style>
+      </p:cxnSp>
+    </p:spTree>
+    <p:extLst>
+      <p:ext uri="{BB962C8B-B14F-4D97-AF65-F5344CB8AC3E}">
+        <p14:creationId xmlns:p14="http://schemas.microsoft.com/office/powerpoint/2010/main" val="3809846140"/>
+      </p:ext>
+    </p:extLst>
+  </p:cSld>
+  <p:clrMapOvr>
+    <a:masterClrMapping/>
+  </p:clrMapOvr>
+</p:sld>
+</file>
+
+<file path=ppt/slides/slide28.xml><?xml version="1.0" encoding="utf-8"?>
+<p:sld xmlns:a="http://schemas.openxmlformats.org/drawingml/2006/main" xmlns:r="http://schemas.openxmlformats.org/officeDocument/2006/relationships" xmlns:p="http://schemas.openxmlformats.org/presentationml/2006/main">
+  <p:cSld>
+    <p:spTree>
+      <p:nvGrpSpPr>
+        <p:cNvPr id="1" name="">
+          <a:extLst>
+            <a:ext uri="{FF2B5EF4-FFF2-40B4-BE49-F238E27FC236}">
+              <a16:creationId xmlns:a16="http://schemas.microsoft.com/office/drawing/2014/main" id="{A0AFDB43-1F10-E7EB-0AFA-1C423CAB063A}"/>
+            </a:ext>
+          </a:extLst>
+        </p:cNvPr>
+        <p:cNvGrpSpPr/>
+        <p:nvPr/>
+      </p:nvGrpSpPr>
+      <p:grpSpPr>
+        <a:xfrm>
+          <a:off x="0" y="0"/>
+          <a:ext cx="0" cy="0"/>
+          <a:chOff x="0" y="0"/>
+          <a:chExt cx="0" cy="0"/>
+        </a:xfrm>
+      </p:grpSpPr>
+      <p:sp>
+        <p:nvSpPr>
+          <p:cNvPr id="2" name="Title 1">
+            <a:extLst>
+              <a:ext uri="{FF2B5EF4-FFF2-40B4-BE49-F238E27FC236}">
+                <a16:creationId xmlns:a16="http://schemas.microsoft.com/office/drawing/2014/main" id="{43BCE93A-6C5A-B473-9AB1-6910F251DEAD}"/>
+              </a:ext>
+            </a:extLst>
+          </p:cNvPr>
+          <p:cNvSpPr>
+            <a:spLocks noGrp="1"/>
+          </p:cNvSpPr>
+          <p:nvPr>
+            <p:ph type="title"/>
+          </p:nvPr>
+        </p:nvSpPr>
+        <p:spPr>
+          <a:xfrm>
+            <a:off x="838200" y="365126"/>
+            <a:ext cx="10515600" cy="718608"/>
+          </a:xfrm>
+        </p:spPr>
+        <p:txBody>
+          <a:bodyPr>
+            <a:normAutofit/>
+          </a:bodyPr>
+          <a:lstStyle/>
+          <a:p>
+            <a:r>
+              <a:rPr lang="nl-NL" sz="3600" dirty="0"/>
+              <a:t>Het </a:t>
+            </a:r>
+            <a:r>
+              <a:rPr lang="nl-NL" sz="3600" dirty="0" err="1"/>
+              <a:t>uv.lock</a:t>
+            </a:r>
+            <a:r>
+              <a:rPr lang="nl-NL" sz="3600" dirty="0"/>
+              <a:t> bestand</a:t>
+            </a:r>
+            <a:endParaRPr lang="nl-NL" sz="3600" noProof="0" dirty="0"/>
+          </a:p>
+        </p:txBody>
+      </p:sp>
+      <p:sp>
+        <p:nvSpPr>
+          <p:cNvPr id="3" name="Content Placeholder 2">
+            <a:extLst>
+              <a:ext uri="{FF2B5EF4-FFF2-40B4-BE49-F238E27FC236}">
+                <a16:creationId xmlns:a16="http://schemas.microsoft.com/office/drawing/2014/main" id="{1781E3BA-8183-4B30-8D19-68FB912DE441}"/>
+              </a:ext>
+            </a:extLst>
+          </p:cNvPr>
+          <p:cNvSpPr>
+            <a:spLocks noGrp="1"/>
+          </p:cNvSpPr>
+          <p:nvPr>
+            <p:ph idx="1"/>
+          </p:nvPr>
+        </p:nvSpPr>
+        <p:spPr>
+          <a:xfrm>
+            <a:off x="838198" y="1456267"/>
+            <a:ext cx="4715935" cy="4720696"/>
+          </a:xfrm>
+        </p:spPr>
+        <p:txBody>
+          <a:bodyPr>
+            <a:normAutofit/>
+          </a:bodyPr>
+          <a:lstStyle/>
+          <a:p>
+            <a:pPr marL="0" indent="0">
+              <a:buNone/>
+            </a:pPr>
+            <a:r>
+              <a:rPr lang="nl-NL" sz="2000" dirty="0" err="1">
+                <a:latin typeface="Courier New" panose="02070309020205020404" pitchFamily="49" charset="0"/>
+                <a:cs typeface="Courier New" panose="02070309020205020404" pitchFamily="49" charset="0"/>
+              </a:rPr>
+              <a:t>uv.lock</a:t>
+            </a:r>
+            <a:r>
+              <a:rPr lang="nl-NL" sz="2000" dirty="0"/>
+              <a:t> legt de exacte versies van alle packages in de virtuele omgeving vast.</a:t>
+            </a:r>
+          </a:p>
+          <a:p>
+            <a:pPr marL="0" indent="0">
+              <a:buNone/>
+            </a:pPr>
+            <a:endParaRPr lang="nl-NL" sz="2000" dirty="0"/>
+          </a:p>
+          <a:p>
+            <a:pPr marL="0" indent="0">
+              <a:buNone/>
+            </a:pPr>
+            <a:endParaRPr lang="nl-NL" sz="2000" dirty="0"/>
+          </a:p>
+          <a:p>
+            <a:pPr marL="0" indent="0">
+              <a:buNone/>
+            </a:pPr>
+            <a:r>
+              <a:rPr lang="nl-NL" sz="2000" dirty="0"/>
+              <a:t>Met </a:t>
+            </a:r>
+            <a:r>
+              <a:rPr lang="nl-NL" sz="2000" dirty="0" err="1">
+                <a:latin typeface="Courier New" panose="02070309020205020404" pitchFamily="49" charset="0"/>
+                <a:cs typeface="Courier New" panose="02070309020205020404" pitchFamily="49" charset="0"/>
+              </a:rPr>
+              <a:t>uv.lock</a:t>
+            </a:r>
+            <a:r>
+              <a:rPr lang="nl-NL" sz="2000" dirty="0"/>
+              <a:t> kun je een virtuele omgeving exact reproduceren!</a:t>
+            </a:r>
+          </a:p>
+          <a:p>
+            <a:pPr marL="0" indent="0">
+              <a:buNone/>
+            </a:pPr>
+            <a:endParaRPr lang="nl-NL" sz="2000" dirty="0"/>
+          </a:p>
+          <a:p>
+            <a:pPr marL="0" indent="0">
+              <a:buNone/>
+            </a:pPr>
+            <a:endParaRPr lang="nl-NL" sz="2000" dirty="0"/>
+          </a:p>
+          <a:p>
+            <a:pPr marL="0" indent="0">
+              <a:buNone/>
+            </a:pPr>
+            <a:r>
+              <a:rPr lang="nl-NL" sz="2000" dirty="0"/>
+              <a:t>Maar: wijzigingen in </a:t>
+            </a:r>
+            <a:r>
+              <a:rPr lang="nl-NL" sz="2000" dirty="0" err="1">
+                <a:latin typeface="Courier New" panose="02070309020205020404" pitchFamily="49" charset="0"/>
+                <a:cs typeface="Courier New" panose="02070309020205020404" pitchFamily="49" charset="0"/>
+              </a:rPr>
+              <a:t>pyproject.toml</a:t>
+            </a:r>
+            <a:r>
+              <a:rPr lang="nl-NL" sz="2000" dirty="0"/>
+              <a:t> kunnen update van </a:t>
+            </a:r>
+            <a:r>
+              <a:rPr lang="nl-NL" sz="2000" dirty="0" err="1">
+                <a:latin typeface="Courier New" panose="02070309020205020404" pitchFamily="49" charset="0"/>
+                <a:cs typeface="Courier New" panose="02070309020205020404" pitchFamily="49" charset="0"/>
+              </a:rPr>
+              <a:t>uv.lock</a:t>
+            </a:r>
+            <a:r>
+              <a:rPr lang="nl-NL" sz="2000" dirty="0"/>
+              <a:t> veroorzaken.</a:t>
+            </a:r>
+          </a:p>
+        </p:txBody>
+      </p:sp>
+      <p:sp>
+        <p:nvSpPr>
+          <p:cNvPr id="5" name="Content Placeholder 2">
+            <a:extLst>
+              <a:ext uri="{FF2B5EF4-FFF2-40B4-BE49-F238E27FC236}">
+                <a16:creationId xmlns:a16="http://schemas.microsoft.com/office/drawing/2014/main" id="{737715E9-1B15-6F8F-5184-356488E58119}"/>
               </a:ext>
             </a:extLst>
           </p:cNvPr>
@@ -13166,10 +14387,48 @@
           </a:p>
         </p:txBody>
       </p:sp>
+      <p:cxnSp>
+        <p:nvCxnSpPr>
+          <p:cNvPr id="4" name="Straight Connector 3">
+            <a:extLst>
+              <a:ext uri="{FF2B5EF4-FFF2-40B4-BE49-F238E27FC236}">
+                <a16:creationId xmlns:a16="http://schemas.microsoft.com/office/drawing/2014/main" id="{D0FDA2E1-2FE5-05F8-476B-025A8D9D164D}"/>
+              </a:ext>
+            </a:extLst>
+          </p:cNvPr>
+          <p:cNvCxnSpPr>
+            <a:cxnSpLocks/>
+          </p:cNvCxnSpPr>
+          <p:nvPr/>
+        </p:nvCxnSpPr>
+        <p:spPr>
+          <a:xfrm>
+            <a:off x="5960533" y="1388533"/>
+            <a:ext cx="0" cy="4788430"/>
+          </a:xfrm>
+          <a:prstGeom prst="line">
+            <a:avLst/>
+          </a:prstGeom>
+        </p:spPr>
+        <p:style>
+          <a:lnRef idx="3">
+            <a:schemeClr val="dk1"/>
+          </a:lnRef>
+          <a:fillRef idx="0">
+            <a:schemeClr val="dk1"/>
+          </a:fillRef>
+          <a:effectRef idx="2">
+            <a:schemeClr val="dk1"/>
+          </a:effectRef>
+          <a:fontRef idx="minor">
+            <a:schemeClr val="tx1"/>
+          </a:fontRef>
+        </p:style>
+      </p:cxnSp>
     </p:spTree>
     <p:extLst>
       <p:ext uri="{BB962C8B-B14F-4D97-AF65-F5344CB8AC3E}">
-        <p14:creationId xmlns:p14="http://schemas.microsoft.com/office/powerpoint/2010/main" val="3809846140"/>
+        <p14:creationId xmlns:p14="http://schemas.microsoft.com/office/powerpoint/2010/main" val="8306357"/>
       </p:ext>
     </p:extLst>
   </p:cSld>
@@ -13179,7 +14438,7 @@
 </p:sld>
 </file>
 
-<file path=ppt/slides/slide28.xml><?xml version="1.0" encoding="utf-8"?>
+<file path=ppt/slides/slide29.xml><?xml version="1.0" encoding="utf-8"?>
 <p:sld xmlns:a="http://schemas.openxmlformats.org/drawingml/2006/main" xmlns:r="http://schemas.openxmlformats.org/officeDocument/2006/relationships" xmlns:p="http://schemas.openxmlformats.org/presentationml/2006/main">
   <p:cSld>
     <p:spTree>
@@ -13275,69 +14534,72 @@
             </a:pPr>
             <a:r>
               <a:rPr lang="nl-NL" sz="2000" dirty="0"/>
-              <a:t>Updaten </a:t>
-            </a:r>
-            <a:r>
-              <a:rPr lang="nl-NL" sz="2000" dirty="0" err="1"/>
+              <a:t>Update </a:t>
+            </a:r>
+            <a:r>
+              <a:rPr lang="nl-NL" sz="2000" dirty="0" err="1">
+                <a:latin typeface="Courier New" panose="02070309020205020404" pitchFamily="49" charset="0"/>
+                <a:cs typeface="Courier New" panose="02070309020205020404" pitchFamily="49" charset="0"/>
+              </a:rPr>
+              <a:t>uv.lock</a:t>
+            </a:r>
+            <a:r>
+              <a:rPr lang="nl-NL" sz="2000" dirty="0"/>
+              <a:t> handmatig met:</a:t>
+            </a:r>
+          </a:p>
+          <a:p>
+            <a:pPr marL="0" indent="0">
+              <a:buNone/>
+            </a:pPr>
+            <a:endParaRPr lang="nl-NL" sz="2000" dirty="0"/>
+          </a:p>
+          <a:p>
+            <a:pPr marL="0" indent="0">
+              <a:buNone/>
+            </a:pPr>
+            <a:r>
+              <a:rPr lang="nl-NL" sz="2000" dirty="0" err="1">
+                <a:latin typeface="Courier New" panose="02070309020205020404" pitchFamily="49" charset="0"/>
+                <a:cs typeface="Courier New" panose="02070309020205020404" pitchFamily="49" charset="0"/>
+              </a:rPr>
+              <a:t>uv</a:t>
+            </a:r>
+            <a:r>
+              <a:rPr lang="nl-NL" sz="2000" dirty="0">
+                <a:latin typeface="Courier New" panose="02070309020205020404" pitchFamily="49" charset="0"/>
+                <a:cs typeface="Courier New" panose="02070309020205020404" pitchFamily="49" charset="0"/>
+              </a:rPr>
+              <a:t> </a:t>
+            </a:r>
+            <a:r>
+              <a:rPr lang="nl-NL" sz="2000" dirty="0" err="1">
+                <a:latin typeface="Courier New" panose="02070309020205020404" pitchFamily="49" charset="0"/>
+                <a:cs typeface="Courier New" panose="02070309020205020404" pitchFamily="49" charset="0"/>
+              </a:rPr>
               <a:t>lock</a:t>
             </a:r>
             <a:r>
+              <a:rPr lang="nl-NL" sz="2000" dirty="0">
+                <a:latin typeface="Courier New" panose="02070309020205020404" pitchFamily="49" charset="0"/>
+                <a:cs typeface="Courier New" panose="02070309020205020404" pitchFamily="49" charset="0"/>
+              </a:rPr>
+              <a:t> --upgrade</a:t>
+            </a:r>
+          </a:p>
+          <a:p>
+            <a:pPr marL="0" indent="0">
+              <a:buNone/>
+            </a:pPr>
+            <a:endParaRPr lang="nl-NL" sz="2000" dirty="0"/>
+          </a:p>
+          <a:p>
+            <a:pPr marL="0" indent="0">
+              <a:buNone/>
+            </a:pPr>
+            <a:r>
               <a:rPr lang="nl-NL" sz="2000" dirty="0"/>
-              <a:t> file kan met:</a:t>
-            </a:r>
-          </a:p>
-          <a:p>
-            <a:pPr marL="0" indent="0">
-              <a:buNone/>
-            </a:pPr>
-            <a:endParaRPr lang="nl-NL" sz="2000" dirty="0"/>
-          </a:p>
-          <a:p>
-            <a:pPr marL="0" indent="0">
-              <a:buNone/>
-            </a:pPr>
-            <a:r>
-              <a:rPr lang="nl-NL" sz="2000" dirty="0" err="1">
-                <a:latin typeface="Courier New" panose="02070309020205020404" pitchFamily="49" charset="0"/>
-                <a:cs typeface="Courier New" panose="02070309020205020404" pitchFamily="49" charset="0"/>
-              </a:rPr>
-              <a:t>uv</a:t>
-            </a:r>
-            <a:r>
-              <a:rPr lang="nl-NL" sz="2000" dirty="0">
-                <a:latin typeface="Courier New" panose="02070309020205020404" pitchFamily="49" charset="0"/>
-                <a:cs typeface="Courier New" panose="02070309020205020404" pitchFamily="49" charset="0"/>
-              </a:rPr>
-              <a:t> </a:t>
-            </a:r>
-            <a:r>
-              <a:rPr lang="nl-NL" sz="2000" dirty="0" err="1">
-                <a:latin typeface="Courier New" panose="02070309020205020404" pitchFamily="49" charset="0"/>
-                <a:cs typeface="Courier New" panose="02070309020205020404" pitchFamily="49" charset="0"/>
-              </a:rPr>
-              <a:t>lock</a:t>
-            </a:r>
-            <a:r>
-              <a:rPr lang="nl-NL" sz="2000" dirty="0">
-                <a:latin typeface="Courier New" panose="02070309020205020404" pitchFamily="49" charset="0"/>
-                <a:cs typeface="Courier New" panose="02070309020205020404" pitchFamily="49" charset="0"/>
-              </a:rPr>
-              <a:t> --upgrade</a:t>
-            </a:r>
-          </a:p>
-          <a:p>
-            <a:pPr marL="0" indent="0">
-              <a:buNone/>
-            </a:pPr>
-            <a:endParaRPr lang="nl-NL" sz="2000" dirty="0"/>
-          </a:p>
-          <a:p>
-            <a:pPr marL="0" indent="0">
-              <a:buNone/>
-            </a:pPr>
-            <a:r>
-              <a:rPr lang="nl-NL" sz="2000" dirty="0"/>
-              <a:t>Gelijktrekken omgeving en </a:t>
+              <a:t>Synchroniseren omgeving en </a:t>
             </a:r>
             <a:r>
               <a:rPr lang="nl-NL" sz="2000" dirty="0" err="1">
@@ -14131,99 +15393,48 @@
           </a:p>
         </p:txBody>
       </p:sp>
+      <p:cxnSp>
+        <p:nvCxnSpPr>
+          <p:cNvPr id="4" name="Straight Connector 3">
+            <a:extLst>
+              <a:ext uri="{FF2B5EF4-FFF2-40B4-BE49-F238E27FC236}">
+                <a16:creationId xmlns:a16="http://schemas.microsoft.com/office/drawing/2014/main" id="{26C9F77A-0228-C9E5-58AE-CFEB18443A9E}"/>
+              </a:ext>
+            </a:extLst>
+          </p:cNvPr>
+          <p:cNvCxnSpPr>
+            <a:cxnSpLocks/>
+          </p:cNvCxnSpPr>
+          <p:nvPr/>
+        </p:nvCxnSpPr>
+        <p:spPr>
+          <a:xfrm>
+            <a:off x="5960533" y="1388533"/>
+            <a:ext cx="0" cy="4788430"/>
+          </a:xfrm>
+          <a:prstGeom prst="line">
+            <a:avLst/>
+          </a:prstGeom>
+        </p:spPr>
+        <p:style>
+          <a:lnRef idx="3">
+            <a:schemeClr val="dk1"/>
+          </a:lnRef>
+          <a:fillRef idx="0">
+            <a:schemeClr val="dk1"/>
+          </a:fillRef>
+          <a:effectRef idx="2">
+            <a:schemeClr val="dk1"/>
+          </a:effectRef>
+          <a:fontRef idx="minor">
+            <a:schemeClr val="tx1"/>
+          </a:fontRef>
+        </p:style>
+      </p:cxnSp>
     </p:spTree>
     <p:extLst>
       <p:ext uri="{BB962C8B-B14F-4D97-AF65-F5344CB8AC3E}">
         <p14:creationId xmlns:p14="http://schemas.microsoft.com/office/powerpoint/2010/main" val="3019983136"/>
-      </p:ext>
-    </p:extLst>
-  </p:cSld>
-  <p:clrMapOvr>
-    <a:masterClrMapping/>
-  </p:clrMapOvr>
-</p:sld>
-</file>
-
-<file path=ppt/slides/slide29.xml><?xml version="1.0" encoding="utf-8"?>
-<p:sld xmlns:a="http://schemas.openxmlformats.org/drawingml/2006/main" xmlns:r="http://schemas.openxmlformats.org/officeDocument/2006/relationships" xmlns:p="http://schemas.openxmlformats.org/presentationml/2006/main">
-  <p:cSld>
-    <p:spTree>
-      <p:nvGrpSpPr>
-        <p:cNvPr id="1" name="">
-          <a:extLst>
-            <a:ext uri="{FF2B5EF4-FFF2-40B4-BE49-F238E27FC236}">
-              <a16:creationId xmlns:a16="http://schemas.microsoft.com/office/drawing/2014/main" id="{77E209A3-99EC-A18B-7CE2-4A05569F6C9C}"/>
-            </a:ext>
-          </a:extLst>
-        </p:cNvPr>
-        <p:cNvGrpSpPr/>
-        <p:nvPr/>
-      </p:nvGrpSpPr>
-      <p:grpSpPr>
-        <a:xfrm>
-          <a:off x="0" y="0"/>
-          <a:ext cx="0" cy="0"/>
-          <a:chOff x="0" y="0"/>
-          <a:chExt cx="0" cy="0"/>
-        </a:xfrm>
-      </p:grpSpPr>
-      <p:sp>
-        <p:nvSpPr>
-          <p:cNvPr id="4" name="Title 3">
-            <a:extLst>
-              <a:ext uri="{FF2B5EF4-FFF2-40B4-BE49-F238E27FC236}">
-                <a16:creationId xmlns:a16="http://schemas.microsoft.com/office/drawing/2014/main" id="{308BF3EB-11DE-EB68-ACE3-AFB603E128EB}"/>
-              </a:ext>
-            </a:extLst>
-          </p:cNvPr>
-          <p:cNvSpPr>
-            <a:spLocks noGrp="1"/>
-          </p:cNvSpPr>
-          <p:nvPr>
-            <p:ph type="title"/>
-          </p:nvPr>
-        </p:nvSpPr>
-        <p:spPr/>
-        <p:txBody>
-          <a:bodyPr/>
-          <a:lstStyle/>
-          <a:p>
-            <a:r>
-              <a:rPr lang="nl-NL" noProof="0" dirty="0"/>
-              <a:t>Package maken</a:t>
-            </a:r>
-          </a:p>
-        </p:txBody>
-      </p:sp>
-      <p:sp>
-        <p:nvSpPr>
-          <p:cNvPr id="5" name="Text Placeholder 4">
-            <a:extLst>
-              <a:ext uri="{FF2B5EF4-FFF2-40B4-BE49-F238E27FC236}">
-                <a16:creationId xmlns:a16="http://schemas.microsoft.com/office/drawing/2014/main" id="{3BA06D4F-E101-4332-DA66-985969D823A3}"/>
-              </a:ext>
-            </a:extLst>
-          </p:cNvPr>
-          <p:cNvSpPr>
-            <a:spLocks noGrp="1"/>
-          </p:cNvSpPr>
-          <p:nvPr>
-            <p:ph type="body" idx="1"/>
-          </p:nvPr>
-        </p:nvSpPr>
-        <p:spPr/>
-        <p:txBody>
-          <a:bodyPr/>
-          <a:lstStyle/>
-          <a:p>
-            <a:endParaRPr lang="en-NL"/>
-          </a:p>
-        </p:txBody>
-      </p:sp>
-    </p:spTree>
-    <p:extLst>
-      <p:ext uri="{BB962C8B-B14F-4D97-AF65-F5344CB8AC3E}">
-        <p14:creationId xmlns:p14="http://schemas.microsoft.com/office/powerpoint/2010/main" val="136042607"/>
       </p:ext>
     </p:extLst>
   </p:cSld>
@@ -14317,6 +15528,95 @@
 </file>
 
 <file path=ppt/slides/slide30.xml><?xml version="1.0" encoding="utf-8"?>
+<p:sld xmlns:a="http://schemas.openxmlformats.org/drawingml/2006/main" xmlns:r="http://schemas.openxmlformats.org/officeDocument/2006/relationships" xmlns:p="http://schemas.openxmlformats.org/presentationml/2006/main">
+  <p:cSld>
+    <p:spTree>
+      <p:nvGrpSpPr>
+        <p:cNvPr id="1" name="">
+          <a:extLst>
+            <a:ext uri="{FF2B5EF4-FFF2-40B4-BE49-F238E27FC236}">
+              <a16:creationId xmlns:a16="http://schemas.microsoft.com/office/drawing/2014/main" id="{77E209A3-99EC-A18B-7CE2-4A05569F6C9C}"/>
+            </a:ext>
+          </a:extLst>
+        </p:cNvPr>
+        <p:cNvGrpSpPr/>
+        <p:nvPr/>
+      </p:nvGrpSpPr>
+      <p:grpSpPr>
+        <a:xfrm>
+          <a:off x="0" y="0"/>
+          <a:ext cx="0" cy="0"/>
+          <a:chOff x="0" y="0"/>
+          <a:chExt cx="0" cy="0"/>
+        </a:xfrm>
+      </p:grpSpPr>
+      <p:sp>
+        <p:nvSpPr>
+          <p:cNvPr id="4" name="Title 3">
+            <a:extLst>
+              <a:ext uri="{FF2B5EF4-FFF2-40B4-BE49-F238E27FC236}">
+                <a16:creationId xmlns:a16="http://schemas.microsoft.com/office/drawing/2014/main" id="{308BF3EB-11DE-EB68-ACE3-AFB603E128EB}"/>
+              </a:ext>
+            </a:extLst>
+          </p:cNvPr>
+          <p:cNvSpPr>
+            <a:spLocks noGrp="1"/>
+          </p:cNvSpPr>
+          <p:nvPr>
+            <p:ph type="title"/>
+          </p:nvPr>
+        </p:nvSpPr>
+        <p:spPr/>
+        <p:txBody>
+          <a:bodyPr/>
+          <a:lstStyle/>
+          <a:p>
+            <a:r>
+              <a:rPr lang="nl-NL" noProof="0" dirty="0"/>
+              <a:t>Package maken</a:t>
+            </a:r>
+          </a:p>
+        </p:txBody>
+      </p:sp>
+      <p:sp>
+        <p:nvSpPr>
+          <p:cNvPr id="5" name="Text Placeholder 4">
+            <a:extLst>
+              <a:ext uri="{FF2B5EF4-FFF2-40B4-BE49-F238E27FC236}">
+                <a16:creationId xmlns:a16="http://schemas.microsoft.com/office/drawing/2014/main" id="{3BA06D4F-E101-4332-DA66-985969D823A3}"/>
+              </a:ext>
+            </a:extLst>
+          </p:cNvPr>
+          <p:cNvSpPr>
+            <a:spLocks noGrp="1"/>
+          </p:cNvSpPr>
+          <p:nvPr>
+            <p:ph type="body" idx="1"/>
+          </p:nvPr>
+        </p:nvSpPr>
+        <p:spPr/>
+        <p:txBody>
+          <a:bodyPr/>
+          <a:lstStyle/>
+          <a:p>
+            <a:endParaRPr lang="en-NL"/>
+          </a:p>
+        </p:txBody>
+      </p:sp>
+    </p:spTree>
+    <p:extLst>
+      <p:ext uri="{BB962C8B-B14F-4D97-AF65-F5344CB8AC3E}">
+        <p14:creationId xmlns:p14="http://schemas.microsoft.com/office/powerpoint/2010/main" val="136042607"/>
+      </p:ext>
+    </p:extLst>
+  </p:cSld>
+  <p:clrMapOvr>
+    <a:masterClrMapping/>
+  </p:clrMapOvr>
+</p:sld>
+</file>
+
+<file path=ppt/slides/slide31.xml><?xml version="1.0" encoding="utf-8"?>
 <p:sld xmlns:a="http://schemas.openxmlformats.org/drawingml/2006/main" xmlns:r="http://schemas.openxmlformats.org/officeDocument/2006/relationships" xmlns:p="http://schemas.openxmlformats.org/presentationml/2006/main">
   <p:cSld>
     <p:spTree>
@@ -14433,7 +15733,7 @@
             </a:pPr>
             <a:r>
               <a:rPr lang="nl-NL" sz="2000" dirty="0"/>
-              <a:t>Collectie van Python scripts.</a:t>
+              <a:t>Verzameling Python scripts.</a:t>
             </a:r>
           </a:p>
           <a:p>
@@ -14450,7 +15750,7 @@
             </a:pPr>
             <a:r>
               <a:rPr lang="nl-NL" sz="2000" dirty="0"/>
-              <a:t>Eindgebruiker werkt direct met de scripts.</a:t>
+              <a:t>Eindgebruiker werkt zelf met de scripts.</a:t>
             </a:r>
           </a:p>
           <a:p>
@@ -14465,6 +15765,13 @@
               <a:buFontTx/>
               <a:buChar char="-"/>
             </a:pPr>
+            <a:endParaRPr lang="nl-NL" sz="2000" noProof="0" dirty="0"/>
+          </a:p>
+          <a:p>
+            <a:pPr>
+              <a:buFontTx/>
+              <a:buChar char="-"/>
+            </a:pPr>
             <a:r>
               <a:rPr lang="nl-NL" sz="2000" dirty="0"/>
               <a:t>Voorbeelden:</a:t>
@@ -14485,7 +15792,7 @@
             </a:r>
             <a:r>
               <a:rPr lang="nl-NL" sz="2000" dirty="0"/>
-              <a:t> analyse</a:t>
+              <a:t> notebooks</a:t>
             </a:r>
           </a:p>
           <a:p>
@@ -14757,7 +16064,7 @@
             </a:pPr>
             <a:r>
               <a:rPr lang="nl-NL" sz="2000" dirty="0"/>
-              <a:t>Collectie van Python scripts.</a:t>
+              <a:t>Verzameling Python scripts.</a:t>
             </a:r>
           </a:p>
           <a:p>
@@ -14774,7 +16081,7 @@
             </a:pPr>
             <a:r>
               <a:rPr lang="nl-NL" sz="2000" dirty="0"/>
-              <a:t>Eindgebruiker importeert code in eigen scripts.</a:t>
+              <a:t>Eindgebruiker importeert package in eigen scripts.</a:t>
             </a:r>
           </a:p>
           <a:p>
@@ -14838,7 +16145,7 @@
 </p:sld>
 </file>
 
-<file path=ppt/slides/slide31.xml><?xml version="1.0" encoding="utf-8"?>
+<file path=ppt/slides/slide32.xml><?xml version="1.0" encoding="utf-8"?>
 <p:sld xmlns:a="http://schemas.openxmlformats.org/drawingml/2006/main" xmlns:r="http://schemas.openxmlformats.org/officeDocument/2006/relationships" xmlns:p="http://schemas.openxmlformats.org/presentationml/2006/main">
   <p:cSld>
     <p:spTree>
@@ -14920,7 +16227,7 @@
         </p:spPr>
         <p:txBody>
           <a:bodyPr>
-            <a:normAutofit lnSpcReduction="10000"/>
+            <a:normAutofit/>
           </a:bodyPr>
           <a:lstStyle/>
           <a:p>
@@ -14929,7 +16236,7 @@
             </a:pPr>
             <a:r>
               <a:rPr lang="nl-NL" sz="2000" dirty="0"/>
-              <a:t>Eenvoudig project opzetten met </a:t>
+              <a:t>Package opzetten met </a:t>
             </a:r>
             <a:r>
               <a:rPr lang="nl-NL" sz="2000" dirty="0" err="1"/>
@@ -14945,39 +16252,6 @@
               <a:buNone/>
             </a:pPr>
             <a:endParaRPr lang="nl-NL" sz="2000" dirty="0"/>
-          </a:p>
-          <a:p>
-            <a:pPr marL="0" indent="0">
-              <a:buNone/>
-            </a:pPr>
-            <a:r>
-              <a:rPr lang="nl-NL" sz="2000" dirty="0" err="1">
-                <a:latin typeface="Courier New" panose="02070309020205020404" pitchFamily="49" charset="0"/>
-                <a:cs typeface="Courier New" panose="02070309020205020404" pitchFamily="49" charset="0"/>
-              </a:rPr>
-              <a:t>uv</a:t>
-            </a:r>
-            <a:r>
-              <a:rPr lang="nl-NL" sz="2000" dirty="0">
-                <a:latin typeface="Courier New" panose="02070309020205020404" pitchFamily="49" charset="0"/>
-                <a:cs typeface="Courier New" panose="02070309020205020404" pitchFamily="49" charset="0"/>
-              </a:rPr>
-              <a:t> </a:t>
-            </a:r>
-            <a:r>
-              <a:rPr lang="nl-NL" sz="2000" dirty="0" err="1">
-                <a:latin typeface="Courier New" panose="02070309020205020404" pitchFamily="49" charset="0"/>
-                <a:cs typeface="Courier New" panose="02070309020205020404" pitchFamily="49" charset="0"/>
-              </a:rPr>
-              <a:t>init</a:t>
-            </a:r>
-            <a:r>
-              <a:rPr lang="nl-NL" sz="2000" dirty="0">
-                <a:latin typeface="Courier New" panose="02070309020205020404" pitchFamily="49" charset="0"/>
-                <a:cs typeface="Courier New" panose="02070309020205020404" pitchFamily="49" charset="0"/>
-              </a:rPr>
-              <a:t> --package</a:t>
-            </a:r>
           </a:p>
           <a:p>
             <a:pPr marL="0" indent="0">
@@ -15039,12 +16313,26 @@
               <a:buChar char="-"/>
             </a:pPr>
             <a:r>
-              <a:rPr lang="nl-NL" sz="2000" dirty="0" err="1"/>
+              <a:rPr lang="nl-NL" sz="2000" dirty="0"/>
+              <a:t>Een </a:t>
+            </a:r>
+            <a:r>
+              <a:rPr lang="nl-NL" sz="2000" dirty="0" err="1">
+                <a:latin typeface="Courier New" panose="02070309020205020404" pitchFamily="49" charset="0"/>
+                <a:cs typeface="Courier New" panose="02070309020205020404" pitchFamily="49" charset="0"/>
+              </a:rPr>
               <a:t>src</a:t>
             </a:r>
             <a:r>
+              <a:rPr lang="nl-NL" sz="2000" dirty="0">
+                <a:latin typeface="Courier New" panose="02070309020205020404" pitchFamily="49" charset="0"/>
+                <a:cs typeface="Courier New" panose="02070309020205020404" pitchFamily="49" charset="0"/>
+              </a:rPr>
+              <a:t>/&lt;package&gt;</a:t>
+            </a:r>
+            <a:r>
               <a:rPr lang="nl-NL" sz="2000" dirty="0"/>
-              <a:t>/package directory</a:t>
+              <a:t> folder</a:t>
             </a:r>
           </a:p>
           <a:p>
@@ -15054,8 +16342,26 @@
             </a:pPr>
             <a:r>
               <a:rPr lang="nl-NL" sz="2000" dirty="0"/>
-              <a:t>git repository</a:t>
-            </a:r>
+              <a:t>Git repository en </a:t>
+            </a:r>
+            <a:r>
+              <a:rPr lang="nl-NL" sz="2000" dirty="0">
+                <a:latin typeface="Courier New" panose="02070309020205020404" pitchFamily="49" charset="0"/>
+                <a:cs typeface="Courier New" panose="02070309020205020404" pitchFamily="49" charset="0"/>
+              </a:rPr>
+              <a:t>.</a:t>
+            </a:r>
+            <a:r>
+              <a:rPr lang="nl-NL" sz="2000" dirty="0" err="1">
+                <a:latin typeface="Courier New" panose="02070309020205020404" pitchFamily="49" charset="0"/>
+                <a:cs typeface="Courier New" panose="02070309020205020404" pitchFamily="49" charset="0"/>
+              </a:rPr>
+              <a:t>gitignore</a:t>
+            </a:r>
+            <a:endParaRPr lang="nl-NL" sz="2000" dirty="0">
+              <a:latin typeface="Courier New" panose="02070309020205020404" pitchFamily="49" charset="0"/>
+              <a:cs typeface="Courier New" panose="02070309020205020404" pitchFamily="49" charset="0"/>
+            </a:endParaRPr>
           </a:p>
           <a:p>
             <a:pPr>
@@ -15064,7 +16370,7 @@
             </a:pPr>
             <a:r>
               <a:rPr lang="nl-NL" sz="2000" dirty="0"/>
-              <a:t>python versie bestand</a:t>
+              <a:t>Python versie bestand</a:t>
             </a:r>
           </a:p>
           <a:p>
@@ -15073,10 +16379,20 @@
               <a:buChar char="-"/>
             </a:pPr>
             <a:r>
-              <a:rPr lang="nl-NL" sz="2000" dirty="0" err="1"/>
+              <a:rPr lang="nl-NL" sz="2000" dirty="0"/>
+              <a:t>Setup bestand: </a:t>
+            </a:r>
+            <a:r>
+              <a:rPr lang="nl-NL" sz="2000" dirty="0" err="1">
+                <a:latin typeface="Courier New" panose="02070309020205020404" pitchFamily="49" charset="0"/>
+                <a:cs typeface="Courier New" panose="02070309020205020404" pitchFamily="49" charset="0"/>
+              </a:rPr>
               <a:t>pyproject.toml</a:t>
             </a:r>
-            <a:endParaRPr lang="nl-NL" sz="2000" dirty="0"/>
+            <a:endParaRPr lang="nl-NL" sz="2000" dirty="0">
+              <a:latin typeface="Courier New" panose="02070309020205020404" pitchFamily="49" charset="0"/>
+              <a:cs typeface="Courier New" panose="02070309020205020404" pitchFamily="49" charset="0"/>
+            </a:endParaRPr>
           </a:p>
           <a:p>
             <a:pPr>
@@ -15085,14 +16401,15 @@
             </a:pPr>
             <a:r>
               <a:rPr lang="nl-NL" sz="2000" dirty="0"/>
+              <a:t>Documentatie: </a:t>
+            </a:r>
+            <a:r>
+              <a:rPr lang="nl-NL" sz="2000" dirty="0">
+                <a:latin typeface="Courier New" panose="02070309020205020404" pitchFamily="49" charset="0"/>
+                <a:cs typeface="Courier New" panose="02070309020205020404" pitchFamily="49" charset="0"/>
+              </a:rPr>
               <a:t>README.md</a:t>
             </a:r>
-          </a:p>
-          <a:p>
-            <a:pPr marL="0" indent="0">
-              <a:buNone/>
-            </a:pPr>
-            <a:endParaRPr lang="nl-NL" sz="2000" noProof="0" dirty="0"/>
           </a:p>
         </p:txBody>
       </p:sp>
@@ -15633,7 +16950,7 @@
 </p:sld>
 </file>
 
-<file path=ppt/slides/slide32.xml><?xml version="1.0" encoding="utf-8"?>
+<file path=ppt/slides/slide33.xml><?xml version="1.0" encoding="utf-8"?>
 <p:sld xmlns:a="http://schemas.openxmlformats.org/drawingml/2006/main" xmlns:r="http://schemas.openxmlformats.org/officeDocument/2006/relationships" xmlns:p="http://schemas.openxmlformats.org/presentationml/2006/main">
   <p:cSld>
     <p:spTree>
@@ -15715,7 +17032,7 @@
         </p:spPr>
         <p:txBody>
           <a:bodyPr>
-            <a:normAutofit lnSpcReduction="10000"/>
+            <a:normAutofit/>
           </a:bodyPr>
           <a:lstStyle/>
           <a:p>
@@ -15724,7 +17041,7 @@
             </a:pPr>
             <a:r>
               <a:rPr lang="nl-NL" sz="2000" dirty="0"/>
-              <a:t>Eenvoudig project opzetten met </a:t>
+              <a:t>Package opzetten met </a:t>
             </a:r>
             <a:r>
               <a:rPr lang="nl-NL" sz="2000" dirty="0" err="1"/>
@@ -15740,39 +17057,6 @@
               <a:buNone/>
             </a:pPr>
             <a:endParaRPr lang="nl-NL" sz="2000" dirty="0"/>
-          </a:p>
-          <a:p>
-            <a:pPr marL="0" indent="0">
-              <a:buNone/>
-            </a:pPr>
-            <a:r>
-              <a:rPr lang="nl-NL" sz="2000" dirty="0" err="1">
-                <a:latin typeface="Courier New" panose="02070309020205020404" pitchFamily="49" charset="0"/>
-                <a:cs typeface="Courier New" panose="02070309020205020404" pitchFamily="49" charset="0"/>
-              </a:rPr>
-              <a:t>uv</a:t>
-            </a:r>
-            <a:r>
-              <a:rPr lang="nl-NL" sz="2000" dirty="0">
-                <a:latin typeface="Courier New" panose="02070309020205020404" pitchFamily="49" charset="0"/>
-                <a:cs typeface="Courier New" panose="02070309020205020404" pitchFamily="49" charset="0"/>
-              </a:rPr>
-              <a:t> </a:t>
-            </a:r>
-            <a:r>
-              <a:rPr lang="nl-NL" sz="2000" dirty="0" err="1">
-                <a:latin typeface="Courier New" panose="02070309020205020404" pitchFamily="49" charset="0"/>
-                <a:cs typeface="Courier New" panose="02070309020205020404" pitchFamily="49" charset="0"/>
-              </a:rPr>
-              <a:t>init</a:t>
-            </a:r>
-            <a:r>
-              <a:rPr lang="nl-NL" sz="2000" dirty="0">
-                <a:latin typeface="Courier New" panose="02070309020205020404" pitchFamily="49" charset="0"/>
-                <a:cs typeface="Courier New" panose="02070309020205020404" pitchFamily="49" charset="0"/>
-              </a:rPr>
-              <a:t> --package</a:t>
-            </a:r>
           </a:p>
           <a:p>
             <a:pPr marL="0" indent="0">
@@ -15834,12 +17118,26 @@
               <a:buChar char="-"/>
             </a:pPr>
             <a:r>
-              <a:rPr lang="nl-NL" sz="2000" dirty="0" err="1"/>
+              <a:rPr lang="nl-NL" sz="2000" dirty="0"/>
+              <a:t>Een </a:t>
+            </a:r>
+            <a:r>
+              <a:rPr lang="nl-NL" sz="2000" dirty="0" err="1">
+                <a:latin typeface="Courier New" panose="02070309020205020404" pitchFamily="49" charset="0"/>
+                <a:cs typeface="Courier New" panose="02070309020205020404" pitchFamily="49" charset="0"/>
+              </a:rPr>
               <a:t>src</a:t>
             </a:r>
             <a:r>
+              <a:rPr lang="nl-NL" sz="2000" dirty="0">
+                <a:latin typeface="Courier New" panose="02070309020205020404" pitchFamily="49" charset="0"/>
+                <a:cs typeface="Courier New" panose="02070309020205020404" pitchFamily="49" charset="0"/>
+              </a:rPr>
+              <a:t>/&lt;package&gt;</a:t>
+            </a:r>
+            <a:r>
               <a:rPr lang="nl-NL" sz="2000" dirty="0"/>
-              <a:t>/package directory</a:t>
+              <a:t> folder</a:t>
             </a:r>
           </a:p>
           <a:p>
@@ -15849,8 +17147,26 @@
             </a:pPr>
             <a:r>
               <a:rPr lang="nl-NL" sz="2000" dirty="0"/>
-              <a:t>git repository</a:t>
-            </a:r>
+              <a:t>Git repository en </a:t>
+            </a:r>
+            <a:r>
+              <a:rPr lang="nl-NL" sz="2000" dirty="0">
+                <a:latin typeface="Courier New" panose="02070309020205020404" pitchFamily="49" charset="0"/>
+                <a:cs typeface="Courier New" panose="02070309020205020404" pitchFamily="49" charset="0"/>
+              </a:rPr>
+              <a:t>.</a:t>
+            </a:r>
+            <a:r>
+              <a:rPr lang="nl-NL" sz="2000" dirty="0" err="1">
+                <a:latin typeface="Courier New" panose="02070309020205020404" pitchFamily="49" charset="0"/>
+                <a:cs typeface="Courier New" panose="02070309020205020404" pitchFamily="49" charset="0"/>
+              </a:rPr>
+              <a:t>gitignore</a:t>
+            </a:r>
+            <a:endParaRPr lang="nl-NL" sz="2000" dirty="0">
+              <a:latin typeface="Courier New" panose="02070309020205020404" pitchFamily="49" charset="0"/>
+              <a:cs typeface="Courier New" panose="02070309020205020404" pitchFamily="49" charset="0"/>
+            </a:endParaRPr>
           </a:p>
           <a:p>
             <a:pPr>
@@ -15859,7 +17175,7 @@
             </a:pPr>
             <a:r>
               <a:rPr lang="nl-NL" sz="2000" dirty="0"/>
-              <a:t>python versie bestand</a:t>
+              <a:t>Python versie bestand</a:t>
             </a:r>
           </a:p>
           <a:p>
@@ -15868,10 +17184,20 @@
               <a:buChar char="-"/>
             </a:pPr>
             <a:r>
-              <a:rPr lang="nl-NL" sz="2000" dirty="0" err="1"/>
+              <a:rPr lang="nl-NL" sz="2000" dirty="0"/>
+              <a:t>Setup bestand: </a:t>
+            </a:r>
+            <a:r>
+              <a:rPr lang="nl-NL" sz="2000" dirty="0" err="1">
+                <a:latin typeface="Courier New" panose="02070309020205020404" pitchFamily="49" charset="0"/>
+                <a:cs typeface="Courier New" panose="02070309020205020404" pitchFamily="49" charset="0"/>
+              </a:rPr>
               <a:t>pyproject.toml</a:t>
             </a:r>
-            <a:endParaRPr lang="nl-NL" sz="2000" dirty="0"/>
+            <a:endParaRPr lang="nl-NL" sz="2000" dirty="0">
+              <a:latin typeface="Courier New" panose="02070309020205020404" pitchFamily="49" charset="0"/>
+              <a:cs typeface="Courier New" panose="02070309020205020404" pitchFamily="49" charset="0"/>
+            </a:endParaRPr>
           </a:p>
           <a:p>
             <a:pPr>
@@ -15880,14 +17206,15 @@
             </a:pPr>
             <a:r>
               <a:rPr lang="nl-NL" sz="2000" dirty="0"/>
+              <a:t>Documentatie: </a:t>
+            </a:r>
+            <a:r>
+              <a:rPr lang="nl-NL" sz="2000" dirty="0">
+                <a:latin typeface="Courier New" panose="02070309020205020404" pitchFamily="49" charset="0"/>
+                <a:cs typeface="Courier New" panose="02070309020205020404" pitchFamily="49" charset="0"/>
+              </a:rPr>
               <a:t>README.md</a:t>
             </a:r>
-          </a:p>
-          <a:p>
-            <a:pPr marL="0" indent="0">
-              <a:buNone/>
-            </a:pPr>
-            <a:endParaRPr lang="nl-NL" sz="2000" noProof="0" dirty="0"/>
           </a:p>
         </p:txBody>
       </p:sp>
@@ -16090,7 +17417,7 @@
               <a:buNone/>
             </a:pPr>
             <a:r>
-              <a:rPr lang="nl-NL" sz="1800" dirty="0">
+              <a:rPr lang="nl-NL" sz="1600" dirty="0">
                 <a:latin typeface="Courier New" panose="02070309020205020404" pitchFamily="49" charset="0"/>
                 <a:cs typeface="Courier New" panose="02070309020205020404" pitchFamily="49" charset="0"/>
               </a:rPr>
@@ -16105,21 +17432,21 @@
               <a:buNone/>
             </a:pPr>
             <a:r>
-              <a:rPr lang="nl-NL" sz="1800" dirty="0">
+              <a:rPr lang="nl-NL" sz="1600" dirty="0">
                 <a:latin typeface="Courier New" panose="02070309020205020404" pitchFamily="49" charset="0"/>
                 <a:cs typeface="Courier New" panose="02070309020205020404" pitchFamily="49" charset="0"/>
               </a:rPr>
               <a:t>name = "</a:t>
             </a:r>
             <a:r>
-              <a:rPr lang="nl-NL" sz="1800" dirty="0" err="1">
+              <a:rPr lang="nl-NL" sz="1600" dirty="0" err="1">
                 <a:latin typeface="Courier New" panose="02070309020205020404" pitchFamily="49" charset="0"/>
                 <a:cs typeface="Courier New" panose="02070309020205020404" pitchFamily="49" charset="0"/>
               </a:rPr>
               <a:t>my</a:t>
             </a:r>
             <a:r>
-              <a:rPr lang="nl-NL" sz="1800" dirty="0">
+              <a:rPr lang="nl-NL" sz="1600" dirty="0">
                 <a:latin typeface="Courier New" panose="02070309020205020404" pitchFamily="49" charset="0"/>
                 <a:cs typeface="Courier New" panose="02070309020205020404" pitchFamily="49" charset="0"/>
               </a:rPr>
@@ -16134,14 +17461,14 @@
               <a:buNone/>
             </a:pPr>
             <a:r>
-              <a:rPr lang="nl-NL" sz="1800" dirty="0" err="1">
+              <a:rPr lang="nl-NL" sz="1600" dirty="0" err="1">
                 <a:latin typeface="Courier New" panose="02070309020205020404" pitchFamily="49" charset="0"/>
                 <a:cs typeface="Courier New" panose="02070309020205020404" pitchFamily="49" charset="0"/>
               </a:rPr>
               <a:t>version</a:t>
             </a:r>
             <a:r>
-              <a:rPr lang="nl-NL" sz="1800" dirty="0">
+              <a:rPr lang="nl-NL" sz="1600" dirty="0">
                 <a:latin typeface="Courier New" panose="02070309020205020404" pitchFamily="49" charset="0"/>
                 <a:cs typeface="Courier New" panose="02070309020205020404" pitchFamily="49" charset="0"/>
               </a:rPr>
@@ -16156,32 +17483,18 @@
               <a:buNone/>
             </a:pPr>
             <a:r>
-              <a:rPr lang="nl-NL" sz="1800" dirty="0" err="1">
+              <a:rPr lang="nl-NL" sz="1600" dirty="0" err="1">
                 <a:latin typeface="Courier New" panose="02070309020205020404" pitchFamily="49" charset="0"/>
                 <a:cs typeface="Courier New" panose="02070309020205020404" pitchFamily="49" charset="0"/>
               </a:rPr>
               <a:t>description</a:t>
             </a:r>
             <a:r>
-              <a:rPr lang="nl-NL" sz="1800" dirty="0">
-                <a:latin typeface="Courier New" panose="02070309020205020404" pitchFamily="49" charset="0"/>
-                <a:cs typeface="Courier New" panose="02070309020205020404" pitchFamily="49" charset="0"/>
-              </a:rPr>
-              <a:t> = "</a:t>
-            </a:r>
-            <a:r>
-              <a:rPr lang="nl-NL" sz="1800" dirty="0" err="1">
-                <a:latin typeface="Courier New" panose="02070309020205020404" pitchFamily="49" charset="0"/>
-                <a:cs typeface="Courier New" panose="02070309020205020404" pitchFamily="49" charset="0"/>
-              </a:rPr>
-              <a:t>Description</a:t>
-            </a:r>
-            <a:r>
-              <a:rPr lang="nl-NL" sz="1800" dirty="0">
-                <a:latin typeface="Courier New" panose="02070309020205020404" pitchFamily="49" charset="0"/>
-                <a:cs typeface="Courier New" panose="02070309020205020404" pitchFamily="49" charset="0"/>
-              </a:rPr>
-              <a:t> here"</a:t>
+              <a:rPr lang="nl-NL" sz="1600" dirty="0">
+                <a:latin typeface="Courier New" panose="02070309020205020404" pitchFamily="49" charset="0"/>
+                <a:cs typeface="Courier New" panose="02070309020205020404" pitchFamily="49" charset="0"/>
+              </a:rPr>
+              <a:t> = "..."</a:t>
             </a:r>
           </a:p>
           <a:p>
@@ -16192,14 +17505,14 @@
               <a:buNone/>
             </a:pPr>
             <a:r>
-              <a:rPr lang="nl-NL" sz="1800" dirty="0" err="1">
+              <a:rPr lang="nl-NL" sz="1600" dirty="0" err="1">
                 <a:latin typeface="Courier New" panose="02070309020205020404" pitchFamily="49" charset="0"/>
                 <a:cs typeface="Courier New" panose="02070309020205020404" pitchFamily="49" charset="0"/>
               </a:rPr>
               <a:t>readme</a:t>
             </a:r>
             <a:r>
-              <a:rPr lang="nl-NL" sz="1800" dirty="0">
+              <a:rPr lang="nl-NL" sz="1600" dirty="0">
                 <a:latin typeface="Courier New" panose="02070309020205020404" pitchFamily="49" charset="0"/>
                 <a:cs typeface="Courier New" panose="02070309020205020404" pitchFamily="49" charset="0"/>
               </a:rPr>
@@ -16214,14 +17527,14 @@
               <a:buNone/>
             </a:pPr>
             <a:r>
-              <a:rPr lang="nl-NL" sz="1800" b="1" dirty="0" err="1">
+              <a:rPr lang="nl-NL" sz="1600" b="1" dirty="0" err="1">
                 <a:latin typeface="Courier New" panose="02070309020205020404" pitchFamily="49" charset="0"/>
                 <a:cs typeface="Courier New" panose="02070309020205020404" pitchFamily="49" charset="0"/>
               </a:rPr>
               <a:t>authors</a:t>
             </a:r>
             <a:r>
-              <a:rPr lang="nl-NL" sz="1800" dirty="0">
+              <a:rPr lang="nl-NL" sz="1600" dirty="0">
                 <a:latin typeface="Courier New" panose="02070309020205020404" pitchFamily="49" charset="0"/>
                 <a:cs typeface="Courier New" panose="02070309020205020404" pitchFamily="49" charset="0"/>
               </a:rPr>
@@ -16236,11 +17549,11 @@
               <a:buNone/>
             </a:pPr>
             <a:r>
-              <a:rPr lang="nl-NL" sz="1800" dirty="0">
-                <a:latin typeface="Courier New" panose="02070309020205020404" pitchFamily="49" charset="0"/>
-                <a:cs typeface="Courier New" panose="02070309020205020404" pitchFamily="49" charset="0"/>
-              </a:rPr>
-              <a:t>    { name = "Lukas Koning" }</a:t>
+              <a:rPr lang="nl-NL" sz="1600" dirty="0">
+                <a:latin typeface="Courier New" panose="02070309020205020404" pitchFamily="49" charset="0"/>
+                <a:cs typeface="Courier New" panose="02070309020205020404" pitchFamily="49" charset="0"/>
+              </a:rPr>
+              <a:t>    {name = "..."}</a:t>
             </a:r>
           </a:p>
           <a:p>
@@ -16251,7 +17564,7 @@
               <a:buNone/>
             </a:pPr>
             <a:r>
-              <a:rPr lang="nl-NL" sz="1800" dirty="0">
+              <a:rPr lang="nl-NL" sz="1600" dirty="0">
                 <a:latin typeface="Courier New" panose="02070309020205020404" pitchFamily="49" charset="0"/>
                 <a:cs typeface="Courier New" panose="02070309020205020404" pitchFamily="49" charset="0"/>
               </a:rPr>
@@ -16265,44 +17578,7 @@
               </a:spcBef>
               <a:buNone/>
             </a:pPr>
-            <a:r>
-              <a:rPr lang="nl-NL" sz="1800" dirty="0" err="1">
-                <a:latin typeface="Courier New" panose="02070309020205020404" pitchFamily="49" charset="0"/>
-                <a:cs typeface="Courier New" panose="02070309020205020404" pitchFamily="49" charset="0"/>
-              </a:rPr>
-              <a:t>requires</a:t>
-            </a:r>
-            <a:r>
-              <a:rPr lang="nl-NL" sz="1800" dirty="0">
-                <a:latin typeface="Courier New" panose="02070309020205020404" pitchFamily="49" charset="0"/>
-                <a:cs typeface="Courier New" panose="02070309020205020404" pitchFamily="49" charset="0"/>
-              </a:rPr>
-              <a:t>-python = "&gt;=3.13"</a:t>
-            </a:r>
-          </a:p>
-          <a:p>
-            <a:pPr marL="0" indent="0">
-              <a:spcBef>
-                <a:spcPts val="0"/>
-              </a:spcBef>
-              <a:buNone/>
-            </a:pPr>
-            <a:r>
-              <a:rPr lang="nl-NL" sz="1800" dirty="0">
-                <a:latin typeface="Courier New" panose="02070309020205020404" pitchFamily="49" charset="0"/>
-                <a:cs typeface="Courier New" panose="02070309020205020404" pitchFamily="49" charset="0"/>
-              </a:rPr>
-              <a:t>dependencies = []</a:t>
-            </a:r>
-          </a:p>
-          <a:p>
-            <a:pPr marL="0" indent="0">
-              <a:spcBef>
-                <a:spcPts val="0"/>
-              </a:spcBef>
-              <a:buNone/>
-            </a:pPr>
-            <a:endParaRPr lang="nl-NL" sz="1800" dirty="0">
+            <a:endParaRPr lang="nl-NL" sz="1600" dirty="0">
               <a:latin typeface="Courier New" panose="02070309020205020404" pitchFamily="49" charset="0"/>
               <a:cs typeface="Courier New" panose="02070309020205020404" pitchFamily="49" charset="0"/>
             </a:endParaRPr>
@@ -16315,25 +17591,18 @@
               <a:buNone/>
             </a:pPr>
             <a:r>
-              <a:rPr lang="nl-NL" sz="1800" b="1" dirty="0">
-                <a:latin typeface="Courier New" panose="02070309020205020404" pitchFamily="49" charset="0"/>
-                <a:cs typeface="Courier New" panose="02070309020205020404" pitchFamily="49" charset="0"/>
-              </a:rPr>
-              <a:t>[</a:t>
-            </a:r>
-            <a:r>
-              <a:rPr lang="nl-NL" sz="1800" b="1" dirty="0" err="1">
-                <a:latin typeface="Courier New" panose="02070309020205020404" pitchFamily="49" charset="0"/>
-                <a:cs typeface="Courier New" panose="02070309020205020404" pitchFamily="49" charset="0"/>
-              </a:rPr>
-              <a:t>project.scripts</a:t>
-            </a:r>
-            <a:r>
-              <a:rPr lang="nl-NL" sz="1800" b="1" dirty="0">
-                <a:latin typeface="Courier New" panose="02070309020205020404" pitchFamily="49" charset="0"/>
-                <a:cs typeface="Courier New" panose="02070309020205020404" pitchFamily="49" charset="0"/>
-              </a:rPr>
-              <a:t>]</a:t>
+              <a:rPr lang="nl-NL" sz="1600" dirty="0" err="1">
+                <a:latin typeface="Courier New" panose="02070309020205020404" pitchFamily="49" charset="0"/>
+                <a:cs typeface="Courier New" panose="02070309020205020404" pitchFamily="49" charset="0"/>
+              </a:rPr>
+              <a:t>requires</a:t>
+            </a:r>
+            <a:r>
+              <a:rPr lang="nl-NL" sz="1600" dirty="0">
+                <a:latin typeface="Courier New" panose="02070309020205020404" pitchFamily="49" charset="0"/>
+                <a:cs typeface="Courier New" panose="02070309020205020404" pitchFamily="49" charset="0"/>
+              </a:rPr>
+              <a:t>-python = "&gt;=3.13"</a:t>
             </a:r>
           </a:p>
           <a:p>
@@ -16344,32 +17613,11 @@
               <a:buNone/>
             </a:pPr>
             <a:r>
-              <a:rPr lang="nl-NL" sz="1800" dirty="0" err="1">
-                <a:latin typeface="Courier New" panose="02070309020205020404" pitchFamily="49" charset="0"/>
-                <a:cs typeface="Courier New" panose="02070309020205020404" pitchFamily="49" charset="0"/>
-              </a:rPr>
-              <a:t>my</a:t>
-            </a:r>
-            <a:r>
-              <a:rPr lang="nl-NL" sz="1800" dirty="0">
-                <a:latin typeface="Courier New" panose="02070309020205020404" pitchFamily="49" charset="0"/>
-                <a:cs typeface="Courier New" panose="02070309020205020404" pitchFamily="49" charset="0"/>
-              </a:rPr>
-              <a:t>-package = "</a:t>
-            </a:r>
-            <a:r>
-              <a:rPr lang="nl-NL" sz="1800" dirty="0" err="1">
-                <a:latin typeface="Courier New" panose="02070309020205020404" pitchFamily="49" charset="0"/>
-                <a:cs typeface="Courier New" panose="02070309020205020404" pitchFamily="49" charset="0"/>
-              </a:rPr>
-              <a:t>my_package:main</a:t>
-            </a:r>
-            <a:r>
-              <a:rPr lang="nl-NL" sz="1800" dirty="0">
-                <a:latin typeface="Courier New" panose="02070309020205020404" pitchFamily="49" charset="0"/>
-                <a:cs typeface="Courier New" panose="02070309020205020404" pitchFamily="49" charset="0"/>
-              </a:rPr>
-              <a:t>"</a:t>
+              <a:rPr lang="nl-NL" sz="1600" dirty="0">
+                <a:latin typeface="Courier New" panose="02070309020205020404" pitchFamily="49" charset="0"/>
+                <a:cs typeface="Courier New" panose="02070309020205020404" pitchFamily="49" charset="0"/>
+              </a:rPr>
+              <a:t>dependencies = []</a:t>
             </a:r>
           </a:p>
           <a:p>
@@ -16379,7 +17627,7 @@
               </a:spcBef>
               <a:buNone/>
             </a:pPr>
-            <a:endParaRPr lang="nl-NL" sz="1800" dirty="0">
+            <a:endParaRPr lang="nl-NL" sz="1600" dirty="0">
               <a:latin typeface="Courier New" panose="02070309020205020404" pitchFamily="49" charset="0"/>
               <a:cs typeface="Courier New" panose="02070309020205020404" pitchFamily="49" charset="0"/>
             </a:endParaRPr>
@@ -16392,28 +17640,105 @@
               <a:buNone/>
             </a:pPr>
             <a:r>
-              <a:rPr lang="nl-NL" sz="1800" b="1" dirty="0">
+              <a:rPr lang="nl-NL" sz="1600" b="1" dirty="0">
                 <a:latin typeface="Courier New" panose="02070309020205020404" pitchFamily="49" charset="0"/>
                 <a:cs typeface="Courier New" panose="02070309020205020404" pitchFamily="49" charset="0"/>
               </a:rPr>
               <a:t>[</a:t>
             </a:r>
             <a:r>
-              <a:rPr lang="nl-NL" sz="1800" b="1" dirty="0" err="1">
+              <a:rPr lang="nl-NL" sz="1600" b="1" dirty="0" err="1">
+                <a:latin typeface="Courier New" panose="02070309020205020404" pitchFamily="49" charset="0"/>
+                <a:cs typeface="Courier New" panose="02070309020205020404" pitchFamily="49" charset="0"/>
+              </a:rPr>
+              <a:t>project.scripts</a:t>
+            </a:r>
+            <a:r>
+              <a:rPr lang="nl-NL" sz="1600" b="1" dirty="0">
+                <a:latin typeface="Courier New" panose="02070309020205020404" pitchFamily="49" charset="0"/>
+                <a:cs typeface="Courier New" panose="02070309020205020404" pitchFamily="49" charset="0"/>
+              </a:rPr>
+              <a:t>]</a:t>
+            </a:r>
+          </a:p>
+          <a:p>
+            <a:pPr marL="0" indent="0">
+              <a:spcBef>
+                <a:spcPts val="0"/>
+              </a:spcBef>
+              <a:buNone/>
+            </a:pPr>
+            <a:r>
+              <a:rPr lang="nl-NL" sz="1600" dirty="0" err="1">
+                <a:latin typeface="Courier New" panose="02070309020205020404" pitchFamily="49" charset="0"/>
+                <a:cs typeface="Courier New" panose="02070309020205020404" pitchFamily="49" charset="0"/>
+              </a:rPr>
+              <a:t>my</a:t>
+            </a:r>
+            <a:r>
+              <a:rPr lang="nl-NL" sz="1600" dirty="0">
+                <a:latin typeface="Courier New" panose="02070309020205020404" pitchFamily="49" charset="0"/>
+                <a:cs typeface="Courier New" panose="02070309020205020404" pitchFamily="49" charset="0"/>
+              </a:rPr>
+              <a:t>-package = "</a:t>
+            </a:r>
+            <a:r>
+              <a:rPr lang="nl-NL" sz="1600" dirty="0" err="1">
+                <a:latin typeface="Courier New" panose="02070309020205020404" pitchFamily="49" charset="0"/>
+                <a:cs typeface="Courier New" panose="02070309020205020404" pitchFamily="49" charset="0"/>
+              </a:rPr>
+              <a:t>my_package:main</a:t>
+            </a:r>
+            <a:r>
+              <a:rPr lang="nl-NL" sz="1600" dirty="0">
+                <a:latin typeface="Courier New" panose="02070309020205020404" pitchFamily="49" charset="0"/>
+                <a:cs typeface="Courier New" panose="02070309020205020404" pitchFamily="49" charset="0"/>
+              </a:rPr>
+              <a:t>"</a:t>
+            </a:r>
+          </a:p>
+          <a:p>
+            <a:pPr marL="0" indent="0">
+              <a:spcBef>
+                <a:spcPts val="0"/>
+              </a:spcBef>
+              <a:buNone/>
+            </a:pPr>
+            <a:endParaRPr lang="nl-NL" sz="1600" dirty="0">
+              <a:latin typeface="Courier New" panose="02070309020205020404" pitchFamily="49" charset="0"/>
+              <a:cs typeface="Courier New" panose="02070309020205020404" pitchFamily="49" charset="0"/>
+            </a:endParaRPr>
+          </a:p>
+          <a:p>
+            <a:pPr marL="0" indent="0">
+              <a:spcBef>
+                <a:spcPts val="0"/>
+              </a:spcBef>
+              <a:buNone/>
+            </a:pPr>
+            <a:r>
+              <a:rPr lang="nl-NL" sz="1600" b="1" dirty="0">
+                <a:latin typeface="Courier New" panose="02070309020205020404" pitchFamily="49" charset="0"/>
+                <a:cs typeface="Courier New" panose="02070309020205020404" pitchFamily="49" charset="0"/>
+              </a:rPr>
+              <a:t>[</a:t>
+            </a:r>
+            <a:r>
+              <a:rPr lang="nl-NL" sz="1600" b="1" dirty="0" err="1">
                 <a:latin typeface="Courier New" panose="02070309020205020404" pitchFamily="49" charset="0"/>
                 <a:cs typeface="Courier New" panose="02070309020205020404" pitchFamily="49" charset="0"/>
               </a:rPr>
               <a:t>build</a:t>
             </a:r>
             <a:r>
-              <a:rPr lang="nl-NL" sz="1800" b="1" dirty="0">
+              <a:rPr lang="nl-NL" sz="1600" b="1" dirty="0">
                 <a:latin typeface="Courier New" panose="02070309020205020404" pitchFamily="49" charset="0"/>
                 <a:cs typeface="Courier New" panose="02070309020205020404" pitchFamily="49" charset="0"/>
               </a:rPr>
               <a:t>-system</a:t>
             </a:r>
             <a:r>
-              <a:rPr lang="nl-NL" sz="1800" dirty="0">
+              <a:rPr lang="nl-NL" sz="1600" dirty="0">
                 <a:latin typeface="Courier New" panose="02070309020205020404" pitchFamily="49" charset="0"/>
                 <a:cs typeface="Courier New" panose="02070309020205020404" pitchFamily="49" charset="0"/>
               </a:rPr>
@@ -16428,28 +17753,28 @@
               <a:buNone/>
             </a:pPr>
             <a:r>
-              <a:rPr lang="nl-NL" sz="1800" dirty="0" err="1">
+              <a:rPr lang="nl-NL" sz="1600" dirty="0" err="1">
                 <a:latin typeface="Courier New" panose="02070309020205020404" pitchFamily="49" charset="0"/>
                 <a:cs typeface="Courier New" panose="02070309020205020404" pitchFamily="49" charset="0"/>
               </a:rPr>
               <a:t>requires</a:t>
             </a:r>
             <a:r>
-              <a:rPr lang="nl-NL" sz="1800" dirty="0">
+              <a:rPr lang="nl-NL" sz="1600" dirty="0">
                 <a:latin typeface="Courier New" panose="02070309020205020404" pitchFamily="49" charset="0"/>
                 <a:cs typeface="Courier New" panose="02070309020205020404" pitchFamily="49" charset="0"/>
               </a:rPr>
               <a:t> = ["</a:t>
             </a:r>
             <a:r>
-              <a:rPr lang="nl-NL" sz="1800" dirty="0" err="1">
+              <a:rPr lang="nl-NL" sz="1600" dirty="0" err="1">
                 <a:latin typeface="Courier New" panose="02070309020205020404" pitchFamily="49" charset="0"/>
                 <a:cs typeface="Courier New" panose="02070309020205020404" pitchFamily="49" charset="0"/>
               </a:rPr>
               <a:t>uv_build</a:t>
             </a:r>
             <a:r>
-              <a:rPr lang="nl-NL" sz="1800" dirty="0">
+              <a:rPr lang="nl-NL" sz="1600" dirty="0">
                 <a:latin typeface="Courier New" panose="02070309020205020404" pitchFamily="49" charset="0"/>
                 <a:cs typeface="Courier New" panose="02070309020205020404" pitchFamily="49" charset="0"/>
               </a:rPr>
@@ -16464,28 +17789,28 @@
               <a:buNone/>
             </a:pPr>
             <a:r>
-              <a:rPr lang="nl-NL" sz="1800" dirty="0" err="1">
+              <a:rPr lang="nl-NL" sz="1600" dirty="0" err="1">
                 <a:latin typeface="Courier New" panose="02070309020205020404" pitchFamily="49" charset="0"/>
                 <a:cs typeface="Courier New" panose="02070309020205020404" pitchFamily="49" charset="0"/>
               </a:rPr>
               <a:t>build</a:t>
             </a:r>
             <a:r>
-              <a:rPr lang="nl-NL" sz="1800" dirty="0">
+              <a:rPr lang="nl-NL" sz="1600" dirty="0">
                 <a:latin typeface="Courier New" panose="02070309020205020404" pitchFamily="49" charset="0"/>
                 <a:cs typeface="Courier New" panose="02070309020205020404" pitchFamily="49" charset="0"/>
               </a:rPr>
               <a:t>-backend = "</a:t>
             </a:r>
             <a:r>
-              <a:rPr lang="nl-NL" sz="1800" dirty="0" err="1">
+              <a:rPr lang="nl-NL" sz="1600" dirty="0" err="1">
                 <a:latin typeface="Courier New" panose="02070309020205020404" pitchFamily="49" charset="0"/>
                 <a:cs typeface="Courier New" panose="02070309020205020404" pitchFamily="49" charset="0"/>
               </a:rPr>
               <a:t>uv_build</a:t>
             </a:r>
             <a:r>
-              <a:rPr lang="nl-NL" sz="1800" dirty="0">
+              <a:rPr lang="nl-NL" sz="1600" dirty="0">
                 <a:latin typeface="Courier New" panose="02070309020205020404" pitchFamily="49" charset="0"/>
                 <a:cs typeface="Courier New" panose="02070309020205020404" pitchFamily="49" charset="0"/>
               </a:rPr>
@@ -16494,6 +17819,44 @@
           </a:p>
         </p:txBody>
       </p:sp>
+      <p:cxnSp>
+        <p:nvCxnSpPr>
+          <p:cNvPr id="4" name="Straight Connector 3">
+            <a:extLst>
+              <a:ext uri="{FF2B5EF4-FFF2-40B4-BE49-F238E27FC236}">
+                <a16:creationId xmlns:a16="http://schemas.microsoft.com/office/drawing/2014/main" id="{8F2A2D4A-9DCB-CA25-1499-9A2C30FDDC77}"/>
+              </a:ext>
+            </a:extLst>
+          </p:cNvPr>
+          <p:cNvCxnSpPr>
+            <a:cxnSpLocks/>
+          </p:cNvCxnSpPr>
+          <p:nvPr/>
+        </p:nvCxnSpPr>
+        <p:spPr>
+          <a:xfrm>
+            <a:off x="5960533" y="1388533"/>
+            <a:ext cx="0" cy="4788430"/>
+          </a:xfrm>
+          <a:prstGeom prst="line">
+            <a:avLst/>
+          </a:prstGeom>
+        </p:spPr>
+        <p:style>
+          <a:lnRef idx="3">
+            <a:schemeClr val="dk1"/>
+          </a:lnRef>
+          <a:fillRef idx="0">
+            <a:schemeClr val="dk1"/>
+          </a:fillRef>
+          <a:effectRef idx="2">
+            <a:schemeClr val="dk1"/>
+          </a:effectRef>
+          <a:fontRef idx="minor">
+            <a:schemeClr val="tx1"/>
+          </a:fontRef>
+        </p:style>
+      </p:cxnSp>
     </p:spTree>
     <p:extLst>
       <p:ext uri="{BB962C8B-B14F-4D97-AF65-F5344CB8AC3E}">
@@ -16507,7 +17870,7 @@
 </p:sld>
 </file>
 
-<file path=ppt/slides/slide33.xml><?xml version="1.0" encoding="utf-8"?>
+<file path=ppt/slides/slide34.xml><?xml version="1.0" encoding="utf-8"?>
 <p:sld xmlns:a="http://schemas.openxmlformats.org/drawingml/2006/main" xmlns:r="http://schemas.openxmlformats.org/officeDocument/2006/relationships" xmlns:p="http://schemas.openxmlformats.org/presentationml/2006/main">
   <p:cSld>
     <p:spTree>
@@ -16609,7 +17972,7 @@
             </a:r>
             <a:r>
               <a:rPr lang="nl-NL" sz="2000" dirty="0"/>
-              <a:t> kun je scripts (modules) uit de folder importeren.</a:t>
+              <a:t> kun je scripts uit de folder importeren als modules.</a:t>
             </a:r>
           </a:p>
           <a:p>
@@ -16624,7 +17987,7 @@
             </a:pPr>
             <a:r>
               <a:rPr lang="nl-NL" sz="2000" dirty="0"/>
-              <a:t>Meestal leeg bestand, maar kan code bevatten.</a:t>
+              <a:t>Kan code bevatten, meestal leeg bestand.</a:t>
             </a:r>
           </a:p>
           <a:p>
@@ -16638,8 +18001,12 @@
               <a:buNone/>
             </a:pPr>
             <a:r>
+              <a:rPr lang="nl-NL" sz="2000"/>
+              <a:t>De </a:t>
+            </a:r>
+            <a:r>
               <a:rPr lang="nl-NL" sz="2000" dirty="0"/>
-              <a:t>Deze code wordt geladen als de module geïmporteerd wordt.</a:t>
+              <a:t>code wordt geladen als de module geïmporteerd wordt.</a:t>
             </a:r>
           </a:p>
           <a:p>
@@ -17196,7 +18563,7 @@
 </p:sld>
 </file>
 
-<file path=ppt/slides/slide34.xml><?xml version="1.0" encoding="utf-8"?>
+<file path=ppt/slides/slide35.xml><?xml version="1.0" encoding="utf-8"?>
 <p:sld xmlns:a="http://schemas.openxmlformats.org/drawingml/2006/main" xmlns:r="http://schemas.openxmlformats.org/officeDocument/2006/relationships" xmlns:p="http://schemas.openxmlformats.org/presentationml/2006/main">
   <p:cSld>
     <p:spTree>
@@ -18047,7 +19414,7 @@
 </p:sld>
 </file>
 
-<file path=ppt/slides/slide35.xml><?xml version="1.0" encoding="utf-8"?>
+<file path=ppt/slides/slide36.xml><?xml version="1.0" encoding="utf-8"?>
 <p:sld xmlns:a="http://schemas.openxmlformats.org/drawingml/2006/main" xmlns:r="http://schemas.openxmlformats.org/officeDocument/2006/relationships" xmlns:p="http://schemas.openxmlformats.org/presentationml/2006/main">
   <p:cSld>
     <p:spTree>
@@ -18441,7 +19808,7 @@
 </p:sld>
 </file>
 
-<file path=ppt/slides/slide36.xml><?xml version="1.0" encoding="utf-8"?>
+<file path=ppt/slides/slide37.xml><?xml version="1.0" encoding="utf-8"?>
 <p:sld xmlns:a="http://schemas.openxmlformats.org/drawingml/2006/main" xmlns:r="http://schemas.openxmlformats.org/officeDocument/2006/relationships" xmlns:p="http://schemas.openxmlformats.org/presentationml/2006/main">
   <p:cSld>
     <p:spTree>
@@ -19051,7 +20418,7 @@
 </p:sld>
 </file>
 
-<file path=ppt/slides/slide37.xml><?xml version="1.0" encoding="utf-8"?>
+<file path=ppt/slides/slide38.xml><?xml version="1.0" encoding="utf-8"?>
 <p:sld xmlns:a="http://schemas.openxmlformats.org/drawingml/2006/main" xmlns:r="http://schemas.openxmlformats.org/officeDocument/2006/relationships" xmlns:p="http://schemas.openxmlformats.org/presentationml/2006/main">
   <p:cSld>
     <p:spTree>
@@ -19140,7 +20507,7 @@
 </p:sld>
 </file>
 
-<file path=ppt/slides/slide38.xml><?xml version="1.0" encoding="utf-8"?>
+<file path=ppt/slides/slide39.xml><?xml version="1.0" encoding="utf-8"?>
 <p:sld xmlns:a="http://schemas.openxmlformats.org/drawingml/2006/main" xmlns:r="http://schemas.openxmlformats.org/officeDocument/2006/relationships" xmlns:p="http://schemas.openxmlformats.org/presentationml/2006/main">
   <p:cSld>
     <p:spTree>
@@ -19728,7 +21095,226 @@
 </p:sld>
 </file>
 
-<file path=ppt/slides/slide39.xml><?xml version="1.0" encoding="utf-8"?>
+<file path=ppt/slides/slide4.xml><?xml version="1.0" encoding="utf-8"?>
+<p:sld xmlns:a="http://schemas.openxmlformats.org/drawingml/2006/main" xmlns:r="http://schemas.openxmlformats.org/officeDocument/2006/relationships" xmlns:p="http://schemas.openxmlformats.org/presentationml/2006/main">
+  <p:cSld>
+    <p:spTree>
+      <p:nvGrpSpPr>
+        <p:cNvPr id="1" name=""/>
+        <p:cNvGrpSpPr/>
+        <p:nvPr/>
+      </p:nvGrpSpPr>
+      <p:grpSpPr>
+        <a:xfrm>
+          <a:off x="0" y="0"/>
+          <a:ext cx="0" cy="0"/>
+          <a:chOff x="0" y="0"/>
+          <a:chExt cx="0" cy="0"/>
+        </a:xfrm>
+      </p:grpSpPr>
+      <p:pic>
+        <p:nvPicPr>
+          <p:cNvPr id="1026" name="Picture 2" descr="Python">
+            <a:extLst>
+              <a:ext uri="{FF2B5EF4-FFF2-40B4-BE49-F238E27FC236}">
+                <a16:creationId xmlns:a16="http://schemas.microsoft.com/office/drawing/2014/main" id="{2604CCD1-B710-B7B3-3C01-61B36162D61A}"/>
+              </a:ext>
+            </a:extLst>
+          </p:cNvPr>
+          <p:cNvPicPr>
+            <a:picLocks noChangeAspect="1" noChangeArrowheads="1"/>
+          </p:cNvPicPr>
+          <p:nvPr/>
+        </p:nvPicPr>
+        <p:blipFill>
+          <a:blip r:embed="rId2">
+            <a:extLst>
+              <a:ext uri="{28A0092B-C50C-407E-A947-70E740481C1C}">
+                <a14:useLocalDpi xmlns:a14="http://schemas.microsoft.com/office/drawing/2010/main" val="0"/>
+              </a:ext>
+            </a:extLst>
+          </a:blip>
+          <a:srcRect/>
+          <a:stretch>
+            <a:fillRect/>
+          </a:stretch>
+        </p:blipFill>
+        <p:spPr bwMode="auto">
+          <a:xfrm>
+            <a:off x="6880227" y="1098853"/>
+            <a:ext cx="4473573" cy="5078110"/>
+          </a:xfrm>
+          <a:prstGeom prst="rect">
+            <a:avLst/>
+          </a:prstGeom>
+          <a:noFill/>
+          <a:extLst>
+            <a:ext uri="{909E8E84-426E-40DD-AFC4-6F175D3DCCD1}">
+              <a14:hiddenFill xmlns:a14="http://schemas.microsoft.com/office/drawing/2010/main">
+                <a:solidFill>
+                  <a:srgbClr val="FFFFFF"/>
+                </a:solidFill>
+              </a14:hiddenFill>
+            </a:ext>
+          </a:extLst>
+        </p:spPr>
+      </p:pic>
+      <p:sp>
+        <p:nvSpPr>
+          <p:cNvPr id="2" name="Title 1">
+            <a:extLst>
+              <a:ext uri="{FF2B5EF4-FFF2-40B4-BE49-F238E27FC236}">
+                <a16:creationId xmlns:a16="http://schemas.microsoft.com/office/drawing/2014/main" id="{39A1D606-8DD1-369C-5C09-471CDD551AD5}"/>
+              </a:ext>
+            </a:extLst>
+          </p:cNvPr>
+          <p:cNvSpPr>
+            <a:spLocks noGrp="1"/>
+          </p:cNvSpPr>
+          <p:nvPr>
+            <p:ph type="title"/>
+          </p:nvPr>
+        </p:nvSpPr>
+        <p:spPr>
+          <a:xfrm>
+            <a:off x="838200" y="365126"/>
+            <a:ext cx="10515600" cy="718608"/>
+          </a:xfrm>
+        </p:spPr>
+        <p:txBody>
+          <a:bodyPr>
+            <a:normAutofit/>
+          </a:bodyPr>
+          <a:lstStyle/>
+          <a:p>
+            <a:r>
+              <a:rPr lang="nl-NL" sz="3600" noProof="0" dirty="0"/>
+              <a:t>Sterke punten</a:t>
+            </a:r>
+          </a:p>
+        </p:txBody>
+      </p:sp>
+      <p:sp>
+        <p:nvSpPr>
+          <p:cNvPr id="3" name="Content Placeholder 2">
+            <a:extLst>
+              <a:ext uri="{FF2B5EF4-FFF2-40B4-BE49-F238E27FC236}">
+                <a16:creationId xmlns:a16="http://schemas.microsoft.com/office/drawing/2014/main" id="{F4C2D286-E049-0AAB-1360-B7157E11AD7E}"/>
+              </a:ext>
+            </a:extLst>
+          </p:cNvPr>
+          <p:cNvSpPr>
+            <a:spLocks noGrp="1"/>
+          </p:cNvSpPr>
+          <p:nvPr>
+            <p:ph idx="1"/>
+          </p:nvPr>
+        </p:nvSpPr>
+        <p:spPr>
+          <a:xfrm>
+            <a:off x="838200" y="1456267"/>
+            <a:ext cx="4749800" cy="4720696"/>
+          </a:xfrm>
+        </p:spPr>
+        <p:txBody>
+          <a:bodyPr>
+            <a:normAutofit/>
+          </a:bodyPr>
+          <a:lstStyle/>
+          <a:p>
+            <a:pPr>
+              <a:buFontTx/>
+              <a:buChar char="-"/>
+            </a:pPr>
+            <a:r>
+              <a:rPr lang="nl-NL" sz="2000" noProof="0" dirty="0"/>
+              <a:t>Makkelijk te leren, flexibele syntax.</a:t>
+            </a:r>
+          </a:p>
+          <a:p>
+            <a:pPr>
+              <a:buFontTx/>
+              <a:buChar char="-"/>
+            </a:pPr>
+            <a:endParaRPr lang="nl-NL" sz="2000" noProof="0" dirty="0"/>
+          </a:p>
+          <a:p>
+            <a:pPr>
+              <a:buFontTx/>
+              <a:buChar char="-"/>
+            </a:pPr>
+            <a:r>
+              <a:rPr lang="nl-NL" sz="2000" noProof="0" dirty="0"/>
+              <a:t>Veel ontwikkelaars en gebruikers.</a:t>
+            </a:r>
+          </a:p>
+          <a:p>
+            <a:pPr>
+              <a:buFontTx/>
+              <a:buChar char="-"/>
+            </a:pPr>
+            <a:endParaRPr lang="nl-NL" sz="2000" noProof="0" dirty="0"/>
+          </a:p>
+          <a:p>
+            <a:pPr>
+              <a:buFontTx/>
+              <a:buChar char="-"/>
+            </a:pPr>
+            <a:r>
+              <a:rPr lang="nl-NL" sz="2000" noProof="0" dirty="0"/>
+              <a:t>Veel online informatie.</a:t>
+            </a:r>
+          </a:p>
+          <a:p>
+            <a:pPr>
+              <a:buFontTx/>
+              <a:buChar char="-"/>
+            </a:pPr>
+            <a:endParaRPr lang="nl-NL" sz="2000" noProof="0" dirty="0"/>
+          </a:p>
+          <a:p>
+            <a:pPr>
+              <a:buFontTx/>
+              <a:buChar char="-"/>
+            </a:pPr>
+            <a:r>
+              <a:rPr lang="nl-NL" sz="2000" noProof="0" dirty="0"/>
+              <a:t>Uitgebreid ecosysteem van uitbreidingen.</a:t>
+            </a:r>
+          </a:p>
+          <a:p>
+            <a:pPr>
+              <a:buFontTx/>
+              <a:buChar char="-"/>
+            </a:pPr>
+            <a:endParaRPr lang="nl-NL" sz="2000" noProof="0" dirty="0"/>
+          </a:p>
+          <a:p>
+            <a:pPr>
+              <a:buFontTx/>
+              <a:buChar char="-"/>
+            </a:pPr>
+            <a:r>
+              <a:rPr lang="nl-NL" sz="2000" noProof="0" dirty="0"/>
+              <a:t>Breed inzetbaar.</a:t>
+            </a:r>
+          </a:p>
+        </p:txBody>
+      </p:sp>
+    </p:spTree>
+    <p:extLst>
+      <p:ext uri="{BB962C8B-B14F-4D97-AF65-F5344CB8AC3E}">
+        <p14:creationId xmlns:p14="http://schemas.microsoft.com/office/powerpoint/2010/main" val="344422135"/>
+      </p:ext>
+    </p:extLst>
+  </p:cSld>
+  <p:clrMapOvr>
+    <a:masterClrMapping/>
+  </p:clrMapOvr>
+</p:sld>
+</file>
+
+<file path=ppt/slides/slide40.xml><?xml version="1.0" encoding="utf-8"?>
 <p:sld xmlns:a="http://schemas.openxmlformats.org/drawingml/2006/main" xmlns:r="http://schemas.openxmlformats.org/officeDocument/2006/relationships" xmlns:p="http://schemas.openxmlformats.org/presentationml/2006/main">
   <p:cSld>
     <p:spTree>
@@ -20290,241 +21876,7 @@
 </p:sld>
 </file>
 
-<file path=ppt/slides/slide4.xml><?xml version="1.0" encoding="utf-8"?>
-<p:sld xmlns:a="http://schemas.openxmlformats.org/drawingml/2006/main" xmlns:r="http://schemas.openxmlformats.org/officeDocument/2006/relationships" xmlns:p="http://schemas.openxmlformats.org/presentationml/2006/main">
-  <p:cSld>
-    <p:spTree>
-      <p:nvGrpSpPr>
-        <p:cNvPr id="1" name=""/>
-        <p:cNvGrpSpPr/>
-        <p:nvPr/>
-      </p:nvGrpSpPr>
-      <p:grpSpPr>
-        <a:xfrm>
-          <a:off x="0" y="0"/>
-          <a:ext cx="0" cy="0"/>
-          <a:chOff x="0" y="0"/>
-          <a:chExt cx="0" cy="0"/>
-        </a:xfrm>
-      </p:grpSpPr>
-      <p:pic>
-        <p:nvPicPr>
-          <p:cNvPr id="1026" name="Picture 2" descr="Python">
-            <a:extLst>
-              <a:ext uri="{FF2B5EF4-FFF2-40B4-BE49-F238E27FC236}">
-                <a16:creationId xmlns:a16="http://schemas.microsoft.com/office/drawing/2014/main" id="{2604CCD1-B710-B7B3-3C01-61B36162D61A}"/>
-              </a:ext>
-            </a:extLst>
-          </p:cNvPr>
-          <p:cNvPicPr>
-            <a:picLocks noChangeAspect="1" noChangeArrowheads="1"/>
-          </p:cNvPicPr>
-          <p:nvPr/>
-        </p:nvPicPr>
-        <p:blipFill>
-          <a:blip r:embed="rId2">
-            <a:extLst>
-              <a:ext uri="{28A0092B-C50C-407E-A947-70E740481C1C}">
-                <a14:useLocalDpi xmlns:a14="http://schemas.microsoft.com/office/drawing/2010/main" val="0"/>
-              </a:ext>
-            </a:extLst>
-          </a:blip>
-          <a:srcRect/>
-          <a:stretch>
-            <a:fillRect/>
-          </a:stretch>
-        </p:blipFill>
-        <p:spPr bwMode="auto">
-          <a:xfrm>
-            <a:off x="6880227" y="1098853"/>
-            <a:ext cx="4473573" cy="5078110"/>
-          </a:xfrm>
-          <a:prstGeom prst="rect">
-            <a:avLst/>
-          </a:prstGeom>
-          <a:noFill/>
-          <a:extLst>
-            <a:ext uri="{909E8E84-426E-40DD-AFC4-6F175D3DCCD1}">
-              <a14:hiddenFill xmlns:a14="http://schemas.microsoft.com/office/drawing/2010/main">
-                <a:solidFill>
-                  <a:srgbClr val="FFFFFF"/>
-                </a:solidFill>
-              </a14:hiddenFill>
-            </a:ext>
-          </a:extLst>
-        </p:spPr>
-      </p:pic>
-      <p:sp>
-        <p:nvSpPr>
-          <p:cNvPr id="2" name="Title 1">
-            <a:extLst>
-              <a:ext uri="{FF2B5EF4-FFF2-40B4-BE49-F238E27FC236}">
-                <a16:creationId xmlns:a16="http://schemas.microsoft.com/office/drawing/2014/main" id="{39A1D606-8DD1-369C-5C09-471CDD551AD5}"/>
-              </a:ext>
-            </a:extLst>
-          </p:cNvPr>
-          <p:cNvSpPr>
-            <a:spLocks noGrp="1"/>
-          </p:cNvSpPr>
-          <p:nvPr>
-            <p:ph type="title"/>
-          </p:nvPr>
-        </p:nvSpPr>
-        <p:spPr>
-          <a:xfrm>
-            <a:off x="838200" y="365126"/>
-            <a:ext cx="10515600" cy="718608"/>
-          </a:xfrm>
-        </p:spPr>
-        <p:txBody>
-          <a:bodyPr>
-            <a:normAutofit/>
-          </a:bodyPr>
-          <a:lstStyle/>
-          <a:p>
-            <a:r>
-              <a:rPr lang="nl-NL" sz="3600" noProof="0" dirty="0"/>
-              <a:t>Sterke en zwakke punten</a:t>
-            </a:r>
-          </a:p>
-        </p:txBody>
-      </p:sp>
-      <p:sp>
-        <p:nvSpPr>
-          <p:cNvPr id="3" name="Content Placeholder 2">
-            <a:extLst>
-              <a:ext uri="{FF2B5EF4-FFF2-40B4-BE49-F238E27FC236}">
-                <a16:creationId xmlns:a16="http://schemas.microsoft.com/office/drawing/2014/main" id="{F4C2D286-E049-0AAB-1360-B7157E11AD7E}"/>
-              </a:ext>
-            </a:extLst>
-          </p:cNvPr>
-          <p:cNvSpPr>
-            <a:spLocks noGrp="1"/>
-          </p:cNvSpPr>
-          <p:nvPr>
-            <p:ph idx="1"/>
-          </p:nvPr>
-        </p:nvSpPr>
-        <p:spPr>
-          <a:xfrm>
-            <a:off x="838200" y="1456267"/>
-            <a:ext cx="4749800" cy="4720696"/>
-          </a:xfrm>
-        </p:spPr>
-        <p:txBody>
-          <a:bodyPr>
-            <a:normAutofit/>
-          </a:bodyPr>
-          <a:lstStyle/>
-          <a:p>
-            <a:pPr marL="0" indent="0">
-              <a:buNone/>
-            </a:pPr>
-            <a:r>
-              <a:rPr lang="nl-NL" sz="2000" b="1" noProof="0" dirty="0"/>
-              <a:t>Sterke punten:</a:t>
-            </a:r>
-          </a:p>
-          <a:p>
-            <a:pPr marL="0" indent="0">
-              <a:buNone/>
-            </a:pPr>
-            <a:endParaRPr lang="nl-NL" sz="2000" noProof="0" dirty="0"/>
-          </a:p>
-          <a:p>
-            <a:pPr>
-              <a:buFontTx/>
-              <a:buChar char="-"/>
-            </a:pPr>
-            <a:r>
-              <a:rPr lang="nl-NL" sz="2000" noProof="0" dirty="0"/>
-              <a:t>Makkelijk te leren, flexibele syntax.</a:t>
-            </a:r>
-          </a:p>
-          <a:p>
-            <a:pPr>
-              <a:buFontTx/>
-              <a:buChar char="-"/>
-            </a:pPr>
-            <a:endParaRPr lang="nl-NL" sz="2000" noProof="0" dirty="0"/>
-          </a:p>
-          <a:p>
-            <a:pPr>
-              <a:buFontTx/>
-              <a:buChar char="-"/>
-            </a:pPr>
-            <a:r>
-              <a:rPr lang="nl-NL" sz="2000" noProof="0" dirty="0"/>
-              <a:t>Veel ontwikkelaars en gebruikers.</a:t>
-            </a:r>
-          </a:p>
-          <a:p>
-            <a:pPr>
-              <a:buFontTx/>
-              <a:buChar char="-"/>
-            </a:pPr>
-            <a:endParaRPr lang="nl-NL" sz="2000" noProof="0" dirty="0"/>
-          </a:p>
-          <a:p>
-            <a:pPr>
-              <a:buFontTx/>
-              <a:buChar char="-"/>
-            </a:pPr>
-            <a:r>
-              <a:rPr lang="nl-NL" sz="2000" noProof="0" dirty="0"/>
-              <a:t>Veel online informatie.</a:t>
-            </a:r>
-          </a:p>
-          <a:p>
-            <a:pPr>
-              <a:buFontTx/>
-              <a:buChar char="-"/>
-            </a:pPr>
-            <a:endParaRPr lang="nl-NL" sz="2000" noProof="0" dirty="0"/>
-          </a:p>
-          <a:p>
-            <a:pPr>
-              <a:buFontTx/>
-              <a:buChar char="-"/>
-            </a:pPr>
-            <a:r>
-              <a:rPr lang="nl-NL" sz="2000" noProof="0" dirty="0"/>
-              <a:t>Uitgebreid ecosysteem van uitbreidingen.</a:t>
-            </a:r>
-          </a:p>
-          <a:p>
-            <a:pPr>
-              <a:buFontTx/>
-              <a:buChar char="-"/>
-            </a:pPr>
-            <a:endParaRPr lang="nl-NL" sz="2000" noProof="0" dirty="0"/>
-          </a:p>
-          <a:p>
-            <a:pPr>
-              <a:buFontTx/>
-              <a:buChar char="-"/>
-            </a:pPr>
-            <a:r>
-              <a:rPr lang="nl-NL" sz="2000" noProof="0" dirty="0"/>
-              <a:t>Breed inzetbaar.</a:t>
-            </a:r>
-          </a:p>
-        </p:txBody>
-      </p:sp>
-    </p:spTree>
-    <p:extLst>
-      <p:ext uri="{BB962C8B-B14F-4D97-AF65-F5344CB8AC3E}">
-        <p14:creationId xmlns:p14="http://schemas.microsoft.com/office/powerpoint/2010/main" val="344422135"/>
-      </p:ext>
-    </p:extLst>
-  </p:cSld>
-  <p:clrMapOvr>
-    <a:masterClrMapping/>
-  </p:clrMapOvr>
-</p:sld>
-</file>
-
-<file path=ppt/slides/slide40.xml><?xml version="1.0" encoding="utf-8"?>
+<file path=ppt/slides/slide41.xml><?xml version="1.0" encoding="utf-8"?>
 <p:sld xmlns:a="http://schemas.openxmlformats.org/drawingml/2006/main" xmlns:r="http://schemas.openxmlformats.org/officeDocument/2006/relationships" xmlns:p="http://schemas.openxmlformats.org/presentationml/2006/main">
   <p:cSld>
     <p:spTree>
@@ -21252,7 +22604,7 @@
 </p:sld>
 </file>
 
-<file path=ppt/slides/slide41.xml><?xml version="1.0" encoding="utf-8"?>
+<file path=ppt/slides/slide42.xml><?xml version="1.0" encoding="utf-8"?>
 <p:sld xmlns:a="http://schemas.openxmlformats.org/drawingml/2006/main" xmlns:r="http://schemas.openxmlformats.org/officeDocument/2006/relationships" xmlns:p="http://schemas.openxmlformats.org/presentationml/2006/main">
   <p:cSld>
     <p:spTree>
@@ -21462,7 +22814,7 @@
 </p:sld>
 </file>
 
-<file path=ppt/slides/slide42.xml><?xml version="1.0" encoding="utf-8"?>
+<file path=ppt/slides/slide43.xml><?xml version="1.0" encoding="utf-8"?>
 <p:sld xmlns:a="http://schemas.openxmlformats.org/drawingml/2006/main" xmlns:r="http://schemas.openxmlformats.org/officeDocument/2006/relationships" xmlns:p="http://schemas.openxmlformats.org/presentationml/2006/main">
   <p:cSld>
     <p:spTree>
@@ -21551,7 +22903,7 @@
 </p:sld>
 </file>
 
-<file path=ppt/slides/slide43.xml><?xml version="1.0" encoding="utf-8"?>
+<file path=ppt/slides/slide44.xml><?xml version="1.0" encoding="utf-8"?>
 <p:sld xmlns:a="http://schemas.openxmlformats.org/drawingml/2006/main" xmlns:r="http://schemas.openxmlformats.org/officeDocument/2006/relationships" xmlns:p="http://schemas.openxmlformats.org/presentationml/2006/main">
   <p:cSld>
     <p:spTree>
@@ -21724,7 +23076,7 @@
 </p:sld>
 </file>
 
-<file path=ppt/slides/slide44.xml><?xml version="1.0" encoding="utf-8"?>
+<file path=ppt/slides/slide45.xml><?xml version="1.0" encoding="utf-8"?>
 <p:sld xmlns:a="http://schemas.openxmlformats.org/drawingml/2006/main" xmlns:r="http://schemas.openxmlformats.org/officeDocument/2006/relationships" xmlns:p="http://schemas.openxmlformats.org/presentationml/2006/main">
   <p:cSld>
     <p:spTree>
@@ -22468,7 +23820,7 @@
 </p:sld>
 </file>
 
-<file path=ppt/slides/slide45.xml><?xml version="1.0" encoding="utf-8"?>
+<file path=ppt/slides/slide46.xml><?xml version="1.0" encoding="utf-8"?>
 <p:sld xmlns:a="http://schemas.openxmlformats.org/drawingml/2006/main" xmlns:r="http://schemas.openxmlformats.org/officeDocument/2006/relationships" xmlns:p="http://schemas.openxmlformats.org/presentationml/2006/main">
   <p:cSld>
     <p:spTree>
@@ -22558,7 +23910,7 @@
 </p:sld>
 </file>
 
-<file path=ppt/slides/slide46.xml><?xml version="1.0" encoding="utf-8"?>
+<file path=ppt/slides/slide47.xml><?xml version="1.0" encoding="utf-8"?>
 <p:sld xmlns:a="http://schemas.openxmlformats.org/drawingml/2006/main" xmlns:r="http://schemas.openxmlformats.org/officeDocument/2006/relationships" xmlns:p="http://schemas.openxmlformats.org/presentationml/2006/main">
   <p:cSld>
     <p:spTree>
@@ -23054,7 +24406,7 @@
 </p:sld>
 </file>
 
-<file path=ppt/slides/slide47.xml><?xml version="1.0" encoding="utf-8"?>
+<file path=ppt/slides/slide48.xml><?xml version="1.0" encoding="utf-8"?>
 <p:sld xmlns:a="http://schemas.openxmlformats.org/drawingml/2006/main" xmlns:r="http://schemas.openxmlformats.org/officeDocument/2006/relationships" xmlns:p="http://schemas.openxmlformats.org/presentationml/2006/main">
   <p:cSld>
     <p:spTree>
@@ -23149,7 +24501,7 @@
 </p:sld>
 </file>
 
-<file path=ppt/slides/slide48.xml><?xml version="1.0" encoding="utf-8"?>
+<file path=ppt/slides/slide49.xml><?xml version="1.0" encoding="utf-8"?>
 <p:sld xmlns:a="http://schemas.openxmlformats.org/drawingml/2006/main" xmlns:r="http://schemas.openxmlformats.org/officeDocument/2006/relationships" xmlns:p="http://schemas.openxmlformats.org/presentationml/2006/main">
   <p:cSld>
     <p:spTree>
@@ -23508,7 +24860,892 @@
 </p:sld>
 </file>
 
-<file path=ppt/slides/slide49.xml><?xml version="1.0" encoding="utf-8"?>
+<file path=ppt/slides/slide5.xml><?xml version="1.0" encoding="utf-8"?>
+<p:sld xmlns:a="http://schemas.openxmlformats.org/drawingml/2006/main" xmlns:r="http://schemas.openxmlformats.org/officeDocument/2006/relationships" xmlns:p="http://schemas.openxmlformats.org/presentationml/2006/main">
+  <p:cSld>
+    <p:spTree>
+      <p:nvGrpSpPr>
+        <p:cNvPr id="1" name="">
+          <a:extLst>
+            <a:ext uri="{FF2B5EF4-FFF2-40B4-BE49-F238E27FC236}">
+              <a16:creationId xmlns:a16="http://schemas.microsoft.com/office/drawing/2014/main" id="{F4B537BD-A938-DAF3-FEF2-1B5E3A6E1778}"/>
+            </a:ext>
+          </a:extLst>
+        </p:cNvPr>
+        <p:cNvGrpSpPr/>
+        <p:nvPr/>
+      </p:nvGrpSpPr>
+      <p:grpSpPr>
+        <a:xfrm>
+          <a:off x="0" y="0"/>
+          <a:ext cx="0" cy="0"/>
+          <a:chOff x="0" y="0"/>
+          <a:chExt cx="0" cy="0"/>
+        </a:xfrm>
+      </p:grpSpPr>
+      <p:sp>
+        <p:nvSpPr>
+          <p:cNvPr id="2" name="Title 1">
+            <a:extLst>
+              <a:ext uri="{FF2B5EF4-FFF2-40B4-BE49-F238E27FC236}">
+                <a16:creationId xmlns:a16="http://schemas.microsoft.com/office/drawing/2014/main" id="{9934E2EF-C0A7-A70B-04F1-1E24BD18D62D}"/>
+              </a:ext>
+            </a:extLst>
+          </p:cNvPr>
+          <p:cNvSpPr>
+            <a:spLocks noGrp="1"/>
+          </p:cNvSpPr>
+          <p:nvPr>
+            <p:ph type="title"/>
+          </p:nvPr>
+        </p:nvSpPr>
+        <p:spPr>
+          <a:xfrm>
+            <a:off x="838200" y="365126"/>
+            <a:ext cx="10515600" cy="718608"/>
+          </a:xfrm>
+        </p:spPr>
+        <p:txBody>
+          <a:bodyPr>
+            <a:normAutofit/>
+          </a:bodyPr>
+          <a:lstStyle/>
+          <a:p>
+            <a:r>
+              <a:rPr lang="nl-NL" sz="3600" noProof="0" dirty="0"/>
+              <a:t>Zwakke punten</a:t>
+            </a:r>
+          </a:p>
+        </p:txBody>
+      </p:sp>
+      <p:sp>
+        <p:nvSpPr>
+          <p:cNvPr id="3" name="Content Placeholder 2">
+            <a:extLst>
+              <a:ext uri="{FF2B5EF4-FFF2-40B4-BE49-F238E27FC236}">
+                <a16:creationId xmlns:a16="http://schemas.microsoft.com/office/drawing/2014/main" id="{AE69D57C-00B8-1248-107F-AA6E5F085DF9}"/>
+              </a:ext>
+            </a:extLst>
+          </p:cNvPr>
+          <p:cNvSpPr>
+            <a:spLocks noGrp="1"/>
+          </p:cNvSpPr>
+          <p:nvPr>
+            <p:ph idx="1"/>
+          </p:nvPr>
+        </p:nvSpPr>
+        <p:spPr>
+          <a:xfrm>
+            <a:off x="838200" y="1456267"/>
+            <a:ext cx="4749800" cy="4720696"/>
+          </a:xfrm>
+        </p:spPr>
+        <p:txBody>
+          <a:bodyPr>
+            <a:normAutofit/>
+          </a:bodyPr>
+          <a:lstStyle/>
+          <a:p>
+            <a:pPr>
+              <a:buFontTx/>
+              <a:buChar char="-"/>
+            </a:pPr>
+            <a:r>
+              <a:rPr lang="nl-NL" sz="2000" dirty="0"/>
+              <a:t>Makkelijk om “slechte” code te schrijven.</a:t>
+            </a:r>
+          </a:p>
+          <a:p>
+            <a:pPr>
+              <a:buFontTx/>
+              <a:buChar char="-"/>
+            </a:pPr>
+            <a:endParaRPr lang="nl-NL" sz="2000" dirty="0"/>
+          </a:p>
+          <a:p>
+            <a:pPr>
+              <a:buFontTx/>
+              <a:buChar char="-"/>
+            </a:pPr>
+            <a:r>
+              <a:rPr lang="nl-NL" sz="2000" dirty="0"/>
+              <a:t>Relatief traag  (vgl. C, C++, Scala, Rust).</a:t>
+            </a:r>
+          </a:p>
+          <a:p>
+            <a:pPr>
+              <a:buFontTx/>
+              <a:buChar char="-"/>
+            </a:pPr>
+            <a:endParaRPr lang="nl-NL" sz="2000" dirty="0"/>
+          </a:p>
+          <a:p>
+            <a:pPr>
+              <a:buFontTx/>
+              <a:buChar char="-"/>
+            </a:pPr>
+            <a:r>
+              <a:rPr lang="nl-NL" sz="2000" dirty="0"/>
+              <a:t>Distributie code niet eenduidig.</a:t>
+            </a:r>
+          </a:p>
+        </p:txBody>
+      </p:sp>
+      <p:sp>
+        <p:nvSpPr>
+          <p:cNvPr id="4" name="Content Placeholder 2">
+            <a:extLst>
+              <a:ext uri="{FF2B5EF4-FFF2-40B4-BE49-F238E27FC236}">
+                <a16:creationId xmlns:a16="http://schemas.microsoft.com/office/drawing/2014/main" id="{2210A4AD-7C19-5184-ECB4-77EDD34F6402}"/>
+              </a:ext>
+            </a:extLst>
+          </p:cNvPr>
+          <p:cNvSpPr txBox="1">
+            <a:spLocks/>
+          </p:cNvSpPr>
+          <p:nvPr/>
+        </p:nvSpPr>
+        <p:spPr>
+          <a:xfrm>
+            <a:off x="6409267" y="1456267"/>
+            <a:ext cx="4749800" cy="4720696"/>
+          </a:xfrm>
+          <a:prstGeom prst="rect">
+            <a:avLst/>
+          </a:prstGeom>
+        </p:spPr>
+        <p:txBody>
+          <a:bodyPr vert="horz" lIns="91440" tIns="45720" rIns="91440" bIns="45720" rtlCol="0">
+            <a:normAutofit/>
+          </a:bodyPr>
+          <a:lstStyle>
+            <a:lvl1pPr marL="228600" indent="-228600" algn="l" defTabSz="914400" rtl="0" eaLnBrk="1" latinLnBrk="0" hangingPunct="1">
+              <a:lnSpc>
+                <a:spcPct val="90000"/>
+              </a:lnSpc>
+              <a:spcBef>
+                <a:spcPts val="1000"/>
+              </a:spcBef>
+              <a:buFont typeface="Arial" panose="020B0604020202020204" pitchFamily="34" charset="0"/>
+              <a:buChar char="•"/>
+              <a:defRPr sz="2800" kern="1200">
+                <a:solidFill>
+                  <a:schemeClr val="tx1"/>
+                </a:solidFill>
+                <a:latin typeface="+mn-lt"/>
+                <a:ea typeface="+mn-ea"/>
+                <a:cs typeface="+mn-cs"/>
+              </a:defRPr>
+            </a:lvl1pPr>
+            <a:lvl2pPr marL="685800" indent="-228600" algn="l" defTabSz="914400" rtl="0" eaLnBrk="1" latinLnBrk="0" hangingPunct="1">
+              <a:lnSpc>
+                <a:spcPct val="90000"/>
+              </a:lnSpc>
+              <a:spcBef>
+                <a:spcPts val="500"/>
+              </a:spcBef>
+              <a:buFont typeface="Arial" panose="020B0604020202020204" pitchFamily="34" charset="0"/>
+              <a:buChar char="•"/>
+              <a:defRPr sz="2400" kern="1200">
+                <a:solidFill>
+                  <a:schemeClr val="tx1"/>
+                </a:solidFill>
+                <a:latin typeface="+mn-lt"/>
+                <a:ea typeface="+mn-ea"/>
+                <a:cs typeface="+mn-cs"/>
+              </a:defRPr>
+            </a:lvl2pPr>
+            <a:lvl3pPr marL="1143000" indent="-228600" algn="l" defTabSz="914400" rtl="0" eaLnBrk="1" latinLnBrk="0" hangingPunct="1">
+              <a:lnSpc>
+                <a:spcPct val="90000"/>
+              </a:lnSpc>
+              <a:spcBef>
+                <a:spcPts val="500"/>
+              </a:spcBef>
+              <a:buFont typeface="Arial" panose="020B0604020202020204" pitchFamily="34" charset="0"/>
+              <a:buChar char="•"/>
+              <a:defRPr sz="2000" kern="1200">
+                <a:solidFill>
+                  <a:schemeClr val="tx1"/>
+                </a:solidFill>
+                <a:latin typeface="+mn-lt"/>
+                <a:ea typeface="+mn-ea"/>
+                <a:cs typeface="+mn-cs"/>
+              </a:defRPr>
+            </a:lvl3pPr>
+            <a:lvl4pPr marL="1600200" indent="-228600" algn="l" defTabSz="914400" rtl="0" eaLnBrk="1" latinLnBrk="0" hangingPunct="1">
+              <a:lnSpc>
+                <a:spcPct val="90000"/>
+              </a:lnSpc>
+              <a:spcBef>
+                <a:spcPts val="500"/>
+              </a:spcBef>
+              <a:buFont typeface="Arial" panose="020B0604020202020204" pitchFamily="34" charset="0"/>
+              <a:buChar char="•"/>
+              <a:defRPr sz="1800" kern="1200">
+                <a:solidFill>
+                  <a:schemeClr val="tx1"/>
+                </a:solidFill>
+                <a:latin typeface="+mn-lt"/>
+                <a:ea typeface="+mn-ea"/>
+                <a:cs typeface="+mn-cs"/>
+              </a:defRPr>
+            </a:lvl4pPr>
+            <a:lvl5pPr marL="2057400" indent="-228600" algn="l" defTabSz="914400" rtl="0" eaLnBrk="1" latinLnBrk="0" hangingPunct="1">
+              <a:lnSpc>
+                <a:spcPct val="90000"/>
+              </a:lnSpc>
+              <a:spcBef>
+                <a:spcPts val="500"/>
+              </a:spcBef>
+              <a:buFont typeface="Arial" panose="020B0604020202020204" pitchFamily="34" charset="0"/>
+              <a:buChar char="•"/>
+              <a:defRPr sz="1800" kern="1200">
+                <a:solidFill>
+                  <a:schemeClr val="tx1"/>
+                </a:solidFill>
+                <a:latin typeface="+mn-lt"/>
+                <a:ea typeface="+mn-ea"/>
+                <a:cs typeface="+mn-cs"/>
+              </a:defRPr>
+            </a:lvl5pPr>
+            <a:lvl6pPr marL="2514600" indent="-228600" algn="l" defTabSz="914400" rtl="0" eaLnBrk="1" latinLnBrk="0" hangingPunct="1">
+              <a:lnSpc>
+                <a:spcPct val="90000"/>
+              </a:lnSpc>
+              <a:spcBef>
+                <a:spcPts val="500"/>
+              </a:spcBef>
+              <a:buFont typeface="Arial" panose="020B0604020202020204" pitchFamily="34" charset="0"/>
+              <a:buChar char="•"/>
+              <a:defRPr sz="1800" kern="1200">
+                <a:solidFill>
+                  <a:schemeClr val="tx1"/>
+                </a:solidFill>
+                <a:latin typeface="+mn-lt"/>
+                <a:ea typeface="+mn-ea"/>
+                <a:cs typeface="+mn-cs"/>
+              </a:defRPr>
+            </a:lvl6pPr>
+            <a:lvl7pPr marL="2971800" indent="-228600" algn="l" defTabSz="914400" rtl="0" eaLnBrk="1" latinLnBrk="0" hangingPunct="1">
+              <a:lnSpc>
+                <a:spcPct val="90000"/>
+              </a:lnSpc>
+              <a:spcBef>
+                <a:spcPts val="500"/>
+              </a:spcBef>
+              <a:buFont typeface="Arial" panose="020B0604020202020204" pitchFamily="34" charset="0"/>
+              <a:buChar char="•"/>
+              <a:defRPr sz="1800" kern="1200">
+                <a:solidFill>
+                  <a:schemeClr val="tx1"/>
+                </a:solidFill>
+                <a:latin typeface="+mn-lt"/>
+                <a:ea typeface="+mn-ea"/>
+                <a:cs typeface="+mn-cs"/>
+              </a:defRPr>
+            </a:lvl7pPr>
+            <a:lvl8pPr marL="3429000" indent="-228600" algn="l" defTabSz="914400" rtl="0" eaLnBrk="1" latinLnBrk="0" hangingPunct="1">
+              <a:lnSpc>
+                <a:spcPct val="90000"/>
+              </a:lnSpc>
+              <a:spcBef>
+                <a:spcPts val="500"/>
+              </a:spcBef>
+              <a:buFont typeface="Arial" panose="020B0604020202020204" pitchFamily="34" charset="0"/>
+              <a:buChar char="•"/>
+              <a:defRPr sz="1800" kern="1200">
+                <a:solidFill>
+                  <a:schemeClr val="tx1"/>
+                </a:solidFill>
+                <a:latin typeface="+mn-lt"/>
+                <a:ea typeface="+mn-ea"/>
+                <a:cs typeface="+mn-cs"/>
+              </a:defRPr>
+            </a:lvl8pPr>
+            <a:lvl9pPr marL="3886200" indent="-228600" algn="l" defTabSz="914400" rtl="0" eaLnBrk="1" latinLnBrk="0" hangingPunct="1">
+              <a:lnSpc>
+                <a:spcPct val="90000"/>
+              </a:lnSpc>
+              <a:spcBef>
+                <a:spcPts val="500"/>
+              </a:spcBef>
+              <a:buFont typeface="Arial" panose="020B0604020202020204" pitchFamily="34" charset="0"/>
+              <a:buChar char="•"/>
+              <a:defRPr sz="1800" kern="1200">
+                <a:solidFill>
+                  <a:schemeClr val="tx1"/>
+                </a:solidFill>
+                <a:latin typeface="+mn-lt"/>
+                <a:ea typeface="+mn-ea"/>
+                <a:cs typeface="+mn-cs"/>
+              </a:defRPr>
+            </a:lvl9pPr>
+          </a:lstStyle>
+          <a:p>
+            <a:pPr marL="0" indent="0">
+              <a:buNone/>
+            </a:pPr>
+            <a:endParaRPr lang="nl-NL" sz="2000" dirty="0"/>
+          </a:p>
+        </p:txBody>
+      </p:sp>
+      <p:sp>
+        <p:nvSpPr>
+          <p:cNvPr id="5" name="Content Placeholder 2">
+            <a:extLst>
+              <a:ext uri="{FF2B5EF4-FFF2-40B4-BE49-F238E27FC236}">
+                <a16:creationId xmlns:a16="http://schemas.microsoft.com/office/drawing/2014/main" id="{FE4D819A-A65A-B849-482E-28A9AA671928}"/>
+              </a:ext>
+            </a:extLst>
+          </p:cNvPr>
+          <p:cNvSpPr txBox="1">
+            <a:spLocks/>
+          </p:cNvSpPr>
+          <p:nvPr/>
+        </p:nvSpPr>
+        <p:spPr>
+          <a:xfrm>
+            <a:off x="6604000" y="1456267"/>
+            <a:ext cx="4749800" cy="4720696"/>
+          </a:xfrm>
+          <a:prstGeom prst="rect">
+            <a:avLst/>
+          </a:prstGeom>
+        </p:spPr>
+        <p:txBody>
+          <a:bodyPr vert="horz" lIns="91440" tIns="45720" rIns="91440" bIns="45720" rtlCol="0">
+            <a:normAutofit/>
+          </a:bodyPr>
+          <a:lstStyle>
+            <a:lvl1pPr marL="228600" indent="-228600" algn="l" defTabSz="914400" rtl="0" eaLnBrk="1" latinLnBrk="0" hangingPunct="1">
+              <a:lnSpc>
+                <a:spcPct val="90000"/>
+              </a:lnSpc>
+              <a:spcBef>
+                <a:spcPts val="1000"/>
+              </a:spcBef>
+              <a:buFont typeface="Arial" panose="020B0604020202020204" pitchFamily="34" charset="0"/>
+              <a:buChar char="•"/>
+              <a:defRPr sz="2800" kern="1200">
+                <a:solidFill>
+                  <a:schemeClr val="tx1"/>
+                </a:solidFill>
+                <a:latin typeface="+mn-lt"/>
+                <a:ea typeface="+mn-ea"/>
+                <a:cs typeface="+mn-cs"/>
+              </a:defRPr>
+            </a:lvl1pPr>
+            <a:lvl2pPr marL="685800" indent="-228600" algn="l" defTabSz="914400" rtl="0" eaLnBrk="1" latinLnBrk="0" hangingPunct="1">
+              <a:lnSpc>
+                <a:spcPct val="90000"/>
+              </a:lnSpc>
+              <a:spcBef>
+                <a:spcPts val="500"/>
+              </a:spcBef>
+              <a:buFont typeface="Arial" panose="020B0604020202020204" pitchFamily="34" charset="0"/>
+              <a:buChar char="•"/>
+              <a:defRPr sz="2400" kern="1200">
+                <a:solidFill>
+                  <a:schemeClr val="tx1"/>
+                </a:solidFill>
+                <a:latin typeface="+mn-lt"/>
+                <a:ea typeface="+mn-ea"/>
+                <a:cs typeface="+mn-cs"/>
+              </a:defRPr>
+            </a:lvl2pPr>
+            <a:lvl3pPr marL="1143000" indent="-228600" algn="l" defTabSz="914400" rtl="0" eaLnBrk="1" latinLnBrk="0" hangingPunct="1">
+              <a:lnSpc>
+                <a:spcPct val="90000"/>
+              </a:lnSpc>
+              <a:spcBef>
+                <a:spcPts val="500"/>
+              </a:spcBef>
+              <a:buFont typeface="Arial" panose="020B0604020202020204" pitchFamily="34" charset="0"/>
+              <a:buChar char="•"/>
+              <a:defRPr sz="2000" kern="1200">
+                <a:solidFill>
+                  <a:schemeClr val="tx1"/>
+                </a:solidFill>
+                <a:latin typeface="+mn-lt"/>
+                <a:ea typeface="+mn-ea"/>
+                <a:cs typeface="+mn-cs"/>
+              </a:defRPr>
+            </a:lvl3pPr>
+            <a:lvl4pPr marL="1600200" indent="-228600" algn="l" defTabSz="914400" rtl="0" eaLnBrk="1" latinLnBrk="0" hangingPunct="1">
+              <a:lnSpc>
+                <a:spcPct val="90000"/>
+              </a:lnSpc>
+              <a:spcBef>
+                <a:spcPts val="500"/>
+              </a:spcBef>
+              <a:buFont typeface="Arial" panose="020B0604020202020204" pitchFamily="34" charset="0"/>
+              <a:buChar char="•"/>
+              <a:defRPr sz="1800" kern="1200">
+                <a:solidFill>
+                  <a:schemeClr val="tx1"/>
+                </a:solidFill>
+                <a:latin typeface="+mn-lt"/>
+                <a:ea typeface="+mn-ea"/>
+                <a:cs typeface="+mn-cs"/>
+              </a:defRPr>
+            </a:lvl4pPr>
+            <a:lvl5pPr marL="2057400" indent="-228600" algn="l" defTabSz="914400" rtl="0" eaLnBrk="1" latinLnBrk="0" hangingPunct="1">
+              <a:lnSpc>
+                <a:spcPct val="90000"/>
+              </a:lnSpc>
+              <a:spcBef>
+                <a:spcPts val="500"/>
+              </a:spcBef>
+              <a:buFont typeface="Arial" panose="020B0604020202020204" pitchFamily="34" charset="0"/>
+              <a:buChar char="•"/>
+              <a:defRPr sz="1800" kern="1200">
+                <a:solidFill>
+                  <a:schemeClr val="tx1"/>
+                </a:solidFill>
+                <a:latin typeface="+mn-lt"/>
+                <a:ea typeface="+mn-ea"/>
+                <a:cs typeface="+mn-cs"/>
+              </a:defRPr>
+            </a:lvl5pPr>
+            <a:lvl6pPr marL="2514600" indent="-228600" algn="l" defTabSz="914400" rtl="0" eaLnBrk="1" latinLnBrk="0" hangingPunct="1">
+              <a:lnSpc>
+                <a:spcPct val="90000"/>
+              </a:lnSpc>
+              <a:spcBef>
+                <a:spcPts val="500"/>
+              </a:spcBef>
+              <a:buFont typeface="Arial" panose="020B0604020202020204" pitchFamily="34" charset="0"/>
+              <a:buChar char="•"/>
+              <a:defRPr sz="1800" kern="1200">
+                <a:solidFill>
+                  <a:schemeClr val="tx1"/>
+                </a:solidFill>
+                <a:latin typeface="+mn-lt"/>
+                <a:ea typeface="+mn-ea"/>
+                <a:cs typeface="+mn-cs"/>
+              </a:defRPr>
+            </a:lvl6pPr>
+            <a:lvl7pPr marL="2971800" indent="-228600" algn="l" defTabSz="914400" rtl="0" eaLnBrk="1" latinLnBrk="0" hangingPunct="1">
+              <a:lnSpc>
+                <a:spcPct val="90000"/>
+              </a:lnSpc>
+              <a:spcBef>
+                <a:spcPts val="500"/>
+              </a:spcBef>
+              <a:buFont typeface="Arial" panose="020B0604020202020204" pitchFamily="34" charset="0"/>
+              <a:buChar char="•"/>
+              <a:defRPr sz="1800" kern="1200">
+                <a:solidFill>
+                  <a:schemeClr val="tx1"/>
+                </a:solidFill>
+                <a:latin typeface="+mn-lt"/>
+                <a:ea typeface="+mn-ea"/>
+                <a:cs typeface="+mn-cs"/>
+              </a:defRPr>
+            </a:lvl7pPr>
+            <a:lvl8pPr marL="3429000" indent="-228600" algn="l" defTabSz="914400" rtl="0" eaLnBrk="1" latinLnBrk="0" hangingPunct="1">
+              <a:lnSpc>
+                <a:spcPct val="90000"/>
+              </a:lnSpc>
+              <a:spcBef>
+                <a:spcPts val="500"/>
+              </a:spcBef>
+              <a:buFont typeface="Arial" panose="020B0604020202020204" pitchFamily="34" charset="0"/>
+              <a:buChar char="•"/>
+              <a:defRPr sz="1800" kern="1200">
+                <a:solidFill>
+                  <a:schemeClr val="tx1"/>
+                </a:solidFill>
+                <a:latin typeface="+mn-lt"/>
+                <a:ea typeface="+mn-ea"/>
+                <a:cs typeface="+mn-cs"/>
+              </a:defRPr>
+            </a:lvl8pPr>
+            <a:lvl9pPr marL="3886200" indent="-228600" algn="l" defTabSz="914400" rtl="0" eaLnBrk="1" latinLnBrk="0" hangingPunct="1">
+              <a:lnSpc>
+                <a:spcPct val="90000"/>
+              </a:lnSpc>
+              <a:spcBef>
+                <a:spcPts val="500"/>
+              </a:spcBef>
+              <a:buFont typeface="Arial" panose="020B0604020202020204" pitchFamily="34" charset="0"/>
+              <a:buChar char="•"/>
+              <a:defRPr sz="1800" kern="1200">
+                <a:solidFill>
+                  <a:schemeClr val="tx1"/>
+                </a:solidFill>
+                <a:latin typeface="+mn-lt"/>
+                <a:ea typeface="+mn-ea"/>
+                <a:cs typeface="+mn-cs"/>
+              </a:defRPr>
+            </a:lvl9pPr>
+          </a:lstStyle>
+          <a:p>
+            <a:pPr marL="0" indent="0">
+              <a:lnSpc>
+                <a:spcPct val="100000"/>
+              </a:lnSpc>
+              <a:spcBef>
+                <a:spcPts val="0"/>
+              </a:spcBef>
+              <a:buFont typeface="Arial" panose="020B0604020202020204" pitchFamily="34" charset="0"/>
+              <a:buNone/>
+            </a:pPr>
+            <a:r>
+              <a:rPr lang="nl-NL" sz="1800" dirty="0" err="1">
+                <a:latin typeface="Courier New" panose="02070309020205020404" pitchFamily="49" charset="0"/>
+                <a:cs typeface="Courier New" panose="02070309020205020404" pitchFamily="49" charset="0"/>
+              </a:rPr>
+              <a:t>qs</a:t>
+            </a:r>
+            <a:r>
+              <a:rPr lang="nl-NL" sz="1800" dirty="0">
+                <a:latin typeface="Courier New" panose="02070309020205020404" pitchFamily="49" charset="0"/>
+                <a:cs typeface="Courier New" panose="02070309020205020404" pitchFamily="49" charset="0"/>
+              </a:rPr>
+              <a:t> = [</a:t>
+            </a:r>
+          </a:p>
+          <a:p>
+            <a:pPr marL="0" indent="0">
+              <a:lnSpc>
+                <a:spcPct val="100000"/>
+              </a:lnSpc>
+              <a:spcBef>
+                <a:spcPts val="0"/>
+              </a:spcBef>
+              <a:buFont typeface="Arial" panose="020B0604020202020204" pitchFamily="34" charset="0"/>
+              <a:buNone/>
+            </a:pPr>
+            <a:r>
+              <a:rPr lang="nl-NL" sz="1800" dirty="0">
+                <a:latin typeface="Courier New" panose="02070309020205020404" pitchFamily="49" charset="0"/>
+                <a:cs typeface="Courier New" panose="02070309020205020404" pitchFamily="49" charset="0"/>
+              </a:rPr>
+              <a:t>    _ ** 2 </a:t>
+            </a:r>
+            <a:r>
+              <a:rPr lang="nl-NL" sz="1800" dirty="0" err="1">
+                <a:solidFill>
+                  <a:srgbClr val="7030A0"/>
+                </a:solidFill>
+                <a:latin typeface="Courier New" panose="02070309020205020404" pitchFamily="49" charset="0"/>
+                <a:cs typeface="Courier New" panose="02070309020205020404" pitchFamily="49" charset="0"/>
+              </a:rPr>
+              <a:t>for</a:t>
+            </a:r>
+            <a:r>
+              <a:rPr lang="nl-NL" sz="1800" dirty="0">
+                <a:latin typeface="Courier New" panose="02070309020205020404" pitchFamily="49" charset="0"/>
+                <a:cs typeface="Courier New" panose="02070309020205020404" pitchFamily="49" charset="0"/>
+              </a:rPr>
+              <a:t> _ </a:t>
+            </a:r>
+            <a:r>
+              <a:rPr lang="nl-NL" sz="1800" dirty="0">
+                <a:solidFill>
+                  <a:srgbClr val="7030A0"/>
+                </a:solidFill>
+                <a:latin typeface="Courier New" panose="02070309020205020404" pitchFamily="49" charset="0"/>
+                <a:cs typeface="Courier New" panose="02070309020205020404" pitchFamily="49" charset="0"/>
+              </a:rPr>
+              <a:t>in</a:t>
+            </a:r>
+            <a:r>
+              <a:rPr lang="nl-NL" sz="1800" dirty="0">
+                <a:latin typeface="Courier New" panose="02070309020205020404" pitchFamily="49" charset="0"/>
+                <a:cs typeface="Courier New" panose="02070309020205020404" pitchFamily="49" charset="0"/>
+              </a:rPr>
+              <a:t> </a:t>
+            </a:r>
+            <a:r>
+              <a:rPr lang="nl-NL" sz="1800" dirty="0" err="1">
+                <a:latin typeface="Courier New" panose="02070309020205020404" pitchFamily="49" charset="0"/>
+                <a:cs typeface="Courier New" panose="02070309020205020404" pitchFamily="49" charset="0"/>
+              </a:rPr>
+              <a:t>my_list</a:t>
+            </a:r>
+            <a:endParaRPr lang="nl-NL" sz="1800" dirty="0">
+              <a:latin typeface="Courier New" panose="02070309020205020404" pitchFamily="49" charset="0"/>
+              <a:cs typeface="Courier New" panose="02070309020205020404" pitchFamily="49" charset="0"/>
+            </a:endParaRPr>
+          </a:p>
+          <a:p>
+            <a:pPr marL="0" indent="0">
+              <a:lnSpc>
+                <a:spcPct val="100000"/>
+              </a:lnSpc>
+              <a:spcBef>
+                <a:spcPts val="0"/>
+              </a:spcBef>
+              <a:buFont typeface="Arial" panose="020B0604020202020204" pitchFamily="34" charset="0"/>
+              <a:buNone/>
+            </a:pPr>
+            <a:r>
+              <a:rPr lang="nl-NL" sz="1800" dirty="0">
+                <a:latin typeface="Courier New" panose="02070309020205020404" pitchFamily="49" charset="0"/>
+                <a:cs typeface="Courier New" panose="02070309020205020404" pitchFamily="49" charset="0"/>
+              </a:rPr>
+              <a:t>    </a:t>
+            </a:r>
+            <a:r>
+              <a:rPr lang="nl-NL" sz="1800" dirty="0" err="1">
+                <a:solidFill>
+                  <a:srgbClr val="7030A0"/>
+                </a:solidFill>
+                <a:latin typeface="Courier New" panose="02070309020205020404" pitchFamily="49" charset="0"/>
+                <a:cs typeface="Courier New" panose="02070309020205020404" pitchFamily="49" charset="0"/>
+              </a:rPr>
+              <a:t>if</a:t>
+            </a:r>
+            <a:r>
+              <a:rPr lang="nl-NL" sz="1800" dirty="0">
+                <a:latin typeface="Courier New" panose="02070309020205020404" pitchFamily="49" charset="0"/>
+                <a:cs typeface="Courier New" panose="02070309020205020404" pitchFamily="49" charset="0"/>
+              </a:rPr>
+              <a:t> (</a:t>
+            </a:r>
+          </a:p>
+          <a:p>
+            <a:pPr marL="0" indent="0">
+              <a:lnSpc>
+                <a:spcPct val="100000"/>
+              </a:lnSpc>
+              <a:spcBef>
+                <a:spcPts val="0"/>
+              </a:spcBef>
+              <a:buFont typeface="Arial" panose="020B0604020202020204" pitchFamily="34" charset="0"/>
+              <a:buNone/>
+            </a:pPr>
+            <a:r>
+              <a:rPr lang="nl-NL" sz="1800" dirty="0">
+                <a:latin typeface="Courier New" panose="02070309020205020404" pitchFamily="49" charset="0"/>
+                <a:cs typeface="Courier New" panose="02070309020205020404" pitchFamily="49" charset="0"/>
+              </a:rPr>
+              <a:t>        type(_) </a:t>
+            </a:r>
+            <a:r>
+              <a:rPr lang="nl-NL" sz="1800" dirty="0">
+                <a:solidFill>
+                  <a:srgbClr val="7030A0"/>
+                </a:solidFill>
+                <a:latin typeface="Courier New" panose="02070309020205020404" pitchFamily="49" charset="0"/>
+                <a:cs typeface="Courier New" panose="02070309020205020404" pitchFamily="49" charset="0"/>
+              </a:rPr>
+              <a:t>in</a:t>
+            </a:r>
+            <a:r>
+              <a:rPr lang="nl-NL" sz="1800" dirty="0">
+                <a:latin typeface="Courier New" panose="02070309020205020404" pitchFamily="49" charset="0"/>
+                <a:cs typeface="Courier New" panose="02070309020205020404" pitchFamily="49" charset="0"/>
+              </a:rPr>
+              <a:t> (</a:t>
+            </a:r>
+            <a:r>
+              <a:rPr lang="nl-NL" sz="1800" dirty="0" err="1">
+                <a:solidFill>
+                  <a:schemeClr val="accent5">
+                    <a:lumMod val="75000"/>
+                  </a:schemeClr>
+                </a:solidFill>
+                <a:latin typeface="Courier New" panose="02070309020205020404" pitchFamily="49" charset="0"/>
+                <a:cs typeface="Courier New" panose="02070309020205020404" pitchFamily="49" charset="0"/>
+              </a:rPr>
+              <a:t>float</a:t>
+            </a:r>
+            <a:r>
+              <a:rPr lang="nl-NL" sz="1800" dirty="0">
+                <a:latin typeface="Courier New" panose="02070309020205020404" pitchFamily="49" charset="0"/>
+                <a:cs typeface="Courier New" panose="02070309020205020404" pitchFamily="49" charset="0"/>
+              </a:rPr>
+              <a:t>, </a:t>
+            </a:r>
+            <a:r>
+              <a:rPr lang="nl-NL" sz="1800" dirty="0">
+                <a:solidFill>
+                  <a:schemeClr val="accent5">
+                    <a:lumMod val="75000"/>
+                  </a:schemeClr>
+                </a:solidFill>
+                <a:latin typeface="Courier New" panose="02070309020205020404" pitchFamily="49" charset="0"/>
+                <a:cs typeface="Courier New" panose="02070309020205020404" pitchFamily="49" charset="0"/>
+              </a:rPr>
+              <a:t>int</a:t>
+            </a:r>
+            <a:r>
+              <a:rPr lang="nl-NL" sz="1800" dirty="0">
+                <a:latin typeface="Courier New" panose="02070309020205020404" pitchFamily="49" charset="0"/>
+                <a:cs typeface="Courier New" panose="02070309020205020404" pitchFamily="49" charset="0"/>
+              </a:rPr>
+              <a:t>)</a:t>
+            </a:r>
+          </a:p>
+          <a:p>
+            <a:pPr marL="0" indent="0">
+              <a:lnSpc>
+                <a:spcPct val="100000"/>
+              </a:lnSpc>
+              <a:spcBef>
+                <a:spcPts val="0"/>
+              </a:spcBef>
+              <a:buFont typeface="Arial" panose="020B0604020202020204" pitchFamily="34" charset="0"/>
+              <a:buNone/>
+            </a:pPr>
+            <a:r>
+              <a:rPr lang="nl-NL" sz="1800" dirty="0">
+                <a:latin typeface="Courier New" panose="02070309020205020404" pitchFamily="49" charset="0"/>
+                <a:cs typeface="Courier New" panose="02070309020205020404" pitchFamily="49" charset="0"/>
+              </a:rPr>
+              <a:t>        </a:t>
+            </a:r>
+            <a:r>
+              <a:rPr lang="nl-NL" sz="1800" dirty="0" err="1">
+                <a:solidFill>
+                  <a:srgbClr val="7030A0"/>
+                </a:solidFill>
+                <a:latin typeface="Courier New" panose="02070309020205020404" pitchFamily="49" charset="0"/>
+                <a:cs typeface="Courier New" panose="02070309020205020404" pitchFamily="49" charset="0"/>
+              </a:rPr>
+              <a:t>and</a:t>
+            </a:r>
+            <a:r>
+              <a:rPr lang="nl-NL" sz="1800" dirty="0">
+                <a:latin typeface="Courier New" panose="02070309020205020404" pitchFamily="49" charset="0"/>
+                <a:cs typeface="Courier New" panose="02070309020205020404" pitchFamily="49" charset="0"/>
+              </a:rPr>
+              <a:t> _ </a:t>
+            </a:r>
+            <a:r>
+              <a:rPr lang="nl-NL" sz="1800" dirty="0">
+                <a:solidFill>
+                  <a:srgbClr val="7030A0"/>
+                </a:solidFill>
+                <a:latin typeface="Courier New" panose="02070309020205020404" pitchFamily="49" charset="0"/>
+                <a:cs typeface="Courier New" panose="02070309020205020404" pitchFamily="49" charset="0"/>
+              </a:rPr>
+              <a:t>is </a:t>
+            </a:r>
+            <a:r>
+              <a:rPr lang="nl-NL" sz="1800" dirty="0" err="1">
+                <a:solidFill>
+                  <a:srgbClr val="7030A0"/>
+                </a:solidFill>
+                <a:latin typeface="Courier New" panose="02070309020205020404" pitchFamily="49" charset="0"/>
+                <a:cs typeface="Courier New" panose="02070309020205020404" pitchFamily="49" charset="0"/>
+              </a:rPr>
+              <a:t>not</a:t>
+            </a:r>
+            <a:r>
+              <a:rPr lang="nl-NL" sz="1800" dirty="0">
+                <a:latin typeface="Courier New" panose="02070309020205020404" pitchFamily="49" charset="0"/>
+                <a:cs typeface="Courier New" panose="02070309020205020404" pitchFamily="49" charset="0"/>
+              </a:rPr>
+              <a:t> </a:t>
+            </a:r>
+            <a:r>
+              <a:rPr lang="nl-NL" sz="1800" dirty="0">
+                <a:solidFill>
+                  <a:schemeClr val="accent5">
+                    <a:lumMod val="75000"/>
+                  </a:schemeClr>
+                </a:solidFill>
+                <a:latin typeface="Courier New" panose="02070309020205020404" pitchFamily="49" charset="0"/>
+                <a:cs typeface="Courier New" panose="02070309020205020404" pitchFamily="49" charset="0"/>
+              </a:rPr>
+              <a:t>None</a:t>
+            </a:r>
+          </a:p>
+          <a:p>
+            <a:pPr marL="0" indent="0">
+              <a:lnSpc>
+                <a:spcPct val="100000"/>
+              </a:lnSpc>
+              <a:spcBef>
+                <a:spcPts val="0"/>
+              </a:spcBef>
+              <a:buFont typeface="Arial" panose="020B0604020202020204" pitchFamily="34" charset="0"/>
+              <a:buNone/>
+            </a:pPr>
+            <a:r>
+              <a:rPr lang="nl-NL" sz="1800" dirty="0">
+                <a:latin typeface="Courier New" panose="02070309020205020404" pitchFamily="49" charset="0"/>
+                <a:cs typeface="Courier New" panose="02070309020205020404" pitchFamily="49" charset="0"/>
+              </a:rPr>
+              <a:t>        </a:t>
+            </a:r>
+            <a:r>
+              <a:rPr lang="nl-NL" sz="1800" dirty="0" err="1">
+                <a:solidFill>
+                  <a:srgbClr val="7030A0"/>
+                </a:solidFill>
+                <a:latin typeface="Courier New" panose="02070309020205020404" pitchFamily="49" charset="0"/>
+                <a:cs typeface="Courier New" panose="02070309020205020404" pitchFamily="49" charset="0"/>
+              </a:rPr>
+              <a:t>and</a:t>
+            </a:r>
+            <a:r>
+              <a:rPr lang="nl-NL" sz="1800" dirty="0">
+                <a:latin typeface="Courier New" panose="02070309020205020404" pitchFamily="49" charset="0"/>
+                <a:cs typeface="Courier New" panose="02070309020205020404" pitchFamily="49" charset="0"/>
+              </a:rPr>
+              <a:t> _ != 0</a:t>
+            </a:r>
+          </a:p>
+          <a:p>
+            <a:pPr marL="0" indent="0">
+              <a:lnSpc>
+                <a:spcPct val="100000"/>
+              </a:lnSpc>
+              <a:spcBef>
+                <a:spcPts val="0"/>
+              </a:spcBef>
+              <a:buFont typeface="Arial" panose="020B0604020202020204" pitchFamily="34" charset="0"/>
+              <a:buNone/>
+            </a:pPr>
+            <a:r>
+              <a:rPr lang="nl-NL" sz="1800" dirty="0">
+                <a:latin typeface="Courier New" panose="02070309020205020404" pitchFamily="49" charset="0"/>
+                <a:cs typeface="Courier New" panose="02070309020205020404" pitchFamily="49" charset="0"/>
+              </a:rPr>
+              <a:t>    )</a:t>
+            </a:r>
+          </a:p>
+          <a:p>
+            <a:pPr marL="0" indent="0">
+              <a:lnSpc>
+                <a:spcPct val="100000"/>
+              </a:lnSpc>
+              <a:spcBef>
+                <a:spcPts val="0"/>
+              </a:spcBef>
+              <a:buFont typeface="Arial" panose="020B0604020202020204" pitchFamily="34" charset="0"/>
+              <a:buNone/>
+            </a:pPr>
+            <a:r>
+              <a:rPr lang="nl-NL" sz="1800" dirty="0">
+                <a:latin typeface="Courier New" panose="02070309020205020404" pitchFamily="49" charset="0"/>
+                <a:cs typeface="Courier New" panose="02070309020205020404" pitchFamily="49" charset="0"/>
+              </a:rPr>
+              <a:t>]</a:t>
+            </a:r>
+          </a:p>
+        </p:txBody>
+      </p:sp>
+    </p:spTree>
+    <p:extLst>
+      <p:ext uri="{BB962C8B-B14F-4D97-AF65-F5344CB8AC3E}">
+        <p14:creationId xmlns:p14="http://schemas.microsoft.com/office/powerpoint/2010/main" val="2370871397"/>
+      </p:ext>
+    </p:extLst>
+  </p:cSld>
+  <p:clrMapOvr>
+    <a:masterClrMapping/>
+  </p:clrMapOvr>
+</p:sld>
+</file>
+
+<file path=ppt/slides/slide50.xml><?xml version="1.0" encoding="utf-8"?>
 <p:sld xmlns:a="http://schemas.openxmlformats.org/drawingml/2006/main" xmlns:r="http://schemas.openxmlformats.org/officeDocument/2006/relationships" xmlns:p="http://schemas.openxmlformats.org/presentationml/2006/main">
   <p:cSld>
     <p:spTree>
@@ -23861,764 +26098,7 @@
 </p:sld>
 </file>
 
-<file path=ppt/slides/slide5.xml><?xml version="1.0" encoding="utf-8"?>
-<p:sld xmlns:a="http://schemas.openxmlformats.org/drawingml/2006/main" xmlns:r="http://schemas.openxmlformats.org/officeDocument/2006/relationships" xmlns:p="http://schemas.openxmlformats.org/presentationml/2006/main">
-  <p:cSld>
-    <p:spTree>
-      <p:nvGrpSpPr>
-        <p:cNvPr id="1" name="">
-          <a:extLst>
-            <a:ext uri="{FF2B5EF4-FFF2-40B4-BE49-F238E27FC236}">
-              <a16:creationId xmlns:a16="http://schemas.microsoft.com/office/drawing/2014/main" id="{F4B537BD-A938-DAF3-FEF2-1B5E3A6E1778}"/>
-            </a:ext>
-          </a:extLst>
-        </p:cNvPr>
-        <p:cNvGrpSpPr/>
-        <p:nvPr/>
-      </p:nvGrpSpPr>
-      <p:grpSpPr>
-        <a:xfrm>
-          <a:off x="0" y="0"/>
-          <a:ext cx="0" cy="0"/>
-          <a:chOff x="0" y="0"/>
-          <a:chExt cx="0" cy="0"/>
-        </a:xfrm>
-      </p:grpSpPr>
-      <p:sp>
-        <p:nvSpPr>
-          <p:cNvPr id="2" name="Title 1">
-            <a:extLst>
-              <a:ext uri="{FF2B5EF4-FFF2-40B4-BE49-F238E27FC236}">
-                <a16:creationId xmlns:a16="http://schemas.microsoft.com/office/drawing/2014/main" id="{9934E2EF-C0A7-A70B-04F1-1E24BD18D62D}"/>
-              </a:ext>
-            </a:extLst>
-          </p:cNvPr>
-          <p:cNvSpPr>
-            <a:spLocks noGrp="1"/>
-          </p:cNvSpPr>
-          <p:nvPr>
-            <p:ph type="title"/>
-          </p:nvPr>
-        </p:nvSpPr>
-        <p:spPr>
-          <a:xfrm>
-            <a:off x="838200" y="365126"/>
-            <a:ext cx="10515600" cy="718608"/>
-          </a:xfrm>
-        </p:spPr>
-        <p:txBody>
-          <a:bodyPr>
-            <a:normAutofit/>
-          </a:bodyPr>
-          <a:lstStyle/>
-          <a:p>
-            <a:r>
-              <a:rPr lang="nl-NL" sz="3600" noProof="0" dirty="0"/>
-              <a:t>Sterke en zwakke punten</a:t>
-            </a:r>
-          </a:p>
-        </p:txBody>
-      </p:sp>
-      <p:sp>
-        <p:nvSpPr>
-          <p:cNvPr id="3" name="Content Placeholder 2">
-            <a:extLst>
-              <a:ext uri="{FF2B5EF4-FFF2-40B4-BE49-F238E27FC236}">
-                <a16:creationId xmlns:a16="http://schemas.microsoft.com/office/drawing/2014/main" id="{AE69D57C-00B8-1248-107F-AA6E5F085DF9}"/>
-              </a:ext>
-            </a:extLst>
-          </p:cNvPr>
-          <p:cNvSpPr>
-            <a:spLocks noGrp="1"/>
-          </p:cNvSpPr>
-          <p:nvPr>
-            <p:ph idx="1"/>
-          </p:nvPr>
-        </p:nvSpPr>
-        <p:spPr>
-          <a:xfrm>
-            <a:off x="838200" y="1456267"/>
-            <a:ext cx="4749800" cy="4720696"/>
-          </a:xfrm>
-        </p:spPr>
-        <p:txBody>
-          <a:bodyPr>
-            <a:normAutofit/>
-          </a:bodyPr>
-          <a:lstStyle/>
-          <a:p>
-            <a:pPr marL="0" indent="0">
-              <a:buNone/>
-            </a:pPr>
-            <a:r>
-              <a:rPr lang="nl-NL" sz="2000" b="1" dirty="0"/>
-              <a:t>Zwakke punten:</a:t>
-            </a:r>
-          </a:p>
-          <a:p>
-            <a:pPr marL="0" indent="0">
-              <a:buNone/>
-            </a:pPr>
-            <a:endParaRPr lang="nl-NL" sz="2000" dirty="0"/>
-          </a:p>
-          <a:p>
-            <a:pPr>
-              <a:buFontTx/>
-              <a:buChar char="-"/>
-            </a:pPr>
-            <a:r>
-              <a:rPr lang="nl-NL" sz="2000" dirty="0"/>
-              <a:t>Makkelijk om “slechte” code te schrijven.</a:t>
-            </a:r>
-          </a:p>
-          <a:p>
-            <a:pPr>
-              <a:buFontTx/>
-              <a:buChar char="-"/>
-            </a:pPr>
-            <a:endParaRPr lang="nl-NL" sz="2000" dirty="0"/>
-          </a:p>
-          <a:p>
-            <a:pPr>
-              <a:buFontTx/>
-              <a:buChar char="-"/>
-            </a:pPr>
-            <a:r>
-              <a:rPr lang="nl-NL" sz="2000" dirty="0"/>
-              <a:t>Relatief traag  (vgl. C, C++, Scala, Rust).</a:t>
-            </a:r>
-          </a:p>
-          <a:p>
-            <a:pPr>
-              <a:buFontTx/>
-              <a:buChar char="-"/>
-            </a:pPr>
-            <a:endParaRPr lang="nl-NL" sz="2000" dirty="0"/>
-          </a:p>
-          <a:p>
-            <a:pPr>
-              <a:buFontTx/>
-              <a:buChar char="-"/>
-            </a:pPr>
-            <a:r>
-              <a:rPr lang="nl-NL" sz="2000" dirty="0"/>
-              <a:t>Distributie code niet eenduidig.</a:t>
-            </a:r>
-          </a:p>
-        </p:txBody>
-      </p:sp>
-      <p:sp>
-        <p:nvSpPr>
-          <p:cNvPr id="4" name="Content Placeholder 2">
-            <a:extLst>
-              <a:ext uri="{FF2B5EF4-FFF2-40B4-BE49-F238E27FC236}">
-                <a16:creationId xmlns:a16="http://schemas.microsoft.com/office/drawing/2014/main" id="{2210A4AD-7C19-5184-ECB4-77EDD34F6402}"/>
-              </a:ext>
-            </a:extLst>
-          </p:cNvPr>
-          <p:cNvSpPr txBox="1">
-            <a:spLocks/>
-          </p:cNvSpPr>
-          <p:nvPr/>
-        </p:nvSpPr>
-        <p:spPr>
-          <a:xfrm>
-            <a:off x="6409267" y="1456267"/>
-            <a:ext cx="4749800" cy="4720696"/>
-          </a:xfrm>
-          <a:prstGeom prst="rect">
-            <a:avLst/>
-          </a:prstGeom>
-        </p:spPr>
-        <p:txBody>
-          <a:bodyPr vert="horz" lIns="91440" tIns="45720" rIns="91440" bIns="45720" rtlCol="0">
-            <a:normAutofit/>
-          </a:bodyPr>
-          <a:lstStyle>
-            <a:lvl1pPr marL="228600" indent="-228600" algn="l" defTabSz="914400" rtl="0" eaLnBrk="1" latinLnBrk="0" hangingPunct="1">
-              <a:lnSpc>
-                <a:spcPct val="90000"/>
-              </a:lnSpc>
-              <a:spcBef>
-                <a:spcPts val="1000"/>
-              </a:spcBef>
-              <a:buFont typeface="Arial" panose="020B0604020202020204" pitchFamily="34" charset="0"/>
-              <a:buChar char="•"/>
-              <a:defRPr sz="2800" kern="1200">
-                <a:solidFill>
-                  <a:schemeClr val="tx1"/>
-                </a:solidFill>
-                <a:latin typeface="+mn-lt"/>
-                <a:ea typeface="+mn-ea"/>
-                <a:cs typeface="+mn-cs"/>
-              </a:defRPr>
-            </a:lvl1pPr>
-            <a:lvl2pPr marL="685800" indent="-228600" algn="l" defTabSz="914400" rtl="0" eaLnBrk="1" latinLnBrk="0" hangingPunct="1">
-              <a:lnSpc>
-                <a:spcPct val="90000"/>
-              </a:lnSpc>
-              <a:spcBef>
-                <a:spcPts val="500"/>
-              </a:spcBef>
-              <a:buFont typeface="Arial" panose="020B0604020202020204" pitchFamily="34" charset="0"/>
-              <a:buChar char="•"/>
-              <a:defRPr sz="2400" kern="1200">
-                <a:solidFill>
-                  <a:schemeClr val="tx1"/>
-                </a:solidFill>
-                <a:latin typeface="+mn-lt"/>
-                <a:ea typeface="+mn-ea"/>
-                <a:cs typeface="+mn-cs"/>
-              </a:defRPr>
-            </a:lvl2pPr>
-            <a:lvl3pPr marL="1143000" indent="-228600" algn="l" defTabSz="914400" rtl="0" eaLnBrk="1" latinLnBrk="0" hangingPunct="1">
-              <a:lnSpc>
-                <a:spcPct val="90000"/>
-              </a:lnSpc>
-              <a:spcBef>
-                <a:spcPts val="500"/>
-              </a:spcBef>
-              <a:buFont typeface="Arial" panose="020B0604020202020204" pitchFamily="34" charset="0"/>
-              <a:buChar char="•"/>
-              <a:defRPr sz="2000" kern="1200">
-                <a:solidFill>
-                  <a:schemeClr val="tx1"/>
-                </a:solidFill>
-                <a:latin typeface="+mn-lt"/>
-                <a:ea typeface="+mn-ea"/>
-                <a:cs typeface="+mn-cs"/>
-              </a:defRPr>
-            </a:lvl3pPr>
-            <a:lvl4pPr marL="1600200" indent="-228600" algn="l" defTabSz="914400" rtl="0" eaLnBrk="1" latinLnBrk="0" hangingPunct="1">
-              <a:lnSpc>
-                <a:spcPct val="90000"/>
-              </a:lnSpc>
-              <a:spcBef>
-                <a:spcPts val="500"/>
-              </a:spcBef>
-              <a:buFont typeface="Arial" panose="020B0604020202020204" pitchFamily="34" charset="0"/>
-              <a:buChar char="•"/>
-              <a:defRPr sz="1800" kern="1200">
-                <a:solidFill>
-                  <a:schemeClr val="tx1"/>
-                </a:solidFill>
-                <a:latin typeface="+mn-lt"/>
-                <a:ea typeface="+mn-ea"/>
-                <a:cs typeface="+mn-cs"/>
-              </a:defRPr>
-            </a:lvl4pPr>
-            <a:lvl5pPr marL="2057400" indent="-228600" algn="l" defTabSz="914400" rtl="0" eaLnBrk="1" latinLnBrk="0" hangingPunct="1">
-              <a:lnSpc>
-                <a:spcPct val="90000"/>
-              </a:lnSpc>
-              <a:spcBef>
-                <a:spcPts val="500"/>
-              </a:spcBef>
-              <a:buFont typeface="Arial" panose="020B0604020202020204" pitchFamily="34" charset="0"/>
-              <a:buChar char="•"/>
-              <a:defRPr sz="1800" kern="1200">
-                <a:solidFill>
-                  <a:schemeClr val="tx1"/>
-                </a:solidFill>
-                <a:latin typeface="+mn-lt"/>
-                <a:ea typeface="+mn-ea"/>
-                <a:cs typeface="+mn-cs"/>
-              </a:defRPr>
-            </a:lvl5pPr>
-            <a:lvl6pPr marL="2514600" indent="-228600" algn="l" defTabSz="914400" rtl="0" eaLnBrk="1" latinLnBrk="0" hangingPunct="1">
-              <a:lnSpc>
-                <a:spcPct val="90000"/>
-              </a:lnSpc>
-              <a:spcBef>
-                <a:spcPts val="500"/>
-              </a:spcBef>
-              <a:buFont typeface="Arial" panose="020B0604020202020204" pitchFamily="34" charset="0"/>
-              <a:buChar char="•"/>
-              <a:defRPr sz="1800" kern="1200">
-                <a:solidFill>
-                  <a:schemeClr val="tx1"/>
-                </a:solidFill>
-                <a:latin typeface="+mn-lt"/>
-                <a:ea typeface="+mn-ea"/>
-                <a:cs typeface="+mn-cs"/>
-              </a:defRPr>
-            </a:lvl6pPr>
-            <a:lvl7pPr marL="2971800" indent="-228600" algn="l" defTabSz="914400" rtl="0" eaLnBrk="1" latinLnBrk="0" hangingPunct="1">
-              <a:lnSpc>
-                <a:spcPct val="90000"/>
-              </a:lnSpc>
-              <a:spcBef>
-                <a:spcPts val="500"/>
-              </a:spcBef>
-              <a:buFont typeface="Arial" panose="020B0604020202020204" pitchFamily="34" charset="0"/>
-              <a:buChar char="•"/>
-              <a:defRPr sz="1800" kern="1200">
-                <a:solidFill>
-                  <a:schemeClr val="tx1"/>
-                </a:solidFill>
-                <a:latin typeface="+mn-lt"/>
-                <a:ea typeface="+mn-ea"/>
-                <a:cs typeface="+mn-cs"/>
-              </a:defRPr>
-            </a:lvl7pPr>
-            <a:lvl8pPr marL="3429000" indent="-228600" algn="l" defTabSz="914400" rtl="0" eaLnBrk="1" latinLnBrk="0" hangingPunct="1">
-              <a:lnSpc>
-                <a:spcPct val="90000"/>
-              </a:lnSpc>
-              <a:spcBef>
-                <a:spcPts val="500"/>
-              </a:spcBef>
-              <a:buFont typeface="Arial" panose="020B0604020202020204" pitchFamily="34" charset="0"/>
-              <a:buChar char="•"/>
-              <a:defRPr sz="1800" kern="1200">
-                <a:solidFill>
-                  <a:schemeClr val="tx1"/>
-                </a:solidFill>
-                <a:latin typeface="+mn-lt"/>
-                <a:ea typeface="+mn-ea"/>
-                <a:cs typeface="+mn-cs"/>
-              </a:defRPr>
-            </a:lvl8pPr>
-            <a:lvl9pPr marL="3886200" indent="-228600" algn="l" defTabSz="914400" rtl="0" eaLnBrk="1" latinLnBrk="0" hangingPunct="1">
-              <a:lnSpc>
-                <a:spcPct val="90000"/>
-              </a:lnSpc>
-              <a:spcBef>
-                <a:spcPts val="500"/>
-              </a:spcBef>
-              <a:buFont typeface="Arial" panose="020B0604020202020204" pitchFamily="34" charset="0"/>
-              <a:buChar char="•"/>
-              <a:defRPr sz="1800" kern="1200">
-                <a:solidFill>
-                  <a:schemeClr val="tx1"/>
-                </a:solidFill>
-                <a:latin typeface="+mn-lt"/>
-                <a:ea typeface="+mn-ea"/>
-                <a:cs typeface="+mn-cs"/>
-              </a:defRPr>
-            </a:lvl9pPr>
-          </a:lstStyle>
-          <a:p>
-            <a:pPr marL="0" indent="0">
-              <a:buNone/>
-            </a:pPr>
-            <a:endParaRPr lang="nl-NL" sz="2000" dirty="0"/>
-          </a:p>
-        </p:txBody>
-      </p:sp>
-      <p:sp>
-        <p:nvSpPr>
-          <p:cNvPr id="5" name="Content Placeholder 2">
-            <a:extLst>
-              <a:ext uri="{FF2B5EF4-FFF2-40B4-BE49-F238E27FC236}">
-                <a16:creationId xmlns:a16="http://schemas.microsoft.com/office/drawing/2014/main" id="{FE4D819A-A65A-B849-482E-28A9AA671928}"/>
-              </a:ext>
-            </a:extLst>
-          </p:cNvPr>
-          <p:cNvSpPr txBox="1">
-            <a:spLocks/>
-          </p:cNvSpPr>
-          <p:nvPr/>
-        </p:nvSpPr>
-        <p:spPr>
-          <a:xfrm>
-            <a:off x="6604000" y="1456267"/>
-            <a:ext cx="4749800" cy="4720696"/>
-          </a:xfrm>
-          <a:prstGeom prst="rect">
-            <a:avLst/>
-          </a:prstGeom>
-        </p:spPr>
-        <p:txBody>
-          <a:bodyPr vert="horz" lIns="91440" tIns="45720" rIns="91440" bIns="45720" rtlCol="0">
-            <a:normAutofit/>
-          </a:bodyPr>
-          <a:lstStyle>
-            <a:lvl1pPr marL="228600" indent="-228600" algn="l" defTabSz="914400" rtl="0" eaLnBrk="1" latinLnBrk="0" hangingPunct="1">
-              <a:lnSpc>
-                <a:spcPct val="90000"/>
-              </a:lnSpc>
-              <a:spcBef>
-                <a:spcPts val="1000"/>
-              </a:spcBef>
-              <a:buFont typeface="Arial" panose="020B0604020202020204" pitchFamily="34" charset="0"/>
-              <a:buChar char="•"/>
-              <a:defRPr sz="2800" kern="1200">
-                <a:solidFill>
-                  <a:schemeClr val="tx1"/>
-                </a:solidFill>
-                <a:latin typeface="+mn-lt"/>
-                <a:ea typeface="+mn-ea"/>
-                <a:cs typeface="+mn-cs"/>
-              </a:defRPr>
-            </a:lvl1pPr>
-            <a:lvl2pPr marL="685800" indent="-228600" algn="l" defTabSz="914400" rtl="0" eaLnBrk="1" latinLnBrk="0" hangingPunct="1">
-              <a:lnSpc>
-                <a:spcPct val="90000"/>
-              </a:lnSpc>
-              <a:spcBef>
-                <a:spcPts val="500"/>
-              </a:spcBef>
-              <a:buFont typeface="Arial" panose="020B0604020202020204" pitchFamily="34" charset="0"/>
-              <a:buChar char="•"/>
-              <a:defRPr sz="2400" kern="1200">
-                <a:solidFill>
-                  <a:schemeClr val="tx1"/>
-                </a:solidFill>
-                <a:latin typeface="+mn-lt"/>
-                <a:ea typeface="+mn-ea"/>
-                <a:cs typeface="+mn-cs"/>
-              </a:defRPr>
-            </a:lvl2pPr>
-            <a:lvl3pPr marL="1143000" indent="-228600" algn="l" defTabSz="914400" rtl="0" eaLnBrk="1" latinLnBrk="0" hangingPunct="1">
-              <a:lnSpc>
-                <a:spcPct val="90000"/>
-              </a:lnSpc>
-              <a:spcBef>
-                <a:spcPts val="500"/>
-              </a:spcBef>
-              <a:buFont typeface="Arial" panose="020B0604020202020204" pitchFamily="34" charset="0"/>
-              <a:buChar char="•"/>
-              <a:defRPr sz="2000" kern="1200">
-                <a:solidFill>
-                  <a:schemeClr val="tx1"/>
-                </a:solidFill>
-                <a:latin typeface="+mn-lt"/>
-                <a:ea typeface="+mn-ea"/>
-                <a:cs typeface="+mn-cs"/>
-              </a:defRPr>
-            </a:lvl3pPr>
-            <a:lvl4pPr marL="1600200" indent="-228600" algn="l" defTabSz="914400" rtl="0" eaLnBrk="1" latinLnBrk="0" hangingPunct="1">
-              <a:lnSpc>
-                <a:spcPct val="90000"/>
-              </a:lnSpc>
-              <a:spcBef>
-                <a:spcPts val="500"/>
-              </a:spcBef>
-              <a:buFont typeface="Arial" panose="020B0604020202020204" pitchFamily="34" charset="0"/>
-              <a:buChar char="•"/>
-              <a:defRPr sz="1800" kern="1200">
-                <a:solidFill>
-                  <a:schemeClr val="tx1"/>
-                </a:solidFill>
-                <a:latin typeface="+mn-lt"/>
-                <a:ea typeface="+mn-ea"/>
-                <a:cs typeface="+mn-cs"/>
-              </a:defRPr>
-            </a:lvl4pPr>
-            <a:lvl5pPr marL="2057400" indent="-228600" algn="l" defTabSz="914400" rtl="0" eaLnBrk="1" latinLnBrk="0" hangingPunct="1">
-              <a:lnSpc>
-                <a:spcPct val="90000"/>
-              </a:lnSpc>
-              <a:spcBef>
-                <a:spcPts val="500"/>
-              </a:spcBef>
-              <a:buFont typeface="Arial" panose="020B0604020202020204" pitchFamily="34" charset="0"/>
-              <a:buChar char="•"/>
-              <a:defRPr sz="1800" kern="1200">
-                <a:solidFill>
-                  <a:schemeClr val="tx1"/>
-                </a:solidFill>
-                <a:latin typeface="+mn-lt"/>
-                <a:ea typeface="+mn-ea"/>
-                <a:cs typeface="+mn-cs"/>
-              </a:defRPr>
-            </a:lvl5pPr>
-            <a:lvl6pPr marL="2514600" indent="-228600" algn="l" defTabSz="914400" rtl="0" eaLnBrk="1" latinLnBrk="0" hangingPunct="1">
-              <a:lnSpc>
-                <a:spcPct val="90000"/>
-              </a:lnSpc>
-              <a:spcBef>
-                <a:spcPts val="500"/>
-              </a:spcBef>
-              <a:buFont typeface="Arial" panose="020B0604020202020204" pitchFamily="34" charset="0"/>
-              <a:buChar char="•"/>
-              <a:defRPr sz="1800" kern="1200">
-                <a:solidFill>
-                  <a:schemeClr val="tx1"/>
-                </a:solidFill>
-                <a:latin typeface="+mn-lt"/>
-                <a:ea typeface="+mn-ea"/>
-                <a:cs typeface="+mn-cs"/>
-              </a:defRPr>
-            </a:lvl6pPr>
-            <a:lvl7pPr marL="2971800" indent="-228600" algn="l" defTabSz="914400" rtl="0" eaLnBrk="1" latinLnBrk="0" hangingPunct="1">
-              <a:lnSpc>
-                <a:spcPct val="90000"/>
-              </a:lnSpc>
-              <a:spcBef>
-                <a:spcPts val="500"/>
-              </a:spcBef>
-              <a:buFont typeface="Arial" panose="020B0604020202020204" pitchFamily="34" charset="0"/>
-              <a:buChar char="•"/>
-              <a:defRPr sz="1800" kern="1200">
-                <a:solidFill>
-                  <a:schemeClr val="tx1"/>
-                </a:solidFill>
-                <a:latin typeface="+mn-lt"/>
-                <a:ea typeface="+mn-ea"/>
-                <a:cs typeface="+mn-cs"/>
-              </a:defRPr>
-            </a:lvl7pPr>
-            <a:lvl8pPr marL="3429000" indent="-228600" algn="l" defTabSz="914400" rtl="0" eaLnBrk="1" latinLnBrk="0" hangingPunct="1">
-              <a:lnSpc>
-                <a:spcPct val="90000"/>
-              </a:lnSpc>
-              <a:spcBef>
-                <a:spcPts val="500"/>
-              </a:spcBef>
-              <a:buFont typeface="Arial" panose="020B0604020202020204" pitchFamily="34" charset="0"/>
-              <a:buChar char="•"/>
-              <a:defRPr sz="1800" kern="1200">
-                <a:solidFill>
-                  <a:schemeClr val="tx1"/>
-                </a:solidFill>
-                <a:latin typeface="+mn-lt"/>
-                <a:ea typeface="+mn-ea"/>
-                <a:cs typeface="+mn-cs"/>
-              </a:defRPr>
-            </a:lvl8pPr>
-            <a:lvl9pPr marL="3886200" indent="-228600" algn="l" defTabSz="914400" rtl="0" eaLnBrk="1" latinLnBrk="0" hangingPunct="1">
-              <a:lnSpc>
-                <a:spcPct val="90000"/>
-              </a:lnSpc>
-              <a:spcBef>
-                <a:spcPts val="500"/>
-              </a:spcBef>
-              <a:buFont typeface="Arial" panose="020B0604020202020204" pitchFamily="34" charset="0"/>
-              <a:buChar char="•"/>
-              <a:defRPr sz="1800" kern="1200">
-                <a:solidFill>
-                  <a:schemeClr val="tx1"/>
-                </a:solidFill>
-                <a:latin typeface="+mn-lt"/>
-                <a:ea typeface="+mn-ea"/>
-                <a:cs typeface="+mn-cs"/>
-              </a:defRPr>
-            </a:lvl9pPr>
-          </a:lstStyle>
-          <a:p>
-            <a:pPr marL="0" indent="0">
-              <a:buFont typeface="Arial" panose="020B0604020202020204" pitchFamily="34" charset="0"/>
-              <a:buNone/>
-            </a:pPr>
-            <a:r>
-              <a:rPr lang="nl-NL" sz="1800" dirty="0" err="1">
-                <a:latin typeface="Courier New" panose="02070309020205020404" pitchFamily="49" charset="0"/>
-                <a:cs typeface="Courier New" panose="02070309020205020404" pitchFamily="49" charset="0"/>
-              </a:rPr>
-              <a:t>qs</a:t>
-            </a:r>
-            <a:r>
-              <a:rPr lang="nl-NL" sz="1800" dirty="0">
-                <a:latin typeface="Courier New" panose="02070309020205020404" pitchFamily="49" charset="0"/>
-                <a:cs typeface="Courier New" panose="02070309020205020404" pitchFamily="49" charset="0"/>
-              </a:rPr>
-              <a:t> = [</a:t>
-            </a:r>
-          </a:p>
-          <a:p>
-            <a:pPr marL="0" indent="0">
-              <a:buFont typeface="Arial" panose="020B0604020202020204" pitchFamily="34" charset="0"/>
-              <a:buNone/>
-            </a:pPr>
-            <a:r>
-              <a:rPr lang="nl-NL" sz="1800" dirty="0">
-                <a:latin typeface="Courier New" panose="02070309020205020404" pitchFamily="49" charset="0"/>
-                <a:cs typeface="Courier New" panose="02070309020205020404" pitchFamily="49" charset="0"/>
-              </a:rPr>
-              <a:t>    _ ** 2 </a:t>
-            </a:r>
-            <a:r>
-              <a:rPr lang="nl-NL" sz="1800" dirty="0" err="1">
-                <a:latin typeface="Courier New" panose="02070309020205020404" pitchFamily="49" charset="0"/>
-                <a:cs typeface="Courier New" panose="02070309020205020404" pitchFamily="49" charset="0"/>
-              </a:rPr>
-              <a:t>for</a:t>
-            </a:r>
-            <a:r>
-              <a:rPr lang="nl-NL" sz="1800" dirty="0">
-                <a:latin typeface="Courier New" panose="02070309020205020404" pitchFamily="49" charset="0"/>
-                <a:cs typeface="Courier New" panose="02070309020205020404" pitchFamily="49" charset="0"/>
-              </a:rPr>
-              <a:t> _ in </a:t>
-            </a:r>
-            <a:r>
-              <a:rPr lang="nl-NL" sz="1800" dirty="0" err="1">
-                <a:latin typeface="Courier New" panose="02070309020205020404" pitchFamily="49" charset="0"/>
-                <a:cs typeface="Courier New" panose="02070309020205020404" pitchFamily="49" charset="0"/>
-              </a:rPr>
-              <a:t>my_list</a:t>
-            </a:r>
-            <a:endParaRPr lang="nl-NL" sz="1800" dirty="0">
-              <a:latin typeface="Courier New" panose="02070309020205020404" pitchFamily="49" charset="0"/>
-              <a:cs typeface="Courier New" panose="02070309020205020404" pitchFamily="49" charset="0"/>
-            </a:endParaRPr>
-          </a:p>
-          <a:p>
-            <a:pPr marL="0" indent="0">
-              <a:buFont typeface="Arial" panose="020B0604020202020204" pitchFamily="34" charset="0"/>
-              <a:buNone/>
-            </a:pPr>
-            <a:r>
-              <a:rPr lang="nl-NL" sz="1800" dirty="0">
-                <a:latin typeface="Courier New" panose="02070309020205020404" pitchFamily="49" charset="0"/>
-                <a:cs typeface="Courier New" panose="02070309020205020404" pitchFamily="49" charset="0"/>
-              </a:rPr>
-              <a:t>    </a:t>
-            </a:r>
-            <a:r>
-              <a:rPr lang="nl-NL" sz="1800" dirty="0" err="1">
-                <a:latin typeface="Courier New" panose="02070309020205020404" pitchFamily="49" charset="0"/>
-                <a:cs typeface="Courier New" panose="02070309020205020404" pitchFamily="49" charset="0"/>
-              </a:rPr>
-              <a:t>if</a:t>
-            </a:r>
-            <a:r>
-              <a:rPr lang="nl-NL" sz="1800" dirty="0">
-                <a:latin typeface="Courier New" panose="02070309020205020404" pitchFamily="49" charset="0"/>
-                <a:cs typeface="Courier New" panose="02070309020205020404" pitchFamily="49" charset="0"/>
-              </a:rPr>
-              <a:t> (</a:t>
-            </a:r>
-          </a:p>
-          <a:p>
-            <a:pPr marL="0" indent="0">
-              <a:buFont typeface="Arial" panose="020B0604020202020204" pitchFamily="34" charset="0"/>
-              <a:buNone/>
-            </a:pPr>
-            <a:r>
-              <a:rPr lang="nl-NL" sz="1800" dirty="0">
-                <a:latin typeface="Courier New" panose="02070309020205020404" pitchFamily="49" charset="0"/>
-                <a:cs typeface="Courier New" panose="02070309020205020404" pitchFamily="49" charset="0"/>
-              </a:rPr>
-              <a:t>        type(_) in (</a:t>
-            </a:r>
-            <a:r>
-              <a:rPr lang="nl-NL" sz="1800" dirty="0" err="1">
-                <a:latin typeface="Courier New" panose="02070309020205020404" pitchFamily="49" charset="0"/>
-                <a:cs typeface="Courier New" panose="02070309020205020404" pitchFamily="49" charset="0"/>
-              </a:rPr>
-              <a:t>float</a:t>
-            </a:r>
-            <a:r>
-              <a:rPr lang="nl-NL" sz="1800" dirty="0">
-                <a:latin typeface="Courier New" panose="02070309020205020404" pitchFamily="49" charset="0"/>
-                <a:cs typeface="Courier New" panose="02070309020205020404" pitchFamily="49" charset="0"/>
-              </a:rPr>
-              <a:t>, int)</a:t>
-            </a:r>
-          </a:p>
-          <a:p>
-            <a:pPr marL="0" indent="0">
-              <a:buFont typeface="Arial" panose="020B0604020202020204" pitchFamily="34" charset="0"/>
-              <a:buNone/>
-            </a:pPr>
-            <a:r>
-              <a:rPr lang="nl-NL" sz="1800" dirty="0">
-                <a:latin typeface="Courier New" panose="02070309020205020404" pitchFamily="49" charset="0"/>
-                <a:cs typeface="Courier New" panose="02070309020205020404" pitchFamily="49" charset="0"/>
-              </a:rPr>
-              <a:t>        </a:t>
-            </a:r>
-            <a:r>
-              <a:rPr lang="nl-NL" sz="1800" dirty="0" err="1">
-                <a:latin typeface="Courier New" panose="02070309020205020404" pitchFamily="49" charset="0"/>
-                <a:cs typeface="Courier New" panose="02070309020205020404" pitchFamily="49" charset="0"/>
-              </a:rPr>
-              <a:t>and</a:t>
-            </a:r>
-            <a:r>
-              <a:rPr lang="nl-NL" sz="1800" dirty="0">
-                <a:latin typeface="Courier New" panose="02070309020205020404" pitchFamily="49" charset="0"/>
-                <a:cs typeface="Courier New" panose="02070309020205020404" pitchFamily="49" charset="0"/>
-              </a:rPr>
-              <a:t> _ is </a:t>
-            </a:r>
-            <a:r>
-              <a:rPr lang="nl-NL" sz="1800" dirty="0" err="1">
-                <a:latin typeface="Courier New" panose="02070309020205020404" pitchFamily="49" charset="0"/>
-                <a:cs typeface="Courier New" panose="02070309020205020404" pitchFamily="49" charset="0"/>
-              </a:rPr>
-              <a:t>not</a:t>
-            </a:r>
-            <a:r>
-              <a:rPr lang="nl-NL" sz="1800" dirty="0">
-                <a:latin typeface="Courier New" panose="02070309020205020404" pitchFamily="49" charset="0"/>
-                <a:cs typeface="Courier New" panose="02070309020205020404" pitchFamily="49" charset="0"/>
-              </a:rPr>
-              <a:t> None</a:t>
-            </a:r>
-          </a:p>
-          <a:p>
-            <a:pPr marL="0" indent="0">
-              <a:buFont typeface="Arial" panose="020B0604020202020204" pitchFamily="34" charset="0"/>
-              <a:buNone/>
-            </a:pPr>
-            <a:r>
-              <a:rPr lang="nl-NL" sz="1800" dirty="0">
-                <a:latin typeface="Courier New" panose="02070309020205020404" pitchFamily="49" charset="0"/>
-                <a:cs typeface="Courier New" panose="02070309020205020404" pitchFamily="49" charset="0"/>
-              </a:rPr>
-              <a:t>        </a:t>
-            </a:r>
-            <a:r>
-              <a:rPr lang="nl-NL" sz="1800" dirty="0" err="1">
-                <a:latin typeface="Courier New" panose="02070309020205020404" pitchFamily="49" charset="0"/>
-                <a:cs typeface="Courier New" panose="02070309020205020404" pitchFamily="49" charset="0"/>
-              </a:rPr>
-              <a:t>and</a:t>
-            </a:r>
-            <a:r>
-              <a:rPr lang="nl-NL" sz="1800" dirty="0">
-                <a:latin typeface="Courier New" panose="02070309020205020404" pitchFamily="49" charset="0"/>
-                <a:cs typeface="Courier New" panose="02070309020205020404" pitchFamily="49" charset="0"/>
-              </a:rPr>
-              <a:t> _ != 0</a:t>
-            </a:r>
-          </a:p>
-          <a:p>
-            <a:pPr marL="0" indent="0">
-              <a:buFont typeface="Arial" panose="020B0604020202020204" pitchFamily="34" charset="0"/>
-              <a:buNone/>
-            </a:pPr>
-            <a:r>
-              <a:rPr lang="nl-NL" sz="1800" dirty="0">
-                <a:latin typeface="Courier New" panose="02070309020205020404" pitchFamily="49" charset="0"/>
-                <a:cs typeface="Courier New" panose="02070309020205020404" pitchFamily="49" charset="0"/>
-              </a:rPr>
-              <a:t>    )</a:t>
-            </a:r>
-          </a:p>
-          <a:p>
-            <a:pPr marL="0" indent="0">
-              <a:buFont typeface="Arial" panose="020B0604020202020204" pitchFamily="34" charset="0"/>
-              <a:buNone/>
-            </a:pPr>
-            <a:r>
-              <a:rPr lang="nl-NL" sz="1800" dirty="0">
-                <a:latin typeface="Courier New" panose="02070309020205020404" pitchFamily="49" charset="0"/>
-                <a:cs typeface="Courier New" panose="02070309020205020404" pitchFamily="49" charset="0"/>
-              </a:rPr>
-              <a:t>]</a:t>
-            </a:r>
-          </a:p>
-        </p:txBody>
-      </p:sp>
-    </p:spTree>
-    <p:extLst>
-      <p:ext uri="{BB962C8B-B14F-4D97-AF65-F5344CB8AC3E}">
-        <p14:creationId xmlns:p14="http://schemas.microsoft.com/office/powerpoint/2010/main" val="2370871397"/>
-      </p:ext>
-    </p:extLst>
-  </p:cSld>
-  <p:clrMapOvr>
-    <a:masterClrMapping/>
-  </p:clrMapOvr>
-</p:sld>
-</file>
-
-<file path=ppt/slides/slide50.xml><?xml version="1.0" encoding="utf-8"?>
+<file path=ppt/slides/slide51.xml><?xml version="1.0" encoding="utf-8"?>
 <p:sld xmlns:a="http://schemas.openxmlformats.org/drawingml/2006/main" xmlns:r="http://schemas.openxmlformats.org/officeDocument/2006/relationships" xmlns:p="http://schemas.openxmlformats.org/presentationml/2006/main">
   <p:cSld>
     <p:spTree>
@@ -24922,7 +26402,7 @@
 </p:sld>
 </file>
 
-<file path=ppt/slides/slide51.xml><?xml version="1.0" encoding="utf-8"?>
+<file path=ppt/slides/slide52.xml><?xml version="1.0" encoding="utf-8"?>
 <p:sld xmlns:a="http://schemas.openxmlformats.org/drawingml/2006/main" xmlns:r="http://schemas.openxmlformats.org/officeDocument/2006/relationships" xmlns:p="http://schemas.openxmlformats.org/presentationml/2006/main" show="0">
   <p:cSld>
     <p:spTree>
@@ -25617,13 +27097,13 @@
         </p:spPr>
         <p:style>
           <a:lnRef idx="1">
-            <a:schemeClr val="accent5"/>
+            <a:schemeClr val="accent4"/>
           </a:lnRef>
           <a:fillRef idx="2">
-            <a:schemeClr val="accent5"/>
+            <a:schemeClr val="accent4"/>
           </a:fillRef>
           <a:effectRef idx="1">
-            <a:schemeClr val="accent5"/>
+            <a:schemeClr val="accent4"/>
           </a:effectRef>
           <a:fontRef idx="minor">
             <a:schemeClr val="dk1"/>
@@ -26048,13 +27528,13 @@
         </p:spPr>
         <p:style>
           <a:lnRef idx="1">
-            <a:schemeClr val="accent5"/>
+            <a:schemeClr val="accent4"/>
           </a:lnRef>
           <a:fillRef idx="2">
-            <a:schemeClr val="accent5"/>
+            <a:schemeClr val="accent4"/>
           </a:fillRef>
           <a:effectRef idx="1">
-            <a:schemeClr val="accent5"/>
+            <a:schemeClr val="accent4"/>
           </a:effectRef>
           <a:fontRef idx="minor">
             <a:schemeClr val="dk1"/>
@@ -26334,7 +27814,7 @@
             <a:pPr algn="ctr"/>
             <a:r>
               <a:rPr lang="nl-NL" dirty="0"/>
-              <a:t>Packages</a:t>
+              <a:t>Package</a:t>
             </a:r>
           </a:p>
         </p:txBody>
@@ -26727,13 +28207,13 @@
         </p:spPr>
         <p:style>
           <a:lnRef idx="1">
-            <a:schemeClr val="accent5"/>
+            <a:schemeClr val="accent4"/>
           </a:lnRef>
           <a:fillRef idx="2">
-            <a:schemeClr val="accent5"/>
+            <a:schemeClr val="accent4"/>
           </a:fillRef>
           <a:effectRef idx="1">
-            <a:schemeClr val="accent5"/>
+            <a:schemeClr val="accent4"/>
           </a:effectRef>
           <a:fontRef idx="minor">
             <a:schemeClr val="dk1"/>
@@ -27218,7 +28698,7 @@
           <a:p>
             <a:r>
               <a:rPr lang="nl-NL" sz="2000" dirty="0"/>
-              <a:t>Ze bieden dan alleen Python instructies aan.</a:t>
+              <a:t>Ze bieden dan alleen een Python API aan.</a:t>
             </a:r>
           </a:p>
         </p:txBody>
@@ -27497,13 +28977,13 @@
               <a:rPr lang="nl-NL" sz="1800" noProof="0" dirty="0">
                 <a:cs typeface="Courier New" panose="02070309020205020404" pitchFamily="49" charset="0"/>
               </a:rPr>
-              <a:t>Met Python komen veel </a:t>
+              <a:t>Python heeft veel </a:t>
             </a:r>
             <a:r>
               <a:rPr lang="nl-NL" sz="1800" dirty="0">
                 <a:cs typeface="Courier New" panose="02070309020205020404" pitchFamily="49" charset="0"/>
               </a:rPr>
-              <a:t>packages mee.</a:t>
+              <a:t>packages aan boord.</a:t>
             </a:r>
           </a:p>
           <a:p>
@@ -27553,7 +29033,7 @@
               <a:rPr lang="nl-NL" sz="1800" noProof="0" dirty="0">
                 <a:cs typeface="Courier New" panose="02070309020205020404" pitchFamily="49" charset="0"/>
               </a:rPr>
-              <a:t>Ze worden geïnstalleerd met Python zelf.</a:t>
+              <a:t>Ze worden geïnstalleerd met Python.</a:t>
             </a:r>
           </a:p>
           <a:p>
@@ -27936,25 +29416,6 @@
                 <a:cs typeface="Courier New" panose="02070309020205020404" pitchFamily="49" charset="0"/>
               </a:rPr>
               <a:t>		Functies voor JSON bestanden.</a:t>
-            </a:r>
-          </a:p>
-          <a:p>
-            <a:pPr marL="0" indent="0">
-              <a:buFont typeface="Arial" panose="020B0604020202020204" pitchFamily="34" charset="0"/>
-              <a:buNone/>
-            </a:pPr>
-            <a:r>
-              <a:rPr lang="nl-NL" sz="1600" dirty="0">
-                <a:latin typeface="Courier New" panose="02070309020205020404" pitchFamily="49" charset="0"/>
-                <a:cs typeface="Courier New" panose="02070309020205020404" pitchFamily="49" charset="0"/>
-              </a:rPr>
-              <a:t>zipfile</a:t>
-            </a:r>
-            <a:r>
-              <a:rPr lang="nl-NL" sz="1600" dirty="0">
-                <a:cs typeface="Courier New" panose="02070309020205020404" pitchFamily="49" charset="0"/>
-              </a:rPr>
-              <a:t>		Functies voor zip bestanden.</a:t>
             </a:r>
           </a:p>
           <a:p>

--- a/python_course_4p/1_venv_package/1_venv_package.pptx
+++ b/python_course_4p/1_venv_package/1_venv_package.pptx
@@ -5,7 +5,7 @@
     <p:sldMasterId id="2147483648" r:id="rId1"/>
   </p:sldMasterIdLst>
   <p:notesMasterIdLst>
-    <p:notesMasterId r:id="rId58"/>
+    <p:notesMasterId r:id="rId60"/>
   </p:notesMasterIdLst>
   <p:sldIdLst>
     <p:sldId id="256" r:id="rId2"/>
@@ -49,21 +49,23 @@
     <p:sldId id="375" r:id="rId40"/>
     <p:sldId id="381" r:id="rId41"/>
     <p:sldId id="397" r:id="rId42"/>
-    <p:sldId id="378" r:id="rId43"/>
-    <p:sldId id="379" r:id="rId44"/>
-    <p:sldId id="380" r:id="rId45"/>
-    <p:sldId id="359" r:id="rId46"/>
-    <p:sldId id="383" r:id="rId47"/>
-    <p:sldId id="384" r:id="rId48"/>
-    <p:sldId id="385" r:id="rId49"/>
-    <p:sldId id="387" r:id="rId50"/>
-    <p:sldId id="382" r:id="rId51"/>
-    <p:sldId id="388" r:id="rId52"/>
-    <p:sldId id="389" r:id="rId53"/>
-    <p:sldId id="386" r:id="rId54"/>
-    <p:sldId id="266" r:id="rId55"/>
-    <p:sldId id="278" r:id="rId56"/>
-    <p:sldId id="282" r:id="rId57"/>
+    <p:sldId id="399" r:id="rId43"/>
+    <p:sldId id="400" r:id="rId44"/>
+    <p:sldId id="378" r:id="rId45"/>
+    <p:sldId id="379" r:id="rId46"/>
+    <p:sldId id="380" r:id="rId47"/>
+    <p:sldId id="359" r:id="rId48"/>
+    <p:sldId id="383" r:id="rId49"/>
+    <p:sldId id="384" r:id="rId50"/>
+    <p:sldId id="385" r:id="rId51"/>
+    <p:sldId id="387" r:id="rId52"/>
+    <p:sldId id="382" r:id="rId53"/>
+    <p:sldId id="388" r:id="rId54"/>
+    <p:sldId id="389" r:id="rId55"/>
+    <p:sldId id="386" r:id="rId56"/>
+    <p:sldId id="266" r:id="rId57"/>
+    <p:sldId id="278" r:id="rId58"/>
+    <p:sldId id="282" r:id="rId59"/>
   </p:sldIdLst>
   <p:sldSz cx="12192000" cy="6858000"/>
   <p:notesSz cx="6858000" cy="9144000"/>
@@ -252,7 +254,7 @@
           <a:p>
             <a:fld id="{3BADDCAA-88FC-44D4-A91A-DD0530AB88E0}" type="datetimeFigureOut">
               <a:rPr lang="en-NL" smtClean="0"/>
-              <a:t>23/10/2026</a:t>
+              <a:t>26/10/2026</a:t>
             </a:fld>
             <a:endParaRPr lang="en-NL"/>
           </a:p>
@@ -1104,7 +1106,7 @@
           <a:p>
             <a:fld id="{4BAF0DEA-1372-46C0-8FC9-2869E9CCF7DA}" type="slidenum">
               <a:rPr lang="en-NL" smtClean="0"/>
-              <a:t>43</a:t>
+              <a:t>45</a:t>
             </a:fld>
             <a:endParaRPr lang="en-NL"/>
           </a:p>
@@ -1212,7 +1214,7 @@
           <a:p>
             <a:fld id="{4BAF0DEA-1372-46C0-8FC9-2869E9CCF7DA}" type="slidenum">
               <a:rPr lang="en-NL" smtClean="0"/>
-              <a:t>46</a:t>
+              <a:t>48</a:t>
             </a:fld>
             <a:endParaRPr lang="en-NL"/>
           </a:p>
@@ -1342,7 +1344,7 @@
           <a:p>
             <a:fld id="{4BAF0DEA-1372-46C0-8FC9-2869E9CCF7DA}" type="slidenum">
               <a:rPr lang="en-NL" smtClean="0"/>
-              <a:t>47</a:t>
+              <a:t>49</a:t>
             </a:fld>
             <a:endParaRPr lang="en-NL"/>
           </a:p>
@@ -1458,7 +1460,7 @@
           <a:p>
             <a:fld id="{4BAF0DEA-1372-46C0-8FC9-2869E9CCF7DA}" type="slidenum">
               <a:rPr lang="en-NL" smtClean="0"/>
-              <a:t>48</a:t>
+              <a:t>50</a:t>
             </a:fld>
             <a:endParaRPr lang="en-NL"/>
           </a:p>
@@ -1626,7 +1628,7 @@
           <a:p>
             <a:fld id="{0EBB069A-003F-4FC0-8534-236B0C5C7B5F}" type="datetimeFigureOut">
               <a:rPr lang="en-NL" smtClean="0"/>
-              <a:t>23/10/2026</a:t>
+              <a:t>26/10/2026</a:t>
             </a:fld>
             <a:endParaRPr lang="en-NL"/>
           </a:p>
@@ -1826,7 +1828,7 @@
           <a:p>
             <a:fld id="{0EBB069A-003F-4FC0-8534-236B0C5C7B5F}" type="datetimeFigureOut">
               <a:rPr lang="en-NL" smtClean="0"/>
-              <a:t>23/10/2026</a:t>
+              <a:t>26/10/2026</a:t>
             </a:fld>
             <a:endParaRPr lang="en-NL"/>
           </a:p>
@@ -2036,7 +2038,7 @@
           <a:p>
             <a:fld id="{0EBB069A-003F-4FC0-8534-236B0C5C7B5F}" type="datetimeFigureOut">
               <a:rPr lang="en-NL" smtClean="0"/>
-              <a:t>23/10/2026</a:t>
+              <a:t>26/10/2026</a:t>
             </a:fld>
             <a:endParaRPr lang="en-NL"/>
           </a:p>
@@ -2236,7 +2238,7 @@
           <a:p>
             <a:fld id="{0EBB069A-003F-4FC0-8534-236B0C5C7B5F}" type="datetimeFigureOut">
               <a:rPr lang="en-NL" smtClean="0"/>
-              <a:t>23/10/2026</a:t>
+              <a:t>26/10/2026</a:t>
             </a:fld>
             <a:endParaRPr lang="en-NL"/>
           </a:p>
@@ -2512,7 +2514,7 @@
           <a:p>
             <a:fld id="{0EBB069A-003F-4FC0-8534-236B0C5C7B5F}" type="datetimeFigureOut">
               <a:rPr lang="en-NL" smtClean="0"/>
-              <a:t>23/10/2026</a:t>
+              <a:t>26/10/2026</a:t>
             </a:fld>
             <a:endParaRPr lang="en-NL"/>
           </a:p>
@@ -2780,7 +2782,7 @@
           <a:p>
             <a:fld id="{0EBB069A-003F-4FC0-8534-236B0C5C7B5F}" type="datetimeFigureOut">
               <a:rPr lang="en-NL" smtClean="0"/>
-              <a:t>23/10/2026</a:t>
+              <a:t>26/10/2026</a:t>
             </a:fld>
             <a:endParaRPr lang="en-NL"/>
           </a:p>
@@ -3195,7 +3197,7 @@
           <a:p>
             <a:fld id="{0EBB069A-003F-4FC0-8534-236B0C5C7B5F}" type="datetimeFigureOut">
               <a:rPr lang="en-NL" smtClean="0"/>
-              <a:t>23/10/2026</a:t>
+              <a:t>26/10/2026</a:t>
             </a:fld>
             <a:endParaRPr lang="en-NL"/>
           </a:p>
@@ -3337,7 +3339,7 @@
           <a:p>
             <a:fld id="{0EBB069A-003F-4FC0-8534-236B0C5C7B5F}" type="datetimeFigureOut">
               <a:rPr lang="en-NL" smtClean="0"/>
-              <a:t>23/10/2026</a:t>
+              <a:t>26/10/2026</a:t>
             </a:fld>
             <a:endParaRPr lang="en-NL"/>
           </a:p>
@@ -3450,7 +3452,7 @@
           <a:p>
             <a:fld id="{0EBB069A-003F-4FC0-8534-236B0C5C7B5F}" type="datetimeFigureOut">
               <a:rPr lang="en-NL" smtClean="0"/>
-              <a:t>23/10/2026</a:t>
+              <a:t>26/10/2026</a:t>
             </a:fld>
             <a:endParaRPr lang="en-NL"/>
           </a:p>
@@ -3763,7 +3765,7 @@
           <a:p>
             <a:fld id="{0EBB069A-003F-4FC0-8534-236B0C5C7B5F}" type="datetimeFigureOut">
               <a:rPr lang="en-NL" smtClean="0"/>
-              <a:t>23/10/2026</a:t>
+              <a:t>26/10/2026</a:t>
             </a:fld>
             <a:endParaRPr lang="en-NL"/>
           </a:p>
@@ -4052,7 +4054,7 @@
           <a:p>
             <a:fld id="{0EBB069A-003F-4FC0-8534-236B0C5C7B5F}" type="datetimeFigureOut">
               <a:rPr lang="en-NL" smtClean="0"/>
-              <a:t>23/10/2026</a:t>
+              <a:t>26/10/2026</a:t>
             </a:fld>
             <a:endParaRPr lang="en-NL"/>
           </a:p>
@@ -4295,7 +4297,7 @@
           <a:p>
             <a:fld id="{0EBB069A-003F-4FC0-8534-236B0C5C7B5F}" type="datetimeFigureOut">
               <a:rPr lang="en-NL" smtClean="0"/>
-              <a:t>23/10/2026</a:t>
+              <a:t>26/10/2026</a:t>
             </a:fld>
             <a:endParaRPr lang="en-NL"/>
           </a:p>
@@ -5521,19 +5523,20 @@
               <a:rPr lang="nl-NL" sz="1800" b="1" noProof="0" dirty="0">
                 <a:cs typeface="Courier New" panose="02070309020205020404" pitchFamily="49" charset="0"/>
               </a:rPr>
-              <a:t>1.   </a:t>
-            </a:r>
-            <a:r>
-              <a:rPr lang="nl-NL" sz="1800" b="1" noProof="0" dirty="0">
+              <a:t>1. </a:t>
+            </a:r>
+            <a:r>
+              <a:rPr lang="nl-NL" sz="1800" b="1" noProof="0" dirty="0"/>
+              <a:t>Zoek en download met </a:t>
+            </a:r>
+            <a:r>
+              <a:rPr lang="nl-NL" sz="1800" b="1" dirty="0">
                 <a:latin typeface="Courier New" panose="02070309020205020404" pitchFamily="49" charset="0"/>
                 <a:cs typeface="Courier New" panose="02070309020205020404" pitchFamily="49" charset="0"/>
               </a:rPr>
               <a:t>pip</a:t>
             </a:r>
-            <a:r>
-              <a:rPr lang="nl-NL" sz="1800" b="1" noProof="0" dirty="0"/>
-              <a:t>: zoek en download package</a:t>
-            </a:r>
+            <a:endParaRPr lang="nl-NL" sz="1800" b="1" noProof="0" dirty="0"/>
           </a:p>
           <a:p>
             <a:pPr marL="0" indent="0">
@@ -5582,19 +5585,20 @@
               <a:rPr lang="nl-NL" sz="1800" b="1" noProof="0" dirty="0">
                 <a:cs typeface="Courier New" panose="02070309020205020404" pitchFamily="49" charset="0"/>
               </a:rPr>
-              <a:t>2.   </a:t>
-            </a:r>
-            <a:r>
-              <a:rPr lang="nl-NL" sz="1800" b="1" noProof="0" dirty="0">
+              <a:t>2. I</a:t>
+            </a:r>
+            <a:r>
+              <a:rPr lang="nl-NL" sz="1800" b="1" noProof="0" dirty="0"/>
+              <a:t>nstalleer met </a:t>
+            </a:r>
+            <a:r>
+              <a:rPr lang="nl-NL" sz="1800" b="1" dirty="0">
                 <a:latin typeface="Courier New" panose="02070309020205020404" pitchFamily="49" charset="0"/>
                 <a:cs typeface="Courier New" panose="02070309020205020404" pitchFamily="49" charset="0"/>
               </a:rPr>
               <a:t>setuptools</a:t>
             </a:r>
-            <a:r>
-              <a:rPr lang="nl-NL" sz="1800" b="1" noProof="0" dirty="0"/>
-              <a:t>: installeer package</a:t>
-            </a:r>
+            <a:endParaRPr lang="nl-NL" sz="1800" b="1" noProof="0" dirty="0"/>
           </a:p>
           <a:p>
             <a:pPr marL="0" indent="0">
@@ -5634,7 +5638,7 @@
             </a:pPr>
             <a:r>
               <a:rPr lang="nl-NL" sz="1800" b="1" dirty="0"/>
-              <a:t>3.   Herhaal 1 en 2 voor afhankelijkheden</a:t>
+              <a:t>3.   Herhaal voor afhankelijkheden</a:t>
             </a:r>
           </a:p>
           <a:p>
@@ -10889,7 +10893,7 @@
             </a:pPr>
             <a:r>
               <a:rPr lang="nl-NL" sz="1800" dirty="0"/>
-              <a:t>Helpt ook bij opzetten van projecten en beheer van afhankelijkheden.</a:t>
+              <a:t>Helpt bij opzetten van projecten en beheer van afhankelijkheden.</a:t>
             </a:r>
             <a:endParaRPr lang="nl-NL" sz="1800" noProof="0" dirty="0"/>
           </a:p>
@@ -19923,6 +19927,50 @@
           </a:p>
         </p:txBody>
       </p:sp>
+      <p:sp>
+        <p:nvSpPr>
+          <p:cNvPr id="5" name="TextBox 4">
+            <a:extLst>
+              <a:ext uri="{FF2B5EF4-FFF2-40B4-BE49-F238E27FC236}">
+                <a16:creationId xmlns:a16="http://schemas.microsoft.com/office/drawing/2014/main" id="{1D9C23FF-BC59-0370-9126-7F3EB891962B}"/>
+              </a:ext>
+            </a:extLst>
+          </p:cNvPr>
+          <p:cNvSpPr txBox="1"/>
+          <p:nvPr/>
+        </p:nvSpPr>
+        <p:spPr>
+          <a:xfrm>
+            <a:off x="9619967" y="6471982"/>
+            <a:ext cx="2499246" cy="307777"/>
+          </a:xfrm>
+          <a:prstGeom prst="rect">
+            <a:avLst/>
+          </a:prstGeom>
+          <a:noFill/>
+        </p:spPr>
+        <p:txBody>
+          <a:bodyPr wrap="square">
+            <a:spAutoFit/>
+          </a:bodyPr>
+          <a:lstStyle/>
+          <a:p>
+            <a:pPr algn="r"/>
+            <a:r>
+              <a:rPr lang="en-US" sz="1400" dirty="0"/>
+              <a:t>D: </a:t>
+            </a:r>
+            <a:r>
+              <a:rPr lang="en-US" sz="1400" dirty="0" err="1"/>
+              <a:t>uv</a:t>
+            </a:r>
+            <a:r>
+              <a:rPr lang="en-US" sz="1400" dirty="0"/>
+              <a:t> sync.</a:t>
+            </a:r>
+          </a:p>
+        </p:txBody>
+      </p:sp>
     </p:spTree>
     <p:extLst>
       <p:ext uri="{BB962C8B-B14F-4D97-AF65-F5344CB8AC3E}">
@@ -20078,15 +20126,7 @@
           <a:p>
             <a:r>
               <a:rPr lang="nl-NL" sz="3600" dirty="0"/>
-              <a:t>Project </a:t>
-            </a:r>
-            <a:r>
-              <a:rPr lang="nl-NL" sz="3600" dirty="0" err="1"/>
-              <a:t>vs</a:t>
-            </a:r>
-            <a:r>
-              <a:rPr lang="nl-NL" sz="3600" dirty="0"/>
-              <a:t> package</a:t>
+              <a:t>Project versus package</a:t>
             </a:r>
             <a:endParaRPr lang="nl-NL" sz="3600" noProof="0" dirty="0"/>
           </a:p>
@@ -22675,7 +22715,7 @@
             </a:pPr>
             <a:r>
               <a:rPr lang="nl-NL" sz="1800" noProof="0" dirty="0"/>
-              <a:t>Uitgebreid ecosysteem van uitbreidingen.</a:t>
+              <a:t>Uitgebreid ecosysteem van packages.</a:t>
             </a:r>
           </a:p>
           <a:p>
@@ -22693,6 +22733,23 @@
             <a:r>
               <a:rPr lang="nl-NL" sz="1800" noProof="0" dirty="0"/>
               <a:t>Breed inzetbaar.</a:t>
+            </a:r>
+          </a:p>
+          <a:p>
+            <a:pPr>
+              <a:buFontTx/>
+              <a:buChar char="-"/>
+            </a:pPr>
+            <a:endParaRPr lang="nl-NL" sz="1800" dirty="0"/>
+          </a:p>
+          <a:p>
+            <a:pPr>
+              <a:buFontTx/>
+              <a:buChar char="-"/>
+            </a:pPr>
+            <a:r>
+              <a:rPr lang="nl-NL" sz="1800" noProof="0" dirty="0"/>
+              <a:t>Open source!</a:t>
             </a:r>
           </a:p>
         </p:txBody>
@@ -22833,28 +22890,7 @@
             </a:pPr>
             <a:r>
               <a:rPr lang="nl-NL" sz="1800" dirty="0"/>
-              <a:t>Vaak leeg bestand, maar kan code bevatten.</a:t>
-            </a:r>
-          </a:p>
-          <a:p>
-            <a:pPr marL="0" indent="0">
-              <a:buNone/>
-            </a:pPr>
-            <a:endParaRPr lang="nl-NL" sz="1800" dirty="0"/>
-          </a:p>
-          <a:p>
-            <a:pPr marL="0" indent="0">
-              <a:buNone/>
-            </a:pPr>
-            <a:endParaRPr lang="nl-NL" sz="1800" dirty="0"/>
-          </a:p>
-          <a:p>
-            <a:pPr marL="0" indent="0">
-              <a:buNone/>
-            </a:pPr>
-            <a:r>
-              <a:rPr lang="nl-NL" sz="1800" dirty="0"/>
-              <a:t>Code in </a:t>
+              <a:t>De </a:t>
             </a:r>
             <a:r>
               <a:rPr lang="nl-NL" sz="1800" dirty="0">
@@ -22867,6 +22903,39 @@
               <a:rPr lang="nl-NL" sz="1800" dirty="0"/>
               <a:t> wordt uitgevoerd bij importeren package.</a:t>
             </a:r>
+          </a:p>
+          <a:p>
+            <a:pPr marL="0" indent="0">
+              <a:buNone/>
+            </a:pPr>
+            <a:endParaRPr lang="nl-NL" sz="1800" dirty="0"/>
+          </a:p>
+          <a:p>
+            <a:pPr marL="0" indent="0">
+              <a:buNone/>
+            </a:pPr>
+            <a:endParaRPr lang="nl-NL" sz="1800" dirty="0"/>
+          </a:p>
+          <a:p>
+            <a:pPr marL="0" indent="0">
+              <a:buNone/>
+            </a:pPr>
+            <a:r>
+              <a:rPr lang="nl-NL" sz="1800" dirty="0"/>
+              <a:t>Vaak leeg bestand, maar kan code bevatten.</a:t>
+            </a:r>
+          </a:p>
+          <a:p>
+            <a:pPr marL="0" indent="0">
+              <a:buNone/>
+            </a:pPr>
+            <a:endParaRPr lang="nl-NL" sz="1800" dirty="0"/>
+          </a:p>
+          <a:p>
+            <a:pPr marL="0" indent="0">
+              <a:buNone/>
+            </a:pPr>
+            <a:endParaRPr lang="nl-NL" sz="1800" dirty="0"/>
           </a:p>
         </p:txBody>
       </p:sp>
@@ -23303,10 +23372,401 @@
       </p:sp>
       <p:sp>
         <p:nvSpPr>
+          <p:cNvPr id="7" name="Content Placeholder 2">
+            <a:extLst>
+              <a:ext uri="{FF2B5EF4-FFF2-40B4-BE49-F238E27FC236}">
+                <a16:creationId xmlns:a16="http://schemas.microsoft.com/office/drawing/2014/main" id="{77A33588-7257-AFA3-2116-EE339FD4C232}"/>
+              </a:ext>
+            </a:extLst>
+          </p:cNvPr>
+          <p:cNvSpPr txBox="1">
+            <a:spLocks/>
+          </p:cNvSpPr>
+          <p:nvPr/>
+        </p:nvSpPr>
+        <p:spPr>
+          <a:xfrm>
+            <a:off x="4760239" y="1377779"/>
+            <a:ext cx="2400587" cy="1705231"/>
+          </a:xfrm>
+          <a:prstGeom prst="rect">
+            <a:avLst/>
+          </a:prstGeom>
+        </p:spPr>
+        <p:txBody>
+          <a:bodyPr vert="horz" lIns="91440" tIns="45720" rIns="91440" bIns="45720" rtlCol="0">
+            <a:noAutofit/>
+          </a:bodyPr>
+          <a:lstStyle>
+            <a:lvl1pPr marL="228600" indent="-228600" algn="l" defTabSz="914400" rtl="0" eaLnBrk="1" latinLnBrk="0" hangingPunct="1">
+              <a:lnSpc>
+                <a:spcPct val="90000"/>
+              </a:lnSpc>
+              <a:spcBef>
+                <a:spcPts val="1000"/>
+              </a:spcBef>
+              <a:buFont typeface="Arial" panose="020B0604020202020204" pitchFamily="34" charset="0"/>
+              <a:buChar char="•"/>
+              <a:defRPr sz="2800" kern="1200">
+                <a:solidFill>
+                  <a:schemeClr val="tx1"/>
+                </a:solidFill>
+                <a:latin typeface="+mn-lt"/>
+                <a:ea typeface="+mn-ea"/>
+                <a:cs typeface="+mn-cs"/>
+              </a:defRPr>
+            </a:lvl1pPr>
+            <a:lvl2pPr marL="685800" indent="-228600" algn="l" defTabSz="914400" rtl="0" eaLnBrk="1" latinLnBrk="0" hangingPunct="1">
+              <a:lnSpc>
+                <a:spcPct val="90000"/>
+              </a:lnSpc>
+              <a:spcBef>
+                <a:spcPts val="500"/>
+              </a:spcBef>
+              <a:buFont typeface="Arial" panose="020B0604020202020204" pitchFamily="34" charset="0"/>
+              <a:buChar char="•"/>
+              <a:defRPr sz="2400" kern="1200">
+                <a:solidFill>
+                  <a:schemeClr val="tx1"/>
+                </a:solidFill>
+                <a:latin typeface="+mn-lt"/>
+                <a:ea typeface="+mn-ea"/>
+                <a:cs typeface="+mn-cs"/>
+              </a:defRPr>
+            </a:lvl2pPr>
+            <a:lvl3pPr marL="1143000" indent="-228600" algn="l" defTabSz="914400" rtl="0" eaLnBrk="1" latinLnBrk="0" hangingPunct="1">
+              <a:lnSpc>
+                <a:spcPct val="90000"/>
+              </a:lnSpc>
+              <a:spcBef>
+                <a:spcPts val="500"/>
+              </a:spcBef>
+              <a:buFont typeface="Arial" panose="020B0604020202020204" pitchFamily="34" charset="0"/>
+              <a:buChar char="•"/>
+              <a:defRPr sz="2000" kern="1200">
+                <a:solidFill>
+                  <a:schemeClr val="tx1"/>
+                </a:solidFill>
+                <a:latin typeface="+mn-lt"/>
+                <a:ea typeface="+mn-ea"/>
+                <a:cs typeface="+mn-cs"/>
+              </a:defRPr>
+            </a:lvl3pPr>
+            <a:lvl4pPr marL="1600200" indent="-228600" algn="l" defTabSz="914400" rtl="0" eaLnBrk="1" latinLnBrk="0" hangingPunct="1">
+              <a:lnSpc>
+                <a:spcPct val="90000"/>
+              </a:lnSpc>
+              <a:spcBef>
+                <a:spcPts val="500"/>
+              </a:spcBef>
+              <a:buFont typeface="Arial" panose="020B0604020202020204" pitchFamily="34" charset="0"/>
+              <a:buChar char="•"/>
+              <a:defRPr sz="1800" kern="1200">
+                <a:solidFill>
+                  <a:schemeClr val="tx1"/>
+                </a:solidFill>
+                <a:latin typeface="+mn-lt"/>
+                <a:ea typeface="+mn-ea"/>
+                <a:cs typeface="+mn-cs"/>
+              </a:defRPr>
+            </a:lvl4pPr>
+            <a:lvl5pPr marL="2057400" indent="-228600" algn="l" defTabSz="914400" rtl="0" eaLnBrk="1" latinLnBrk="0" hangingPunct="1">
+              <a:lnSpc>
+                <a:spcPct val="90000"/>
+              </a:lnSpc>
+              <a:spcBef>
+                <a:spcPts val="500"/>
+              </a:spcBef>
+              <a:buFont typeface="Arial" panose="020B0604020202020204" pitchFamily="34" charset="0"/>
+              <a:buChar char="•"/>
+              <a:defRPr sz="1800" kern="1200">
+                <a:solidFill>
+                  <a:schemeClr val="tx1"/>
+                </a:solidFill>
+                <a:latin typeface="+mn-lt"/>
+                <a:ea typeface="+mn-ea"/>
+                <a:cs typeface="+mn-cs"/>
+              </a:defRPr>
+            </a:lvl5pPr>
+            <a:lvl6pPr marL="2514600" indent="-228600" algn="l" defTabSz="914400" rtl="0" eaLnBrk="1" latinLnBrk="0" hangingPunct="1">
+              <a:lnSpc>
+                <a:spcPct val="90000"/>
+              </a:lnSpc>
+              <a:spcBef>
+                <a:spcPts val="500"/>
+              </a:spcBef>
+              <a:buFont typeface="Arial" panose="020B0604020202020204" pitchFamily="34" charset="0"/>
+              <a:buChar char="•"/>
+              <a:defRPr sz="1800" kern="1200">
+                <a:solidFill>
+                  <a:schemeClr val="tx1"/>
+                </a:solidFill>
+                <a:latin typeface="+mn-lt"/>
+                <a:ea typeface="+mn-ea"/>
+                <a:cs typeface="+mn-cs"/>
+              </a:defRPr>
+            </a:lvl6pPr>
+            <a:lvl7pPr marL="2971800" indent="-228600" algn="l" defTabSz="914400" rtl="0" eaLnBrk="1" latinLnBrk="0" hangingPunct="1">
+              <a:lnSpc>
+                <a:spcPct val="90000"/>
+              </a:lnSpc>
+              <a:spcBef>
+                <a:spcPts val="500"/>
+              </a:spcBef>
+              <a:buFont typeface="Arial" panose="020B0604020202020204" pitchFamily="34" charset="0"/>
+              <a:buChar char="•"/>
+              <a:defRPr sz="1800" kern="1200">
+                <a:solidFill>
+                  <a:schemeClr val="tx1"/>
+                </a:solidFill>
+                <a:latin typeface="+mn-lt"/>
+                <a:ea typeface="+mn-ea"/>
+                <a:cs typeface="+mn-cs"/>
+              </a:defRPr>
+            </a:lvl7pPr>
+            <a:lvl8pPr marL="3429000" indent="-228600" algn="l" defTabSz="914400" rtl="0" eaLnBrk="1" latinLnBrk="0" hangingPunct="1">
+              <a:lnSpc>
+                <a:spcPct val="90000"/>
+              </a:lnSpc>
+              <a:spcBef>
+                <a:spcPts val="500"/>
+              </a:spcBef>
+              <a:buFont typeface="Arial" panose="020B0604020202020204" pitchFamily="34" charset="0"/>
+              <a:buChar char="•"/>
+              <a:defRPr sz="1800" kern="1200">
+                <a:solidFill>
+                  <a:schemeClr val="tx1"/>
+                </a:solidFill>
+                <a:latin typeface="+mn-lt"/>
+                <a:ea typeface="+mn-ea"/>
+                <a:cs typeface="+mn-cs"/>
+              </a:defRPr>
+            </a:lvl8pPr>
+            <a:lvl9pPr marL="3886200" indent="-228600" algn="l" defTabSz="914400" rtl="0" eaLnBrk="1" latinLnBrk="0" hangingPunct="1">
+              <a:lnSpc>
+                <a:spcPct val="90000"/>
+              </a:lnSpc>
+              <a:spcBef>
+                <a:spcPts val="500"/>
+              </a:spcBef>
+              <a:buFont typeface="Arial" panose="020B0604020202020204" pitchFamily="34" charset="0"/>
+              <a:buChar char="•"/>
+              <a:defRPr sz="1800" kern="1200">
+                <a:solidFill>
+                  <a:schemeClr val="tx1"/>
+                </a:solidFill>
+                <a:latin typeface="+mn-lt"/>
+                <a:ea typeface="+mn-ea"/>
+                <a:cs typeface="+mn-cs"/>
+              </a:defRPr>
+            </a:lvl9pPr>
+          </a:lstStyle>
+          <a:p>
+            <a:pPr marL="0" indent="0">
+              <a:spcBef>
+                <a:spcPts val="0"/>
+              </a:spcBef>
+              <a:buNone/>
+            </a:pPr>
+            <a:r>
+              <a:rPr lang="nl-NL" sz="1600" dirty="0" err="1">
+                <a:latin typeface="Courier New" panose="02070309020205020404" pitchFamily="49" charset="0"/>
+                <a:cs typeface="Courier New" panose="02070309020205020404" pitchFamily="49" charset="0"/>
+              </a:rPr>
+              <a:t>src</a:t>
+            </a:r>
+            <a:r>
+              <a:rPr lang="nl-NL" sz="1600" dirty="0">
+                <a:latin typeface="Courier New" panose="02070309020205020404" pitchFamily="49" charset="0"/>
+                <a:cs typeface="Courier New" panose="02070309020205020404" pitchFamily="49" charset="0"/>
+              </a:rPr>
+              <a:t>/</a:t>
+            </a:r>
+          </a:p>
+          <a:p>
+            <a:pPr marL="0" indent="0">
+              <a:spcBef>
+                <a:spcPts val="0"/>
+              </a:spcBef>
+              <a:buNone/>
+            </a:pPr>
+            <a:r>
+              <a:rPr lang="nl-NL" sz="1600" dirty="0">
+                <a:latin typeface="Courier New" panose="02070309020205020404" pitchFamily="49" charset="0"/>
+                <a:cs typeface="Courier New" panose="02070309020205020404" pitchFamily="49" charset="0"/>
+              </a:rPr>
+              <a:t>│</a:t>
+            </a:r>
+          </a:p>
+          <a:p>
+            <a:pPr marL="0" indent="0">
+              <a:spcBef>
+                <a:spcPts val="0"/>
+              </a:spcBef>
+              <a:buNone/>
+            </a:pPr>
+            <a:r>
+              <a:rPr lang="nl-NL" sz="1600" dirty="0">
+                <a:latin typeface="Courier New" panose="02070309020205020404" pitchFamily="49" charset="0"/>
+                <a:cs typeface="Courier New" panose="02070309020205020404" pitchFamily="49" charset="0"/>
+              </a:rPr>
+              <a:t>└─ </a:t>
+            </a:r>
+            <a:r>
+              <a:rPr lang="nl-NL" sz="1600" dirty="0" err="1">
+                <a:latin typeface="Courier New" panose="02070309020205020404" pitchFamily="49" charset="0"/>
+                <a:cs typeface="Courier New" panose="02070309020205020404" pitchFamily="49" charset="0"/>
+              </a:rPr>
+              <a:t>hi_world</a:t>
+            </a:r>
+            <a:r>
+              <a:rPr lang="nl-NL" sz="1600" dirty="0">
+                <a:latin typeface="Courier New" panose="02070309020205020404" pitchFamily="49" charset="0"/>
+                <a:cs typeface="Courier New" panose="02070309020205020404" pitchFamily="49" charset="0"/>
+              </a:rPr>
+              <a:t> /</a:t>
+            </a:r>
+          </a:p>
+          <a:p>
+            <a:pPr marL="0" indent="0">
+              <a:spcBef>
+                <a:spcPts val="0"/>
+              </a:spcBef>
+              <a:buNone/>
+            </a:pPr>
+            <a:r>
+              <a:rPr lang="nl-NL" sz="1600" dirty="0">
+                <a:latin typeface="Courier New" panose="02070309020205020404" pitchFamily="49" charset="0"/>
+                <a:cs typeface="Courier New" panose="02070309020205020404" pitchFamily="49" charset="0"/>
+              </a:rPr>
+              <a:t>   │</a:t>
+            </a:r>
+          </a:p>
+          <a:p>
+            <a:pPr marL="0" indent="0">
+              <a:spcBef>
+                <a:spcPts val="0"/>
+              </a:spcBef>
+              <a:buNone/>
+            </a:pPr>
+            <a:r>
+              <a:rPr lang="nl-NL" sz="1600" dirty="0">
+                <a:latin typeface="Courier New" panose="02070309020205020404" pitchFamily="49" charset="0"/>
+                <a:cs typeface="Courier New" panose="02070309020205020404" pitchFamily="49" charset="0"/>
+              </a:rPr>
+              <a:t>   ├─ __init__.py</a:t>
+            </a:r>
+          </a:p>
+          <a:p>
+            <a:pPr marL="0" indent="0">
+              <a:spcBef>
+                <a:spcPts val="0"/>
+              </a:spcBef>
+              <a:buNone/>
+            </a:pPr>
+            <a:r>
+              <a:rPr lang="nl-NL" sz="1600" dirty="0">
+                <a:latin typeface="Courier New" panose="02070309020205020404" pitchFamily="49" charset="0"/>
+                <a:cs typeface="Courier New" panose="02070309020205020404" pitchFamily="49" charset="0"/>
+              </a:rPr>
+              <a:t>   │     </a:t>
+            </a:r>
+          </a:p>
+          <a:p>
+            <a:pPr marL="0" indent="0">
+              <a:spcBef>
+                <a:spcPts val="0"/>
+              </a:spcBef>
+              <a:buNone/>
+            </a:pPr>
+            <a:r>
+              <a:rPr lang="nl-NL" sz="1600" dirty="0">
+                <a:latin typeface="Courier New" panose="02070309020205020404" pitchFamily="49" charset="0"/>
+                <a:cs typeface="Courier New" panose="02070309020205020404" pitchFamily="49" charset="0"/>
+              </a:rPr>
+              <a:t>   └─ greet.py</a:t>
+            </a:r>
+          </a:p>
+        </p:txBody>
+      </p:sp>
+    </p:spTree>
+    <p:extLst>
+      <p:ext uri="{BB962C8B-B14F-4D97-AF65-F5344CB8AC3E}">
+        <p14:creationId xmlns:p14="http://schemas.microsoft.com/office/powerpoint/2010/main" val="1209835813"/>
+      </p:ext>
+    </p:extLst>
+  </p:cSld>
+  <p:clrMapOvr>
+    <a:masterClrMapping/>
+  </p:clrMapOvr>
+</p:sld>
+</file>
+
+<file path=ppt/slides/slide42.xml><?xml version="1.0" encoding="utf-8"?>
+<p:sld xmlns:a="http://schemas.openxmlformats.org/drawingml/2006/main" xmlns:r="http://schemas.openxmlformats.org/officeDocument/2006/relationships" xmlns:p="http://schemas.openxmlformats.org/presentationml/2006/main">
+  <p:cSld>
+    <p:spTree>
+      <p:nvGrpSpPr>
+        <p:cNvPr id="1" name="">
+          <a:extLst>
+            <a:ext uri="{FF2B5EF4-FFF2-40B4-BE49-F238E27FC236}">
+              <a16:creationId xmlns:a16="http://schemas.microsoft.com/office/drawing/2014/main" id="{B13A0AAF-9226-09BF-DFA2-8E7B55565C39}"/>
+            </a:ext>
+          </a:extLst>
+        </p:cNvPr>
+        <p:cNvGrpSpPr/>
+        <p:nvPr/>
+      </p:nvGrpSpPr>
+      <p:grpSpPr>
+        <a:xfrm>
+          <a:off x="0" y="0"/>
+          <a:ext cx="0" cy="0"/>
+          <a:chOff x="0" y="0"/>
+          <a:chExt cx="0" cy="0"/>
+        </a:xfrm>
+      </p:grpSpPr>
+      <p:sp>
+        <p:nvSpPr>
+          <p:cNvPr id="2" name="Title 1">
+            <a:extLst>
+              <a:ext uri="{FF2B5EF4-FFF2-40B4-BE49-F238E27FC236}">
+                <a16:creationId xmlns:a16="http://schemas.microsoft.com/office/drawing/2014/main" id="{CB952951-29D7-74FB-082A-F008CF865A76}"/>
+              </a:ext>
+            </a:extLst>
+          </p:cNvPr>
+          <p:cNvSpPr>
+            <a:spLocks noGrp="1"/>
+          </p:cNvSpPr>
+          <p:nvPr>
+            <p:ph type="title"/>
+          </p:nvPr>
+        </p:nvSpPr>
+        <p:spPr>
+          <a:xfrm>
+            <a:off x="838200" y="365126"/>
+            <a:ext cx="10515600" cy="718608"/>
+          </a:xfrm>
+        </p:spPr>
+        <p:txBody>
+          <a:bodyPr>
+            <a:normAutofit/>
+          </a:bodyPr>
+          <a:lstStyle/>
+          <a:p>
+            <a:r>
+              <a:rPr lang="nl-NL" sz="3600" dirty="0"/>
+              <a:t>Functie van __init__.py</a:t>
+            </a:r>
+            <a:endParaRPr lang="nl-NL" sz="3600" noProof="0" dirty="0"/>
+          </a:p>
+        </p:txBody>
+      </p:sp>
+      <p:sp>
+        <p:nvSpPr>
           <p:cNvPr id="3" name="Content Placeholder 2">
             <a:extLst>
               <a:ext uri="{FF2B5EF4-FFF2-40B4-BE49-F238E27FC236}">
-                <a16:creationId xmlns:a16="http://schemas.microsoft.com/office/drawing/2014/main" id="{C893D080-831C-D6F8-F21E-78125CD6E82A}"/>
+                <a16:creationId xmlns:a16="http://schemas.microsoft.com/office/drawing/2014/main" id="{6AC04D14-B924-5F9E-91E0-45FFC19E1A3A}"/>
               </a:ext>
             </a:extLst>
           </p:cNvPr>
@@ -23446,10 +23906,544 @@
       </p:sp>
       <p:sp>
         <p:nvSpPr>
+          <p:cNvPr id="7" name="Content Placeholder 2">
+            <a:extLst>
+              <a:ext uri="{FF2B5EF4-FFF2-40B4-BE49-F238E27FC236}">
+                <a16:creationId xmlns:a16="http://schemas.microsoft.com/office/drawing/2014/main" id="{F2F57477-C5C1-5AE5-C310-A837777CE51F}"/>
+              </a:ext>
+            </a:extLst>
+          </p:cNvPr>
+          <p:cNvSpPr txBox="1">
+            <a:spLocks/>
+          </p:cNvSpPr>
+          <p:nvPr/>
+        </p:nvSpPr>
+        <p:spPr>
+          <a:xfrm>
+            <a:off x="4760239" y="1377779"/>
+            <a:ext cx="2400587" cy="1705231"/>
+          </a:xfrm>
+          <a:prstGeom prst="rect">
+            <a:avLst/>
+          </a:prstGeom>
+        </p:spPr>
+        <p:txBody>
+          <a:bodyPr vert="horz" lIns="91440" tIns="45720" rIns="91440" bIns="45720" rtlCol="0">
+            <a:noAutofit/>
+          </a:bodyPr>
+          <a:lstStyle>
+            <a:lvl1pPr marL="228600" indent="-228600" algn="l" defTabSz="914400" rtl="0" eaLnBrk="1" latinLnBrk="0" hangingPunct="1">
+              <a:lnSpc>
+                <a:spcPct val="90000"/>
+              </a:lnSpc>
+              <a:spcBef>
+                <a:spcPts val="1000"/>
+              </a:spcBef>
+              <a:buFont typeface="Arial" panose="020B0604020202020204" pitchFamily="34" charset="0"/>
+              <a:buChar char="•"/>
+              <a:defRPr sz="2800" kern="1200">
+                <a:solidFill>
+                  <a:schemeClr val="tx1"/>
+                </a:solidFill>
+                <a:latin typeface="+mn-lt"/>
+                <a:ea typeface="+mn-ea"/>
+                <a:cs typeface="+mn-cs"/>
+              </a:defRPr>
+            </a:lvl1pPr>
+            <a:lvl2pPr marL="685800" indent="-228600" algn="l" defTabSz="914400" rtl="0" eaLnBrk="1" latinLnBrk="0" hangingPunct="1">
+              <a:lnSpc>
+                <a:spcPct val="90000"/>
+              </a:lnSpc>
+              <a:spcBef>
+                <a:spcPts val="500"/>
+              </a:spcBef>
+              <a:buFont typeface="Arial" panose="020B0604020202020204" pitchFamily="34" charset="0"/>
+              <a:buChar char="•"/>
+              <a:defRPr sz="2400" kern="1200">
+                <a:solidFill>
+                  <a:schemeClr val="tx1"/>
+                </a:solidFill>
+                <a:latin typeface="+mn-lt"/>
+                <a:ea typeface="+mn-ea"/>
+                <a:cs typeface="+mn-cs"/>
+              </a:defRPr>
+            </a:lvl2pPr>
+            <a:lvl3pPr marL="1143000" indent="-228600" algn="l" defTabSz="914400" rtl="0" eaLnBrk="1" latinLnBrk="0" hangingPunct="1">
+              <a:lnSpc>
+                <a:spcPct val="90000"/>
+              </a:lnSpc>
+              <a:spcBef>
+                <a:spcPts val="500"/>
+              </a:spcBef>
+              <a:buFont typeface="Arial" panose="020B0604020202020204" pitchFamily="34" charset="0"/>
+              <a:buChar char="•"/>
+              <a:defRPr sz="2000" kern="1200">
+                <a:solidFill>
+                  <a:schemeClr val="tx1"/>
+                </a:solidFill>
+                <a:latin typeface="+mn-lt"/>
+                <a:ea typeface="+mn-ea"/>
+                <a:cs typeface="+mn-cs"/>
+              </a:defRPr>
+            </a:lvl3pPr>
+            <a:lvl4pPr marL="1600200" indent="-228600" algn="l" defTabSz="914400" rtl="0" eaLnBrk="1" latinLnBrk="0" hangingPunct="1">
+              <a:lnSpc>
+                <a:spcPct val="90000"/>
+              </a:lnSpc>
+              <a:spcBef>
+                <a:spcPts val="500"/>
+              </a:spcBef>
+              <a:buFont typeface="Arial" panose="020B0604020202020204" pitchFamily="34" charset="0"/>
+              <a:buChar char="•"/>
+              <a:defRPr sz="1800" kern="1200">
+                <a:solidFill>
+                  <a:schemeClr val="tx1"/>
+                </a:solidFill>
+                <a:latin typeface="+mn-lt"/>
+                <a:ea typeface="+mn-ea"/>
+                <a:cs typeface="+mn-cs"/>
+              </a:defRPr>
+            </a:lvl4pPr>
+            <a:lvl5pPr marL="2057400" indent="-228600" algn="l" defTabSz="914400" rtl="0" eaLnBrk="1" latinLnBrk="0" hangingPunct="1">
+              <a:lnSpc>
+                <a:spcPct val="90000"/>
+              </a:lnSpc>
+              <a:spcBef>
+                <a:spcPts val="500"/>
+              </a:spcBef>
+              <a:buFont typeface="Arial" panose="020B0604020202020204" pitchFamily="34" charset="0"/>
+              <a:buChar char="•"/>
+              <a:defRPr sz="1800" kern="1200">
+                <a:solidFill>
+                  <a:schemeClr val="tx1"/>
+                </a:solidFill>
+                <a:latin typeface="+mn-lt"/>
+                <a:ea typeface="+mn-ea"/>
+                <a:cs typeface="+mn-cs"/>
+              </a:defRPr>
+            </a:lvl5pPr>
+            <a:lvl6pPr marL="2514600" indent="-228600" algn="l" defTabSz="914400" rtl="0" eaLnBrk="1" latinLnBrk="0" hangingPunct="1">
+              <a:lnSpc>
+                <a:spcPct val="90000"/>
+              </a:lnSpc>
+              <a:spcBef>
+                <a:spcPts val="500"/>
+              </a:spcBef>
+              <a:buFont typeface="Arial" panose="020B0604020202020204" pitchFamily="34" charset="0"/>
+              <a:buChar char="•"/>
+              <a:defRPr sz="1800" kern="1200">
+                <a:solidFill>
+                  <a:schemeClr val="tx1"/>
+                </a:solidFill>
+                <a:latin typeface="+mn-lt"/>
+                <a:ea typeface="+mn-ea"/>
+                <a:cs typeface="+mn-cs"/>
+              </a:defRPr>
+            </a:lvl6pPr>
+            <a:lvl7pPr marL="2971800" indent="-228600" algn="l" defTabSz="914400" rtl="0" eaLnBrk="1" latinLnBrk="0" hangingPunct="1">
+              <a:lnSpc>
+                <a:spcPct val="90000"/>
+              </a:lnSpc>
+              <a:spcBef>
+                <a:spcPts val="500"/>
+              </a:spcBef>
+              <a:buFont typeface="Arial" panose="020B0604020202020204" pitchFamily="34" charset="0"/>
+              <a:buChar char="•"/>
+              <a:defRPr sz="1800" kern="1200">
+                <a:solidFill>
+                  <a:schemeClr val="tx1"/>
+                </a:solidFill>
+                <a:latin typeface="+mn-lt"/>
+                <a:ea typeface="+mn-ea"/>
+                <a:cs typeface="+mn-cs"/>
+              </a:defRPr>
+            </a:lvl7pPr>
+            <a:lvl8pPr marL="3429000" indent="-228600" algn="l" defTabSz="914400" rtl="0" eaLnBrk="1" latinLnBrk="0" hangingPunct="1">
+              <a:lnSpc>
+                <a:spcPct val="90000"/>
+              </a:lnSpc>
+              <a:spcBef>
+                <a:spcPts val="500"/>
+              </a:spcBef>
+              <a:buFont typeface="Arial" panose="020B0604020202020204" pitchFamily="34" charset="0"/>
+              <a:buChar char="•"/>
+              <a:defRPr sz="1800" kern="1200">
+                <a:solidFill>
+                  <a:schemeClr val="tx1"/>
+                </a:solidFill>
+                <a:latin typeface="+mn-lt"/>
+                <a:ea typeface="+mn-ea"/>
+                <a:cs typeface="+mn-cs"/>
+              </a:defRPr>
+            </a:lvl8pPr>
+            <a:lvl9pPr marL="3886200" indent="-228600" algn="l" defTabSz="914400" rtl="0" eaLnBrk="1" latinLnBrk="0" hangingPunct="1">
+              <a:lnSpc>
+                <a:spcPct val="90000"/>
+              </a:lnSpc>
+              <a:spcBef>
+                <a:spcPts val="500"/>
+              </a:spcBef>
+              <a:buFont typeface="Arial" panose="020B0604020202020204" pitchFamily="34" charset="0"/>
+              <a:buChar char="•"/>
+              <a:defRPr sz="1800" kern="1200">
+                <a:solidFill>
+                  <a:schemeClr val="tx1"/>
+                </a:solidFill>
+                <a:latin typeface="+mn-lt"/>
+                <a:ea typeface="+mn-ea"/>
+                <a:cs typeface="+mn-cs"/>
+              </a:defRPr>
+            </a:lvl9pPr>
+          </a:lstStyle>
+          <a:p>
+            <a:pPr marL="0" indent="0">
+              <a:spcBef>
+                <a:spcPts val="0"/>
+              </a:spcBef>
+              <a:buNone/>
+            </a:pPr>
+            <a:r>
+              <a:rPr lang="nl-NL" sz="1600" dirty="0" err="1">
+                <a:latin typeface="Courier New" panose="02070309020205020404" pitchFamily="49" charset="0"/>
+                <a:cs typeface="Courier New" panose="02070309020205020404" pitchFamily="49" charset="0"/>
+              </a:rPr>
+              <a:t>src</a:t>
+            </a:r>
+            <a:r>
+              <a:rPr lang="nl-NL" sz="1600" dirty="0">
+                <a:latin typeface="Courier New" panose="02070309020205020404" pitchFamily="49" charset="0"/>
+                <a:cs typeface="Courier New" panose="02070309020205020404" pitchFamily="49" charset="0"/>
+              </a:rPr>
+              <a:t>/</a:t>
+            </a:r>
+          </a:p>
+          <a:p>
+            <a:pPr marL="0" indent="0">
+              <a:spcBef>
+                <a:spcPts val="0"/>
+              </a:spcBef>
+              <a:buNone/>
+            </a:pPr>
+            <a:r>
+              <a:rPr lang="nl-NL" sz="1600" dirty="0">
+                <a:latin typeface="Courier New" panose="02070309020205020404" pitchFamily="49" charset="0"/>
+                <a:cs typeface="Courier New" panose="02070309020205020404" pitchFamily="49" charset="0"/>
+              </a:rPr>
+              <a:t>│</a:t>
+            </a:r>
+          </a:p>
+          <a:p>
+            <a:pPr marL="0" indent="0">
+              <a:spcBef>
+                <a:spcPts val="0"/>
+              </a:spcBef>
+              <a:buNone/>
+            </a:pPr>
+            <a:r>
+              <a:rPr lang="nl-NL" sz="1600" dirty="0">
+                <a:latin typeface="Courier New" panose="02070309020205020404" pitchFamily="49" charset="0"/>
+                <a:cs typeface="Courier New" panose="02070309020205020404" pitchFamily="49" charset="0"/>
+              </a:rPr>
+              <a:t>└─ </a:t>
+            </a:r>
+            <a:r>
+              <a:rPr lang="nl-NL" sz="1600" dirty="0" err="1">
+                <a:latin typeface="Courier New" panose="02070309020205020404" pitchFamily="49" charset="0"/>
+                <a:cs typeface="Courier New" panose="02070309020205020404" pitchFamily="49" charset="0"/>
+              </a:rPr>
+              <a:t>hi_world</a:t>
+            </a:r>
+            <a:r>
+              <a:rPr lang="nl-NL" sz="1600" dirty="0">
+                <a:latin typeface="Courier New" panose="02070309020205020404" pitchFamily="49" charset="0"/>
+                <a:cs typeface="Courier New" panose="02070309020205020404" pitchFamily="49" charset="0"/>
+              </a:rPr>
+              <a:t> /</a:t>
+            </a:r>
+          </a:p>
+          <a:p>
+            <a:pPr marL="0" indent="0">
+              <a:spcBef>
+                <a:spcPts val="0"/>
+              </a:spcBef>
+              <a:buNone/>
+            </a:pPr>
+            <a:r>
+              <a:rPr lang="nl-NL" sz="1600" dirty="0">
+                <a:latin typeface="Courier New" panose="02070309020205020404" pitchFamily="49" charset="0"/>
+                <a:cs typeface="Courier New" panose="02070309020205020404" pitchFamily="49" charset="0"/>
+              </a:rPr>
+              <a:t>   │</a:t>
+            </a:r>
+          </a:p>
+          <a:p>
+            <a:pPr marL="0" indent="0">
+              <a:spcBef>
+                <a:spcPts val="0"/>
+              </a:spcBef>
+              <a:buNone/>
+            </a:pPr>
+            <a:r>
+              <a:rPr lang="nl-NL" sz="1600" dirty="0">
+                <a:latin typeface="Courier New" panose="02070309020205020404" pitchFamily="49" charset="0"/>
+                <a:cs typeface="Courier New" panose="02070309020205020404" pitchFamily="49" charset="0"/>
+              </a:rPr>
+              <a:t>   ├─ __init__.py</a:t>
+            </a:r>
+          </a:p>
+          <a:p>
+            <a:pPr marL="0" indent="0">
+              <a:spcBef>
+                <a:spcPts val="0"/>
+              </a:spcBef>
+              <a:buNone/>
+            </a:pPr>
+            <a:r>
+              <a:rPr lang="nl-NL" sz="1600" dirty="0">
+                <a:latin typeface="Courier New" panose="02070309020205020404" pitchFamily="49" charset="0"/>
+                <a:cs typeface="Courier New" panose="02070309020205020404" pitchFamily="49" charset="0"/>
+              </a:rPr>
+              <a:t>   │     </a:t>
+            </a:r>
+          </a:p>
+          <a:p>
+            <a:pPr marL="0" indent="0">
+              <a:spcBef>
+                <a:spcPts val="0"/>
+              </a:spcBef>
+              <a:buNone/>
+            </a:pPr>
+            <a:r>
+              <a:rPr lang="nl-NL" sz="1600" dirty="0">
+                <a:latin typeface="Courier New" panose="02070309020205020404" pitchFamily="49" charset="0"/>
+                <a:cs typeface="Courier New" panose="02070309020205020404" pitchFamily="49" charset="0"/>
+              </a:rPr>
+              <a:t>   └─ greet.py</a:t>
+            </a:r>
+          </a:p>
+        </p:txBody>
+      </p:sp>
+    </p:spTree>
+    <p:extLst>
+      <p:ext uri="{BB962C8B-B14F-4D97-AF65-F5344CB8AC3E}">
+        <p14:creationId xmlns:p14="http://schemas.microsoft.com/office/powerpoint/2010/main" val="223850850"/>
+      </p:ext>
+    </p:extLst>
+  </p:cSld>
+  <p:clrMapOvr>
+    <a:masterClrMapping/>
+  </p:clrMapOvr>
+</p:sld>
+</file>
+
+<file path=ppt/slides/slide43.xml><?xml version="1.0" encoding="utf-8"?>
+<p:sld xmlns:a="http://schemas.openxmlformats.org/drawingml/2006/main" xmlns:r="http://schemas.openxmlformats.org/officeDocument/2006/relationships" xmlns:p="http://schemas.openxmlformats.org/presentationml/2006/main">
+  <p:cSld>
+    <p:spTree>
+      <p:nvGrpSpPr>
+        <p:cNvPr id="1" name="">
+          <a:extLst>
+            <a:ext uri="{FF2B5EF4-FFF2-40B4-BE49-F238E27FC236}">
+              <a16:creationId xmlns:a16="http://schemas.microsoft.com/office/drawing/2014/main" id="{12346A97-8717-48B9-A42F-20B618D52DF0}"/>
+            </a:ext>
+          </a:extLst>
+        </p:cNvPr>
+        <p:cNvGrpSpPr/>
+        <p:nvPr/>
+      </p:nvGrpSpPr>
+      <p:grpSpPr>
+        <a:xfrm>
+          <a:off x="0" y="0"/>
+          <a:ext cx="0" cy="0"/>
+          <a:chOff x="0" y="0"/>
+          <a:chExt cx="0" cy="0"/>
+        </a:xfrm>
+      </p:grpSpPr>
+      <p:sp>
+        <p:nvSpPr>
+          <p:cNvPr id="2" name="Title 1">
+            <a:extLst>
+              <a:ext uri="{FF2B5EF4-FFF2-40B4-BE49-F238E27FC236}">
+                <a16:creationId xmlns:a16="http://schemas.microsoft.com/office/drawing/2014/main" id="{600ED08E-5EC3-7D8B-AE8F-2DCCA2175879}"/>
+              </a:ext>
+            </a:extLst>
+          </p:cNvPr>
+          <p:cNvSpPr>
+            <a:spLocks noGrp="1"/>
+          </p:cNvSpPr>
+          <p:nvPr>
+            <p:ph type="title"/>
+          </p:nvPr>
+        </p:nvSpPr>
+        <p:spPr>
+          <a:xfrm>
+            <a:off x="838200" y="365126"/>
+            <a:ext cx="10515600" cy="718608"/>
+          </a:xfrm>
+        </p:spPr>
+        <p:txBody>
+          <a:bodyPr>
+            <a:normAutofit/>
+          </a:bodyPr>
+          <a:lstStyle/>
+          <a:p>
+            <a:r>
+              <a:rPr lang="nl-NL" sz="3600" dirty="0"/>
+              <a:t>Functie van __init__.py</a:t>
+            </a:r>
+            <a:endParaRPr lang="nl-NL" sz="3600" noProof="0" dirty="0"/>
+          </a:p>
+        </p:txBody>
+      </p:sp>
+      <p:sp>
+        <p:nvSpPr>
+          <p:cNvPr id="3" name="Content Placeholder 2">
+            <a:extLst>
+              <a:ext uri="{FF2B5EF4-FFF2-40B4-BE49-F238E27FC236}">
+                <a16:creationId xmlns:a16="http://schemas.microsoft.com/office/drawing/2014/main" id="{526FB5EF-B5D1-96CF-4426-715353F0E44F}"/>
+              </a:ext>
+            </a:extLst>
+          </p:cNvPr>
+          <p:cNvSpPr>
+            <a:spLocks noGrp="1"/>
+          </p:cNvSpPr>
+          <p:nvPr>
+            <p:ph idx="1"/>
+          </p:nvPr>
+        </p:nvSpPr>
+        <p:spPr>
+          <a:xfrm>
+            <a:off x="838198" y="3632885"/>
+            <a:ext cx="4715935" cy="2544077"/>
+          </a:xfrm>
+        </p:spPr>
+        <p:txBody>
+          <a:bodyPr>
+            <a:normAutofit/>
+          </a:bodyPr>
+          <a:lstStyle/>
+          <a:p>
+            <a:pPr marL="0" indent="0">
+              <a:buNone/>
+            </a:pPr>
+            <a:r>
+              <a:rPr lang="nl-NL" sz="1800" b="1" dirty="0">
+                <a:cs typeface="Courier New" panose="02070309020205020404" pitchFamily="49" charset="0"/>
+              </a:rPr>
+              <a:t>Inhoud</a:t>
+            </a:r>
+            <a:r>
+              <a:rPr lang="nl-NL" sz="1800" b="1" dirty="0">
+                <a:latin typeface="Courier New" panose="02070309020205020404" pitchFamily="49" charset="0"/>
+                <a:cs typeface="Courier New" panose="02070309020205020404" pitchFamily="49" charset="0"/>
+              </a:rPr>
+              <a:t> __init__.py:</a:t>
+            </a:r>
+          </a:p>
+          <a:p>
+            <a:pPr marL="0" indent="0">
+              <a:buNone/>
+            </a:pPr>
+            <a:r>
+              <a:rPr lang="nl-NL" sz="1800" dirty="0">
+                <a:latin typeface="Courier New" panose="02070309020205020404" pitchFamily="49" charset="0"/>
+                <a:cs typeface="Courier New" panose="02070309020205020404" pitchFamily="49" charset="0"/>
+              </a:rPr>
+              <a:t>&lt;leeg&gt;</a:t>
+            </a:r>
+          </a:p>
+          <a:p>
+            <a:pPr marL="0" indent="0">
+              <a:buNone/>
+            </a:pPr>
+            <a:endParaRPr lang="nl-NL" sz="1800" dirty="0">
+              <a:latin typeface="Courier New" panose="02070309020205020404" pitchFamily="49" charset="0"/>
+              <a:cs typeface="Courier New" panose="02070309020205020404" pitchFamily="49" charset="0"/>
+            </a:endParaRPr>
+          </a:p>
+          <a:p>
+            <a:pPr marL="0" indent="0">
+              <a:buNone/>
+            </a:pPr>
+            <a:r>
+              <a:rPr lang="nl-NL" sz="1800" b="1" dirty="0">
+                <a:cs typeface="Courier New" panose="02070309020205020404" pitchFamily="49" charset="0"/>
+              </a:rPr>
+              <a:t>Importeren:</a:t>
+            </a:r>
+          </a:p>
+          <a:p>
+            <a:pPr marL="0" indent="0">
+              <a:buNone/>
+            </a:pPr>
+            <a:r>
+              <a:rPr lang="nl-NL" sz="1800" dirty="0" err="1">
+                <a:solidFill>
+                  <a:srgbClr val="7030A0"/>
+                </a:solidFill>
+                <a:latin typeface="Courier New" panose="02070309020205020404" pitchFamily="49" charset="0"/>
+                <a:cs typeface="Courier New" panose="02070309020205020404" pitchFamily="49" charset="0"/>
+              </a:rPr>
+              <a:t>from</a:t>
+            </a:r>
+            <a:r>
+              <a:rPr lang="nl-NL" sz="1800" dirty="0">
+                <a:latin typeface="Courier New" panose="02070309020205020404" pitchFamily="49" charset="0"/>
+                <a:cs typeface="Courier New" panose="02070309020205020404" pitchFamily="49" charset="0"/>
+              </a:rPr>
+              <a:t> </a:t>
+            </a:r>
+            <a:r>
+              <a:rPr lang="nl-NL" sz="1800" dirty="0" err="1">
+                <a:latin typeface="Courier New" panose="02070309020205020404" pitchFamily="49" charset="0"/>
+                <a:cs typeface="Courier New" panose="02070309020205020404" pitchFamily="49" charset="0"/>
+              </a:rPr>
+              <a:t>hi_world.greet</a:t>
+            </a:r>
+            <a:r>
+              <a:rPr lang="nl-NL" sz="1800" dirty="0">
+                <a:latin typeface="Courier New" panose="02070309020205020404" pitchFamily="49" charset="0"/>
+                <a:cs typeface="Courier New" panose="02070309020205020404" pitchFamily="49" charset="0"/>
+              </a:rPr>
+              <a:t> </a:t>
+            </a:r>
+            <a:r>
+              <a:rPr lang="nl-NL" sz="1800" dirty="0">
+                <a:solidFill>
+                  <a:srgbClr val="7030A0"/>
+                </a:solidFill>
+                <a:latin typeface="Courier New" panose="02070309020205020404" pitchFamily="49" charset="0"/>
+                <a:cs typeface="Courier New" panose="02070309020205020404" pitchFamily="49" charset="0"/>
+              </a:rPr>
+              <a:t>import</a:t>
+            </a:r>
+            <a:r>
+              <a:rPr lang="nl-NL" sz="1800" dirty="0">
+                <a:latin typeface="Courier New" panose="02070309020205020404" pitchFamily="49" charset="0"/>
+                <a:cs typeface="Courier New" panose="02070309020205020404" pitchFamily="49" charset="0"/>
+              </a:rPr>
+              <a:t> </a:t>
+            </a:r>
+            <a:r>
+              <a:rPr lang="nl-NL" sz="1800" dirty="0" err="1">
+                <a:latin typeface="Courier New" panose="02070309020205020404" pitchFamily="49" charset="0"/>
+                <a:cs typeface="Courier New" panose="02070309020205020404" pitchFamily="49" charset="0"/>
+              </a:rPr>
+              <a:t>hello</a:t>
+            </a:r>
+            <a:endParaRPr lang="nl-NL" sz="1800" dirty="0">
+              <a:latin typeface="Courier New" panose="02070309020205020404" pitchFamily="49" charset="0"/>
+              <a:cs typeface="Courier New" panose="02070309020205020404" pitchFamily="49" charset="0"/>
+            </a:endParaRPr>
+          </a:p>
+        </p:txBody>
+      </p:sp>
+      <p:sp>
+        <p:nvSpPr>
           <p:cNvPr id="5" name="Content Placeholder 2">
             <a:extLst>
               <a:ext uri="{FF2B5EF4-FFF2-40B4-BE49-F238E27FC236}">
-                <a16:creationId xmlns:a16="http://schemas.microsoft.com/office/drawing/2014/main" id="{54402707-3B5E-3D4E-880B-81EE7166113B}"/>
+                <a16:creationId xmlns:a16="http://schemas.microsoft.com/office/drawing/2014/main" id="{33997DED-0C26-0CDD-C683-DA1B1621D31F}"/>
               </a:ext>
             </a:extLst>
           </p:cNvPr>
@@ -23808,7 +24802,7 @@
           <p:cNvPr id="4" name="Straight Connector 3">
             <a:extLst>
               <a:ext uri="{FF2B5EF4-FFF2-40B4-BE49-F238E27FC236}">
-                <a16:creationId xmlns:a16="http://schemas.microsoft.com/office/drawing/2014/main" id="{3E3C33AF-342F-C740-ACFD-62CAB82B7580}"/>
+                <a16:creationId xmlns:a16="http://schemas.microsoft.com/office/drawing/2014/main" id="{79E3EDDD-67FF-F7CE-2771-098199B38990}"/>
               </a:ext>
             </a:extLst>
           </p:cNvPr>
@@ -23846,7 +24840,7 @@
           <p:cNvPr id="7" name="Content Placeholder 2">
             <a:extLst>
               <a:ext uri="{FF2B5EF4-FFF2-40B4-BE49-F238E27FC236}">
-                <a16:creationId xmlns:a16="http://schemas.microsoft.com/office/drawing/2014/main" id="{77A33588-7257-AFA3-2116-EE339FD4C232}"/>
+                <a16:creationId xmlns:a16="http://schemas.microsoft.com/office/drawing/2014/main" id="{5DEA8ADA-DFF7-463A-B7D6-DEFDD6B7D352}"/>
               </a:ext>
             </a:extLst>
           </p:cNvPr>
@@ -24163,7 +25157,7 @@
     </p:spTree>
     <p:extLst>
       <p:ext uri="{BB962C8B-B14F-4D97-AF65-F5344CB8AC3E}">
-        <p14:creationId xmlns:p14="http://schemas.microsoft.com/office/powerpoint/2010/main" val="1209835813"/>
+        <p14:creationId xmlns:p14="http://schemas.microsoft.com/office/powerpoint/2010/main" val="747279176"/>
       </p:ext>
     </p:extLst>
   </p:cSld>
@@ -24173,7 +25167,7 @@
 </p:sld>
 </file>
 
-<file path=ppt/slides/slide42.xml><?xml version="1.0" encoding="utf-8"?>
+<file path=ppt/slides/slide44.xml><?xml version="1.0" encoding="utf-8"?>
 <p:sld xmlns:a="http://schemas.openxmlformats.org/drawingml/2006/main" xmlns:r="http://schemas.openxmlformats.org/officeDocument/2006/relationships" xmlns:p="http://schemas.openxmlformats.org/presentationml/2006/main">
   <p:cSld>
     <p:spTree>
@@ -24803,7 +25797,7 @@
             </a:pPr>
             <a:r>
               <a:rPr lang="nl-NL" sz="2000" dirty="0"/>
-              <a:t>Scripts zijn CLI commando's die je package kan uitvoeren.</a:t>
+              <a:t>Scripts zijn shell commando's die je package kan uitvoeren.</a:t>
             </a:r>
           </a:p>
           <a:p>
@@ -25112,7 +26106,7 @@
 </p:sld>
 </file>
 
-<file path=ppt/slides/slide43.xml><?xml version="1.0" encoding="utf-8"?>
+<file path=ppt/slides/slide45.xml><?xml version="1.0" encoding="utf-8"?>
 <p:sld xmlns:a="http://schemas.openxmlformats.org/drawingml/2006/main" xmlns:r="http://schemas.openxmlformats.org/officeDocument/2006/relationships" xmlns:p="http://schemas.openxmlformats.org/presentationml/2006/main">
   <p:cSld>
     <p:spTree>
@@ -25596,7 +26590,7 @@
 </p:sld>
 </file>
 
-<file path=ppt/slides/slide44.xml><?xml version="1.0" encoding="utf-8"?>
+<file path=ppt/slides/slide46.xml><?xml version="1.0" encoding="utf-8"?>
 <p:sld xmlns:a="http://schemas.openxmlformats.org/drawingml/2006/main" xmlns:r="http://schemas.openxmlformats.org/officeDocument/2006/relationships" xmlns:p="http://schemas.openxmlformats.org/presentationml/2006/main">
   <p:cSld>
     <p:spTree>
@@ -26247,7 +27241,7 @@
 </p:sld>
 </file>
 
-<file path=ppt/slides/slide45.xml><?xml version="1.0" encoding="utf-8"?>
+<file path=ppt/slides/slide47.xml><?xml version="1.0" encoding="utf-8"?>
 <p:sld xmlns:a="http://schemas.openxmlformats.org/drawingml/2006/main" xmlns:r="http://schemas.openxmlformats.org/officeDocument/2006/relationships" xmlns:p="http://schemas.openxmlformats.org/presentationml/2006/main">
   <p:cSld>
     <p:spTree>
@@ -26336,7 +27330,7 @@
 </p:sld>
 </file>
 
-<file path=ppt/slides/slide46.xml><?xml version="1.0" encoding="utf-8"?>
+<file path=ppt/slides/slide48.xml><?xml version="1.0" encoding="utf-8"?>
 <p:sld xmlns:a="http://schemas.openxmlformats.org/drawingml/2006/main" xmlns:r="http://schemas.openxmlformats.org/officeDocument/2006/relationships" xmlns:p="http://schemas.openxmlformats.org/presentationml/2006/main">
   <p:cSld>
     <p:spTree>
@@ -26794,7 +27788,7 @@
 </p:sld>
 </file>
 
-<file path=ppt/slides/slide47.xml><?xml version="1.0" encoding="utf-8"?>
+<file path=ppt/slides/slide49.xml><?xml version="1.0" encoding="utf-8"?>
 <p:sld xmlns:a="http://schemas.openxmlformats.org/drawingml/2006/main" xmlns:r="http://schemas.openxmlformats.org/officeDocument/2006/relationships" xmlns:p="http://schemas.openxmlformats.org/presentationml/2006/main">
   <p:cSld>
     <p:spTree>
@@ -27348,7 +28342,947 @@
 </p:sld>
 </file>
 
-<file path=ppt/slides/slide48.xml><?xml version="1.0" encoding="utf-8"?>
+<file path=ppt/slides/slide5.xml><?xml version="1.0" encoding="utf-8"?>
+<p:sld xmlns:a="http://schemas.openxmlformats.org/drawingml/2006/main" xmlns:r="http://schemas.openxmlformats.org/officeDocument/2006/relationships" xmlns:p="http://schemas.openxmlformats.org/presentationml/2006/main">
+  <p:cSld>
+    <p:spTree>
+      <p:nvGrpSpPr>
+        <p:cNvPr id="1" name="">
+          <a:extLst>
+            <a:ext uri="{FF2B5EF4-FFF2-40B4-BE49-F238E27FC236}">
+              <a16:creationId xmlns:a16="http://schemas.microsoft.com/office/drawing/2014/main" id="{F4B537BD-A938-DAF3-FEF2-1B5E3A6E1778}"/>
+            </a:ext>
+          </a:extLst>
+        </p:cNvPr>
+        <p:cNvGrpSpPr/>
+        <p:nvPr/>
+      </p:nvGrpSpPr>
+      <p:grpSpPr>
+        <a:xfrm>
+          <a:off x="0" y="0"/>
+          <a:ext cx="0" cy="0"/>
+          <a:chOff x="0" y="0"/>
+          <a:chExt cx="0" cy="0"/>
+        </a:xfrm>
+      </p:grpSpPr>
+      <p:sp>
+        <p:nvSpPr>
+          <p:cNvPr id="2" name="Title 1">
+            <a:extLst>
+              <a:ext uri="{FF2B5EF4-FFF2-40B4-BE49-F238E27FC236}">
+                <a16:creationId xmlns:a16="http://schemas.microsoft.com/office/drawing/2014/main" id="{9934E2EF-C0A7-A70B-04F1-1E24BD18D62D}"/>
+              </a:ext>
+            </a:extLst>
+          </p:cNvPr>
+          <p:cNvSpPr>
+            <a:spLocks noGrp="1"/>
+          </p:cNvSpPr>
+          <p:nvPr>
+            <p:ph type="title"/>
+          </p:nvPr>
+        </p:nvSpPr>
+        <p:spPr>
+          <a:xfrm>
+            <a:off x="838200" y="365126"/>
+            <a:ext cx="10515600" cy="718608"/>
+          </a:xfrm>
+        </p:spPr>
+        <p:txBody>
+          <a:bodyPr>
+            <a:normAutofit/>
+          </a:bodyPr>
+          <a:lstStyle/>
+          <a:p>
+            <a:r>
+              <a:rPr lang="nl-NL" sz="3600" noProof="0" dirty="0"/>
+              <a:t>Zwakke punten</a:t>
+            </a:r>
+          </a:p>
+        </p:txBody>
+      </p:sp>
+      <p:sp>
+        <p:nvSpPr>
+          <p:cNvPr id="3" name="Content Placeholder 2">
+            <a:extLst>
+              <a:ext uri="{FF2B5EF4-FFF2-40B4-BE49-F238E27FC236}">
+                <a16:creationId xmlns:a16="http://schemas.microsoft.com/office/drawing/2014/main" id="{AE69D57C-00B8-1248-107F-AA6E5F085DF9}"/>
+              </a:ext>
+            </a:extLst>
+          </p:cNvPr>
+          <p:cNvSpPr>
+            <a:spLocks noGrp="1"/>
+          </p:cNvSpPr>
+          <p:nvPr>
+            <p:ph idx="1"/>
+          </p:nvPr>
+        </p:nvSpPr>
+        <p:spPr>
+          <a:xfrm>
+            <a:off x="838200" y="1456267"/>
+            <a:ext cx="4749800" cy="4720696"/>
+          </a:xfrm>
+        </p:spPr>
+        <p:txBody>
+          <a:bodyPr>
+            <a:normAutofit/>
+          </a:bodyPr>
+          <a:lstStyle/>
+          <a:p>
+            <a:pPr>
+              <a:buFontTx/>
+              <a:buChar char="-"/>
+            </a:pPr>
+            <a:r>
+              <a:rPr lang="nl-NL" sz="1800" dirty="0"/>
+              <a:t>Makkelijk om “slechte” code te schrijven.</a:t>
+            </a:r>
+          </a:p>
+          <a:p>
+            <a:pPr>
+              <a:buFontTx/>
+              <a:buChar char="-"/>
+            </a:pPr>
+            <a:endParaRPr lang="nl-NL" sz="1800" dirty="0"/>
+          </a:p>
+          <a:p>
+            <a:pPr>
+              <a:buFontTx/>
+              <a:buChar char="-"/>
+            </a:pPr>
+            <a:r>
+              <a:rPr lang="nl-NL" sz="1800" dirty="0"/>
+              <a:t>Relatief traag  (vgl. C, C++, Rust).</a:t>
+            </a:r>
+          </a:p>
+          <a:p>
+            <a:pPr>
+              <a:buFontTx/>
+              <a:buChar char="-"/>
+            </a:pPr>
+            <a:endParaRPr lang="nl-NL" sz="1800" dirty="0"/>
+          </a:p>
+          <a:p>
+            <a:pPr>
+              <a:buFontTx/>
+              <a:buChar char="-"/>
+            </a:pPr>
+            <a:r>
+              <a:rPr lang="nl-NL" sz="1800" dirty="0"/>
+              <a:t>Fouten komen aan het licht bij uitvoeren code.</a:t>
+            </a:r>
+          </a:p>
+          <a:p>
+            <a:pPr>
+              <a:buFontTx/>
+              <a:buChar char="-"/>
+            </a:pPr>
+            <a:endParaRPr lang="nl-NL" sz="1800" dirty="0"/>
+          </a:p>
+          <a:p>
+            <a:pPr>
+              <a:buFontTx/>
+              <a:buChar char="-"/>
+            </a:pPr>
+            <a:r>
+              <a:rPr lang="nl-NL" sz="1800" dirty="0"/>
+              <a:t>Distributie code niet eenduidig.</a:t>
+            </a:r>
+          </a:p>
+        </p:txBody>
+      </p:sp>
+      <p:sp>
+        <p:nvSpPr>
+          <p:cNvPr id="4" name="Content Placeholder 2">
+            <a:extLst>
+              <a:ext uri="{FF2B5EF4-FFF2-40B4-BE49-F238E27FC236}">
+                <a16:creationId xmlns:a16="http://schemas.microsoft.com/office/drawing/2014/main" id="{2210A4AD-7C19-5184-ECB4-77EDD34F6402}"/>
+              </a:ext>
+            </a:extLst>
+          </p:cNvPr>
+          <p:cNvSpPr txBox="1">
+            <a:spLocks/>
+          </p:cNvSpPr>
+          <p:nvPr/>
+        </p:nvSpPr>
+        <p:spPr>
+          <a:xfrm>
+            <a:off x="6409267" y="1456267"/>
+            <a:ext cx="4749800" cy="4720696"/>
+          </a:xfrm>
+          <a:prstGeom prst="rect">
+            <a:avLst/>
+          </a:prstGeom>
+        </p:spPr>
+        <p:txBody>
+          <a:bodyPr vert="horz" lIns="91440" tIns="45720" rIns="91440" bIns="45720" rtlCol="0">
+            <a:normAutofit/>
+          </a:bodyPr>
+          <a:lstStyle>
+            <a:lvl1pPr marL="228600" indent="-228600" algn="l" defTabSz="914400" rtl="0" eaLnBrk="1" latinLnBrk="0" hangingPunct="1">
+              <a:lnSpc>
+                <a:spcPct val="90000"/>
+              </a:lnSpc>
+              <a:spcBef>
+                <a:spcPts val="1000"/>
+              </a:spcBef>
+              <a:buFont typeface="Arial" panose="020B0604020202020204" pitchFamily="34" charset="0"/>
+              <a:buChar char="•"/>
+              <a:defRPr sz="2800" kern="1200">
+                <a:solidFill>
+                  <a:schemeClr val="tx1"/>
+                </a:solidFill>
+                <a:latin typeface="+mn-lt"/>
+                <a:ea typeface="+mn-ea"/>
+                <a:cs typeface="+mn-cs"/>
+              </a:defRPr>
+            </a:lvl1pPr>
+            <a:lvl2pPr marL="685800" indent="-228600" algn="l" defTabSz="914400" rtl="0" eaLnBrk="1" latinLnBrk="0" hangingPunct="1">
+              <a:lnSpc>
+                <a:spcPct val="90000"/>
+              </a:lnSpc>
+              <a:spcBef>
+                <a:spcPts val="500"/>
+              </a:spcBef>
+              <a:buFont typeface="Arial" panose="020B0604020202020204" pitchFamily="34" charset="0"/>
+              <a:buChar char="•"/>
+              <a:defRPr sz="2400" kern="1200">
+                <a:solidFill>
+                  <a:schemeClr val="tx1"/>
+                </a:solidFill>
+                <a:latin typeface="+mn-lt"/>
+                <a:ea typeface="+mn-ea"/>
+                <a:cs typeface="+mn-cs"/>
+              </a:defRPr>
+            </a:lvl2pPr>
+            <a:lvl3pPr marL="1143000" indent="-228600" algn="l" defTabSz="914400" rtl="0" eaLnBrk="1" latinLnBrk="0" hangingPunct="1">
+              <a:lnSpc>
+                <a:spcPct val="90000"/>
+              </a:lnSpc>
+              <a:spcBef>
+                <a:spcPts val="500"/>
+              </a:spcBef>
+              <a:buFont typeface="Arial" panose="020B0604020202020204" pitchFamily="34" charset="0"/>
+              <a:buChar char="•"/>
+              <a:defRPr sz="2000" kern="1200">
+                <a:solidFill>
+                  <a:schemeClr val="tx1"/>
+                </a:solidFill>
+                <a:latin typeface="+mn-lt"/>
+                <a:ea typeface="+mn-ea"/>
+                <a:cs typeface="+mn-cs"/>
+              </a:defRPr>
+            </a:lvl3pPr>
+            <a:lvl4pPr marL="1600200" indent="-228600" algn="l" defTabSz="914400" rtl="0" eaLnBrk="1" latinLnBrk="0" hangingPunct="1">
+              <a:lnSpc>
+                <a:spcPct val="90000"/>
+              </a:lnSpc>
+              <a:spcBef>
+                <a:spcPts val="500"/>
+              </a:spcBef>
+              <a:buFont typeface="Arial" panose="020B0604020202020204" pitchFamily="34" charset="0"/>
+              <a:buChar char="•"/>
+              <a:defRPr sz="1800" kern="1200">
+                <a:solidFill>
+                  <a:schemeClr val="tx1"/>
+                </a:solidFill>
+                <a:latin typeface="+mn-lt"/>
+                <a:ea typeface="+mn-ea"/>
+                <a:cs typeface="+mn-cs"/>
+              </a:defRPr>
+            </a:lvl4pPr>
+            <a:lvl5pPr marL="2057400" indent="-228600" algn="l" defTabSz="914400" rtl="0" eaLnBrk="1" latinLnBrk="0" hangingPunct="1">
+              <a:lnSpc>
+                <a:spcPct val="90000"/>
+              </a:lnSpc>
+              <a:spcBef>
+                <a:spcPts val="500"/>
+              </a:spcBef>
+              <a:buFont typeface="Arial" panose="020B0604020202020204" pitchFamily="34" charset="0"/>
+              <a:buChar char="•"/>
+              <a:defRPr sz="1800" kern="1200">
+                <a:solidFill>
+                  <a:schemeClr val="tx1"/>
+                </a:solidFill>
+                <a:latin typeface="+mn-lt"/>
+                <a:ea typeface="+mn-ea"/>
+                <a:cs typeface="+mn-cs"/>
+              </a:defRPr>
+            </a:lvl5pPr>
+            <a:lvl6pPr marL="2514600" indent="-228600" algn="l" defTabSz="914400" rtl="0" eaLnBrk="1" latinLnBrk="0" hangingPunct="1">
+              <a:lnSpc>
+                <a:spcPct val="90000"/>
+              </a:lnSpc>
+              <a:spcBef>
+                <a:spcPts val="500"/>
+              </a:spcBef>
+              <a:buFont typeface="Arial" panose="020B0604020202020204" pitchFamily="34" charset="0"/>
+              <a:buChar char="•"/>
+              <a:defRPr sz="1800" kern="1200">
+                <a:solidFill>
+                  <a:schemeClr val="tx1"/>
+                </a:solidFill>
+                <a:latin typeface="+mn-lt"/>
+                <a:ea typeface="+mn-ea"/>
+                <a:cs typeface="+mn-cs"/>
+              </a:defRPr>
+            </a:lvl6pPr>
+            <a:lvl7pPr marL="2971800" indent="-228600" algn="l" defTabSz="914400" rtl="0" eaLnBrk="1" latinLnBrk="0" hangingPunct="1">
+              <a:lnSpc>
+                <a:spcPct val="90000"/>
+              </a:lnSpc>
+              <a:spcBef>
+                <a:spcPts val="500"/>
+              </a:spcBef>
+              <a:buFont typeface="Arial" panose="020B0604020202020204" pitchFamily="34" charset="0"/>
+              <a:buChar char="•"/>
+              <a:defRPr sz="1800" kern="1200">
+                <a:solidFill>
+                  <a:schemeClr val="tx1"/>
+                </a:solidFill>
+                <a:latin typeface="+mn-lt"/>
+                <a:ea typeface="+mn-ea"/>
+                <a:cs typeface="+mn-cs"/>
+              </a:defRPr>
+            </a:lvl7pPr>
+            <a:lvl8pPr marL="3429000" indent="-228600" algn="l" defTabSz="914400" rtl="0" eaLnBrk="1" latinLnBrk="0" hangingPunct="1">
+              <a:lnSpc>
+                <a:spcPct val="90000"/>
+              </a:lnSpc>
+              <a:spcBef>
+                <a:spcPts val="500"/>
+              </a:spcBef>
+              <a:buFont typeface="Arial" panose="020B0604020202020204" pitchFamily="34" charset="0"/>
+              <a:buChar char="•"/>
+              <a:defRPr sz="1800" kern="1200">
+                <a:solidFill>
+                  <a:schemeClr val="tx1"/>
+                </a:solidFill>
+                <a:latin typeface="+mn-lt"/>
+                <a:ea typeface="+mn-ea"/>
+                <a:cs typeface="+mn-cs"/>
+              </a:defRPr>
+            </a:lvl8pPr>
+            <a:lvl9pPr marL="3886200" indent="-228600" algn="l" defTabSz="914400" rtl="0" eaLnBrk="1" latinLnBrk="0" hangingPunct="1">
+              <a:lnSpc>
+                <a:spcPct val="90000"/>
+              </a:lnSpc>
+              <a:spcBef>
+                <a:spcPts val="500"/>
+              </a:spcBef>
+              <a:buFont typeface="Arial" panose="020B0604020202020204" pitchFamily="34" charset="0"/>
+              <a:buChar char="•"/>
+              <a:defRPr sz="1800" kern="1200">
+                <a:solidFill>
+                  <a:schemeClr val="tx1"/>
+                </a:solidFill>
+                <a:latin typeface="+mn-lt"/>
+                <a:ea typeface="+mn-ea"/>
+                <a:cs typeface="+mn-cs"/>
+              </a:defRPr>
+            </a:lvl9pPr>
+          </a:lstStyle>
+          <a:p>
+            <a:pPr marL="0" indent="0">
+              <a:buNone/>
+            </a:pPr>
+            <a:endParaRPr lang="nl-NL" sz="2000" dirty="0"/>
+          </a:p>
+        </p:txBody>
+      </p:sp>
+      <p:sp>
+        <p:nvSpPr>
+          <p:cNvPr id="5" name="Content Placeholder 2">
+            <a:extLst>
+              <a:ext uri="{FF2B5EF4-FFF2-40B4-BE49-F238E27FC236}">
+                <a16:creationId xmlns:a16="http://schemas.microsoft.com/office/drawing/2014/main" id="{FE4D819A-A65A-B849-482E-28A9AA671928}"/>
+              </a:ext>
+            </a:extLst>
+          </p:cNvPr>
+          <p:cNvSpPr txBox="1">
+            <a:spLocks/>
+          </p:cNvSpPr>
+          <p:nvPr/>
+        </p:nvSpPr>
+        <p:spPr>
+          <a:xfrm>
+            <a:off x="6604000" y="1456267"/>
+            <a:ext cx="4749800" cy="4720696"/>
+          </a:xfrm>
+          <a:prstGeom prst="rect">
+            <a:avLst/>
+          </a:prstGeom>
+        </p:spPr>
+        <p:txBody>
+          <a:bodyPr vert="horz" lIns="91440" tIns="45720" rIns="91440" bIns="45720" rtlCol="0">
+            <a:normAutofit/>
+          </a:bodyPr>
+          <a:lstStyle>
+            <a:lvl1pPr marL="228600" indent="-228600" algn="l" defTabSz="914400" rtl="0" eaLnBrk="1" latinLnBrk="0" hangingPunct="1">
+              <a:lnSpc>
+                <a:spcPct val="90000"/>
+              </a:lnSpc>
+              <a:spcBef>
+                <a:spcPts val="1000"/>
+              </a:spcBef>
+              <a:buFont typeface="Arial" panose="020B0604020202020204" pitchFamily="34" charset="0"/>
+              <a:buChar char="•"/>
+              <a:defRPr sz="2800" kern="1200">
+                <a:solidFill>
+                  <a:schemeClr val="tx1"/>
+                </a:solidFill>
+                <a:latin typeface="+mn-lt"/>
+                <a:ea typeface="+mn-ea"/>
+                <a:cs typeface="+mn-cs"/>
+              </a:defRPr>
+            </a:lvl1pPr>
+            <a:lvl2pPr marL="685800" indent="-228600" algn="l" defTabSz="914400" rtl="0" eaLnBrk="1" latinLnBrk="0" hangingPunct="1">
+              <a:lnSpc>
+                <a:spcPct val="90000"/>
+              </a:lnSpc>
+              <a:spcBef>
+                <a:spcPts val="500"/>
+              </a:spcBef>
+              <a:buFont typeface="Arial" panose="020B0604020202020204" pitchFamily="34" charset="0"/>
+              <a:buChar char="•"/>
+              <a:defRPr sz="2400" kern="1200">
+                <a:solidFill>
+                  <a:schemeClr val="tx1"/>
+                </a:solidFill>
+                <a:latin typeface="+mn-lt"/>
+                <a:ea typeface="+mn-ea"/>
+                <a:cs typeface="+mn-cs"/>
+              </a:defRPr>
+            </a:lvl2pPr>
+            <a:lvl3pPr marL="1143000" indent="-228600" algn="l" defTabSz="914400" rtl="0" eaLnBrk="1" latinLnBrk="0" hangingPunct="1">
+              <a:lnSpc>
+                <a:spcPct val="90000"/>
+              </a:lnSpc>
+              <a:spcBef>
+                <a:spcPts val="500"/>
+              </a:spcBef>
+              <a:buFont typeface="Arial" panose="020B0604020202020204" pitchFamily="34" charset="0"/>
+              <a:buChar char="•"/>
+              <a:defRPr sz="2000" kern="1200">
+                <a:solidFill>
+                  <a:schemeClr val="tx1"/>
+                </a:solidFill>
+                <a:latin typeface="+mn-lt"/>
+                <a:ea typeface="+mn-ea"/>
+                <a:cs typeface="+mn-cs"/>
+              </a:defRPr>
+            </a:lvl3pPr>
+            <a:lvl4pPr marL="1600200" indent="-228600" algn="l" defTabSz="914400" rtl="0" eaLnBrk="1" latinLnBrk="0" hangingPunct="1">
+              <a:lnSpc>
+                <a:spcPct val="90000"/>
+              </a:lnSpc>
+              <a:spcBef>
+                <a:spcPts val="500"/>
+              </a:spcBef>
+              <a:buFont typeface="Arial" panose="020B0604020202020204" pitchFamily="34" charset="0"/>
+              <a:buChar char="•"/>
+              <a:defRPr sz="1800" kern="1200">
+                <a:solidFill>
+                  <a:schemeClr val="tx1"/>
+                </a:solidFill>
+                <a:latin typeface="+mn-lt"/>
+                <a:ea typeface="+mn-ea"/>
+                <a:cs typeface="+mn-cs"/>
+              </a:defRPr>
+            </a:lvl4pPr>
+            <a:lvl5pPr marL="2057400" indent="-228600" algn="l" defTabSz="914400" rtl="0" eaLnBrk="1" latinLnBrk="0" hangingPunct="1">
+              <a:lnSpc>
+                <a:spcPct val="90000"/>
+              </a:lnSpc>
+              <a:spcBef>
+                <a:spcPts val="500"/>
+              </a:spcBef>
+              <a:buFont typeface="Arial" panose="020B0604020202020204" pitchFamily="34" charset="0"/>
+              <a:buChar char="•"/>
+              <a:defRPr sz="1800" kern="1200">
+                <a:solidFill>
+                  <a:schemeClr val="tx1"/>
+                </a:solidFill>
+                <a:latin typeface="+mn-lt"/>
+                <a:ea typeface="+mn-ea"/>
+                <a:cs typeface="+mn-cs"/>
+              </a:defRPr>
+            </a:lvl5pPr>
+            <a:lvl6pPr marL="2514600" indent="-228600" algn="l" defTabSz="914400" rtl="0" eaLnBrk="1" latinLnBrk="0" hangingPunct="1">
+              <a:lnSpc>
+                <a:spcPct val="90000"/>
+              </a:lnSpc>
+              <a:spcBef>
+                <a:spcPts val="500"/>
+              </a:spcBef>
+              <a:buFont typeface="Arial" panose="020B0604020202020204" pitchFamily="34" charset="0"/>
+              <a:buChar char="•"/>
+              <a:defRPr sz="1800" kern="1200">
+                <a:solidFill>
+                  <a:schemeClr val="tx1"/>
+                </a:solidFill>
+                <a:latin typeface="+mn-lt"/>
+                <a:ea typeface="+mn-ea"/>
+                <a:cs typeface="+mn-cs"/>
+              </a:defRPr>
+            </a:lvl6pPr>
+            <a:lvl7pPr marL="2971800" indent="-228600" algn="l" defTabSz="914400" rtl="0" eaLnBrk="1" latinLnBrk="0" hangingPunct="1">
+              <a:lnSpc>
+                <a:spcPct val="90000"/>
+              </a:lnSpc>
+              <a:spcBef>
+                <a:spcPts val="500"/>
+              </a:spcBef>
+              <a:buFont typeface="Arial" panose="020B0604020202020204" pitchFamily="34" charset="0"/>
+              <a:buChar char="•"/>
+              <a:defRPr sz="1800" kern="1200">
+                <a:solidFill>
+                  <a:schemeClr val="tx1"/>
+                </a:solidFill>
+                <a:latin typeface="+mn-lt"/>
+                <a:ea typeface="+mn-ea"/>
+                <a:cs typeface="+mn-cs"/>
+              </a:defRPr>
+            </a:lvl7pPr>
+            <a:lvl8pPr marL="3429000" indent="-228600" algn="l" defTabSz="914400" rtl="0" eaLnBrk="1" latinLnBrk="0" hangingPunct="1">
+              <a:lnSpc>
+                <a:spcPct val="90000"/>
+              </a:lnSpc>
+              <a:spcBef>
+                <a:spcPts val="500"/>
+              </a:spcBef>
+              <a:buFont typeface="Arial" panose="020B0604020202020204" pitchFamily="34" charset="0"/>
+              <a:buChar char="•"/>
+              <a:defRPr sz="1800" kern="1200">
+                <a:solidFill>
+                  <a:schemeClr val="tx1"/>
+                </a:solidFill>
+                <a:latin typeface="+mn-lt"/>
+                <a:ea typeface="+mn-ea"/>
+                <a:cs typeface="+mn-cs"/>
+              </a:defRPr>
+            </a:lvl8pPr>
+            <a:lvl9pPr marL="3886200" indent="-228600" algn="l" defTabSz="914400" rtl="0" eaLnBrk="1" latinLnBrk="0" hangingPunct="1">
+              <a:lnSpc>
+                <a:spcPct val="90000"/>
+              </a:lnSpc>
+              <a:spcBef>
+                <a:spcPts val="500"/>
+              </a:spcBef>
+              <a:buFont typeface="Arial" panose="020B0604020202020204" pitchFamily="34" charset="0"/>
+              <a:buChar char="•"/>
+              <a:defRPr sz="1800" kern="1200">
+                <a:solidFill>
+                  <a:schemeClr val="tx1"/>
+                </a:solidFill>
+                <a:latin typeface="+mn-lt"/>
+                <a:ea typeface="+mn-ea"/>
+                <a:cs typeface="+mn-cs"/>
+              </a:defRPr>
+            </a:lvl9pPr>
+          </a:lstStyle>
+          <a:p>
+            <a:pPr marL="0" indent="0">
+              <a:lnSpc>
+                <a:spcPct val="100000"/>
+              </a:lnSpc>
+              <a:spcBef>
+                <a:spcPts val="0"/>
+              </a:spcBef>
+              <a:buFont typeface="Arial" panose="020B0604020202020204" pitchFamily="34" charset="0"/>
+              <a:buNone/>
+            </a:pPr>
+            <a:r>
+              <a:rPr lang="nl-NL" sz="1600" dirty="0" err="1">
+                <a:latin typeface="Courier New" panose="02070309020205020404" pitchFamily="49" charset="0"/>
+                <a:cs typeface="Courier New" panose="02070309020205020404" pitchFamily="49" charset="0"/>
+              </a:rPr>
+              <a:t>qs</a:t>
+            </a:r>
+            <a:r>
+              <a:rPr lang="nl-NL" sz="1600" dirty="0">
+                <a:latin typeface="Courier New" panose="02070309020205020404" pitchFamily="49" charset="0"/>
+                <a:cs typeface="Courier New" panose="02070309020205020404" pitchFamily="49" charset="0"/>
+              </a:rPr>
+              <a:t> = [</a:t>
+            </a:r>
+          </a:p>
+          <a:p>
+            <a:pPr marL="0" indent="0">
+              <a:lnSpc>
+                <a:spcPct val="100000"/>
+              </a:lnSpc>
+              <a:spcBef>
+                <a:spcPts val="0"/>
+              </a:spcBef>
+              <a:buFont typeface="Arial" panose="020B0604020202020204" pitchFamily="34" charset="0"/>
+              <a:buNone/>
+            </a:pPr>
+            <a:r>
+              <a:rPr lang="nl-NL" sz="1600" dirty="0">
+                <a:latin typeface="Courier New" panose="02070309020205020404" pitchFamily="49" charset="0"/>
+                <a:cs typeface="Courier New" panose="02070309020205020404" pitchFamily="49" charset="0"/>
+              </a:rPr>
+              <a:t>    _ ** 2 </a:t>
+            </a:r>
+            <a:r>
+              <a:rPr lang="nl-NL" sz="1600" dirty="0" err="1">
+                <a:solidFill>
+                  <a:srgbClr val="7030A0"/>
+                </a:solidFill>
+                <a:latin typeface="Courier New" panose="02070309020205020404" pitchFamily="49" charset="0"/>
+                <a:cs typeface="Courier New" panose="02070309020205020404" pitchFamily="49" charset="0"/>
+              </a:rPr>
+              <a:t>for</a:t>
+            </a:r>
+            <a:r>
+              <a:rPr lang="nl-NL" sz="1600" dirty="0">
+                <a:latin typeface="Courier New" panose="02070309020205020404" pitchFamily="49" charset="0"/>
+                <a:cs typeface="Courier New" panose="02070309020205020404" pitchFamily="49" charset="0"/>
+              </a:rPr>
+              <a:t> _ </a:t>
+            </a:r>
+            <a:r>
+              <a:rPr lang="nl-NL" sz="1600" dirty="0">
+                <a:solidFill>
+                  <a:srgbClr val="7030A0"/>
+                </a:solidFill>
+                <a:latin typeface="Courier New" panose="02070309020205020404" pitchFamily="49" charset="0"/>
+                <a:cs typeface="Courier New" panose="02070309020205020404" pitchFamily="49" charset="0"/>
+              </a:rPr>
+              <a:t>in</a:t>
+            </a:r>
+            <a:r>
+              <a:rPr lang="nl-NL" sz="1600" dirty="0">
+                <a:latin typeface="Courier New" panose="02070309020205020404" pitchFamily="49" charset="0"/>
+                <a:cs typeface="Courier New" panose="02070309020205020404" pitchFamily="49" charset="0"/>
+              </a:rPr>
+              <a:t> </a:t>
+            </a:r>
+            <a:r>
+              <a:rPr lang="nl-NL" sz="1600" dirty="0" err="1">
+                <a:latin typeface="Courier New" panose="02070309020205020404" pitchFamily="49" charset="0"/>
+                <a:cs typeface="Courier New" panose="02070309020205020404" pitchFamily="49" charset="0"/>
+              </a:rPr>
+              <a:t>my_list</a:t>
+            </a:r>
+            <a:endParaRPr lang="nl-NL" sz="1600" dirty="0">
+              <a:latin typeface="Courier New" panose="02070309020205020404" pitchFamily="49" charset="0"/>
+              <a:cs typeface="Courier New" panose="02070309020205020404" pitchFamily="49" charset="0"/>
+            </a:endParaRPr>
+          </a:p>
+          <a:p>
+            <a:pPr marL="0" indent="0">
+              <a:lnSpc>
+                <a:spcPct val="100000"/>
+              </a:lnSpc>
+              <a:spcBef>
+                <a:spcPts val="0"/>
+              </a:spcBef>
+              <a:buFont typeface="Arial" panose="020B0604020202020204" pitchFamily="34" charset="0"/>
+              <a:buNone/>
+            </a:pPr>
+            <a:r>
+              <a:rPr lang="nl-NL" sz="1600" dirty="0">
+                <a:latin typeface="Courier New" panose="02070309020205020404" pitchFamily="49" charset="0"/>
+                <a:cs typeface="Courier New" panose="02070309020205020404" pitchFamily="49" charset="0"/>
+              </a:rPr>
+              <a:t>    </a:t>
+            </a:r>
+            <a:r>
+              <a:rPr lang="nl-NL" sz="1600" dirty="0" err="1">
+                <a:solidFill>
+                  <a:srgbClr val="7030A0"/>
+                </a:solidFill>
+                <a:latin typeface="Courier New" panose="02070309020205020404" pitchFamily="49" charset="0"/>
+                <a:cs typeface="Courier New" panose="02070309020205020404" pitchFamily="49" charset="0"/>
+              </a:rPr>
+              <a:t>if</a:t>
+            </a:r>
+            <a:r>
+              <a:rPr lang="nl-NL" sz="1600" dirty="0">
+                <a:latin typeface="Courier New" panose="02070309020205020404" pitchFamily="49" charset="0"/>
+                <a:cs typeface="Courier New" panose="02070309020205020404" pitchFamily="49" charset="0"/>
+              </a:rPr>
+              <a:t> (</a:t>
+            </a:r>
+          </a:p>
+          <a:p>
+            <a:pPr marL="0" indent="0">
+              <a:lnSpc>
+                <a:spcPct val="100000"/>
+              </a:lnSpc>
+              <a:spcBef>
+                <a:spcPts val="0"/>
+              </a:spcBef>
+              <a:buFont typeface="Arial" panose="020B0604020202020204" pitchFamily="34" charset="0"/>
+              <a:buNone/>
+            </a:pPr>
+            <a:r>
+              <a:rPr lang="nl-NL" sz="1600" dirty="0">
+                <a:latin typeface="Courier New" panose="02070309020205020404" pitchFamily="49" charset="0"/>
+                <a:cs typeface="Courier New" panose="02070309020205020404" pitchFamily="49" charset="0"/>
+              </a:rPr>
+              <a:t>        type(_) </a:t>
+            </a:r>
+            <a:r>
+              <a:rPr lang="nl-NL" sz="1600" dirty="0">
+                <a:solidFill>
+                  <a:srgbClr val="7030A0"/>
+                </a:solidFill>
+                <a:latin typeface="Courier New" panose="02070309020205020404" pitchFamily="49" charset="0"/>
+                <a:cs typeface="Courier New" panose="02070309020205020404" pitchFamily="49" charset="0"/>
+              </a:rPr>
+              <a:t>in</a:t>
+            </a:r>
+            <a:r>
+              <a:rPr lang="nl-NL" sz="1600" dirty="0">
+                <a:latin typeface="Courier New" panose="02070309020205020404" pitchFamily="49" charset="0"/>
+                <a:cs typeface="Courier New" panose="02070309020205020404" pitchFamily="49" charset="0"/>
+              </a:rPr>
+              <a:t> (</a:t>
+            </a:r>
+            <a:r>
+              <a:rPr lang="nl-NL" sz="1600" dirty="0" err="1">
+                <a:solidFill>
+                  <a:schemeClr val="accent5">
+                    <a:lumMod val="75000"/>
+                  </a:schemeClr>
+                </a:solidFill>
+                <a:latin typeface="Courier New" panose="02070309020205020404" pitchFamily="49" charset="0"/>
+                <a:cs typeface="Courier New" panose="02070309020205020404" pitchFamily="49" charset="0"/>
+              </a:rPr>
+              <a:t>float</a:t>
+            </a:r>
+            <a:r>
+              <a:rPr lang="nl-NL" sz="1600" dirty="0">
+                <a:latin typeface="Courier New" panose="02070309020205020404" pitchFamily="49" charset="0"/>
+                <a:cs typeface="Courier New" panose="02070309020205020404" pitchFamily="49" charset="0"/>
+              </a:rPr>
+              <a:t>, </a:t>
+            </a:r>
+            <a:r>
+              <a:rPr lang="nl-NL" sz="1600" dirty="0">
+                <a:solidFill>
+                  <a:schemeClr val="accent5">
+                    <a:lumMod val="75000"/>
+                  </a:schemeClr>
+                </a:solidFill>
+                <a:latin typeface="Courier New" panose="02070309020205020404" pitchFamily="49" charset="0"/>
+                <a:cs typeface="Courier New" panose="02070309020205020404" pitchFamily="49" charset="0"/>
+              </a:rPr>
+              <a:t>int</a:t>
+            </a:r>
+            <a:r>
+              <a:rPr lang="nl-NL" sz="1600" dirty="0">
+                <a:latin typeface="Courier New" panose="02070309020205020404" pitchFamily="49" charset="0"/>
+                <a:cs typeface="Courier New" panose="02070309020205020404" pitchFamily="49" charset="0"/>
+              </a:rPr>
+              <a:t>)</a:t>
+            </a:r>
+          </a:p>
+          <a:p>
+            <a:pPr marL="0" indent="0">
+              <a:lnSpc>
+                <a:spcPct val="100000"/>
+              </a:lnSpc>
+              <a:spcBef>
+                <a:spcPts val="0"/>
+              </a:spcBef>
+              <a:buFont typeface="Arial" panose="020B0604020202020204" pitchFamily="34" charset="0"/>
+              <a:buNone/>
+            </a:pPr>
+            <a:r>
+              <a:rPr lang="nl-NL" sz="1600" dirty="0">
+                <a:latin typeface="Courier New" panose="02070309020205020404" pitchFamily="49" charset="0"/>
+                <a:cs typeface="Courier New" panose="02070309020205020404" pitchFamily="49" charset="0"/>
+              </a:rPr>
+              <a:t>        </a:t>
+            </a:r>
+            <a:r>
+              <a:rPr lang="nl-NL" sz="1600" dirty="0" err="1">
+                <a:solidFill>
+                  <a:srgbClr val="7030A0"/>
+                </a:solidFill>
+                <a:latin typeface="Courier New" panose="02070309020205020404" pitchFamily="49" charset="0"/>
+                <a:cs typeface="Courier New" panose="02070309020205020404" pitchFamily="49" charset="0"/>
+              </a:rPr>
+              <a:t>and</a:t>
+            </a:r>
+            <a:r>
+              <a:rPr lang="nl-NL" sz="1600" dirty="0">
+                <a:latin typeface="Courier New" panose="02070309020205020404" pitchFamily="49" charset="0"/>
+                <a:cs typeface="Courier New" panose="02070309020205020404" pitchFamily="49" charset="0"/>
+              </a:rPr>
+              <a:t> _ </a:t>
+            </a:r>
+            <a:r>
+              <a:rPr lang="nl-NL" sz="1600" dirty="0">
+                <a:solidFill>
+                  <a:srgbClr val="7030A0"/>
+                </a:solidFill>
+                <a:latin typeface="Courier New" panose="02070309020205020404" pitchFamily="49" charset="0"/>
+                <a:cs typeface="Courier New" panose="02070309020205020404" pitchFamily="49" charset="0"/>
+              </a:rPr>
+              <a:t>is </a:t>
+            </a:r>
+            <a:r>
+              <a:rPr lang="nl-NL" sz="1600" dirty="0" err="1">
+                <a:solidFill>
+                  <a:srgbClr val="7030A0"/>
+                </a:solidFill>
+                <a:latin typeface="Courier New" panose="02070309020205020404" pitchFamily="49" charset="0"/>
+                <a:cs typeface="Courier New" panose="02070309020205020404" pitchFamily="49" charset="0"/>
+              </a:rPr>
+              <a:t>not</a:t>
+            </a:r>
+            <a:r>
+              <a:rPr lang="nl-NL" sz="1600" dirty="0">
+                <a:latin typeface="Courier New" panose="02070309020205020404" pitchFamily="49" charset="0"/>
+                <a:cs typeface="Courier New" panose="02070309020205020404" pitchFamily="49" charset="0"/>
+              </a:rPr>
+              <a:t> </a:t>
+            </a:r>
+            <a:r>
+              <a:rPr lang="nl-NL" sz="1600" dirty="0">
+                <a:solidFill>
+                  <a:schemeClr val="accent5">
+                    <a:lumMod val="75000"/>
+                  </a:schemeClr>
+                </a:solidFill>
+                <a:latin typeface="Courier New" panose="02070309020205020404" pitchFamily="49" charset="0"/>
+                <a:cs typeface="Courier New" panose="02070309020205020404" pitchFamily="49" charset="0"/>
+              </a:rPr>
+              <a:t>None</a:t>
+            </a:r>
+          </a:p>
+          <a:p>
+            <a:pPr marL="0" indent="0">
+              <a:lnSpc>
+                <a:spcPct val="100000"/>
+              </a:lnSpc>
+              <a:spcBef>
+                <a:spcPts val="0"/>
+              </a:spcBef>
+              <a:buFont typeface="Arial" panose="020B0604020202020204" pitchFamily="34" charset="0"/>
+              <a:buNone/>
+            </a:pPr>
+            <a:r>
+              <a:rPr lang="nl-NL" sz="1600" dirty="0">
+                <a:latin typeface="Courier New" panose="02070309020205020404" pitchFamily="49" charset="0"/>
+                <a:cs typeface="Courier New" panose="02070309020205020404" pitchFamily="49" charset="0"/>
+              </a:rPr>
+              <a:t>        </a:t>
+            </a:r>
+            <a:r>
+              <a:rPr lang="nl-NL" sz="1600" dirty="0" err="1">
+                <a:solidFill>
+                  <a:srgbClr val="7030A0"/>
+                </a:solidFill>
+                <a:latin typeface="Courier New" panose="02070309020205020404" pitchFamily="49" charset="0"/>
+                <a:cs typeface="Courier New" panose="02070309020205020404" pitchFamily="49" charset="0"/>
+              </a:rPr>
+              <a:t>and</a:t>
+            </a:r>
+            <a:r>
+              <a:rPr lang="nl-NL" sz="1600" dirty="0">
+                <a:latin typeface="Courier New" panose="02070309020205020404" pitchFamily="49" charset="0"/>
+                <a:cs typeface="Courier New" panose="02070309020205020404" pitchFamily="49" charset="0"/>
+              </a:rPr>
+              <a:t> _ &gt;= 0</a:t>
+            </a:r>
+          </a:p>
+          <a:p>
+            <a:pPr marL="0" indent="0">
+              <a:lnSpc>
+                <a:spcPct val="100000"/>
+              </a:lnSpc>
+              <a:spcBef>
+                <a:spcPts val="0"/>
+              </a:spcBef>
+              <a:buFont typeface="Arial" panose="020B0604020202020204" pitchFamily="34" charset="0"/>
+              <a:buNone/>
+            </a:pPr>
+            <a:r>
+              <a:rPr lang="nl-NL" sz="1600" dirty="0">
+                <a:latin typeface="Courier New" panose="02070309020205020404" pitchFamily="49" charset="0"/>
+                <a:cs typeface="Courier New" panose="02070309020205020404" pitchFamily="49" charset="0"/>
+              </a:rPr>
+              <a:t>    )</a:t>
+            </a:r>
+          </a:p>
+          <a:p>
+            <a:pPr marL="0" indent="0">
+              <a:lnSpc>
+                <a:spcPct val="100000"/>
+              </a:lnSpc>
+              <a:spcBef>
+                <a:spcPts val="0"/>
+              </a:spcBef>
+              <a:buFont typeface="Arial" panose="020B0604020202020204" pitchFamily="34" charset="0"/>
+              <a:buNone/>
+            </a:pPr>
+            <a:r>
+              <a:rPr lang="nl-NL" sz="1600" dirty="0">
+                <a:latin typeface="Courier New" panose="02070309020205020404" pitchFamily="49" charset="0"/>
+                <a:cs typeface="Courier New" panose="02070309020205020404" pitchFamily="49" charset="0"/>
+              </a:rPr>
+              <a:t>]</a:t>
+            </a:r>
+          </a:p>
+        </p:txBody>
+      </p:sp>
+      <p:cxnSp>
+        <p:nvCxnSpPr>
+          <p:cNvPr id="6" name="Straight Connector 5">
+            <a:extLst>
+              <a:ext uri="{FF2B5EF4-FFF2-40B4-BE49-F238E27FC236}">
+                <a16:creationId xmlns:a16="http://schemas.microsoft.com/office/drawing/2014/main" id="{4E630EC8-816A-E473-7194-8B2BB5384102}"/>
+              </a:ext>
+            </a:extLst>
+          </p:cNvPr>
+          <p:cNvCxnSpPr>
+            <a:cxnSpLocks/>
+          </p:cNvCxnSpPr>
+          <p:nvPr/>
+        </p:nvCxnSpPr>
+        <p:spPr>
+          <a:xfrm>
+            <a:off x="5960533" y="1388533"/>
+            <a:ext cx="0" cy="4788430"/>
+          </a:xfrm>
+          <a:prstGeom prst="line">
+            <a:avLst/>
+          </a:prstGeom>
+        </p:spPr>
+        <p:style>
+          <a:lnRef idx="3">
+            <a:schemeClr val="dk1"/>
+          </a:lnRef>
+          <a:fillRef idx="0">
+            <a:schemeClr val="dk1"/>
+          </a:fillRef>
+          <a:effectRef idx="2">
+            <a:schemeClr val="dk1"/>
+          </a:effectRef>
+          <a:fontRef idx="minor">
+            <a:schemeClr val="tx1"/>
+          </a:fontRef>
+        </p:style>
+      </p:cxnSp>
+    </p:spTree>
+    <p:extLst>
+      <p:ext uri="{BB962C8B-B14F-4D97-AF65-F5344CB8AC3E}">
+        <p14:creationId xmlns:p14="http://schemas.microsoft.com/office/powerpoint/2010/main" val="2370871397"/>
+      </p:ext>
+    </p:extLst>
+  </p:cSld>
+  <p:clrMapOvr>
+    <a:masterClrMapping/>
+  </p:clrMapOvr>
+</p:sld>
+</file>
+
+<file path=ppt/slides/slide50.xml><?xml version="1.0" encoding="utf-8"?>
 <p:sld xmlns:a="http://schemas.openxmlformats.org/drawingml/2006/main" xmlns:r="http://schemas.openxmlformats.org/officeDocument/2006/relationships" xmlns:p="http://schemas.openxmlformats.org/presentationml/2006/main">
   <p:cSld>
     <p:spTree>
@@ -27861,7 +29795,7 @@
 </p:sld>
 </file>
 
-<file path=ppt/slides/slide49.xml><?xml version="1.0" encoding="utf-8"?>
+<file path=ppt/slides/slide51.xml><?xml version="1.0" encoding="utf-8"?>
 <p:sld xmlns:a="http://schemas.openxmlformats.org/drawingml/2006/main" xmlns:r="http://schemas.openxmlformats.org/officeDocument/2006/relationships" xmlns:p="http://schemas.openxmlformats.org/presentationml/2006/main">
   <p:cSld>
     <p:spTree>
@@ -28031,37 +29965,6 @@
               <a:rPr lang="nl-NL" sz="2000" dirty="0"/>
               <a:t> bestand; wat zit hierin?</a:t>
             </a:r>
-          </a:p>
-          <a:p>
-            <a:pPr marL="457200" indent="-457200">
-              <a:buAutoNum type="arabicPeriod"/>
-            </a:pPr>
-            <a:endParaRPr lang="nl-NL" sz="2000" dirty="0"/>
-          </a:p>
-          <a:p>
-            <a:pPr marL="457200" indent="-457200">
-              <a:buAutoNum type="arabicPeriod"/>
-            </a:pPr>
-            <a:r>
-              <a:rPr lang="nl-NL" sz="2000" noProof="0" dirty="0"/>
-              <a:t>Kun je </a:t>
-            </a:r>
-            <a:r>
-              <a:rPr lang="nl-NL" sz="2000" noProof="0" dirty="0" err="1">
-                <a:latin typeface="Courier New" panose="02070309020205020404" pitchFamily="49" charset="0"/>
-                <a:cs typeface="Courier New" panose="02070309020205020404" pitchFamily="49" charset="0"/>
-              </a:rPr>
-              <a:t>pandas</a:t>
-            </a:r>
-            <a:r>
-              <a:rPr lang="nl-NL" sz="2000" noProof="0" dirty="0"/>
-              <a:t> installeren via git?</a:t>
-            </a:r>
-          </a:p>
-          <a:p>
-            <a:pPr marL="0" indent="0">
-              <a:buNone/>
-            </a:pPr>
             <a:endParaRPr lang="nl-NL" sz="2000" noProof="0" dirty="0"/>
           </a:p>
           <a:p>
@@ -28091,930 +29994,7 @@
 </p:sld>
 </file>
 
-<file path=ppt/slides/slide5.xml><?xml version="1.0" encoding="utf-8"?>
-<p:sld xmlns:a="http://schemas.openxmlformats.org/drawingml/2006/main" xmlns:r="http://schemas.openxmlformats.org/officeDocument/2006/relationships" xmlns:p="http://schemas.openxmlformats.org/presentationml/2006/main">
-  <p:cSld>
-    <p:spTree>
-      <p:nvGrpSpPr>
-        <p:cNvPr id="1" name="">
-          <a:extLst>
-            <a:ext uri="{FF2B5EF4-FFF2-40B4-BE49-F238E27FC236}">
-              <a16:creationId xmlns:a16="http://schemas.microsoft.com/office/drawing/2014/main" id="{F4B537BD-A938-DAF3-FEF2-1B5E3A6E1778}"/>
-            </a:ext>
-          </a:extLst>
-        </p:cNvPr>
-        <p:cNvGrpSpPr/>
-        <p:nvPr/>
-      </p:nvGrpSpPr>
-      <p:grpSpPr>
-        <a:xfrm>
-          <a:off x="0" y="0"/>
-          <a:ext cx="0" cy="0"/>
-          <a:chOff x="0" y="0"/>
-          <a:chExt cx="0" cy="0"/>
-        </a:xfrm>
-      </p:grpSpPr>
-      <p:sp>
-        <p:nvSpPr>
-          <p:cNvPr id="2" name="Title 1">
-            <a:extLst>
-              <a:ext uri="{FF2B5EF4-FFF2-40B4-BE49-F238E27FC236}">
-                <a16:creationId xmlns:a16="http://schemas.microsoft.com/office/drawing/2014/main" id="{9934E2EF-C0A7-A70B-04F1-1E24BD18D62D}"/>
-              </a:ext>
-            </a:extLst>
-          </p:cNvPr>
-          <p:cNvSpPr>
-            <a:spLocks noGrp="1"/>
-          </p:cNvSpPr>
-          <p:nvPr>
-            <p:ph type="title"/>
-          </p:nvPr>
-        </p:nvSpPr>
-        <p:spPr>
-          <a:xfrm>
-            <a:off x="838200" y="365126"/>
-            <a:ext cx="10515600" cy="718608"/>
-          </a:xfrm>
-        </p:spPr>
-        <p:txBody>
-          <a:bodyPr>
-            <a:normAutofit/>
-          </a:bodyPr>
-          <a:lstStyle/>
-          <a:p>
-            <a:r>
-              <a:rPr lang="nl-NL" sz="3600" noProof="0" dirty="0"/>
-              <a:t>Zwakke punten</a:t>
-            </a:r>
-          </a:p>
-        </p:txBody>
-      </p:sp>
-      <p:sp>
-        <p:nvSpPr>
-          <p:cNvPr id="3" name="Content Placeholder 2">
-            <a:extLst>
-              <a:ext uri="{FF2B5EF4-FFF2-40B4-BE49-F238E27FC236}">
-                <a16:creationId xmlns:a16="http://schemas.microsoft.com/office/drawing/2014/main" id="{AE69D57C-00B8-1248-107F-AA6E5F085DF9}"/>
-              </a:ext>
-            </a:extLst>
-          </p:cNvPr>
-          <p:cNvSpPr>
-            <a:spLocks noGrp="1"/>
-          </p:cNvSpPr>
-          <p:nvPr>
-            <p:ph idx="1"/>
-          </p:nvPr>
-        </p:nvSpPr>
-        <p:spPr>
-          <a:xfrm>
-            <a:off x="838200" y="1456267"/>
-            <a:ext cx="4749800" cy="4720696"/>
-          </a:xfrm>
-        </p:spPr>
-        <p:txBody>
-          <a:bodyPr>
-            <a:normAutofit/>
-          </a:bodyPr>
-          <a:lstStyle/>
-          <a:p>
-            <a:pPr>
-              <a:buFontTx/>
-              <a:buChar char="-"/>
-            </a:pPr>
-            <a:r>
-              <a:rPr lang="nl-NL" sz="1800" dirty="0"/>
-              <a:t>Makkelijk om “slechte” code te schrijven.</a:t>
-            </a:r>
-          </a:p>
-          <a:p>
-            <a:pPr>
-              <a:buFontTx/>
-              <a:buChar char="-"/>
-            </a:pPr>
-            <a:endParaRPr lang="nl-NL" sz="1800" dirty="0"/>
-          </a:p>
-          <a:p>
-            <a:pPr>
-              <a:buFontTx/>
-              <a:buChar char="-"/>
-            </a:pPr>
-            <a:r>
-              <a:rPr lang="nl-NL" sz="1800" dirty="0"/>
-              <a:t>Relatief traag  (vgl. C, C++, Scala, Rust).</a:t>
-            </a:r>
-          </a:p>
-          <a:p>
-            <a:pPr>
-              <a:buFontTx/>
-              <a:buChar char="-"/>
-            </a:pPr>
-            <a:endParaRPr lang="nl-NL" sz="1800" dirty="0"/>
-          </a:p>
-          <a:p>
-            <a:pPr>
-              <a:buFontTx/>
-              <a:buChar char="-"/>
-            </a:pPr>
-            <a:r>
-              <a:rPr lang="nl-NL" sz="1800" dirty="0"/>
-              <a:t>Distributie code niet eenduidig.</a:t>
-            </a:r>
-          </a:p>
-        </p:txBody>
-      </p:sp>
-      <p:sp>
-        <p:nvSpPr>
-          <p:cNvPr id="4" name="Content Placeholder 2">
-            <a:extLst>
-              <a:ext uri="{FF2B5EF4-FFF2-40B4-BE49-F238E27FC236}">
-                <a16:creationId xmlns:a16="http://schemas.microsoft.com/office/drawing/2014/main" id="{2210A4AD-7C19-5184-ECB4-77EDD34F6402}"/>
-              </a:ext>
-            </a:extLst>
-          </p:cNvPr>
-          <p:cNvSpPr txBox="1">
-            <a:spLocks/>
-          </p:cNvSpPr>
-          <p:nvPr/>
-        </p:nvSpPr>
-        <p:spPr>
-          <a:xfrm>
-            <a:off x="6409267" y="1456267"/>
-            <a:ext cx="4749800" cy="4720696"/>
-          </a:xfrm>
-          <a:prstGeom prst="rect">
-            <a:avLst/>
-          </a:prstGeom>
-        </p:spPr>
-        <p:txBody>
-          <a:bodyPr vert="horz" lIns="91440" tIns="45720" rIns="91440" bIns="45720" rtlCol="0">
-            <a:normAutofit/>
-          </a:bodyPr>
-          <a:lstStyle>
-            <a:lvl1pPr marL="228600" indent="-228600" algn="l" defTabSz="914400" rtl="0" eaLnBrk="1" latinLnBrk="0" hangingPunct="1">
-              <a:lnSpc>
-                <a:spcPct val="90000"/>
-              </a:lnSpc>
-              <a:spcBef>
-                <a:spcPts val="1000"/>
-              </a:spcBef>
-              <a:buFont typeface="Arial" panose="020B0604020202020204" pitchFamily="34" charset="0"/>
-              <a:buChar char="•"/>
-              <a:defRPr sz="2800" kern="1200">
-                <a:solidFill>
-                  <a:schemeClr val="tx1"/>
-                </a:solidFill>
-                <a:latin typeface="+mn-lt"/>
-                <a:ea typeface="+mn-ea"/>
-                <a:cs typeface="+mn-cs"/>
-              </a:defRPr>
-            </a:lvl1pPr>
-            <a:lvl2pPr marL="685800" indent="-228600" algn="l" defTabSz="914400" rtl="0" eaLnBrk="1" latinLnBrk="0" hangingPunct="1">
-              <a:lnSpc>
-                <a:spcPct val="90000"/>
-              </a:lnSpc>
-              <a:spcBef>
-                <a:spcPts val="500"/>
-              </a:spcBef>
-              <a:buFont typeface="Arial" panose="020B0604020202020204" pitchFamily="34" charset="0"/>
-              <a:buChar char="•"/>
-              <a:defRPr sz="2400" kern="1200">
-                <a:solidFill>
-                  <a:schemeClr val="tx1"/>
-                </a:solidFill>
-                <a:latin typeface="+mn-lt"/>
-                <a:ea typeface="+mn-ea"/>
-                <a:cs typeface="+mn-cs"/>
-              </a:defRPr>
-            </a:lvl2pPr>
-            <a:lvl3pPr marL="1143000" indent="-228600" algn="l" defTabSz="914400" rtl="0" eaLnBrk="1" latinLnBrk="0" hangingPunct="1">
-              <a:lnSpc>
-                <a:spcPct val="90000"/>
-              </a:lnSpc>
-              <a:spcBef>
-                <a:spcPts val="500"/>
-              </a:spcBef>
-              <a:buFont typeface="Arial" panose="020B0604020202020204" pitchFamily="34" charset="0"/>
-              <a:buChar char="•"/>
-              <a:defRPr sz="2000" kern="1200">
-                <a:solidFill>
-                  <a:schemeClr val="tx1"/>
-                </a:solidFill>
-                <a:latin typeface="+mn-lt"/>
-                <a:ea typeface="+mn-ea"/>
-                <a:cs typeface="+mn-cs"/>
-              </a:defRPr>
-            </a:lvl3pPr>
-            <a:lvl4pPr marL="1600200" indent="-228600" algn="l" defTabSz="914400" rtl="0" eaLnBrk="1" latinLnBrk="0" hangingPunct="1">
-              <a:lnSpc>
-                <a:spcPct val="90000"/>
-              </a:lnSpc>
-              <a:spcBef>
-                <a:spcPts val="500"/>
-              </a:spcBef>
-              <a:buFont typeface="Arial" panose="020B0604020202020204" pitchFamily="34" charset="0"/>
-              <a:buChar char="•"/>
-              <a:defRPr sz="1800" kern="1200">
-                <a:solidFill>
-                  <a:schemeClr val="tx1"/>
-                </a:solidFill>
-                <a:latin typeface="+mn-lt"/>
-                <a:ea typeface="+mn-ea"/>
-                <a:cs typeface="+mn-cs"/>
-              </a:defRPr>
-            </a:lvl4pPr>
-            <a:lvl5pPr marL="2057400" indent="-228600" algn="l" defTabSz="914400" rtl="0" eaLnBrk="1" latinLnBrk="0" hangingPunct="1">
-              <a:lnSpc>
-                <a:spcPct val="90000"/>
-              </a:lnSpc>
-              <a:spcBef>
-                <a:spcPts val="500"/>
-              </a:spcBef>
-              <a:buFont typeface="Arial" panose="020B0604020202020204" pitchFamily="34" charset="0"/>
-              <a:buChar char="•"/>
-              <a:defRPr sz="1800" kern="1200">
-                <a:solidFill>
-                  <a:schemeClr val="tx1"/>
-                </a:solidFill>
-                <a:latin typeface="+mn-lt"/>
-                <a:ea typeface="+mn-ea"/>
-                <a:cs typeface="+mn-cs"/>
-              </a:defRPr>
-            </a:lvl5pPr>
-            <a:lvl6pPr marL="2514600" indent="-228600" algn="l" defTabSz="914400" rtl="0" eaLnBrk="1" latinLnBrk="0" hangingPunct="1">
-              <a:lnSpc>
-                <a:spcPct val="90000"/>
-              </a:lnSpc>
-              <a:spcBef>
-                <a:spcPts val="500"/>
-              </a:spcBef>
-              <a:buFont typeface="Arial" panose="020B0604020202020204" pitchFamily="34" charset="0"/>
-              <a:buChar char="•"/>
-              <a:defRPr sz="1800" kern="1200">
-                <a:solidFill>
-                  <a:schemeClr val="tx1"/>
-                </a:solidFill>
-                <a:latin typeface="+mn-lt"/>
-                <a:ea typeface="+mn-ea"/>
-                <a:cs typeface="+mn-cs"/>
-              </a:defRPr>
-            </a:lvl6pPr>
-            <a:lvl7pPr marL="2971800" indent="-228600" algn="l" defTabSz="914400" rtl="0" eaLnBrk="1" latinLnBrk="0" hangingPunct="1">
-              <a:lnSpc>
-                <a:spcPct val="90000"/>
-              </a:lnSpc>
-              <a:spcBef>
-                <a:spcPts val="500"/>
-              </a:spcBef>
-              <a:buFont typeface="Arial" panose="020B0604020202020204" pitchFamily="34" charset="0"/>
-              <a:buChar char="•"/>
-              <a:defRPr sz="1800" kern="1200">
-                <a:solidFill>
-                  <a:schemeClr val="tx1"/>
-                </a:solidFill>
-                <a:latin typeface="+mn-lt"/>
-                <a:ea typeface="+mn-ea"/>
-                <a:cs typeface="+mn-cs"/>
-              </a:defRPr>
-            </a:lvl7pPr>
-            <a:lvl8pPr marL="3429000" indent="-228600" algn="l" defTabSz="914400" rtl="0" eaLnBrk="1" latinLnBrk="0" hangingPunct="1">
-              <a:lnSpc>
-                <a:spcPct val="90000"/>
-              </a:lnSpc>
-              <a:spcBef>
-                <a:spcPts val="500"/>
-              </a:spcBef>
-              <a:buFont typeface="Arial" panose="020B0604020202020204" pitchFamily="34" charset="0"/>
-              <a:buChar char="•"/>
-              <a:defRPr sz="1800" kern="1200">
-                <a:solidFill>
-                  <a:schemeClr val="tx1"/>
-                </a:solidFill>
-                <a:latin typeface="+mn-lt"/>
-                <a:ea typeface="+mn-ea"/>
-                <a:cs typeface="+mn-cs"/>
-              </a:defRPr>
-            </a:lvl8pPr>
-            <a:lvl9pPr marL="3886200" indent="-228600" algn="l" defTabSz="914400" rtl="0" eaLnBrk="1" latinLnBrk="0" hangingPunct="1">
-              <a:lnSpc>
-                <a:spcPct val="90000"/>
-              </a:lnSpc>
-              <a:spcBef>
-                <a:spcPts val="500"/>
-              </a:spcBef>
-              <a:buFont typeface="Arial" panose="020B0604020202020204" pitchFamily="34" charset="0"/>
-              <a:buChar char="•"/>
-              <a:defRPr sz="1800" kern="1200">
-                <a:solidFill>
-                  <a:schemeClr val="tx1"/>
-                </a:solidFill>
-                <a:latin typeface="+mn-lt"/>
-                <a:ea typeface="+mn-ea"/>
-                <a:cs typeface="+mn-cs"/>
-              </a:defRPr>
-            </a:lvl9pPr>
-          </a:lstStyle>
-          <a:p>
-            <a:pPr marL="0" indent="0">
-              <a:buNone/>
-            </a:pPr>
-            <a:endParaRPr lang="nl-NL" sz="2000" dirty="0"/>
-          </a:p>
-        </p:txBody>
-      </p:sp>
-      <p:sp>
-        <p:nvSpPr>
-          <p:cNvPr id="5" name="Content Placeholder 2">
-            <a:extLst>
-              <a:ext uri="{FF2B5EF4-FFF2-40B4-BE49-F238E27FC236}">
-                <a16:creationId xmlns:a16="http://schemas.microsoft.com/office/drawing/2014/main" id="{FE4D819A-A65A-B849-482E-28A9AA671928}"/>
-              </a:ext>
-            </a:extLst>
-          </p:cNvPr>
-          <p:cNvSpPr txBox="1">
-            <a:spLocks/>
-          </p:cNvSpPr>
-          <p:nvPr/>
-        </p:nvSpPr>
-        <p:spPr>
-          <a:xfrm>
-            <a:off x="6604000" y="1456267"/>
-            <a:ext cx="4749800" cy="4720696"/>
-          </a:xfrm>
-          <a:prstGeom prst="rect">
-            <a:avLst/>
-          </a:prstGeom>
-        </p:spPr>
-        <p:txBody>
-          <a:bodyPr vert="horz" lIns="91440" tIns="45720" rIns="91440" bIns="45720" rtlCol="0">
-            <a:normAutofit/>
-          </a:bodyPr>
-          <a:lstStyle>
-            <a:lvl1pPr marL="228600" indent="-228600" algn="l" defTabSz="914400" rtl="0" eaLnBrk="1" latinLnBrk="0" hangingPunct="1">
-              <a:lnSpc>
-                <a:spcPct val="90000"/>
-              </a:lnSpc>
-              <a:spcBef>
-                <a:spcPts val="1000"/>
-              </a:spcBef>
-              <a:buFont typeface="Arial" panose="020B0604020202020204" pitchFamily="34" charset="0"/>
-              <a:buChar char="•"/>
-              <a:defRPr sz="2800" kern="1200">
-                <a:solidFill>
-                  <a:schemeClr val="tx1"/>
-                </a:solidFill>
-                <a:latin typeface="+mn-lt"/>
-                <a:ea typeface="+mn-ea"/>
-                <a:cs typeface="+mn-cs"/>
-              </a:defRPr>
-            </a:lvl1pPr>
-            <a:lvl2pPr marL="685800" indent="-228600" algn="l" defTabSz="914400" rtl="0" eaLnBrk="1" latinLnBrk="0" hangingPunct="1">
-              <a:lnSpc>
-                <a:spcPct val="90000"/>
-              </a:lnSpc>
-              <a:spcBef>
-                <a:spcPts val="500"/>
-              </a:spcBef>
-              <a:buFont typeface="Arial" panose="020B0604020202020204" pitchFamily="34" charset="0"/>
-              <a:buChar char="•"/>
-              <a:defRPr sz="2400" kern="1200">
-                <a:solidFill>
-                  <a:schemeClr val="tx1"/>
-                </a:solidFill>
-                <a:latin typeface="+mn-lt"/>
-                <a:ea typeface="+mn-ea"/>
-                <a:cs typeface="+mn-cs"/>
-              </a:defRPr>
-            </a:lvl2pPr>
-            <a:lvl3pPr marL="1143000" indent="-228600" algn="l" defTabSz="914400" rtl="0" eaLnBrk="1" latinLnBrk="0" hangingPunct="1">
-              <a:lnSpc>
-                <a:spcPct val="90000"/>
-              </a:lnSpc>
-              <a:spcBef>
-                <a:spcPts val="500"/>
-              </a:spcBef>
-              <a:buFont typeface="Arial" panose="020B0604020202020204" pitchFamily="34" charset="0"/>
-              <a:buChar char="•"/>
-              <a:defRPr sz="2000" kern="1200">
-                <a:solidFill>
-                  <a:schemeClr val="tx1"/>
-                </a:solidFill>
-                <a:latin typeface="+mn-lt"/>
-                <a:ea typeface="+mn-ea"/>
-                <a:cs typeface="+mn-cs"/>
-              </a:defRPr>
-            </a:lvl3pPr>
-            <a:lvl4pPr marL="1600200" indent="-228600" algn="l" defTabSz="914400" rtl="0" eaLnBrk="1" latinLnBrk="0" hangingPunct="1">
-              <a:lnSpc>
-                <a:spcPct val="90000"/>
-              </a:lnSpc>
-              <a:spcBef>
-                <a:spcPts val="500"/>
-              </a:spcBef>
-              <a:buFont typeface="Arial" panose="020B0604020202020204" pitchFamily="34" charset="0"/>
-              <a:buChar char="•"/>
-              <a:defRPr sz="1800" kern="1200">
-                <a:solidFill>
-                  <a:schemeClr val="tx1"/>
-                </a:solidFill>
-                <a:latin typeface="+mn-lt"/>
-                <a:ea typeface="+mn-ea"/>
-                <a:cs typeface="+mn-cs"/>
-              </a:defRPr>
-            </a:lvl4pPr>
-            <a:lvl5pPr marL="2057400" indent="-228600" algn="l" defTabSz="914400" rtl="0" eaLnBrk="1" latinLnBrk="0" hangingPunct="1">
-              <a:lnSpc>
-                <a:spcPct val="90000"/>
-              </a:lnSpc>
-              <a:spcBef>
-                <a:spcPts val="500"/>
-              </a:spcBef>
-              <a:buFont typeface="Arial" panose="020B0604020202020204" pitchFamily="34" charset="0"/>
-              <a:buChar char="•"/>
-              <a:defRPr sz="1800" kern="1200">
-                <a:solidFill>
-                  <a:schemeClr val="tx1"/>
-                </a:solidFill>
-                <a:latin typeface="+mn-lt"/>
-                <a:ea typeface="+mn-ea"/>
-                <a:cs typeface="+mn-cs"/>
-              </a:defRPr>
-            </a:lvl5pPr>
-            <a:lvl6pPr marL="2514600" indent="-228600" algn="l" defTabSz="914400" rtl="0" eaLnBrk="1" latinLnBrk="0" hangingPunct="1">
-              <a:lnSpc>
-                <a:spcPct val="90000"/>
-              </a:lnSpc>
-              <a:spcBef>
-                <a:spcPts val="500"/>
-              </a:spcBef>
-              <a:buFont typeface="Arial" panose="020B0604020202020204" pitchFamily="34" charset="0"/>
-              <a:buChar char="•"/>
-              <a:defRPr sz="1800" kern="1200">
-                <a:solidFill>
-                  <a:schemeClr val="tx1"/>
-                </a:solidFill>
-                <a:latin typeface="+mn-lt"/>
-                <a:ea typeface="+mn-ea"/>
-                <a:cs typeface="+mn-cs"/>
-              </a:defRPr>
-            </a:lvl6pPr>
-            <a:lvl7pPr marL="2971800" indent="-228600" algn="l" defTabSz="914400" rtl="0" eaLnBrk="1" latinLnBrk="0" hangingPunct="1">
-              <a:lnSpc>
-                <a:spcPct val="90000"/>
-              </a:lnSpc>
-              <a:spcBef>
-                <a:spcPts val="500"/>
-              </a:spcBef>
-              <a:buFont typeface="Arial" panose="020B0604020202020204" pitchFamily="34" charset="0"/>
-              <a:buChar char="•"/>
-              <a:defRPr sz="1800" kern="1200">
-                <a:solidFill>
-                  <a:schemeClr val="tx1"/>
-                </a:solidFill>
-                <a:latin typeface="+mn-lt"/>
-                <a:ea typeface="+mn-ea"/>
-                <a:cs typeface="+mn-cs"/>
-              </a:defRPr>
-            </a:lvl7pPr>
-            <a:lvl8pPr marL="3429000" indent="-228600" algn="l" defTabSz="914400" rtl="0" eaLnBrk="1" latinLnBrk="0" hangingPunct="1">
-              <a:lnSpc>
-                <a:spcPct val="90000"/>
-              </a:lnSpc>
-              <a:spcBef>
-                <a:spcPts val="500"/>
-              </a:spcBef>
-              <a:buFont typeface="Arial" panose="020B0604020202020204" pitchFamily="34" charset="0"/>
-              <a:buChar char="•"/>
-              <a:defRPr sz="1800" kern="1200">
-                <a:solidFill>
-                  <a:schemeClr val="tx1"/>
-                </a:solidFill>
-                <a:latin typeface="+mn-lt"/>
-                <a:ea typeface="+mn-ea"/>
-                <a:cs typeface="+mn-cs"/>
-              </a:defRPr>
-            </a:lvl8pPr>
-            <a:lvl9pPr marL="3886200" indent="-228600" algn="l" defTabSz="914400" rtl="0" eaLnBrk="1" latinLnBrk="0" hangingPunct="1">
-              <a:lnSpc>
-                <a:spcPct val="90000"/>
-              </a:lnSpc>
-              <a:spcBef>
-                <a:spcPts val="500"/>
-              </a:spcBef>
-              <a:buFont typeface="Arial" panose="020B0604020202020204" pitchFamily="34" charset="0"/>
-              <a:buChar char="•"/>
-              <a:defRPr sz="1800" kern="1200">
-                <a:solidFill>
-                  <a:schemeClr val="tx1"/>
-                </a:solidFill>
-                <a:latin typeface="+mn-lt"/>
-                <a:ea typeface="+mn-ea"/>
-                <a:cs typeface="+mn-cs"/>
-              </a:defRPr>
-            </a:lvl9pPr>
-          </a:lstStyle>
-          <a:p>
-            <a:pPr marL="0" indent="0">
-              <a:lnSpc>
-                <a:spcPct val="100000"/>
-              </a:lnSpc>
-              <a:spcBef>
-                <a:spcPts val="0"/>
-              </a:spcBef>
-              <a:buFont typeface="Arial" panose="020B0604020202020204" pitchFamily="34" charset="0"/>
-              <a:buNone/>
-            </a:pPr>
-            <a:r>
-              <a:rPr lang="nl-NL" sz="1600" dirty="0" err="1">
-                <a:latin typeface="Courier New" panose="02070309020205020404" pitchFamily="49" charset="0"/>
-                <a:cs typeface="Courier New" panose="02070309020205020404" pitchFamily="49" charset="0"/>
-              </a:rPr>
-              <a:t>qs</a:t>
-            </a:r>
-            <a:r>
-              <a:rPr lang="nl-NL" sz="1600" dirty="0">
-                <a:latin typeface="Courier New" panose="02070309020205020404" pitchFamily="49" charset="0"/>
-                <a:cs typeface="Courier New" panose="02070309020205020404" pitchFamily="49" charset="0"/>
-              </a:rPr>
-              <a:t> = [</a:t>
-            </a:r>
-          </a:p>
-          <a:p>
-            <a:pPr marL="0" indent="0">
-              <a:lnSpc>
-                <a:spcPct val="100000"/>
-              </a:lnSpc>
-              <a:spcBef>
-                <a:spcPts val="0"/>
-              </a:spcBef>
-              <a:buFont typeface="Arial" panose="020B0604020202020204" pitchFamily="34" charset="0"/>
-              <a:buNone/>
-            </a:pPr>
-            <a:r>
-              <a:rPr lang="nl-NL" sz="1600" dirty="0">
-                <a:latin typeface="Courier New" panose="02070309020205020404" pitchFamily="49" charset="0"/>
-                <a:cs typeface="Courier New" panose="02070309020205020404" pitchFamily="49" charset="0"/>
-              </a:rPr>
-              <a:t>    _ ** 2 </a:t>
-            </a:r>
-            <a:r>
-              <a:rPr lang="nl-NL" sz="1600" dirty="0" err="1">
-                <a:solidFill>
-                  <a:srgbClr val="7030A0"/>
-                </a:solidFill>
-                <a:latin typeface="Courier New" panose="02070309020205020404" pitchFamily="49" charset="0"/>
-                <a:cs typeface="Courier New" panose="02070309020205020404" pitchFamily="49" charset="0"/>
-              </a:rPr>
-              <a:t>for</a:t>
-            </a:r>
-            <a:r>
-              <a:rPr lang="nl-NL" sz="1600" dirty="0">
-                <a:latin typeface="Courier New" panose="02070309020205020404" pitchFamily="49" charset="0"/>
-                <a:cs typeface="Courier New" panose="02070309020205020404" pitchFamily="49" charset="0"/>
-              </a:rPr>
-              <a:t> _ </a:t>
-            </a:r>
-            <a:r>
-              <a:rPr lang="nl-NL" sz="1600" dirty="0">
-                <a:solidFill>
-                  <a:srgbClr val="7030A0"/>
-                </a:solidFill>
-                <a:latin typeface="Courier New" panose="02070309020205020404" pitchFamily="49" charset="0"/>
-                <a:cs typeface="Courier New" panose="02070309020205020404" pitchFamily="49" charset="0"/>
-              </a:rPr>
-              <a:t>in</a:t>
-            </a:r>
-            <a:r>
-              <a:rPr lang="nl-NL" sz="1600" dirty="0">
-                <a:latin typeface="Courier New" panose="02070309020205020404" pitchFamily="49" charset="0"/>
-                <a:cs typeface="Courier New" panose="02070309020205020404" pitchFamily="49" charset="0"/>
-              </a:rPr>
-              <a:t> </a:t>
-            </a:r>
-            <a:r>
-              <a:rPr lang="nl-NL" sz="1600" dirty="0" err="1">
-                <a:latin typeface="Courier New" panose="02070309020205020404" pitchFamily="49" charset="0"/>
-                <a:cs typeface="Courier New" panose="02070309020205020404" pitchFamily="49" charset="0"/>
-              </a:rPr>
-              <a:t>my_list</a:t>
-            </a:r>
-            <a:endParaRPr lang="nl-NL" sz="1600" dirty="0">
-              <a:latin typeface="Courier New" panose="02070309020205020404" pitchFamily="49" charset="0"/>
-              <a:cs typeface="Courier New" panose="02070309020205020404" pitchFamily="49" charset="0"/>
-            </a:endParaRPr>
-          </a:p>
-          <a:p>
-            <a:pPr marL="0" indent="0">
-              <a:lnSpc>
-                <a:spcPct val="100000"/>
-              </a:lnSpc>
-              <a:spcBef>
-                <a:spcPts val="0"/>
-              </a:spcBef>
-              <a:buFont typeface="Arial" panose="020B0604020202020204" pitchFamily="34" charset="0"/>
-              <a:buNone/>
-            </a:pPr>
-            <a:r>
-              <a:rPr lang="nl-NL" sz="1600" dirty="0">
-                <a:latin typeface="Courier New" panose="02070309020205020404" pitchFamily="49" charset="0"/>
-                <a:cs typeface="Courier New" panose="02070309020205020404" pitchFamily="49" charset="0"/>
-              </a:rPr>
-              <a:t>    </a:t>
-            </a:r>
-            <a:r>
-              <a:rPr lang="nl-NL" sz="1600" dirty="0" err="1">
-                <a:solidFill>
-                  <a:srgbClr val="7030A0"/>
-                </a:solidFill>
-                <a:latin typeface="Courier New" panose="02070309020205020404" pitchFamily="49" charset="0"/>
-                <a:cs typeface="Courier New" panose="02070309020205020404" pitchFamily="49" charset="0"/>
-              </a:rPr>
-              <a:t>if</a:t>
-            </a:r>
-            <a:r>
-              <a:rPr lang="nl-NL" sz="1600" dirty="0">
-                <a:latin typeface="Courier New" panose="02070309020205020404" pitchFamily="49" charset="0"/>
-                <a:cs typeface="Courier New" panose="02070309020205020404" pitchFamily="49" charset="0"/>
-              </a:rPr>
-              <a:t> (</a:t>
-            </a:r>
-          </a:p>
-          <a:p>
-            <a:pPr marL="0" indent="0">
-              <a:lnSpc>
-                <a:spcPct val="100000"/>
-              </a:lnSpc>
-              <a:spcBef>
-                <a:spcPts val="0"/>
-              </a:spcBef>
-              <a:buFont typeface="Arial" panose="020B0604020202020204" pitchFamily="34" charset="0"/>
-              <a:buNone/>
-            </a:pPr>
-            <a:r>
-              <a:rPr lang="nl-NL" sz="1600" dirty="0">
-                <a:latin typeface="Courier New" panose="02070309020205020404" pitchFamily="49" charset="0"/>
-                <a:cs typeface="Courier New" panose="02070309020205020404" pitchFamily="49" charset="0"/>
-              </a:rPr>
-              <a:t>        type(_) </a:t>
-            </a:r>
-            <a:r>
-              <a:rPr lang="nl-NL" sz="1600" dirty="0">
-                <a:solidFill>
-                  <a:srgbClr val="7030A0"/>
-                </a:solidFill>
-                <a:latin typeface="Courier New" panose="02070309020205020404" pitchFamily="49" charset="0"/>
-                <a:cs typeface="Courier New" panose="02070309020205020404" pitchFamily="49" charset="0"/>
-              </a:rPr>
-              <a:t>in</a:t>
-            </a:r>
-            <a:r>
-              <a:rPr lang="nl-NL" sz="1600" dirty="0">
-                <a:latin typeface="Courier New" panose="02070309020205020404" pitchFamily="49" charset="0"/>
-                <a:cs typeface="Courier New" panose="02070309020205020404" pitchFamily="49" charset="0"/>
-              </a:rPr>
-              <a:t> (</a:t>
-            </a:r>
-            <a:r>
-              <a:rPr lang="nl-NL" sz="1600" dirty="0" err="1">
-                <a:solidFill>
-                  <a:schemeClr val="accent5">
-                    <a:lumMod val="75000"/>
-                  </a:schemeClr>
-                </a:solidFill>
-                <a:latin typeface="Courier New" panose="02070309020205020404" pitchFamily="49" charset="0"/>
-                <a:cs typeface="Courier New" panose="02070309020205020404" pitchFamily="49" charset="0"/>
-              </a:rPr>
-              <a:t>float</a:t>
-            </a:r>
-            <a:r>
-              <a:rPr lang="nl-NL" sz="1600" dirty="0">
-                <a:latin typeface="Courier New" panose="02070309020205020404" pitchFamily="49" charset="0"/>
-                <a:cs typeface="Courier New" panose="02070309020205020404" pitchFamily="49" charset="0"/>
-              </a:rPr>
-              <a:t>, </a:t>
-            </a:r>
-            <a:r>
-              <a:rPr lang="nl-NL" sz="1600" dirty="0">
-                <a:solidFill>
-                  <a:schemeClr val="accent5">
-                    <a:lumMod val="75000"/>
-                  </a:schemeClr>
-                </a:solidFill>
-                <a:latin typeface="Courier New" panose="02070309020205020404" pitchFamily="49" charset="0"/>
-                <a:cs typeface="Courier New" panose="02070309020205020404" pitchFamily="49" charset="0"/>
-              </a:rPr>
-              <a:t>int</a:t>
-            </a:r>
-            <a:r>
-              <a:rPr lang="nl-NL" sz="1600" dirty="0">
-                <a:latin typeface="Courier New" panose="02070309020205020404" pitchFamily="49" charset="0"/>
-                <a:cs typeface="Courier New" panose="02070309020205020404" pitchFamily="49" charset="0"/>
-              </a:rPr>
-              <a:t>)</a:t>
-            </a:r>
-          </a:p>
-          <a:p>
-            <a:pPr marL="0" indent="0">
-              <a:lnSpc>
-                <a:spcPct val="100000"/>
-              </a:lnSpc>
-              <a:spcBef>
-                <a:spcPts val="0"/>
-              </a:spcBef>
-              <a:buFont typeface="Arial" panose="020B0604020202020204" pitchFamily="34" charset="0"/>
-              <a:buNone/>
-            </a:pPr>
-            <a:r>
-              <a:rPr lang="nl-NL" sz="1600" dirty="0">
-                <a:latin typeface="Courier New" panose="02070309020205020404" pitchFamily="49" charset="0"/>
-                <a:cs typeface="Courier New" panose="02070309020205020404" pitchFamily="49" charset="0"/>
-              </a:rPr>
-              <a:t>        </a:t>
-            </a:r>
-            <a:r>
-              <a:rPr lang="nl-NL" sz="1600" dirty="0" err="1">
-                <a:solidFill>
-                  <a:srgbClr val="7030A0"/>
-                </a:solidFill>
-                <a:latin typeface="Courier New" panose="02070309020205020404" pitchFamily="49" charset="0"/>
-                <a:cs typeface="Courier New" panose="02070309020205020404" pitchFamily="49" charset="0"/>
-              </a:rPr>
-              <a:t>and</a:t>
-            </a:r>
-            <a:r>
-              <a:rPr lang="nl-NL" sz="1600" dirty="0">
-                <a:latin typeface="Courier New" panose="02070309020205020404" pitchFamily="49" charset="0"/>
-                <a:cs typeface="Courier New" panose="02070309020205020404" pitchFamily="49" charset="0"/>
-              </a:rPr>
-              <a:t> _ </a:t>
-            </a:r>
-            <a:r>
-              <a:rPr lang="nl-NL" sz="1600" dirty="0">
-                <a:solidFill>
-                  <a:srgbClr val="7030A0"/>
-                </a:solidFill>
-                <a:latin typeface="Courier New" panose="02070309020205020404" pitchFamily="49" charset="0"/>
-                <a:cs typeface="Courier New" panose="02070309020205020404" pitchFamily="49" charset="0"/>
-              </a:rPr>
-              <a:t>is </a:t>
-            </a:r>
-            <a:r>
-              <a:rPr lang="nl-NL" sz="1600" dirty="0" err="1">
-                <a:solidFill>
-                  <a:srgbClr val="7030A0"/>
-                </a:solidFill>
-                <a:latin typeface="Courier New" panose="02070309020205020404" pitchFamily="49" charset="0"/>
-                <a:cs typeface="Courier New" panose="02070309020205020404" pitchFamily="49" charset="0"/>
-              </a:rPr>
-              <a:t>not</a:t>
-            </a:r>
-            <a:r>
-              <a:rPr lang="nl-NL" sz="1600" dirty="0">
-                <a:latin typeface="Courier New" panose="02070309020205020404" pitchFamily="49" charset="0"/>
-                <a:cs typeface="Courier New" panose="02070309020205020404" pitchFamily="49" charset="0"/>
-              </a:rPr>
-              <a:t> </a:t>
-            </a:r>
-            <a:r>
-              <a:rPr lang="nl-NL" sz="1600" dirty="0">
-                <a:solidFill>
-                  <a:schemeClr val="accent5">
-                    <a:lumMod val="75000"/>
-                  </a:schemeClr>
-                </a:solidFill>
-                <a:latin typeface="Courier New" panose="02070309020205020404" pitchFamily="49" charset="0"/>
-                <a:cs typeface="Courier New" panose="02070309020205020404" pitchFamily="49" charset="0"/>
-              </a:rPr>
-              <a:t>None</a:t>
-            </a:r>
-          </a:p>
-          <a:p>
-            <a:pPr marL="0" indent="0">
-              <a:lnSpc>
-                <a:spcPct val="100000"/>
-              </a:lnSpc>
-              <a:spcBef>
-                <a:spcPts val="0"/>
-              </a:spcBef>
-              <a:buFont typeface="Arial" panose="020B0604020202020204" pitchFamily="34" charset="0"/>
-              <a:buNone/>
-            </a:pPr>
-            <a:r>
-              <a:rPr lang="nl-NL" sz="1600" dirty="0">
-                <a:latin typeface="Courier New" panose="02070309020205020404" pitchFamily="49" charset="0"/>
-                <a:cs typeface="Courier New" panose="02070309020205020404" pitchFamily="49" charset="0"/>
-              </a:rPr>
-              <a:t>        </a:t>
-            </a:r>
-            <a:r>
-              <a:rPr lang="nl-NL" sz="1600" dirty="0" err="1">
-                <a:solidFill>
-                  <a:srgbClr val="7030A0"/>
-                </a:solidFill>
-                <a:latin typeface="Courier New" panose="02070309020205020404" pitchFamily="49" charset="0"/>
-                <a:cs typeface="Courier New" panose="02070309020205020404" pitchFamily="49" charset="0"/>
-              </a:rPr>
-              <a:t>and</a:t>
-            </a:r>
-            <a:r>
-              <a:rPr lang="nl-NL" sz="1600" dirty="0">
-                <a:latin typeface="Courier New" panose="02070309020205020404" pitchFamily="49" charset="0"/>
-                <a:cs typeface="Courier New" panose="02070309020205020404" pitchFamily="49" charset="0"/>
-              </a:rPr>
-              <a:t> _ != 0</a:t>
-            </a:r>
-          </a:p>
-          <a:p>
-            <a:pPr marL="0" indent="0">
-              <a:lnSpc>
-                <a:spcPct val="100000"/>
-              </a:lnSpc>
-              <a:spcBef>
-                <a:spcPts val="0"/>
-              </a:spcBef>
-              <a:buFont typeface="Arial" panose="020B0604020202020204" pitchFamily="34" charset="0"/>
-              <a:buNone/>
-            </a:pPr>
-            <a:r>
-              <a:rPr lang="nl-NL" sz="1600" dirty="0">
-                <a:latin typeface="Courier New" panose="02070309020205020404" pitchFamily="49" charset="0"/>
-                <a:cs typeface="Courier New" panose="02070309020205020404" pitchFamily="49" charset="0"/>
-              </a:rPr>
-              <a:t>    )</a:t>
-            </a:r>
-          </a:p>
-          <a:p>
-            <a:pPr marL="0" indent="0">
-              <a:lnSpc>
-                <a:spcPct val="100000"/>
-              </a:lnSpc>
-              <a:spcBef>
-                <a:spcPts val="0"/>
-              </a:spcBef>
-              <a:buFont typeface="Arial" panose="020B0604020202020204" pitchFamily="34" charset="0"/>
-              <a:buNone/>
-            </a:pPr>
-            <a:r>
-              <a:rPr lang="nl-NL" sz="1600" dirty="0">
-                <a:latin typeface="Courier New" panose="02070309020205020404" pitchFamily="49" charset="0"/>
-                <a:cs typeface="Courier New" panose="02070309020205020404" pitchFamily="49" charset="0"/>
-              </a:rPr>
-              <a:t>]</a:t>
-            </a:r>
-          </a:p>
-        </p:txBody>
-      </p:sp>
-      <p:cxnSp>
-        <p:nvCxnSpPr>
-          <p:cNvPr id="6" name="Straight Connector 5">
-            <a:extLst>
-              <a:ext uri="{FF2B5EF4-FFF2-40B4-BE49-F238E27FC236}">
-                <a16:creationId xmlns:a16="http://schemas.microsoft.com/office/drawing/2014/main" id="{4E630EC8-816A-E473-7194-8B2BB5384102}"/>
-              </a:ext>
-            </a:extLst>
-          </p:cNvPr>
-          <p:cNvCxnSpPr>
-            <a:cxnSpLocks/>
-          </p:cNvCxnSpPr>
-          <p:nvPr/>
-        </p:nvCxnSpPr>
-        <p:spPr>
-          <a:xfrm>
-            <a:off x="5960533" y="1388533"/>
-            <a:ext cx="0" cy="4788430"/>
-          </a:xfrm>
-          <a:prstGeom prst="line">
-            <a:avLst/>
-          </a:prstGeom>
-        </p:spPr>
-        <p:style>
-          <a:lnRef idx="3">
-            <a:schemeClr val="dk1"/>
-          </a:lnRef>
-          <a:fillRef idx="0">
-            <a:schemeClr val="dk1"/>
-          </a:fillRef>
-          <a:effectRef idx="2">
-            <a:schemeClr val="dk1"/>
-          </a:effectRef>
-          <a:fontRef idx="minor">
-            <a:schemeClr val="tx1"/>
-          </a:fontRef>
-        </p:style>
-      </p:cxnSp>
-    </p:spTree>
-    <p:extLst>
-      <p:ext uri="{BB962C8B-B14F-4D97-AF65-F5344CB8AC3E}">
-        <p14:creationId xmlns:p14="http://schemas.microsoft.com/office/powerpoint/2010/main" val="2370871397"/>
-      </p:ext>
-    </p:extLst>
-  </p:cSld>
-  <p:clrMapOvr>
-    <a:masterClrMapping/>
-  </p:clrMapOvr>
-</p:sld>
-</file>
-
-<file path=ppt/slides/slide50.xml><?xml version="1.0" encoding="utf-8"?>
+<file path=ppt/slides/slide52.xml><?xml version="1.0" encoding="utf-8"?>
 <p:sld xmlns:a="http://schemas.openxmlformats.org/drawingml/2006/main" xmlns:r="http://schemas.openxmlformats.org/officeDocument/2006/relationships" xmlns:p="http://schemas.openxmlformats.org/presentationml/2006/main">
   <p:cSld>
     <p:spTree>
@@ -29103,7 +30083,7 @@
 </p:sld>
 </file>
 
-<file path=ppt/slides/slide51.xml><?xml version="1.0" encoding="utf-8"?>
+<file path=ppt/slides/slide53.xml><?xml version="1.0" encoding="utf-8"?>
 <p:sld xmlns:a="http://schemas.openxmlformats.org/drawingml/2006/main" xmlns:r="http://schemas.openxmlformats.org/officeDocument/2006/relationships" xmlns:p="http://schemas.openxmlformats.org/presentationml/2006/main">
   <p:cSld>
     <p:spTree>
@@ -29306,7 +30286,7 @@
 </p:sld>
 </file>
 
-<file path=ppt/slides/slide52.xml><?xml version="1.0" encoding="utf-8"?>
+<file path=ppt/slides/slide54.xml><?xml version="1.0" encoding="utf-8"?>
 <p:sld xmlns:a="http://schemas.openxmlformats.org/drawingml/2006/main" xmlns:r="http://schemas.openxmlformats.org/officeDocument/2006/relationships" xmlns:p="http://schemas.openxmlformats.org/presentationml/2006/main">
   <p:cSld>
     <p:spTree>
@@ -30047,7 +31027,7 @@
 </p:sld>
 </file>
 
-<file path=ppt/slides/slide53.xml><?xml version="1.0" encoding="utf-8"?>
+<file path=ppt/slides/slide55.xml><?xml version="1.0" encoding="utf-8"?>
 <p:sld xmlns:a="http://schemas.openxmlformats.org/drawingml/2006/main" xmlns:r="http://schemas.openxmlformats.org/officeDocument/2006/relationships" xmlns:p="http://schemas.openxmlformats.org/presentationml/2006/main">
   <p:cSld>
     <p:spTree>
@@ -30137,7 +31117,7 @@
 </p:sld>
 </file>
 
-<file path=ppt/slides/slide54.xml><?xml version="1.0" encoding="utf-8"?>
+<file path=ppt/slides/slide56.xml><?xml version="1.0" encoding="utf-8"?>
 <p:sld xmlns:a="http://schemas.openxmlformats.org/drawingml/2006/main" xmlns:r="http://schemas.openxmlformats.org/officeDocument/2006/relationships" xmlns:p="http://schemas.openxmlformats.org/presentationml/2006/main">
   <p:cSld>
     <p:spTree>
@@ -30629,7 +31609,7 @@
 </p:sld>
 </file>
 
-<file path=ppt/slides/slide55.xml><?xml version="1.0" encoding="utf-8"?>
+<file path=ppt/slides/slide57.xml><?xml version="1.0" encoding="utf-8"?>
 <p:sld xmlns:a="http://schemas.openxmlformats.org/drawingml/2006/main" xmlns:r="http://schemas.openxmlformats.org/officeDocument/2006/relationships" xmlns:p="http://schemas.openxmlformats.org/presentationml/2006/main">
   <p:cSld>
     <p:spTree>
@@ -30724,7 +31704,7 @@
 </p:sld>
 </file>
 
-<file path=ppt/slides/slide56.xml><?xml version="1.0" encoding="utf-8"?>
+<file path=ppt/slides/slide58.xml><?xml version="1.0" encoding="utf-8"?>
 <p:sld xmlns:a="http://schemas.openxmlformats.org/drawingml/2006/main" xmlns:r="http://schemas.openxmlformats.org/officeDocument/2006/relationships" xmlns:p="http://schemas.openxmlformats.org/presentationml/2006/main">
   <p:cSld>
     <p:spTree>
